--- a/public/downloads/praesentation/M09.pptx
+++ b/public/downloads/praesentation/M09.pptx
@@ -25,6 +25,9 @@
     <p:sldId id="273" r:id="rId24"/>
     <p:sldId id="274" r:id="rId25"/>
     <p:sldId id="275" r:id="rId26"/>
+    <p:sldId id="276" r:id="rId27"/>
+    <p:sldId id="277" r:id="rId28"/>
+    <p:sldId id="278" r:id="rId29"/>
   </p:sldIdLst>
   <p:sldSz cx="12188952" cy="6858000" type="screen4x3"/>
   <p:notesSz cx="6858000" cy="9144000"/>
@@ -3166,8 +3169,8 @@
         </p:nvSpPr>
         <p:spPr>
           <a:xfrm>
-            <a:off x="365760" y="365760"/>
-            <a:ext cx="11430000" cy="457200"/>
+            <a:off x="365760" y="320040"/>
+            <a:ext cx="11430000" cy="411480"/>
           </a:xfrm>
           <a:prstGeom prst="rect">
             <a:avLst/>
@@ -3182,13 +3185,13 @@
           <a:p>
             <a:pPr algn="l"/>
             <a:r>
-              <a:rPr sz="1100" b="0">
-                <a:solidFill>
-                  <a:srgbClr val="FFFFFF"/>
+              <a:rPr sz="1100" b="0" i="0">
+                <a:solidFill>
+                  <a:srgbClr val="BBCCEE"/>
                 </a:solidFill>
                 <a:latin typeface="Arial"/>
               </a:rPr>
-              <a:t>M09  ·  K-02 Branchenwissen  ·  Stratege  ·  1 Tag + 3 Monatsrunden</a:t>
+              <a:t>M09  ·  K-02 Branchenwissen  ·  Zielstufe: Stratege  ·  1 Tag + 3 Monatsrunden</a:t>
             </a:r>
           </a:p>
         </p:txBody>
@@ -3201,14 +3204,14 @@
         </p:nvSpPr>
         <p:spPr>
           <a:xfrm>
-            <a:off x="365760" y="868680"/>
-            <a:ext cx="7315200" cy="27432"/>
+            <a:off x="365760" y="804672"/>
+            <a:ext cx="8229600" cy="22860"/>
           </a:xfrm>
           <a:prstGeom prst="rect">
             <a:avLst/>
           </a:prstGeom>
           <a:solidFill>
-            <a:srgbClr val="FFFFFF"/>
+            <a:srgbClr val="335CC0"/>
           </a:solidFill>
           <a:ln>
             <a:noFill/>
@@ -3244,8 +3247,8 @@
         </p:nvSpPr>
         <p:spPr>
           <a:xfrm>
-            <a:off x="365760" y="1097280"/>
-            <a:ext cx="11430000" cy="2286000"/>
+            <a:off x="365760" y="1005840"/>
+            <a:ext cx="11430000" cy="2560320"/>
           </a:xfrm>
           <a:prstGeom prst="rect">
             <a:avLst/>
@@ -3260,7 +3263,7 @@
           <a:p>
             <a:pPr algn="l"/>
             <a:r>
-              <a:rPr sz="4000" b="1">
+              <a:rPr sz="4200" b="1" i="0">
                 <a:solidFill>
                   <a:srgbClr val="FFFFFF"/>
                 </a:solidFill>
@@ -3279,8 +3282,8 @@
         </p:nvSpPr>
         <p:spPr>
           <a:xfrm>
-            <a:off x="365760" y="3200400"/>
-            <a:ext cx="9144000" cy="914400"/>
+            <a:off x="365760" y="3383280"/>
+            <a:ext cx="10058400" cy="822960"/>
           </a:xfrm>
           <a:prstGeom prst="rect">
             <a:avLst/>
@@ -3295,7 +3298,7 @@
           <a:p>
             <a:pPr algn="l"/>
             <a:r>
-              <a:rPr sz="2000" b="0">
+              <a:rPr sz="2000" b="0" i="1">
                 <a:solidFill>
                   <a:srgbClr val="CCD6F0"/>
                 </a:solidFill>
@@ -3314,8 +3317,8 @@
         </p:nvSpPr>
         <p:spPr>
           <a:xfrm>
-            <a:off x="365760" y="6217920"/>
-            <a:ext cx="11430000" cy="457200"/>
+            <a:off x="365760" y="6309360"/>
+            <a:ext cx="11430000" cy="365760"/>
           </a:xfrm>
           <a:prstGeom prst="rect">
             <a:avLst/>
@@ -3330,9 +3333,9 @@
           <a:p>
             <a:pPr algn="l"/>
             <a:r>
-              <a:rPr sz="1000" b="0">
-                <a:solidFill>
-                  <a:srgbClr val="99AACC"/>
+              <a:rPr sz="900" b="0" i="0">
+                <a:solidFill>
+                  <a:srgbClr val="889ACC"/>
                 </a:solidFill>
                 <a:latin typeface="Arial"/>
               </a:rPr>
@@ -3355,7 +3358,7 @@
     <p:bg>
       <p:bgPr>
         <a:solidFill>
-          <a:srgbClr val="1A1A1A"/>
+          <a:srgbClr val="FFFFFF"/>
         </a:solidFill>
         <a:effectLst/>
       </p:bgPr>
@@ -3382,7 +3385,7 @@
             <a:avLst/>
           </a:prstGeom>
           <a:solidFill>
-            <a:srgbClr val="E05B00"/>
+            <a:srgbClr val="003DA5"/>
           </a:solidFill>
           <a:ln>
             <a:noFill/>
@@ -3418,8 +3421,8 @@
         </p:nvSpPr>
         <p:spPr>
           <a:xfrm>
-            <a:off x="365760" y="2286000"/>
-            <a:ext cx="11430000" cy="1828800"/>
+            <a:off x="228600" y="182880"/>
+            <a:ext cx="11430000" cy="320040"/>
           </a:xfrm>
           <a:prstGeom prst="rect">
             <a:avLst/>
@@ -3434,13 +3437,139 @@
           <a:p>
             <a:pPr algn="l"/>
             <a:r>
-              <a:rPr sz="3600" b="1">
-                <a:solidFill>
-                  <a:srgbClr val="FFFFFF"/>
+              <a:rPr sz="900" b="0" i="0">
+                <a:solidFill>
+                  <a:srgbClr val="556575"/>
                 </a:solidFill>
                 <a:latin typeface="Arial"/>
               </a:rPr>
-              <a:t>Arbeitsblatt B: Mein 3-Monats-Expertiseplan</a:t>
+              <a:t>M09 · 4.2 Branchenanalyse: Porter's Five Forces und PESTEL</a:t>
+            </a:r>
+          </a:p>
+        </p:txBody>
+      </p:sp>
+      <p:sp>
+        <p:nvSpPr>
+          <p:cNvPr id="4" name="TextBox 3"/>
+          <p:cNvSpPr txBox="1"/>
+          <p:nvPr/>
+        </p:nvSpPr>
+        <p:spPr>
+          <a:xfrm>
+            <a:off x="365760" y="274320"/>
+            <a:ext cx="11430000" cy="777240"/>
+          </a:xfrm>
+          <a:prstGeom prst="rect">
+            <a:avLst/>
+          </a:prstGeom>
+          <a:noFill/>
+        </p:spPr>
+        <p:txBody>
+          <a:bodyPr wrap="square">
+            <a:spAutoFit/>
+          </a:bodyPr>
+          <a:lstStyle/>
+          <a:p>
+            <a:pPr algn="l"/>
+            <a:r>
+              <a:rPr sz="2200" b="1" i="0">
+                <a:solidFill>
+                  <a:srgbClr val="003DA5"/>
+                </a:solidFill>
+                <a:latin typeface="Arial"/>
+              </a:rPr>
+              <a:t>Kombination im Kundengespräch</a:t>
+            </a:r>
+          </a:p>
+        </p:txBody>
+      </p:sp>
+      <p:sp>
+        <p:nvSpPr>
+          <p:cNvPr id="5" name="Rectangle 4"/>
+          <p:cNvSpPr/>
+          <p:nvPr/>
+        </p:nvSpPr>
+        <p:spPr>
+          <a:xfrm>
+            <a:off x="365760" y="1005840"/>
+            <a:ext cx="11430000" cy="27432"/>
+          </a:xfrm>
+          <a:prstGeom prst="rect">
+            <a:avLst/>
+          </a:prstGeom>
+          <a:solidFill>
+            <a:srgbClr val="D1D5DB"/>
+          </a:solidFill>
+          <a:ln>
+            <a:noFill/>
+          </a:ln>
+        </p:spPr>
+        <p:style>
+          <a:lnRef idx="1">
+            <a:schemeClr val="accent1"/>
+          </a:lnRef>
+          <a:fillRef idx="3">
+            <a:schemeClr val="accent1"/>
+          </a:fillRef>
+          <a:effectRef idx="2">
+            <a:schemeClr val="accent1"/>
+          </a:effectRef>
+          <a:fontRef idx="minor">
+            <a:schemeClr val="lt1"/>
+          </a:fontRef>
+        </p:style>
+        <p:txBody>
+          <a:bodyPr rtlCol="0" anchor="ctr"/>
+          <a:lstStyle/>
+          <a:p>
+            <a:pPr algn="ctr"/>
+          </a:p>
+        </p:txBody>
+      </p:sp>
+      <p:sp>
+        <p:nvSpPr>
+          <p:cNvPr id="6" name="TextBox 5"/>
+          <p:cNvSpPr txBox="1"/>
+          <p:nvPr/>
+        </p:nvSpPr>
+        <p:spPr>
+          <a:xfrm>
+            <a:off x="365760" y="1143000"/>
+            <a:ext cx="11430000" cy="5212080"/>
+          </a:xfrm>
+          <a:prstGeom prst="rect">
+            <a:avLst/>
+          </a:prstGeom>
+          <a:noFill/>
+        </p:spPr>
+        <p:txBody>
+          <a:bodyPr wrap="square">
+            <a:spAutoFit/>
+          </a:bodyPr>
+          <a:lstStyle/>
+          <a:p>
+            <a:pPr>
+              <a:spcBef>
+                <a:spcPts val="500"/>
+              </a:spcBef>
+            </a:pPr>
+            <a:r>
+              <a:rPr sz="1500">
+                <a:solidFill>
+                  <a:srgbClr val="003DA5"/>
+                </a:solidFill>
+                <a:latin typeface="Arial"/>
+              </a:rPr>
+              <a:t>▪  </a:t>
+            </a:r>
+            <a:r>
+              <a:rPr sz="1700">
+                <a:solidFill>
+                  <a:srgbClr val="1A1A1A"/>
+                </a:solidFill>
+                <a:latin typeface="Arial"/>
+              </a:rPr>
+              <a:t>Five Forces und PESTEL sind keine akademischen Werkzeuge – sie strukturieren das Gespräch. Der Berater, der eine Branche durch diese Linse sieht, stellt…</a:t>
             </a:r>
           </a:p>
         </p:txBody>
@@ -3522,8 +3651,8 @@
         </p:nvSpPr>
         <p:spPr>
           <a:xfrm>
-            <a:off x="365760" y="2286000"/>
-            <a:ext cx="11430000" cy="1828800"/>
+            <a:off x="365760" y="2011680"/>
+            <a:ext cx="11430000" cy="2011680"/>
           </a:xfrm>
           <a:prstGeom prst="rect">
             <a:avLst/>
@@ -3538,13 +3667,13 @@
           <a:p>
             <a:pPr algn="l"/>
             <a:r>
-              <a:rPr sz="3600" b="1">
+              <a:rPr sz="3600" b="1" i="0">
                 <a:solidFill>
                   <a:srgbClr val="FFFFFF"/>
                 </a:solidFill>
                 <a:latin typeface="Arial"/>
               </a:rPr>
-              <a:t>Arbeitsblatt C: Strukturiertes Branchengespräch – Protokollvorlage</a:t>
+              <a:t>Einstiegsfragen für Branchenanfänger</a:t>
             </a:r>
           </a:p>
         </p:txBody>
@@ -3563,7 +3692,7 @@
     <p:bg>
       <p:bgPr>
         <a:solidFill>
-          <a:srgbClr val="1A1A1A"/>
+          <a:srgbClr val="FFFFFF"/>
         </a:solidFill>
         <a:effectLst/>
       </p:bgPr>
@@ -3590,7 +3719,7 @@
             <a:avLst/>
           </a:prstGeom>
           <a:solidFill>
-            <a:srgbClr val="E05B00"/>
+            <a:srgbClr val="003DA5"/>
           </a:solidFill>
           <a:ln>
             <a:noFill/>
@@ -3626,8 +3755,8 @@
         </p:nvSpPr>
         <p:spPr>
           <a:xfrm>
-            <a:off x="365760" y="2286000"/>
-            <a:ext cx="11430000" cy="1828800"/>
+            <a:off x="228600" y="182880"/>
+            <a:ext cx="11430000" cy="320040"/>
           </a:xfrm>
           <a:prstGeom prst="rect">
             <a:avLst/>
@@ -3642,17 +3771,666 @@
           <a:p>
             <a:pPr algn="l"/>
             <a:r>
-              <a:rPr sz="3600" b="1">
-                <a:solidFill>
-                  <a:srgbClr val="FFFFFF"/>
+              <a:rPr sz="900" b="0" i="0">
+                <a:solidFill>
+                  <a:srgbClr val="556575"/>
                 </a:solidFill>
                 <a:latin typeface="Arial"/>
               </a:rPr>
-              <a:t>Kick-off Workshop (Tag 1, 7,5 Stunden netto)</a:t>
-            </a:r>
-          </a:p>
-        </p:txBody>
-      </p:sp>
+              <a:t>M09 · 4.2 Branchenanalyse: Porter's Five Forces und PESTEL</a:t>
+            </a:r>
+          </a:p>
+        </p:txBody>
+      </p:sp>
+      <p:sp>
+        <p:nvSpPr>
+          <p:cNvPr id="4" name="TextBox 3"/>
+          <p:cNvSpPr txBox="1"/>
+          <p:nvPr/>
+        </p:nvSpPr>
+        <p:spPr>
+          <a:xfrm>
+            <a:off x="365760" y="274320"/>
+            <a:ext cx="11430000" cy="777240"/>
+          </a:xfrm>
+          <a:prstGeom prst="rect">
+            <a:avLst/>
+          </a:prstGeom>
+          <a:noFill/>
+        </p:spPr>
+        <p:txBody>
+          <a:bodyPr wrap="square">
+            <a:spAutoFit/>
+          </a:bodyPr>
+          <a:lstStyle/>
+          <a:p>
+            <a:pPr algn="l"/>
+            <a:r>
+              <a:rPr sz="2200" b="1" i="0">
+                <a:solidFill>
+                  <a:srgbClr val="003DA5"/>
+                </a:solidFill>
+                <a:latin typeface="Arial"/>
+              </a:rPr>
+              <a:t>Einstiegsfragen für Branchenanfänger</a:t>
+            </a:r>
+          </a:p>
+        </p:txBody>
+      </p:sp>
+      <p:sp>
+        <p:nvSpPr>
+          <p:cNvPr id="5" name="Rectangle 4"/>
+          <p:cNvSpPr/>
+          <p:nvPr/>
+        </p:nvSpPr>
+        <p:spPr>
+          <a:xfrm>
+            <a:off x="365760" y="1005840"/>
+            <a:ext cx="11430000" cy="27432"/>
+          </a:xfrm>
+          <a:prstGeom prst="rect">
+            <a:avLst/>
+          </a:prstGeom>
+          <a:solidFill>
+            <a:srgbClr val="D1D5DB"/>
+          </a:solidFill>
+          <a:ln>
+            <a:noFill/>
+          </a:ln>
+        </p:spPr>
+        <p:style>
+          <a:lnRef idx="1">
+            <a:schemeClr val="accent1"/>
+          </a:lnRef>
+          <a:fillRef idx="3">
+            <a:schemeClr val="accent1"/>
+          </a:fillRef>
+          <a:effectRef idx="2">
+            <a:schemeClr val="accent1"/>
+          </a:effectRef>
+          <a:fontRef idx="minor">
+            <a:schemeClr val="lt1"/>
+          </a:fontRef>
+        </p:style>
+        <p:txBody>
+          <a:bodyPr rtlCol="0" anchor="ctr"/>
+          <a:lstStyle/>
+          <a:p>
+            <a:pPr algn="ctr"/>
+          </a:p>
+        </p:txBody>
+      </p:sp>
+      <p:graphicFrame>
+        <p:nvGraphicFramePr>
+          <p:cNvPr id="6" name="Table 5"/>
+          <p:cNvGraphicFramePr>
+            <a:graphicFrameLocks noGrp="1"/>
+          </p:cNvGraphicFramePr>
+          <p:nvPr/>
+        </p:nvGraphicFramePr>
+        <p:xfrm>
+          <a:off x="365760" y="1143000"/>
+          <a:ext cx="11430000" cy="3803904"/>
+        </p:xfrm>
+        <a:graphic>
+          <a:graphicData uri="http://schemas.openxmlformats.org/drawingml/2006/table">
+            <a:tbl>
+              <a:tblPr firstRow="1" bandRow="1">
+                <a:tableStyleId>{5C22544A-7EE6-4342-B048-85BDC9FD1C3A}</a:tableStyleId>
+              </a:tblPr>
+              <a:tblGrid>
+                <a:gridCol w="3810000"/>
+                <a:gridCol w="3810000"/>
+                <a:gridCol w="3810000"/>
+              </a:tblGrid>
+              <a:tr h="475488">
+                <a:tc>
+                  <a:txBody>
+                    <a:bodyPr wrap="square"/>
+                    <a:lstStyle/>
+                    <a:p>
+                      <a:r>
+                        <a:rPr sz="1100" b="1">
+                          <a:solidFill>
+                            <a:srgbClr val="FFFFFF"/>
+                          </a:solidFill>
+                          <a:latin typeface="Arial"/>
+                        </a:rPr>
+                        <a:t>#</a:t>
+                      </a:r>
+                    </a:p>
+                  </a:txBody>
+                  <a:tcPr>
+                    <a:solidFill>
+                      <a:srgbClr val="003DA5"/>
+                    </a:solidFill>
+                  </a:tcPr>
+                </a:tc>
+                <a:tc>
+                  <a:txBody>
+                    <a:bodyPr wrap="square"/>
+                    <a:lstStyle/>
+                    <a:p>
+                      <a:r>
+                        <a:rPr sz="1100" b="1">
+                          <a:solidFill>
+                            <a:srgbClr val="FFFFFF"/>
+                          </a:solidFill>
+                          <a:latin typeface="Arial"/>
+                        </a:rPr>
+                        <a:t>Frage</a:t>
+                      </a:r>
+                    </a:p>
+                  </a:txBody>
+                  <a:tcPr>
+                    <a:solidFill>
+                      <a:srgbClr val="003DA5"/>
+                    </a:solidFill>
+                  </a:tcPr>
+                </a:tc>
+                <a:tc>
+                  <a:txBody>
+                    <a:bodyPr wrap="square"/>
+                    <a:lstStyle/>
+                    <a:p>
+                      <a:r>
+                        <a:rPr sz="1100" b="1">
+                          <a:solidFill>
+                            <a:srgbClr val="FFFFFF"/>
+                          </a:solidFill>
+                          <a:latin typeface="Arial"/>
+                        </a:rPr>
+                        <a:t>Analysedimension</a:t>
+                      </a:r>
+                    </a:p>
+                  </a:txBody>
+                  <a:tcPr>
+                    <a:solidFill>
+                      <a:srgbClr val="003DA5"/>
+                    </a:solidFill>
+                  </a:tcPr>
+                </a:tc>
+              </a:tr>
+              <a:tr h="475488">
+                <a:tc>
+                  <a:txBody>
+                    <a:bodyPr wrap="square"/>
+                    <a:lstStyle/>
+                    <a:p>
+                      <a:r>
+                        <a:rPr sz="1100" b="0">
+                          <a:solidFill>
+                            <a:srgbClr val="1A1A1A"/>
+                          </a:solidFill>
+                          <a:latin typeface="Arial"/>
+                        </a:rPr>
+                        <a:t>1</a:t>
+                      </a:r>
+                    </a:p>
+                  </a:txBody>
+                  <a:tcPr>
+                    <a:solidFill>
+                      <a:srgbClr val="FFFFFF"/>
+                    </a:solidFill>
+                  </a:tcPr>
+                </a:tc>
+                <a:tc>
+                  <a:txBody>
+                    <a:bodyPr wrap="square"/>
+                    <a:lstStyle/>
+                    <a:p>
+                      <a:r>
+                        <a:rPr sz="1100" b="0">
+                          <a:solidFill>
+                            <a:srgbClr val="1A1A1A"/>
+                          </a:solidFill>
+                          <a:latin typeface="Arial"/>
+                        </a:rPr>
+                        <a:t>„Was hat sich in Ihrer Branche in den letzten zwei Jahren am stärksten verändert?"</a:t>
+                      </a:r>
+                    </a:p>
+                  </a:txBody>
+                  <a:tcPr>
+                    <a:solidFill>
+                      <a:srgbClr val="FFFFFF"/>
+                    </a:solidFill>
+                  </a:tcPr>
+                </a:tc>
+                <a:tc>
+                  <a:txBody>
+                    <a:bodyPr wrap="square"/>
+                    <a:lstStyle/>
+                    <a:p>
+                      <a:r>
+                        <a:rPr sz="1100" b="0">
+                          <a:solidFill>
+                            <a:srgbClr val="1A1A1A"/>
+                          </a:solidFill>
+                          <a:latin typeface="Arial"/>
+                        </a:rPr>
+                        <a:t>PESTEL / Dynamikwissen</a:t>
+                      </a:r>
+                    </a:p>
+                  </a:txBody>
+                  <a:tcPr>
+                    <a:solidFill>
+                      <a:srgbClr val="FFFFFF"/>
+                    </a:solidFill>
+                  </a:tcPr>
+                </a:tc>
+              </a:tr>
+              <a:tr h="475488">
+                <a:tc>
+                  <a:txBody>
+                    <a:bodyPr wrap="square"/>
+                    <a:lstStyle/>
+                    <a:p>
+                      <a:r>
+                        <a:rPr sz="1100" b="0">
+                          <a:solidFill>
+                            <a:srgbClr val="1A1A1A"/>
+                          </a:solidFill>
+                          <a:latin typeface="Arial"/>
+                        </a:rPr>
+                        <a:t>2</a:t>
+                      </a:r>
+                    </a:p>
+                  </a:txBody>
+                  <a:tcPr>
+                    <a:solidFill>
+                      <a:srgbClr val="F4F6FA"/>
+                    </a:solidFill>
+                  </a:tcPr>
+                </a:tc>
+                <a:tc>
+                  <a:txBody>
+                    <a:bodyPr wrap="square"/>
+                    <a:lstStyle/>
+                    <a:p>
+                      <a:r>
+                        <a:rPr sz="1100" b="0">
+                          <a:solidFill>
+                            <a:srgbClr val="1A1A1A"/>
+                          </a:solidFill>
+                          <a:latin typeface="Arial"/>
+                        </a:rPr>
+                        <a:t>„Wer sind Ihre drei wichtigsten Kunden – und wie abhängig sind Sie von diesen?"</a:t>
+                      </a:r>
+                    </a:p>
+                  </a:txBody>
+                  <a:tcPr>
+                    <a:solidFill>
+                      <a:srgbClr val="F4F6FA"/>
+                    </a:solidFill>
+                  </a:tcPr>
+                </a:tc>
+                <a:tc>
+                  <a:txBody>
+                    <a:bodyPr wrap="square"/>
+                    <a:lstStyle/>
+                    <a:p>
+                      <a:r>
+                        <a:rPr sz="1100" b="0">
+                          <a:solidFill>
+                            <a:srgbClr val="1A1A1A"/>
+                          </a:solidFill>
+                          <a:latin typeface="Arial"/>
+                        </a:rPr>
+                        <a:t>Five Forces: Abnehmermacht</a:t>
+                      </a:r>
+                    </a:p>
+                  </a:txBody>
+                  <a:tcPr>
+                    <a:solidFill>
+                      <a:srgbClr val="F4F6FA"/>
+                    </a:solidFill>
+                  </a:tcPr>
+                </a:tc>
+              </a:tr>
+              <a:tr h="475488">
+                <a:tc>
+                  <a:txBody>
+                    <a:bodyPr wrap="square"/>
+                    <a:lstStyle/>
+                    <a:p>
+                      <a:r>
+                        <a:rPr sz="1100" b="0">
+                          <a:solidFill>
+                            <a:srgbClr val="1A1A1A"/>
+                          </a:solidFill>
+                          <a:latin typeface="Arial"/>
+                        </a:rPr>
+                        <a:t>3</a:t>
+                      </a:r>
+                    </a:p>
+                  </a:txBody>
+                  <a:tcPr>
+                    <a:solidFill>
+                      <a:srgbClr val="FFFFFF"/>
+                    </a:solidFill>
+                  </a:tcPr>
+                </a:tc>
+                <a:tc>
+                  <a:txBody>
+                    <a:bodyPr wrap="square"/>
+                    <a:lstStyle/>
+                    <a:p>
+                      <a:r>
+                        <a:rPr sz="1100" b="0">
+                          <a:solidFill>
+                            <a:srgbClr val="1A1A1A"/>
+                          </a:solidFill>
+                          <a:latin typeface="Arial"/>
+                        </a:rPr>
+                        <a:t>„Welche Investitionen stehen in den nächsten 12–24 Monaten bei Ihnen an?"</a:t>
+                      </a:r>
+                    </a:p>
+                  </a:txBody>
+                  <a:tcPr>
+                    <a:solidFill>
+                      <a:srgbClr val="FFFFFF"/>
+                    </a:solidFill>
+                  </a:tcPr>
+                </a:tc>
+                <a:tc>
+                  <a:txBody>
+                    <a:bodyPr wrap="square"/>
+                    <a:lstStyle/>
+                    <a:p>
+                      <a:r>
+                        <a:rPr sz="1100" b="0">
+                          <a:solidFill>
+                            <a:srgbClr val="1A1A1A"/>
+                          </a:solidFill>
+                          <a:latin typeface="Arial"/>
+                        </a:rPr>
+                        <a:t>Kapital- und Finanzierungsbedarf</a:t>
+                      </a:r>
+                    </a:p>
+                  </a:txBody>
+                  <a:tcPr>
+                    <a:solidFill>
+                      <a:srgbClr val="FFFFFF"/>
+                    </a:solidFill>
+                  </a:tcPr>
+                </a:tc>
+              </a:tr>
+              <a:tr h="475488">
+                <a:tc>
+                  <a:txBody>
+                    <a:bodyPr wrap="square"/>
+                    <a:lstStyle/>
+                    <a:p>
+                      <a:r>
+                        <a:rPr sz="1100" b="0">
+                          <a:solidFill>
+                            <a:srgbClr val="1A1A1A"/>
+                          </a:solidFill>
+                          <a:latin typeface="Arial"/>
+                        </a:rPr>
+                        <a:t>4</a:t>
+                      </a:r>
+                    </a:p>
+                  </a:txBody>
+                  <a:tcPr>
+                    <a:solidFill>
+                      <a:srgbClr val="F4F6FA"/>
+                    </a:solidFill>
+                  </a:tcPr>
+                </a:tc>
+                <a:tc>
+                  <a:txBody>
+                    <a:bodyPr wrap="square"/>
+                    <a:lstStyle/>
+                    <a:p>
+                      <a:r>
+                        <a:rPr sz="1100" b="0">
+                          <a:solidFill>
+                            <a:srgbClr val="1A1A1A"/>
+                          </a:solidFill>
+                          <a:latin typeface="Arial"/>
+                        </a:rPr>
+                        <a:t>„Was unterscheidet die erfolgreichen Betriebe in Ihrer Branche von den weniger erfolgreichen?"</a:t>
+                      </a:r>
+                    </a:p>
+                  </a:txBody>
+                  <a:tcPr>
+                    <a:solidFill>
+                      <a:srgbClr val="F4F6FA"/>
+                    </a:solidFill>
+                  </a:tcPr>
+                </a:tc>
+                <a:tc>
+                  <a:txBody>
+                    <a:bodyPr wrap="square"/>
+                    <a:lstStyle/>
+                    <a:p>
+                      <a:r>
+                        <a:rPr sz="1100" b="0">
+                          <a:solidFill>
+                            <a:srgbClr val="1A1A1A"/>
+                          </a:solidFill>
+                          <a:latin typeface="Arial"/>
+                        </a:rPr>
+                        <a:t>Werttreiber, Wettbewerbsdifferenzierung</a:t>
+                      </a:r>
+                    </a:p>
+                  </a:txBody>
+                  <a:tcPr>
+                    <a:solidFill>
+                      <a:srgbClr val="F4F6FA"/>
+                    </a:solidFill>
+                  </a:tcPr>
+                </a:tc>
+              </a:tr>
+              <a:tr h="475488">
+                <a:tc>
+                  <a:txBody>
+                    <a:bodyPr wrap="square"/>
+                    <a:lstStyle/>
+                    <a:p>
+                      <a:r>
+                        <a:rPr sz="1100" b="0">
+                          <a:solidFill>
+                            <a:srgbClr val="1A1A1A"/>
+                          </a:solidFill>
+                          <a:latin typeface="Arial"/>
+                        </a:rPr>
+                        <a:t>5</a:t>
+                      </a:r>
+                    </a:p>
+                  </a:txBody>
+                  <a:tcPr>
+                    <a:solidFill>
+                      <a:srgbClr val="FFFFFF"/>
+                    </a:solidFill>
+                  </a:tcPr>
+                </a:tc>
+                <a:tc>
+                  <a:txBody>
+                    <a:bodyPr wrap="square"/>
+                    <a:lstStyle/>
+                    <a:p>
+                      <a:r>
+                        <a:rPr sz="1100" b="0">
+                          <a:solidFill>
+                            <a:srgbClr val="1A1A1A"/>
+                          </a:solidFill>
+                          <a:latin typeface="Arial"/>
+                        </a:rPr>
+                        <a:t>„Welche Regulierung oder gesetzliche Änderung beschäftigt Ihre Branche gerade am meisten?"</a:t>
+                      </a:r>
+                    </a:p>
+                  </a:txBody>
+                  <a:tcPr>
+                    <a:solidFill>
+                      <a:srgbClr val="FFFFFF"/>
+                    </a:solidFill>
+                  </a:tcPr>
+                </a:tc>
+                <a:tc>
+                  <a:txBody>
+                    <a:bodyPr wrap="square"/>
+                    <a:lstStyle/>
+                    <a:p>
+                      <a:r>
+                        <a:rPr sz="1100" b="0">
+                          <a:solidFill>
+                            <a:srgbClr val="1A1A1A"/>
+                          </a:solidFill>
+                          <a:latin typeface="Arial"/>
+                        </a:rPr>
+                        <a:t>PESTEL: Legal / Political</a:t>
+                      </a:r>
+                    </a:p>
+                  </a:txBody>
+                  <a:tcPr>
+                    <a:solidFill>
+                      <a:srgbClr val="FFFFFF"/>
+                    </a:solidFill>
+                  </a:tcPr>
+                </a:tc>
+              </a:tr>
+              <a:tr h="475488">
+                <a:tc>
+                  <a:txBody>
+                    <a:bodyPr wrap="square"/>
+                    <a:lstStyle/>
+                    <a:p>
+                      <a:r>
+                        <a:rPr sz="1100" b="0">
+                          <a:solidFill>
+                            <a:srgbClr val="1A1A1A"/>
+                          </a:solidFill>
+                          <a:latin typeface="Arial"/>
+                        </a:rPr>
+                        <a:t>6</a:t>
+                      </a:r>
+                    </a:p>
+                  </a:txBody>
+                  <a:tcPr>
+                    <a:solidFill>
+                      <a:srgbClr val="F4F6FA"/>
+                    </a:solidFill>
+                  </a:tcPr>
+                </a:tc>
+                <a:tc>
+                  <a:txBody>
+                    <a:bodyPr wrap="square"/>
+                    <a:lstStyle/>
+                    <a:p>
+                      <a:r>
+                        <a:rPr sz="1100" b="0">
+                          <a:solidFill>
+                            <a:srgbClr val="1A1A1A"/>
+                          </a:solidFill>
+                          <a:latin typeface="Arial"/>
+                        </a:rPr>
+                        <a:t>„Wie hat sich das Thema Fachkräfte bei Ihnen entwickelt?"</a:t>
+                      </a:r>
+                    </a:p>
+                  </a:txBody>
+                  <a:tcPr>
+                    <a:solidFill>
+                      <a:srgbClr val="F4F6FA"/>
+                    </a:solidFill>
+                  </a:tcPr>
+                </a:tc>
+                <a:tc>
+                  <a:txBody>
+                    <a:bodyPr wrap="square"/>
+                    <a:lstStyle/>
+                    <a:p>
+                      <a:r>
+                        <a:rPr sz="1100" b="0">
+                          <a:solidFill>
+                            <a:srgbClr val="1A1A1A"/>
+                          </a:solidFill>
+                          <a:latin typeface="Arial"/>
+                        </a:rPr>
+                        <a:t>PESTEL: Sozial, operatives Risiko</a:t>
+                      </a:r>
+                    </a:p>
+                  </a:txBody>
+                  <a:tcPr>
+                    <a:solidFill>
+                      <a:srgbClr val="F4F6FA"/>
+                    </a:solidFill>
+                  </a:tcPr>
+                </a:tc>
+              </a:tr>
+              <a:tr h="475488">
+                <a:tc>
+                  <a:txBody>
+                    <a:bodyPr wrap="square"/>
+                    <a:lstStyle/>
+                    <a:p>
+                      <a:r>
+                        <a:rPr sz="1100" b="0">
+                          <a:solidFill>
+                            <a:srgbClr val="1A1A1A"/>
+                          </a:solidFill>
+                          <a:latin typeface="Arial"/>
+                        </a:rPr>
+                        <a:t>7</a:t>
+                      </a:r>
+                    </a:p>
+                  </a:txBody>
+                  <a:tcPr>
+                    <a:solidFill>
+                      <a:srgbClr val="FFFFFF"/>
+                    </a:solidFill>
+                  </a:tcPr>
+                </a:tc>
+                <a:tc>
+                  <a:txBody>
+                    <a:bodyPr wrap="square"/>
+                    <a:lstStyle/>
+                    <a:p>
+                      <a:r>
+                        <a:rPr sz="1100" b="0">
+                          <a:solidFill>
+                            <a:srgbClr val="1A1A1A"/>
+                          </a:solidFill>
+                          <a:latin typeface="Arial"/>
+                        </a:rPr>
+                        <a:t>„Was wünschen Sie sich von Ihrem Bankberater, das Sie heute noch nicht bekommen?"</a:t>
+                      </a:r>
+                    </a:p>
+                  </a:txBody>
+                  <a:tcPr>
+                    <a:solidFill>
+                      <a:srgbClr val="FFFFFF"/>
+                    </a:solidFill>
+                  </a:tcPr>
+                </a:tc>
+                <a:tc>
+                  <a:txBody>
+                    <a:bodyPr wrap="square"/>
+                    <a:lstStyle/>
+                    <a:p>
+                      <a:r>
+                        <a:rPr sz="1100" b="0">
+                          <a:solidFill>
+                            <a:srgbClr val="1A1A1A"/>
+                          </a:solidFill>
+                          <a:latin typeface="Arial"/>
+                        </a:rPr>
+                        <a:t>Beratungsqualität, Differenzierungschance</a:t>
+                      </a:r>
+                    </a:p>
+                  </a:txBody>
+                  <a:tcPr>
+                    <a:solidFill>
+                      <a:srgbClr val="FFFFFF"/>
+                    </a:solidFill>
+                  </a:tcPr>
+                </a:tc>
+              </a:tr>
+            </a:tbl>
+          </a:graphicData>
+        </a:graphic>
+      </p:graphicFrame>
     </p:spTree>
   </p:cSld>
   <p:clrMapOvr>
@@ -3730,8 +4508,8 @@
         </p:nvSpPr>
         <p:spPr>
           <a:xfrm>
-            <a:off x="365760" y="2286000"/>
-            <a:ext cx="11430000" cy="1828800"/>
+            <a:off x="365760" y="2011680"/>
+            <a:ext cx="11430000" cy="2011680"/>
           </a:xfrm>
           <a:prstGeom prst="rect">
             <a:avLst/>
@@ -3746,13 +4524,13 @@
           <a:p>
             <a:pPr algn="l"/>
             <a:r>
-              <a:rPr sz="3600" b="1">
+              <a:rPr sz="3600" b="1" i="0">
                 <a:solidFill>
                   <a:srgbClr val="FFFFFF"/>
                 </a:solidFill>
                 <a:latin typeface="Arial"/>
               </a:rPr>
-              <a:t>Monatsrunde 1 (+4 Wochen, 90 Minuten)</a:t>
+              <a:t>Wissensarbeit transparent machen – Gespräche in der Lernphase</a:t>
             </a:r>
           </a:p>
         </p:txBody>
@@ -3771,7 +4549,7 @@
     <p:bg>
       <p:bgPr>
         <a:solidFill>
-          <a:srgbClr val="1A1A1A"/>
+          <a:srgbClr val="FFFFFF"/>
         </a:solidFill>
         <a:effectLst/>
       </p:bgPr>
@@ -3798,7 +4576,7 @@
             <a:avLst/>
           </a:prstGeom>
           <a:solidFill>
-            <a:srgbClr val="E05B00"/>
+            <a:srgbClr val="003DA5"/>
           </a:solidFill>
           <a:ln>
             <a:noFill/>
@@ -3834,8 +4612,8 @@
         </p:nvSpPr>
         <p:spPr>
           <a:xfrm>
-            <a:off x="365760" y="2286000"/>
-            <a:ext cx="11430000" cy="1828800"/>
+            <a:off x="228600" y="182880"/>
+            <a:ext cx="11430000" cy="320040"/>
           </a:xfrm>
           <a:prstGeom prst="rect">
             <a:avLst/>
@@ -3850,13 +4628,216 @@
           <a:p>
             <a:pPr algn="l"/>
             <a:r>
-              <a:rPr sz="3600" b="1">
-                <a:solidFill>
-                  <a:srgbClr val="FFFFFF"/>
+              <a:rPr sz="900" b="0" i="0">
+                <a:solidFill>
+                  <a:srgbClr val="556575"/>
                 </a:solidFill>
                 <a:latin typeface="Arial"/>
               </a:rPr>
-              <a:t>Monatsrunde 2 (+8 Wochen, 90 Minuten)</a:t>
+              <a:t>M09 · 4.2 Branchenanalyse: Porter's Five Forces und PESTEL</a:t>
+            </a:r>
+          </a:p>
+        </p:txBody>
+      </p:sp>
+      <p:sp>
+        <p:nvSpPr>
+          <p:cNvPr id="4" name="TextBox 3"/>
+          <p:cNvSpPr txBox="1"/>
+          <p:nvPr/>
+        </p:nvSpPr>
+        <p:spPr>
+          <a:xfrm>
+            <a:off x="365760" y="274320"/>
+            <a:ext cx="11430000" cy="777240"/>
+          </a:xfrm>
+          <a:prstGeom prst="rect">
+            <a:avLst/>
+          </a:prstGeom>
+          <a:noFill/>
+        </p:spPr>
+        <p:txBody>
+          <a:bodyPr wrap="square">
+            <a:spAutoFit/>
+          </a:bodyPr>
+          <a:lstStyle/>
+          <a:p>
+            <a:pPr algn="l"/>
+            <a:r>
+              <a:rPr sz="2200" b="1" i="0">
+                <a:solidFill>
+                  <a:srgbClr val="003DA5"/>
+                </a:solidFill>
+                <a:latin typeface="Arial"/>
+              </a:rPr>
+              <a:t>Wissensarbeit transparent machen – Gespräche in der Lernphase</a:t>
+            </a:r>
+          </a:p>
+        </p:txBody>
+      </p:sp>
+      <p:sp>
+        <p:nvSpPr>
+          <p:cNvPr id="5" name="Rectangle 4"/>
+          <p:cNvSpPr/>
+          <p:nvPr/>
+        </p:nvSpPr>
+        <p:spPr>
+          <a:xfrm>
+            <a:off x="365760" y="1005840"/>
+            <a:ext cx="11430000" cy="27432"/>
+          </a:xfrm>
+          <a:prstGeom prst="rect">
+            <a:avLst/>
+          </a:prstGeom>
+          <a:solidFill>
+            <a:srgbClr val="D1D5DB"/>
+          </a:solidFill>
+          <a:ln>
+            <a:noFill/>
+          </a:ln>
+        </p:spPr>
+        <p:style>
+          <a:lnRef idx="1">
+            <a:schemeClr val="accent1"/>
+          </a:lnRef>
+          <a:fillRef idx="3">
+            <a:schemeClr val="accent1"/>
+          </a:fillRef>
+          <a:effectRef idx="2">
+            <a:schemeClr val="accent1"/>
+          </a:effectRef>
+          <a:fontRef idx="minor">
+            <a:schemeClr val="lt1"/>
+          </a:fontRef>
+        </p:style>
+        <p:txBody>
+          <a:bodyPr rtlCol="0" anchor="ctr"/>
+          <a:lstStyle/>
+          <a:p>
+            <a:pPr algn="ctr"/>
+          </a:p>
+        </p:txBody>
+      </p:sp>
+      <p:sp>
+        <p:nvSpPr>
+          <p:cNvPr id="6" name="TextBox 5"/>
+          <p:cNvSpPr txBox="1"/>
+          <p:nvPr/>
+        </p:nvSpPr>
+        <p:spPr>
+          <a:xfrm>
+            <a:off x="365760" y="1143000"/>
+            <a:ext cx="11430000" cy="5212080"/>
+          </a:xfrm>
+          <a:prstGeom prst="rect">
+            <a:avLst/>
+          </a:prstGeom>
+          <a:noFill/>
+        </p:spPr>
+        <p:txBody>
+          <a:bodyPr wrap="square">
+            <a:spAutoFit/>
+          </a:bodyPr>
+          <a:lstStyle/>
+          <a:p>
+            <a:pPr>
+              <a:spcBef>
+                <a:spcPts val="500"/>
+              </a:spcBef>
+            </a:pPr>
+            <a:r>
+              <a:rPr sz="1500">
+                <a:solidFill>
+                  <a:srgbClr val="003DA5"/>
+                </a:solidFill>
+                <a:latin typeface="Arial"/>
+              </a:rPr>
+              <a:t>▪  </a:t>
+            </a:r>
+            <a:r>
+              <a:rPr sz="1700" b="1">
+                <a:solidFill>
+                  <a:srgbClr val="003DA5"/>
+                </a:solidFill>
+                <a:latin typeface="Arial"/>
+              </a:rPr>
+              <a:t>Formulierungen, die funktionieren: </a:t>
+            </a:r>
+            <a:r>
+              <a:rPr sz="1700">
+                <a:solidFill>
+                  <a:srgbClr val="1A1A1A"/>
+                </a:solidFill>
+                <a:latin typeface="Arial"/>
+              </a:rPr>
+              <a:t>&gt; „Ich habe mich in den letzten Wochen intensiver mit der [Branche] beschäftigt und bin auf die [GAP-Reform / neue Regulierung / Markttrend] gestoßen. Wie wirkt sich das konkret…</a:t>
+            </a:r>
+          </a:p>
+          <a:p>
+            <a:pPr>
+              <a:spcBef>
+                <a:spcPts val="500"/>
+              </a:spcBef>
+            </a:pPr>
+            <a:r>
+              <a:rPr sz="1500">
+                <a:solidFill>
+                  <a:srgbClr val="003DA5"/>
+                </a:solidFill>
+                <a:latin typeface="Arial"/>
+              </a:rPr>
+              <a:t>▪  </a:t>
+            </a:r>
+            <a:r>
+              <a:rPr sz="1700" b="1">
+                <a:solidFill>
+                  <a:srgbClr val="003DA5"/>
+                </a:solidFill>
+                <a:latin typeface="Arial"/>
+              </a:rPr>
+              <a:t>Was vermeiden: </a:t>
+            </a:r>
+            <a:r>
+              <a:rPr sz="1700">
+                <a:solidFill>
+                  <a:srgbClr val="1A1A1A"/>
+                </a:solidFill>
+                <a:latin typeface="Arial"/>
+              </a:rPr>
+              <a:t>- Nicht sagen: „Ich kenne mich in Ihrer Branche noch nicht so gut aus." (schafft Unsicherheit) - Nicht sagen: „Ich bin kein Branchenexperte, aber..." (unnötige Selbstabwertung) -…</a:t>
+            </a:r>
+          </a:p>
+          <a:p>
+            <a:pPr>
+              <a:spcBef>
+                <a:spcPts val="500"/>
+              </a:spcBef>
+            </a:pPr>
+            <a:r>
+              <a:rPr sz="1500">
+                <a:solidFill>
+                  <a:srgbClr val="003DA5"/>
+                </a:solidFill>
+                <a:latin typeface="Arial"/>
+              </a:rPr>
+              <a:t>▪  </a:t>
+            </a:r>
+            <a:r>
+              <a:rPr sz="1700" b="1">
+                <a:solidFill>
+                  <a:srgbClr val="003DA5"/>
+                </a:solidFill>
+                <a:latin typeface="Arial"/>
+              </a:rPr>
+              <a:t>Die Grundregel: </a:t>
+            </a:r>
+            <a:r>
+              <a:rPr sz="1700">
+                <a:solidFill>
+                  <a:srgbClr val="1A1A1A"/>
+                </a:solidFill>
+                <a:latin typeface="Arial"/>
+              </a:rPr>
+              <a:t>Interesse + konkrete Vorbereitung + echtes Zuhören ersetzen fehlende Expertise – zumindest in den ersten Gesprächen. Expertise entsteht dann im Dialog.</a:t>
             </a:r>
           </a:p>
         </p:txBody>
@@ -3938,8 +4919,8 @@
         </p:nvSpPr>
         <p:spPr>
           <a:xfrm>
-            <a:off x="365760" y="2286000"/>
-            <a:ext cx="11430000" cy="1828800"/>
+            <a:off x="365760" y="2011680"/>
+            <a:ext cx="11430000" cy="2011680"/>
           </a:xfrm>
           <a:prstGeom prst="rect">
             <a:avLst/>
@@ -3954,13 +4935,13 @@
           <a:p>
             <a:pPr algn="l"/>
             <a:r>
-              <a:rPr sz="3600" b="1">
+              <a:rPr sz="3600" b="1" i="0">
                 <a:solidFill>
                   <a:srgbClr val="FFFFFF"/>
                 </a:solidFill>
                 <a:latin typeface="Arial"/>
               </a:rPr>
-              <a:t>Monatsrunde 3 / Abschlusspräsentation (+12 Wochen, 90 Minuten)</a:t>
+              <a:t>Arbeitsblatt A: Branchenanalyse – Five Forces Scoring</a:t>
             </a:r>
           </a:p>
         </p:txBody>
@@ -3979,7 +4960,7 @@
     <p:bg>
       <p:bgPr>
         <a:solidFill>
-          <a:srgbClr val="1A1A1A"/>
+          <a:srgbClr val="FFFFFF"/>
         </a:solidFill>
         <a:effectLst/>
       </p:bgPr>
@@ -4006,7 +4987,7 @@
             <a:avLst/>
           </a:prstGeom>
           <a:solidFill>
-            <a:srgbClr val="E05B00"/>
+            <a:srgbClr val="003DA5"/>
           </a:solidFill>
           <a:ln>
             <a:noFill/>
@@ -4042,8 +5023,8 @@
         </p:nvSpPr>
         <p:spPr>
           <a:xfrm>
-            <a:off x="365760" y="2286000"/>
-            <a:ext cx="11430000" cy="1828800"/>
+            <a:off x="228600" y="182880"/>
+            <a:ext cx="11430000" cy="320040"/>
           </a:xfrm>
           <a:prstGeom prst="rect">
             <a:avLst/>
@@ -4058,17 +5039,753 @@
           <a:p>
             <a:pPr algn="l"/>
             <a:r>
-              <a:rPr sz="3600" b="1">
-                <a:solidFill>
-                  <a:srgbClr val="FFFFFF"/>
+              <a:rPr sz="900" b="0" i="0">
+                <a:solidFill>
+                  <a:srgbClr val="556575"/>
                 </a:solidFill>
                 <a:latin typeface="Arial"/>
               </a:rPr>
-              <a:t>Branchenportfolio – Mindestanforderungen</a:t>
-            </a:r>
-          </a:p>
-        </p:txBody>
-      </p:sp>
+              <a:t>M09 · 4.6 Arbeitsblätter</a:t>
+            </a:r>
+          </a:p>
+        </p:txBody>
+      </p:sp>
+      <p:sp>
+        <p:nvSpPr>
+          <p:cNvPr id="4" name="TextBox 3"/>
+          <p:cNvSpPr txBox="1"/>
+          <p:nvPr/>
+        </p:nvSpPr>
+        <p:spPr>
+          <a:xfrm>
+            <a:off x="365760" y="274320"/>
+            <a:ext cx="11430000" cy="777240"/>
+          </a:xfrm>
+          <a:prstGeom prst="rect">
+            <a:avLst/>
+          </a:prstGeom>
+          <a:noFill/>
+        </p:spPr>
+        <p:txBody>
+          <a:bodyPr wrap="square">
+            <a:spAutoFit/>
+          </a:bodyPr>
+          <a:lstStyle/>
+          <a:p>
+            <a:pPr algn="l"/>
+            <a:r>
+              <a:rPr sz="2200" b="1" i="0">
+                <a:solidFill>
+                  <a:srgbClr val="003DA5"/>
+                </a:solidFill>
+                <a:latin typeface="Arial"/>
+              </a:rPr>
+              <a:t>Arbeitsblatt A: Branchenanalyse – Five Forces Scoring</a:t>
+            </a:r>
+          </a:p>
+        </p:txBody>
+      </p:sp>
+      <p:sp>
+        <p:nvSpPr>
+          <p:cNvPr id="5" name="Rectangle 4"/>
+          <p:cNvSpPr/>
+          <p:nvPr/>
+        </p:nvSpPr>
+        <p:spPr>
+          <a:xfrm>
+            <a:off x="365760" y="1005840"/>
+            <a:ext cx="11430000" cy="27432"/>
+          </a:xfrm>
+          <a:prstGeom prst="rect">
+            <a:avLst/>
+          </a:prstGeom>
+          <a:solidFill>
+            <a:srgbClr val="D1D5DB"/>
+          </a:solidFill>
+          <a:ln>
+            <a:noFill/>
+          </a:ln>
+        </p:spPr>
+        <p:style>
+          <a:lnRef idx="1">
+            <a:schemeClr val="accent1"/>
+          </a:lnRef>
+          <a:fillRef idx="3">
+            <a:schemeClr val="accent1"/>
+          </a:fillRef>
+          <a:effectRef idx="2">
+            <a:schemeClr val="accent1"/>
+          </a:effectRef>
+          <a:fontRef idx="minor">
+            <a:schemeClr val="lt1"/>
+          </a:fontRef>
+        </p:style>
+        <p:txBody>
+          <a:bodyPr rtlCol="0" anchor="ctr"/>
+          <a:lstStyle/>
+          <a:p>
+            <a:pPr algn="ctr"/>
+          </a:p>
+        </p:txBody>
+      </p:sp>
+      <p:graphicFrame>
+        <p:nvGraphicFramePr>
+          <p:cNvPr id="6" name="Table 5"/>
+          <p:cNvGraphicFramePr>
+            <a:graphicFrameLocks noGrp="1"/>
+          </p:cNvGraphicFramePr>
+          <p:nvPr/>
+        </p:nvGraphicFramePr>
+        <p:xfrm>
+          <a:off x="365760" y="1143000"/>
+          <a:ext cx="11430000" cy="3328416"/>
+        </p:xfrm>
+        <a:graphic>
+          <a:graphicData uri="http://schemas.openxmlformats.org/drawingml/2006/table">
+            <a:tbl>
+              <a:tblPr firstRow="1" bandRow="1">
+                <a:tableStyleId>{5C22544A-7EE6-4342-B048-85BDC9FD1C3A}</a:tableStyleId>
+              </a:tblPr>
+              <a:tblGrid>
+                <a:gridCol w="2857500"/>
+                <a:gridCol w="2857500"/>
+                <a:gridCol w="2857500"/>
+                <a:gridCol w="2857500"/>
+              </a:tblGrid>
+              <a:tr h="475488">
+                <a:tc>
+                  <a:txBody>
+                    <a:bodyPr wrap="square"/>
+                    <a:lstStyle/>
+                    <a:p>
+                      <a:r>
+                        <a:rPr sz="1100" b="1">
+                          <a:solidFill>
+                            <a:srgbClr val="FFFFFF"/>
+                          </a:solidFill>
+                          <a:latin typeface="Arial"/>
+                        </a:rPr>
+                        <a:t>Kraft</a:t>
+                      </a:r>
+                    </a:p>
+                  </a:txBody>
+                  <a:tcPr>
+                    <a:solidFill>
+                      <a:srgbClr val="003DA5"/>
+                    </a:solidFill>
+                  </a:tcPr>
+                </a:tc>
+                <a:tc>
+                  <a:txBody>
+                    <a:bodyPr wrap="square"/>
+                    <a:lstStyle/>
+                    <a:p>
+                      <a:r>
+                        <a:rPr sz="1100" b="1">
+                          <a:solidFill>
+                            <a:srgbClr val="FFFFFF"/>
+                          </a:solidFill>
+                          <a:latin typeface="Arial"/>
+                        </a:rPr>
+                        <a:t>Kurzbeschreibung</a:t>
+                      </a:r>
+                    </a:p>
+                  </a:txBody>
+                  <a:tcPr>
+                    <a:solidFill>
+                      <a:srgbClr val="003DA5"/>
+                    </a:solidFill>
+                  </a:tcPr>
+                </a:tc>
+                <a:tc>
+                  <a:txBody>
+                    <a:bodyPr wrap="square"/>
+                    <a:lstStyle/>
+                    <a:p>
+                      <a:r>
+                        <a:rPr sz="1100" b="1">
+                          <a:solidFill>
+                            <a:srgbClr val="FFFFFF"/>
+                          </a:solidFill>
+                          <a:latin typeface="Arial"/>
+                        </a:rPr>
+                        <a:t>Stärke (1–5)</a:t>
+                      </a:r>
+                    </a:p>
+                  </a:txBody>
+                  <a:tcPr>
+                    <a:solidFill>
+                      <a:srgbClr val="003DA5"/>
+                    </a:solidFill>
+                  </a:tcPr>
+                </a:tc>
+                <a:tc>
+                  <a:txBody>
+                    <a:bodyPr wrap="square"/>
+                    <a:lstStyle/>
+                    <a:p>
+                      <a:r>
+                        <a:rPr sz="1100" b="1">
+                          <a:solidFill>
+                            <a:srgbClr val="FFFFFF"/>
+                          </a:solidFill>
+                          <a:latin typeface="Arial"/>
+                        </a:rPr>
+                        <a:t>Implikation für Kreditrisiko</a:t>
+                      </a:r>
+                    </a:p>
+                  </a:txBody>
+                  <a:tcPr>
+                    <a:solidFill>
+                      <a:srgbClr val="003DA5"/>
+                    </a:solidFill>
+                  </a:tcPr>
+                </a:tc>
+              </a:tr>
+              <a:tr h="475488">
+                <a:tc>
+                  <a:txBody>
+                    <a:bodyPr wrap="square"/>
+                    <a:lstStyle/>
+                    <a:p>
+                      <a:r>
+                        <a:rPr sz="1100" b="0">
+                          <a:solidFill>
+                            <a:srgbClr val="1A1A1A"/>
+                          </a:solidFill>
+                          <a:latin typeface="Arial"/>
+                        </a:rPr>
+                        <a:t>Neue Wettbewerber</a:t>
+                      </a:r>
+                    </a:p>
+                  </a:txBody>
+                  <a:tcPr>
+                    <a:solidFill>
+                      <a:srgbClr val="FFFFFF"/>
+                    </a:solidFill>
+                  </a:tcPr>
+                </a:tc>
+                <a:tc>
+                  <a:txBody>
+                    <a:bodyPr wrap="square"/>
+                    <a:lstStyle/>
+                    <a:p>
+                      <a:r>
+                        <a:rPr sz="1100" b="0">
+                          <a:solidFill>
+                            <a:srgbClr val="1A1A1A"/>
+                          </a:solidFill>
+                          <a:latin typeface="Arial"/>
+                        </a:rPr>
+                        <a:t/>
+                      </a:r>
+                    </a:p>
+                  </a:txBody>
+                  <a:tcPr>
+                    <a:solidFill>
+                      <a:srgbClr val="FFFFFF"/>
+                    </a:solidFill>
+                  </a:tcPr>
+                </a:tc>
+                <a:tc>
+                  <a:txBody>
+                    <a:bodyPr wrap="square"/>
+                    <a:lstStyle/>
+                    <a:p>
+                      <a:r>
+                        <a:rPr sz="1100" b="0">
+                          <a:solidFill>
+                            <a:srgbClr val="1A1A1A"/>
+                          </a:solidFill>
+                          <a:latin typeface="Arial"/>
+                        </a:rPr>
+                        <a:t/>
+                      </a:r>
+                    </a:p>
+                  </a:txBody>
+                  <a:tcPr>
+                    <a:solidFill>
+                      <a:srgbClr val="FFFFFF"/>
+                    </a:solidFill>
+                  </a:tcPr>
+                </a:tc>
+                <a:tc>
+                  <a:txBody>
+                    <a:bodyPr wrap="square"/>
+                    <a:lstStyle/>
+                    <a:p>
+                      <a:r>
+                        <a:rPr sz="1100" b="0">
+                          <a:solidFill>
+                            <a:srgbClr val="1A1A1A"/>
+                          </a:solidFill>
+                          <a:latin typeface="Arial"/>
+                        </a:rPr>
+                        <a:t/>
+                      </a:r>
+                    </a:p>
+                  </a:txBody>
+                  <a:tcPr>
+                    <a:solidFill>
+                      <a:srgbClr val="FFFFFF"/>
+                    </a:solidFill>
+                  </a:tcPr>
+                </a:tc>
+              </a:tr>
+              <a:tr h="475488">
+                <a:tc>
+                  <a:txBody>
+                    <a:bodyPr wrap="square"/>
+                    <a:lstStyle/>
+                    <a:p>
+                      <a:r>
+                        <a:rPr sz="1100" b="0">
+                          <a:solidFill>
+                            <a:srgbClr val="1A1A1A"/>
+                          </a:solidFill>
+                          <a:latin typeface="Arial"/>
+                        </a:rPr>
+                        <a:t>Lieferantenmacht</a:t>
+                      </a:r>
+                    </a:p>
+                  </a:txBody>
+                  <a:tcPr>
+                    <a:solidFill>
+                      <a:srgbClr val="F4F6FA"/>
+                    </a:solidFill>
+                  </a:tcPr>
+                </a:tc>
+                <a:tc>
+                  <a:txBody>
+                    <a:bodyPr wrap="square"/>
+                    <a:lstStyle/>
+                    <a:p>
+                      <a:r>
+                        <a:rPr sz="1100" b="0">
+                          <a:solidFill>
+                            <a:srgbClr val="1A1A1A"/>
+                          </a:solidFill>
+                          <a:latin typeface="Arial"/>
+                        </a:rPr>
+                        <a:t/>
+                      </a:r>
+                    </a:p>
+                  </a:txBody>
+                  <a:tcPr>
+                    <a:solidFill>
+                      <a:srgbClr val="F4F6FA"/>
+                    </a:solidFill>
+                  </a:tcPr>
+                </a:tc>
+                <a:tc>
+                  <a:txBody>
+                    <a:bodyPr wrap="square"/>
+                    <a:lstStyle/>
+                    <a:p>
+                      <a:r>
+                        <a:rPr sz="1100" b="0">
+                          <a:solidFill>
+                            <a:srgbClr val="1A1A1A"/>
+                          </a:solidFill>
+                          <a:latin typeface="Arial"/>
+                        </a:rPr>
+                        <a:t/>
+                      </a:r>
+                    </a:p>
+                  </a:txBody>
+                  <a:tcPr>
+                    <a:solidFill>
+                      <a:srgbClr val="F4F6FA"/>
+                    </a:solidFill>
+                  </a:tcPr>
+                </a:tc>
+                <a:tc>
+                  <a:txBody>
+                    <a:bodyPr wrap="square"/>
+                    <a:lstStyle/>
+                    <a:p>
+                      <a:r>
+                        <a:rPr sz="1100" b="0">
+                          <a:solidFill>
+                            <a:srgbClr val="1A1A1A"/>
+                          </a:solidFill>
+                          <a:latin typeface="Arial"/>
+                        </a:rPr>
+                        <a:t/>
+                      </a:r>
+                    </a:p>
+                  </a:txBody>
+                  <a:tcPr>
+                    <a:solidFill>
+                      <a:srgbClr val="F4F6FA"/>
+                    </a:solidFill>
+                  </a:tcPr>
+                </a:tc>
+              </a:tr>
+              <a:tr h="475488">
+                <a:tc>
+                  <a:txBody>
+                    <a:bodyPr wrap="square"/>
+                    <a:lstStyle/>
+                    <a:p>
+                      <a:r>
+                        <a:rPr sz="1100" b="0">
+                          <a:solidFill>
+                            <a:srgbClr val="1A1A1A"/>
+                          </a:solidFill>
+                          <a:latin typeface="Arial"/>
+                        </a:rPr>
+                        <a:t>Abnehmermacht</a:t>
+                      </a:r>
+                    </a:p>
+                  </a:txBody>
+                  <a:tcPr>
+                    <a:solidFill>
+                      <a:srgbClr val="FFFFFF"/>
+                    </a:solidFill>
+                  </a:tcPr>
+                </a:tc>
+                <a:tc>
+                  <a:txBody>
+                    <a:bodyPr wrap="square"/>
+                    <a:lstStyle/>
+                    <a:p>
+                      <a:r>
+                        <a:rPr sz="1100" b="0">
+                          <a:solidFill>
+                            <a:srgbClr val="1A1A1A"/>
+                          </a:solidFill>
+                          <a:latin typeface="Arial"/>
+                        </a:rPr>
+                        <a:t/>
+                      </a:r>
+                    </a:p>
+                  </a:txBody>
+                  <a:tcPr>
+                    <a:solidFill>
+                      <a:srgbClr val="FFFFFF"/>
+                    </a:solidFill>
+                  </a:tcPr>
+                </a:tc>
+                <a:tc>
+                  <a:txBody>
+                    <a:bodyPr wrap="square"/>
+                    <a:lstStyle/>
+                    <a:p>
+                      <a:r>
+                        <a:rPr sz="1100" b="0">
+                          <a:solidFill>
+                            <a:srgbClr val="1A1A1A"/>
+                          </a:solidFill>
+                          <a:latin typeface="Arial"/>
+                        </a:rPr>
+                        <a:t/>
+                      </a:r>
+                    </a:p>
+                  </a:txBody>
+                  <a:tcPr>
+                    <a:solidFill>
+                      <a:srgbClr val="FFFFFF"/>
+                    </a:solidFill>
+                  </a:tcPr>
+                </a:tc>
+                <a:tc>
+                  <a:txBody>
+                    <a:bodyPr wrap="square"/>
+                    <a:lstStyle/>
+                    <a:p>
+                      <a:r>
+                        <a:rPr sz="1100" b="0">
+                          <a:solidFill>
+                            <a:srgbClr val="1A1A1A"/>
+                          </a:solidFill>
+                          <a:latin typeface="Arial"/>
+                        </a:rPr>
+                        <a:t/>
+                      </a:r>
+                    </a:p>
+                  </a:txBody>
+                  <a:tcPr>
+                    <a:solidFill>
+                      <a:srgbClr val="FFFFFF"/>
+                    </a:solidFill>
+                  </a:tcPr>
+                </a:tc>
+              </a:tr>
+              <a:tr h="475488">
+                <a:tc>
+                  <a:txBody>
+                    <a:bodyPr wrap="square"/>
+                    <a:lstStyle/>
+                    <a:p>
+                      <a:r>
+                        <a:rPr sz="1100" b="0">
+                          <a:solidFill>
+                            <a:srgbClr val="1A1A1A"/>
+                          </a:solidFill>
+                          <a:latin typeface="Arial"/>
+                        </a:rPr>
+                        <a:t>Substitutionsbedrohung</a:t>
+                      </a:r>
+                    </a:p>
+                  </a:txBody>
+                  <a:tcPr>
+                    <a:solidFill>
+                      <a:srgbClr val="F4F6FA"/>
+                    </a:solidFill>
+                  </a:tcPr>
+                </a:tc>
+                <a:tc>
+                  <a:txBody>
+                    <a:bodyPr wrap="square"/>
+                    <a:lstStyle/>
+                    <a:p>
+                      <a:r>
+                        <a:rPr sz="1100" b="0">
+                          <a:solidFill>
+                            <a:srgbClr val="1A1A1A"/>
+                          </a:solidFill>
+                          <a:latin typeface="Arial"/>
+                        </a:rPr>
+                        <a:t/>
+                      </a:r>
+                    </a:p>
+                  </a:txBody>
+                  <a:tcPr>
+                    <a:solidFill>
+                      <a:srgbClr val="F4F6FA"/>
+                    </a:solidFill>
+                  </a:tcPr>
+                </a:tc>
+                <a:tc>
+                  <a:txBody>
+                    <a:bodyPr wrap="square"/>
+                    <a:lstStyle/>
+                    <a:p>
+                      <a:r>
+                        <a:rPr sz="1100" b="0">
+                          <a:solidFill>
+                            <a:srgbClr val="1A1A1A"/>
+                          </a:solidFill>
+                          <a:latin typeface="Arial"/>
+                        </a:rPr>
+                        <a:t/>
+                      </a:r>
+                    </a:p>
+                  </a:txBody>
+                  <a:tcPr>
+                    <a:solidFill>
+                      <a:srgbClr val="F4F6FA"/>
+                    </a:solidFill>
+                  </a:tcPr>
+                </a:tc>
+                <a:tc>
+                  <a:txBody>
+                    <a:bodyPr wrap="square"/>
+                    <a:lstStyle/>
+                    <a:p>
+                      <a:r>
+                        <a:rPr sz="1100" b="0">
+                          <a:solidFill>
+                            <a:srgbClr val="1A1A1A"/>
+                          </a:solidFill>
+                          <a:latin typeface="Arial"/>
+                        </a:rPr>
+                        <a:t/>
+                      </a:r>
+                    </a:p>
+                  </a:txBody>
+                  <a:tcPr>
+                    <a:solidFill>
+                      <a:srgbClr val="F4F6FA"/>
+                    </a:solidFill>
+                  </a:tcPr>
+                </a:tc>
+              </a:tr>
+              <a:tr h="475488">
+                <a:tc>
+                  <a:txBody>
+                    <a:bodyPr wrap="square"/>
+                    <a:lstStyle/>
+                    <a:p>
+                      <a:r>
+                        <a:rPr sz="1100" b="0">
+                          <a:solidFill>
+                            <a:srgbClr val="1A1A1A"/>
+                          </a:solidFill>
+                          <a:latin typeface="Arial"/>
+                        </a:rPr>
+                        <a:t>Rivalität intern</a:t>
+                      </a:r>
+                    </a:p>
+                  </a:txBody>
+                  <a:tcPr>
+                    <a:solidFill>
+                      <a:srgbClr val="FFFFFF"/>
+                    </a:solidFill>
+                  </a:tcPr>
+                </a:tc>
+                <a:tc>
+                  <a:txBody>
+                    <a:bodyPr wrap="square"/>
+                    <a:lstStyle/>
+                    <a:p>
+                      <a:r>
+                        <a:rPr sz="1100" b="0">
+                          <a:solidFill>
+                            <a:srgbClr val="1A1A1A"/>
+                          </a:solidFill>
+                          <a:latin typeface="Arial"/>
+                        </a:rPr>
+                        <a:t/>
+                      </a:r>
+                    </a:p>
+                  </a:txBody>
+                  <a:tcPr>
+                    <a:solidFill>
+                      <a:srgbClr val="FFFFFF"/>
+                    </a:solidFill>
+                  </a:tcPr>
+                </a:tc>
+                <a:tc>
+                  <a:txBody>
+                    <a:bodyPr wrap="square"/>
+                    <a:lstStyle/>
+                    <a:p>
+                      <a:r>
+                        <a:rPr sz="1100" b="0">
+                          <a:solidFill>
+                            <a:srgbClr val="1A1A1A"/>
+                          </a:solidFill>
+                          <a:latin typeface="Arial"/>
+                        </a:rPr>
+                        <a:t/>
+                      </a:r>
+                    </a:p>
+                  </a:txBody>
+                  <a:tcPr>
+                    <a:solidFill>
+                      <a:srgbClr val="FFFFFF"/>
+                    </a:solidFill>
+                  </a:tcPr>
+                </a:tc>
+                <a:tc>
+                  <a:txBody>
+                    <a:bodyPr wrap="square"/>
+                    <a:lstStyle/>
+                    <a:p>
+                      <a:r>
+                        <a:rPr sz="1100" b="0">
+                          <a:solidFill>
+                            <a:srgbClr val="1A1A1A"/>
+                          </a:solidFill>
+                          <a:latin typeface="Arial"/>
+                        </a:rPr>
+                        <a:t/>
+                      </a:r>
+                    </a:p>
+                  </a:txBody>
+                  <a:tcPr>
+                    <a:solidFill>
+                      <a:srgbClr val="FFFFFF"/>
+                    </a:solidFill>
+                  </a:tcPr>
+                </a:tc>
+              </a:tr>
+              <a:tr h="475488">
+                <a:tc>
+                  <a:txBody>
+                    <a:bodyPr wrap="square"/>
+                    <a:lstStyle/>
+                    <a:p>
+                      <a:r>
+                        <a:rPr sz="1100" b="0">
+                          <a:solidFill>
+                            <a:srgbClr val="1A1A1A"/>
+                          </a:solidFill>
+                          <a:latin typeface="Arial"/>
+                        </a:rPr>
+                        <a:t>Gesamteindruck Branche</a:t>
+                      </a:r>
+                    </a:p>
+                  </a:txBody>
+                  <a:tcPr>
+                    <a:solidFill>
+                      <a:srgbClr val="F4F6FA"/>
+                    </a:solidFill>
+                  </a:tcPr>
+                </a:tc>
+                <a:tc>
+                  <a:txBody>
+                    <a:bodyPr wrap="square"/>
+                    <a:lstStyle/>
+                    <a:p>
+                      <a:r>
+                        <a:rPr sz="1100" b="0">
+                          <a:solidFill>
+                            <a:srgbClr val="1A1A1A"/>
+                          </a:solidFill>
+                          <a:latin typeface="Arial"/>
+                        </a:rPr>
+                        <a:t/>
+                      </a:r>
+                    </a:p>
+                  </a:txBody>
+                  <a:tcPr>
+                    <a:solidFill>
+                      <a:srgbClr val="F4F6FA"/>
+                    </a:solidFill>
+                  </a:tcPr>
+                </a:tc>
+                <a:tc>
+                  <a:txBody>
+                    <a:bodyPr wrap="square"/>
+                    <a:lstStyle/>
+                    <a:p>
+                      <a:r>
+                        <a:rPr sz="1100" b="0">
+                          <a:solidFill>
+                            <a:srgbClr val="1A1A1A"/>
+                          </a:solidFill>
+                          <a:latin typeface="Arial"/>
+                        </a:rPr>
+                        <a:t/>
+                      </a:r>
+                    </a:p>
+                  </a:txBody>
+                  <a:tcPr>
+                    <a:solidFill>
+                      <a:srgbClr val="F4F6FA"/>
+                    </a:solidFill>
+                  </a:tcPr>
+                </a:tc>
+                <a:tc>
+                  <a:txBody>
+                    <a:bodyPr wrap="square"/>
+                    <a:lstStyle/>
+                    <a:p>
+                      <a:r>
+                        <a:rPr sz="1100" b="0">
+                          <a:solidFill>
+                            <a:srgbClr val="1A1A1A"/>
+                          </a:solidFill>
+                          <a:latin typeface="Arial"/>
+                        </a:rPr>
+                        <a:t/>
+                      </a:r>
+                    </a:p>
+                  </a:txBody>
+                  <a:tcPr>
+                    <a:solidFill>
+                      <a:srgbClr val="F4F6FA"/>
+                    </a:solidFill>
+                  </a:tcPr>
+                </a:tc>
+              </a:tr>
+            </a:tbl>
+          </a:graphicData>
+        </a:graphic>
+      </p:graphicFrame>
     </p:spTree>
   </p:cSld>
   <p:clrMapOvr>
@@ -4146,8 +5863,8 @@
         </p:nvSpPr>
         <p:spPr>
           <a:xfrm>
-            <a:off x="365760" y="2286000"/>
-            <a:ext cx="11430000" cy="1828800"/>
+            <a:off x="365760" y="2011680"/>
+            <a:ext cx="11430000" cy="2011680"/>
           </a:xfrm>
           <a:prstGeom prst="rect">
             <a:avLst/>
@@ -4162,13 +5879,13 @@
           <a:p>
             <a:pPr algn="l"/>
             <a:r>
-              <a:rPr sz="3600" b="1">
+              <a:rPr sz="3600" b="1" i="0">
                 <a:solidFill>
                   <a:srgbClr val="FFFFFF"/>
                 </a:solidFill>
                 <a:latin typeface="Arial"/>
               </a:rPr>
-              <a:t>Praktisch (direkt anwendbar)</a:t>
+              <a:t>Arbeitsblatt B: Mein 3-Monats-Expertiseplan</a:t>
             </a:r>
           </a:p>
         </p:txBody>
@@ -4187,7 +5904,7 @@
     <p:bg>
       <p:bgPr>
         <a:solidFill>
-          <a:srgbClr val="1A1A1A"/>
+          <a:srgbClr val="FFFFFF"/>
         </a:solidFill>
         <a:effectLst/>
       </p:bgPr>
@@ -4214,7 +5931,7 @@
             <a:avLst/>
           </a:prstGeom>
           <a:solidFill>
-            <a:srgbClr val="E05B00"/>
+            <a:srgbClr val="003DA5"/>
           </a:solidFill>
           <a:ln>
             <a:noFill/>
@@ -4250,8 +5967,8 @@
         </p:nvSpPr>
         <p:spPr>
           <a:xfrm>
-            <a:off x="365760" y="2286000"/>
-            <a:ext cx="11430000" cy="1828800"/>
+            <a:off x="228600" y="182880"/>
+            <a:ext cx="11430000" cy="320040"/>
           </a:xfrm>
           <a:prstGeom prst="rect">
             <a:avLst/>
@@ -4266,17 +5983,483 @@
           <a:p>
             <a:pPr algn="l"/>
             <a:r>
-              <a:rPr sz="3600" b="1">
-                <a:solidFill>
-                  <a:srgbClr val="FFFFFF"/>
+              <a:rPr sz="900" b="0" i="0">
+                <a:solidFill>
+                  <a:srgbClr val="556575"/>
                 </a:solidFill>
                 <a:latin typeface="Arial"/>
               </a:rPr>
-              <a:t>Methodisch (Kompetenzaufbau)</a:t>
-            </a:r>
-          </a:p>
-        </p:txBody>
-      </p:sp>
+              <a:t>M09 · 4.6 Arbeitsblätter</a:t>
+            </a:r>
+          </a:p>
+        </p:txBody>
+      </p:sp>
+      <p:sp>
+        <p:nvSpPr>
+          <p:cNvPr id="4" name="TextBox 3"/>
+          <p:cNvSpPr txBox="1"/>
+          <p:nvPr/>
+        </p:nvSpPr>
+        <p:spPr>
+          <a:xfrm>
+            <a:off x="365760" y="274320"/>
+            <a:ext cx="11430000" cy="777240"/>
+          </a:xfrm>
+          <a:prstGeom prst="rect">
+            <a:avLst/>
+          </a:prstGeom>
+          <a:noFill/>
+        </p:spPr>
+        <p:txBody>
+          <a:bodyPr wrap="square">
+            <a:spAutoFit/>
+          </a:bodyPr>
+          <a:lstStyle/>
+          <a:p>
+            <a:pPr algn="l"/>
+            <a:r>
+              <a:rPr sz="2200" b="1" i="0">
+                <a:solidFill>
+                  <a:srgbClr val="003DA5"/>
+                </a:solidFill>
+                <a:latin typeface="Arial"/>
+              </a:rPr>
+              <a:t>Arbeitsblatt B: Mein 3-Monats-Expertiseplan</a:t>
+            </a:r>
+          </a:p>
+        </p:txBody>
+      </p:sp>
+      <p:sp>
+        <p:nvSpPr>
+          <p:cNvPr id="5" name="Rectangle 4"/>
+          <p:cNvSpPr/>
+          <p:nvPr/>
+        </p:nvSpPr>
+        <p:spPr>
+          <a:xfrm>
+            <a:off x="365760" y="1005840"/>
+            <a:ext cx="11430000" cy="27432"/>
+          </a:xfrm>
+          <a:prstGeom prst="rect">
+            <a:avLst/>
+          </a:prstGeom>
+          <a:solidFill>
+            <a:srgbClr val="D1D5DB"/>
+          </a:solidFill>
+          <a:ln>
+            <a:noFill/>
+          </a:ln>
+        </p:spPr>
+        <p:style>
+          <a:lnRef idx="1">
+            <a:schemeClr val="accent1"/>
+          </a:lnRef>
+          <a:fillRef idx="3">
+            <a:schemeClr val="accent1"/>
+          </a:fillRef>
+          <a:effectRef idx="2">
+            <a:schemeClr val="accent1"/>
+          </a:effectRef>
+          <a:fontRef idx="minor">
+            <a:schemeClr val="lt1"/>
+          </a:fontRef>
+        </p:style>
+        <p:txBody>
+          <a:bodyPr rtlCol="0" anchor="ctr"/>
+          <a:lstStyle/>
+          <a:p>
+            <a:pPr algn="ctr"/>
+          </a:p>
+        </p:txBody>
+      </p:sp>
+      <p:graphicFrame>
+        <p:nvGraphicFramePr>
+          <p:cNvPr id="6" name="Table 5"/>
+          <p:cNvGraphicFramePr>
+            <a:graphicFrameLocks noGrp="1"/>
+          </p:cNvGraphicFramePr>
+          <p:nvPr/>
+        </p:nvGraphicFramePr>
+        <p:xfrm>
+          <a:off x="365760" y="1143000"/>
+          <a:ext cx="11430000" cy="1901952"/>
+        </p:xfrm>
+        <a:graphic>
+          <a:graphicData uri="http://schemas.openxmlformats.org/drawingml/2006/table">
+            <a:tbl>
+              <a:tblPr firstRow="1" bandRow="1">
+                <a:tableStyleId>{5C22544A-7EE6-4342-B048-85BDC9FD1C3A}</a:tableStyleId>
+              </a:tblPr>
+              <a:tblGrid>
+                <a:gridCol w="2857500"/>
+                <a:gridCol w="2857500"/>
+                <a:gridCol w="2857500"/>
+                <a:gridCol w="2857500"/>
+              </a:tblGrid>
+              <a:tr h="475488">
+                <a:tc>
+                  <a:txBody>
+                    <a:bodyPr wrap="square"/>
+                    <a:lstStyle/>
+                    <a:p>
+                      <a:r>
+                        <a:rPr sz="1100" b="1">
+                          <a:solidFill>
+                            <a:srgbClr val="FFFFFF"/>
+                          </a:solidFill>
+                          <a:latin typeface="Arial"/>
+                        </a:rPr>
+                        <a:t>Monat</a:t>
+                      </a:r>
+                    </a:p>
+                  </a:txBody>
+                  <a:tcPr>
+                    <a:solidFill>
+                      <a:srgbClr val="003DA5"/>
+                    </a:solidFill>
+                  </a:tcPr>
+                </a:tc>
+                <a:tc>
+                  <a:txBody>
+                    <a:bodyPr wrap="square"/>
+                    <a:lstStyle/>
+                    <a:p>
+                      <a:r>
+                        <a:rPr sz="1100" b="1">
+                          <a:solidFill>
+                            <a:srgbClr val="FFFFFF"/>
+                          </a:solidFill>
+                          <a:latin typeface="Arial"/>
+                        </a:rPr>
+                        <a:t>Schwerpunkt</a:t>
+                      </a:r>
+                    </a:p>
+                  </a:txBody>
+                  <a:tcPr>
+                    <a:solidFill>
+                      <a:srgbClr val="003DA5"/>
+                    </a:solidFill>
+                  </a:tcPr>
+                </a:tc>
+                <a:tc>
+                  <a:txBody>
+                    <a:bodyPr wrap="square"/>
+                    <a:lstStyle/>
+                    <a:p>
+                      <a:r>
+                        <a:rPr sz="1100" b="1">
+                          <a:solidFill>
+                            <a:srgbClr val="FFFFFF"/>
+                          </a:solidFill>
+                          <a:latin typeface="Arial"/>
+                        </a:rPr>
+                        <a:t>Konkrete Aktivität</a:t>
+                      </a:r>
+                    </a:p>
+                  </a:txBody>
+                  <a:tcPr>
+                    <a:solidFill>
+                      <a:srgbClr val="003DA5"/>
+                    </a:solidFill>
+                  </a:tcPr>
+                </a:tc>
+                <a:tc>
+                  <a:txBody>
+                    <a:bodyPr wrap="square"/>
+                    <a:lstStyle/>
+                    <a:p>
+                      <a:r>
+                        <a:rPr sz="1100" b="1">
+                          <a:solidFill>
+                            <a:srgbClr val="FFFFFF"/>
+                          </a:solidFill>
+                          <a:latin typeface="Arial"/>
+                        </a:rPr>
+                        <a:t>Erwartetes Ergebnis</a:t>
+                      </a:r>
+                    </a:p>
+                  </a:txBody>
+                  <a:tcPr>
+                    <a:solidFill>
+                      <a:srgbClr val="003DA5"/>
+                    </a:solidFill>
+                  </a:tcPr>
+                </a:tc>
+              </a:tr>
+              <a:tr h="475488">
+                <a:tc>
+                  <a:txBody>
+                    <a:bodyPr wrap="square"/>
+                    <a:lstStyle/>
+                    <a:p>
+                      <a:r>
+                        <a:rPr sz="1100" b="0">
+                          <a:solidFill>
+                            <a:srgbClr val="1A1A1A"/>
+                          </a:solidFill>
+                          <a:latin typeface="Arial"/>
+                        </a:rPr>
+                        <a:t>Monat 1</a:t>
+                      </a:r>
+                    </a:p>
+                  </a:txBody>
+                  <a:tcPr>
+                    <a:solidFill>
+                      <a:srgbClr val="FFFFFF"/>
+                    </a:solidFill>
+                  </a:tcPr>
+                </a:tc>
+                <a:tc>
+                  <a:txBody>
+                    <a:bodyPr wrap="square"/>
+                    <a:lstStyle/>
+                    <a:p>
+                      <a:r>
+                        <a:rPr sz="1100" b="0">
+                          <a:solidFill>
+                            <a:srgbClr val="1A1A1A"/>
+                          </a:solidFill>
+                          <a:latin typeface="Arial"/>
+                        </a:rPr>
+                        <a:t>Strukturwissen</a:t>
+                      </a:r>
+                    </a:p>
+                  </a:txBody>
+                  <a:tcPr>
+                    <a:solidFill>
+                      <a:srgbClr val="FFFFFF"/>
+                    </a:solidFill>
+                  </a:tcPr>
+                </a:tc>
+                <a:tc>
+                  <a:txBody>
+                    <a:bodyPr wrap="square"/>
+                    <a:lstStyle/>
+                    <a:p>
+                      <a:r>
+                        <a:rPr sz="1100" b="0">
+                          <a:solidFill>
+                            <a:srgbClr val="1A1A1A"/>
+                          </a:solidFill>
+                          <a:latin typeface="Arial"/>
+                        </a:rPr>
+                        <a:t/>
+                      </a:r>
+                    </a:p>
+                  </a:txBody>
+                  <a:tcPr>
+                    <a:solidFill>
+                      <a:srgbClr val="FFFFFF"/>
+                    </a:solidFill>
+                  </a:tcPr>
+                </a:tc>
+                <a:tc>
+                  <a:txBody>
+                    <a:bodyPr wrap="square"/>
+                    <a:lstStyle/>
+                    <a:p>
+                      <a:r>
+                        <a:rPr sz="1100" b="0">
+                          <a:solidFill>
+                            <a:srgbClr val="1A1A1A"/>
+                          </a:solidFill>
+                          <a:latin typeface="Arial"/>
+                        </a:rPr>
+                        <a:t/>
+                      </a:r>
+                    </a:p>
+                  </a:txBody>
+                  <a:tcPr>
+                    <a:solidFill>
+                      <a:srgbClr val="FFFFFF"/>
+                    </a:solidFill>
+                  </a:tcPr>
+                </a:tc>
+              </a:tr>
+              <a:tr h="475488">
+                <a:tc>
+                  <a:txBody>
+                    <a:bodyPr wrap="square"/>
+                    <a:lstStyle/>
+                    <a:p>
+                      <a:r>
+                        <a:rPr sz="1100" b="0">
+                          <a:solidFill>
+                            <a:srgbClr val="1A1A1A"/>
+                          </a:solidFill>
+                          <a:latin typeface="Arial"/>
+                        </a:rPr>
+                        <a:t>Monat 2</a:t>
+                      </a:r>
+                    </a:p>
+                  </a:txBody>
+                  <a:tcPr>
+                    <a:solidFill>
+                      <a:srgbClr val="F4F6FA"/>
+                    </a:solidFill>
+                  </a:tcPr>
+                </a:tc>
+                <a:tc>
+                  <a:txBody>
+                    <a:bodyPr wrap="square"/>
+                    <a:lstStyle/>
+                    <a:p>
+                      <a:r>
+                        <a:rPr sz="1100" b="0">
+                          <a:solidFill>
+                            <a:srgbClr val="1A1A1A"/>
+                          </a:solidFill>
+                          <a:latin typeface="Arial"/>
+                        </a:rPr>
+                        <a:t>Kundengespräche</a:t>
+                      </a:r>
+                    </a:p>
+                  </a:txBody>
+                  <a:tcPr>
+                    <a:solidFill>
+                      <a:srgbClr val="F4F6FA"/>
+                    </a:solidFill>
+                  </a:tcPr>
+                </a:tc>
+                <a:tc>
+                  <a:txBody>
+                    <a:bodyPr wrap="square"/>
+                    <a:lstStyle/>
+                    <a:p>
+                      <a:r>
+                        <a:rPr sz="1100" b="0">
+                          <a:solidFill>
+                            <a:srgbClr val="1A1A1A"/>
+                          </a:solidFill>
+                          <a:latin typeface="Arial"/>
+                        </a:rPr>
+                        <a:t/>
+                      </a:r>
+                    </a:p>
+                  </a:txBody>
+                  <a:tcPr>
+                    <a:solidFill>
+                      <a:srgbClr val="F4F6FA"/>
+                    </a:solidFill>
+                  </a:tcPr>
+                </a:tc>
+                <a:tc>
+                  <a:txBody>
+                    <a:bodyPr wrap="square"/>
+                    <a:lstStyle/>
+                    <a:p>
+                      <a:r>
+                        <a:rPr sz="1100" b="0">
+                          <a:solidFill>
+                            <a:srgbClr val="1A1A1A"/>
+                          </a:solidFill>
+                          <a:latin typeface="Arial"/>
+                        </a:rPr>
+                        <a:t/>
+                      </a:r>
+                    </a:p>
+                  </a:txBody>
+                  <a:tcPr>
+                    <a:solidFill>
+                      <a:srgbClr val="F4F6FA"/>
+                    </a:solidFill>
+                  </a:tcPr>
+                </a:tc>
+              </a:tr>
+              <a:tr h="475488">
+                <a:tc>
+                  <a:txBody>
+                    <a:bodyPr wrap="square"/>
+                    <a:lstStyle/>
+                    <a:p>
+                      <a:r>
+                        <a:rPr sz="1100" b="0">
+                          <a:solidFill>
+                            <a:srgbClr val="1A1A1A"/>
+                          </a:solidFill>
+                          <a:latin typeface="Arial"/>
+                        </a:rPr>
+                        <a:t>Monat 3</a:t>
+                      </a:r>
+                    </a:p>
+                  </a:txBody>
+                  <a:tcPr>
+                    <a:solidFill>
+                      <a:srgbClr val="FFFFFF"/>
+                    </a:solidFill>
+                  </a:tcPr>
+                </a:tc>
+                <a:tc>
+                  <a:txBody>
+                    <a:bodyPr wrap="square"/>
+                    <a:lstStyle/>
+                    <a:p>
+                      <a:r>
+                        <a:rPr sz="1100" b="0">
+                          <a:solidFill>
+                            <a:srgbClr val="1A1A1A"/>
+                          </a:solidFill>
+                          <a:latin typeface="Arial"/>
+                        </a:rPr>
+                        <a:t>Netzwerk &amp; Portfolio</a:t>
+                      </a:r>
+                    </a:p>
+                  </a:txBody>
+                  <a:tcPr>
+                    <a:solidFill>
+                      <a:srgbClr val="FFFFFF"/>
+                    </a:solidFill>
+                  </a:tcPr>
+                </a:tc>
+                <a:tc>
+                  <a:txBody>
+                    <a:bodyPr wrap="square"/>
+                    <a:lstStyle/>
+                    <a:p>
+                      <a:r>
+                        <a:rPr sz="1100" b="0">
+                          <a:solidFill>
+                            <a:srgbClr val="1A1A1A"/>
+                          </a:solidFill>
+                          <a:latin typeface="Arial"/>
+                        </a:rPr>
+                        <a:t/>
+                      </a:r>
+                    </a:p>
+                  </a:txBody>
+                  <a:tcPr>
+                    <a:solidFill>
+                      <a:srgbClr val="FFFFFF"/>
+                    </a:solidFill>
+                  </a:tcPr>
+                </a:tc>
+                <a:tc>
+                  <a:txBody>
+                    <a:bodyPr wrap="square"/>
+                    <a:lstStyle/>
+                    <a:p>
+                      <a:r>
+                        <a:rPr sz="1100" b="0">
+                          <a:solidFill>
+                            <a:srgbClr val="1A1A1A"/>
+                          </a:solidFill>
+                          <a:latin typeface="Arial"/>
+                        </a:rPr>
+                        <a:t/>
+                      </a:r>
+                    </a:p>
+                  </a:txBody>
+                  <a:tcPr>
+                    <a:solidFill>
+                      <a:srgbClr val="FFFFFF"/>
+                    </a:solidFill>
+                  </a:tcPr>
+                </a:tc>
+              </a:tr>
+            </a:tbl>
+          </a:graphicData>
+        </a:graphic>
+      </p:graphicFrame>
     </p:spTree>
   </p:cSld>
   <p:clrMapOvr>
@@ -4354,8 +6537,8 @@
         </p:nvSpPr>
         <p:spPr>
           <a:xfrm>
-            <a:off x="365760" y="2286000"/>
-            <a:ext cx="11430000" cy="1828800"/>
+            <a:off x="365760" y="2011680"/>
+            <a:ext cx="11430000" cy="2011680"/>
           </a:xfrm>
           <a:prstGeom prst="rect">
             <a:avLst/>
@@ -4370,13 +6553,13 @@
           <a:p>
             <a:pPr algn="l"/>
             <a:r>
-              <a:rPr sz="3600" b="1">
+              <a:rPr sz="3600" b="1" i="0">
                 <a:solidFill>
                   <a:srgbClr val="FFFFFF"/>
                 </a:solidFill>
                 <a:latin typeface="Arial"/>
               </a:rPr>
-              <a:t>Branchenwissen (beispielhaft, je nach Zielsegment zu ergänzen)</a:t>
+              <a:t>Arbeitsblatt C: Strukturiertes Branchengespräch – Protokollvorlage</a:t>
             </a:r>
           </a:p>
         </p:txBody>
@@ -4395,7 +6578,7 @@
     <p:bg>
       <p:bgPr>
         <a:solidFill>
-          <a:srgbClr val="F5F7FA"/>
+          <a:srgbClr val="F4F6FA"/>
         </a:solidFill>
         <a:effectLst/>
       </p:bgPr>
@@ -4458,14 +6641,14 @@
         </p:nvSpPr>
         <p:spPr>
           <a:xfrm>
-            <a:off x="365760" y="868680"/>
-            <a:ext cx="7315200" cy="27432"/>
+            <a:off x="228600" y="804672"/>
+            <a:ext cx="11612880" cy="22860"/>
           </a:xfrm>
           <a:prstGeom prst="rect">
             <a:avLst/>
           </a:prstGeom>
           <a:solidFill>
-            <a:srgbClr val="E5E7EB"/>
+            <a:srgbClr val="D1D5DB"/>
           </a:solidFill>
           <a:ln>
             <a:noFill/>
@@ -4502,7 +6685,7 @@
         <p:spPr>
           <a:xfrm>
             <a:off x="365760" y="320040"/>
-            <a:ext cx="3657600" cy="365760"/>
+            <a:ext cx="4572000" cy="347472"/>
           </a:xfrm>
           <a:prstGeom prst="rect">
             <a:avLst/>
@@ -4517,7 +6700,7 @@
           <a:p>
             <a:pPr algn="l"/>
             <a:r>
-              <a:rPr sz="1000" b="1">
+              <a:rPr sz="900" b="1" i="0">
                 <a:solidFill>
                   <a:srgbClr val="003DA5"/>
                 </a:solidFill>
@@ -4537,7 +6720,7 @@
         <p:spPr>
           <a:xfrm>
             <a:off x="365760" y="502920"/>
-            <a:ext cx="9144000" cy="548640"/>
+            <a:ext cx="10058400" cy="640080"/>
           </a:xfrm>
           <a:prstGeom prst="rect">
             <a:avLst/>
@@ -4552,7 +6735,7 @@
           <a:p>
             <a:pPr algn="l"/>
             <a:r>
-              <a:rPr sz="2200" b="1">
+              <a:rPr sz="2400" b="1" i="0">
                 <a:solidFill>
                   <a:srgbClr val="1A1A1A"/>
                 </a:solidFill>
@@ -4571,7 +6754,7 @@
         </p:nvSpPr>
         <p:spPr>
           <a:xfrm>
-            <a:off x="365760" y="1188720"/>
+            <a:off x="365760" y="1234440"/>
             <a:ext cx="11430000" cy="5303520"/>
           </a:xfrm>
           <a:prstGeom prst="rect">
@@ -4587,11 +6770,11 @@
           <a:p>
             <a:pPr>
               <a:spcBef>
-                <a:spcPts val="400"/>
+                <a:spcPts val="500"/>
               </a:spcBef>
             </a:pPr>
             <a:r>
-              <a:rPr sz="1400">
+              <a:rPr sz="1500">
                 <a:solidFill>
                   <a:srgbClr val="003DA5"/>
                 </a:solidFill>
@@ -4600,7 +6783,7 @@
               <a:t>▪  </a:t>
             </a:r>
             <a:r>
-              <a:rPr sz="1600">
+              <a:rPr sz="1700">
                 <a:solidFill>
                   <a:srgbClr val="1A1A1A"/>
                 </a:solidFill>
@@ -4612,11 +6795,11 @@
           <a:p>
             <a:pPr>
               <a:spcBef>
-                <a:spcPts val="400"/>
+                <a:spcPts val="500"/>
               </a:spcBef>
             </a:pPr>
             <a:r>
-              <a:rPr sz="1400">
+              <a:rPr sz="1500">
                 <a:solidFill>
                   <a:srgbClr val="003DA5"/>
                 </a:solidFill>
@@ -4625,7 +6808,7 @@
               <a:t>▪  </a:t>
             </a:r>
             <a:r>
-              <a:rPr sz="1600">
+              <a:rPr sz="1700">
                 <a:solidFill>
                   <a:srgbClr val="1A1A1A"/>
                 </a:solidFill>
@@ -4637,11 +6820,11 @@
           <a:p>
             <a:pPr>
               <a:spcBef>
-                <a:spcPts val="400"/>
+                <a:spcPts val="500"/>
               </a:spcBef>
             </a:pPr>
             <a:r>
-              <a:rPr sz="1400">
+              <a:rPr sz="1500">
                 <a:solidFill>
                   <a:srgbClr val="003DA5"/>
                 </a:solidFill>
@@ -4650,7 +6833,7 @@
               <a:t>▪  </a:t>
             </a:r>
             <a:r>
-              <a:rPr sz="1600">
+              <a:rPr sz="1700">
                 <a:solidFill>
                   <a:srgbClr val="1A1A1A"/>
                 </a:solidFill>
@@ -4662,11 +6845,11 @@
           <a:p>
             <a:pPr>
               <a:spcBef>
-                <a:spcPts val="400"/>
+                <a:spcPts val="500"/>
               </a:spcBef>
             </a:pPr>
             <a:r>
-              <a:rPr sz="1400">
+              <a:rPr sz="1500">
                 <a:solidFill>
                   <a:srgbClr val="003DA5"/>
                 </a:solidFill>
@@ -4675,7 +6858,7 @@
               <a:t>▪  </a:t>
             </a:r>
             <a:r>
-              <a:rPr sz="1600">
+              <a:rPr sz="1700">
                 <a:solidFill>
                   <a:srgbClr val="1A1A1A"/>
                 </a:solidFill>
@@ -4687,11 +6870,11 @@
           <a:p>
             <a:pPr>
               <a:spcBef>
-                <a:spcPts val="400"/>
+                <a:spcPts val="500"/>
               </a:spcBef>
             </a:pPr>
             <a:r>
-              <a:rPr sz="1400">
+              <a:rPr sz="1500">
                 <a:solidFill>
                   <a:srgbClr val="003DA5"/>
                 </a:solidFill>
@@ -4700,7 +6883,7 @@
               <a:t>▪  </a:t>
             </a:r>
             <a:r>
-              <a:rPr sz="1600">
+              <a:rPr sz="1700">
                 <a:solidFill>
                   <a:srgbClr val="1A1A1A"/>
                 </a:solidFill>
@@ -4712,11 +6895,11 @@
           <a:p>
             <a:pPr>
               <a:spcBef>
-                <a:spcPts val="400"/>
+                <a:spcPts val="500"/>
               </a:spcBef>
             </a:pPr>
             <a:r>
-              <a:rPr sz="1400">
+              <a:rPr sz="1500">
                 <a:solidFill>
                   <a:srgbClr val="003DA5"/>
                 </a:solidFill>
@@ -4725,7 +6908,7 @@
               <a:t>▪  </a:t>
             </a:r>
             <a:r>
-              <a:rPr sz="1600">
+              <a:rPr sz="1700">
                 <a:solidFill>
                   <a:srgbClr val="1A1A1A"/>
                 </a:solidFill>
@@ -4745,6 +6928,1003 @@
 </file>
 
 <file path=ppt/slides/slide20.xml><?xml version="1.0" encoding="utf-8"?>
+<p:sld xmlns:a="http://schemas.openxmlformats.org/drawingml/2006/main" xmlns:p="http://schemas.openxmlformats.org/presentationml/2006/main" xmlns:r="http://schemas.openxmlformats.org/officeDocument/2006/relationships">
+  <p:cSld>
+    <p:bg>
+      <p:bgPr>
+        <a:solidFill>
+          <a:srgbClr val="FFFFFF"/>
+        </a:solidFill>
+        <a:effectLst/>
+      </p:bgPr>
+    </p:bg>
+    <p:spTree>
+      <p:nvGrpSpPr>
+        <p:cNvPr id="1" name=""/>
+        <p:cNvGrpSpPr/>
+        <p:nvPr/>
+      </p:nvGrpSpPr>
+      <p:grpSpPr/>
+      <p:sp>
+        <p:nvSpPr>
+          <p:cNvPr id="2" name="Rectangle 1"/>
+          <p:cNvSpPr/>
+          <p:nvPr/>
+        </p:nvSpPr>
+        <p:spPr>
+          <a:xfrm>
+            <a:off x="0" y="0"/>
+            <a:ext cx="73152" cy="6858000"/>
+          </a:xfrm>
+          <a:prstGeom prst="rect">
+            <a:avLst/>
+          </a:prstGeom>
+          <a:solidFill>
+            <a:srgbClr val="003DA5"/>
+          </a:solidFill>
+          <a:ln>
+            <a:noFill/>
+          </a:ln>
+        </p:spPr>
+        <p:style>
+          <a:lnRef idx="1">
+            <a:schemeClr val="accent1"/>
+          </a:lnRef>
+          <a:fillRef idx="3">
+            <a:schemeClr val="accent1"/>
+          </a:fillRef>
+          <a:effectRef idx="2">
+            <a:schemeClr val="accent1"/>
+          </a:effectRef>
+          <a:fontRef idx="minor">
+            <a:schemeClr val="lt1"/>
+          </a:fontRef>
+        </p:style>
+        <p:txBody>
+          <a:bodyPr rtlCol="0" anchor="ctr"/>
+          <a:lstStyle/>
+          <a:p>
+            <a:pPr algn="ctr"/>
+          </a:p>
+        </p:txBody>
+      </p:sp>
+      <p:sp>
+        <p:nvSpPr>
+          <p:cNvPr id="3" name="TextBox 2"/>
+          <p:cNvSpPr txBox="1"/>
+          <p:nvPr/>
+        </p:nvSpPr>
+        <p:spPr>
+          <a:xfrm>
+            <a:off x="228600" y="182880"/>
+            <a:ext cx="11430000" cy="320040"/>
+          </a:xfrm>
+          <a:prstGeom prst="rect">
+            <a:avLst/>
+          </a:prstGeom>
+          <a:noFill/>
+        </p:spPr>
+        <p:txBody>
+          <a:bodyPr wrap="square">
+            <a:spAutoFit/>
+          </a:bodyPr>
+          <a:lstStyle/>
+          <a:p>
+            <a:pPr algn="l"/>
+            <a:r>
+              <a:rPr sz="900" b="0" i="0">
+                <a:solidFill>
+                  <a:srgbClr val="556575"/>
+                </a:solidFill>
+                <a:latin typeface="Arial"/>
+              </a:rPr>
+              <a:t>M09 · 4.6 Arbeitsblätter</a:t>
+            </a:r>
+          </a:p>
+        </p:txBody>
+      </p:sp>
+      <p:sp>
+        <p:nvSpPr>
+          <p:cNvPr id="4" name="TextBox 3"/>
+          <p:cNvSpPr txBox="1"/>
+          <p:nvPr/>
+        </p:nvSpPr>
+        <p:spPr>
+          <a:xfrm>
+            <a:off x="365760" y="274320"/>
+            <a:ext cx="11430000" cy="777240"/>
+          </a:xfrm>
+          <a:prstGeom prst="rect">
+            <a:avLst/>
+          </a:prstGeom>
+          <a:noFill/>
+        </p:spPr>
+        <p:txBody>
+          <a:bodyPr wrap="square">
+            <a:spAutoFit/>
+          </a:bodyPr>
+          <a:lstStyle/>
+          <a:p>
+            <a:pPr algn="l"/>
+            <a:r>
+              <a:rPr sz="2200" b="1" i="0">
+                <a:solidFill>
+                  <a:srgbClr val="003DA5"/>
+                </a:solidFill>
+                <a:latin typeface="Arial"/>
+              </a:rPr>
+              <a:t>Arbeitsblatt C: Strukturiertes Branchengespräch – Protokollvorlage</a:t>
+            </a:r>
+          </a:p>
+        </p:txBody>
+      </p:sp>
+      <p:sp>
+        <p:nvSpPr>
+          <p:cNvPr id="5" name="Rectangle 4"/>
+          <p:cNvSpPr/>
+          <p:nvPr/>
+        </p:nvSpPr>
+        <p:spPr>
+          <a:xfrm>
+            <a:off x="365760" y="1005840"/>
+            <a:ext cx="11430000" cy="27432"/>
+          </a:xfrm>
+          <a:prstGeom prst="rect">
+            <a:avLst/>
+          </a:prstGeom>
+          <a:solidFill>
+            <a:srgbClr val="D1D5DB"/>
+          </a:solidFill>
+          <a:ln>
+            <a:noFill/>
+          </a:ln>
+        </p:spPr>
+        <p:style>
+          <a:lnRef idx="1">
+            <a:schemeClr val="accent1"/>
+          </a:lnRef>
+          <a:fillRef idx="3">
+            <a:schemeClr val="accent1"/>
+          </a:fillRef>
+          <a:effectRef idx="2">
+            <a:schemeClr val="accent1"/>
+          </a:effectRef>
+          <a:fontRef idx="minor">
+            <a:schemeClr val="lt1"/>
+          </a:fontRef>
+        </p:style>
+        <p:txBody>
+          <a:bodyPr rtlCol="0" anchor="ctr"/>
+          <a:lstStyle/>
+          <a:p>
+            <a:pPr algn="ctr"/>
+          </a:p>
+        </p:txBody>
+      </p:sp>
+      <p:graphicFrame>
+        <p:nvGraphicFramePr>
+          <p:cNvPr id="6" name="Table 5"/>
+          <p:cNvGraphicFramePr>
+            <a:graphicFrameLocks noGrp="1"/>
+          </p:cNvGraphicFramePr>
+          <p:nvPr/>
+        </p:nvGraphicFramePr>
+        <p:xfrm>
+          <a:off x="365760" y="1143000"/>
+          <a:ext cx="11430000" cy="2852928"/>
+        </p:xfrm>
+        <a:graphic>
+          <a:graphicData uri="http://schemas.openxmlformats.org/drawingml/2006/table">
+            <a:tbl>
+              <a:tblPr firstRow="1" bandRow="1">
+                <a:tableStyleId>{5C22544A-7EE6-4342-B048-85BDC9FD1C3A}</a:tableStyleId>
+              </a:tblPr>
+              <a:tblGrid>
+                <a:gridCol w="5715000"/>
+                <a:gridCol w="5715000"/>
+              </a:tblGrid>
+              <a:tr h="475488">
+                <a:tc>
+                  <a:txBody>
+                    <a:bodyPr wrap="square"/>
+                    <a:lstStyle/>
+                    <a:p>
+                      <a:r>
+                        <a:rPr sz="1100" b="1">
+                          <a:solidFill>
+                            <a:srgbClr val="FFFFFF"/>
+                          </a:solidFill>
+                          <a:latin typeface="Arial"/>
+                        </a:rPr>
+                        <a:t>Feld</a:t>
+                      </a:r>
+                    </a:p>
+                  </a:txBody>
+                  <a:tcPr>
+                    <a:solidFill>
+                      <a:srgbClr val="003DA5"/>
+                    </a:solidFill>
+                  </a:tcPr>
+                </a:tc>
+                <a:tc>
+                  <a:txBody>
+                    <a:bodyPr wrap="square"/>
+                    <a:lstStyle/>
+                    <a:p>
+                      <a:r>
+                        <a:rPr sz="1100" b="1">
+                          <a:solidFill>
+                            <a:srgbClr val="FFFFFF"/>
+                          </a:solidFill>
+                          <a:latin typeface="Arial"/>
+                        </a:rPr>
+                        <a:t>Inhalt (Stichworte)</a:t>
+                      </a:r>
+                    </a:p>
+                  </a:txBody>
+                  <a:tcPr>
+                    <a:solidFill>
+                      <a:srgbClr val="003DA5"/>
+                    </a:solidFill>
+                  </a:tcPr>
+                </a:tc>
+              </a:tr>
+              <a:tr h="475488">
+                <a:tc>
+                  <a:txBody>
+                    <a:bodyPr wrap="square"/>
+                    <a:lstStyle/>
+                    <a:p>
+                      <a:r>
+                        <a:rPr sz="1100" b="0">
+                          <a:solidFill>
+                            <a:srgbClr val="1A1A1A"/>
+                          </a:solidFill>
+                          <a:latin typeface="Arial"/>
+                        </a:rPr>
+                        <a:t>1. Branchenentwicklung (Was verändert sich gerade in Ihrer Branche?)</a:t>
+                      </a:r>
+                    </a:p>
+                  </a:txBody>
+                  <a:tcPr>
+                    <a:solidFill>
+                      <a:srgbClr val="FFFFFF"/>
+                    </a:solidFill>
+                  </a:tcPr>
+                </a:tc>
+                <a:tc>
+                  <a:txBody>
+                    <a:bodyPr wrap="square"/>
+                    <a:lstStyle/>
+                    <a:p>
+                      <a:r>
+                        <a:rPr sz="1100" b="0">
+                          <a:solidFill>
+                            <a:srgbClr val="1A1A1A"/>
+                          </a:solidFill>
+                          <a:latin typeface="Arial"/>
+                        </a:rPr>
+                        <a:t/>
+                      </a:r>
+                    </a:p>
+                  </a:txBody>
+                  <a:tcPr>
+                    <a:solidFill>
+                      <a:srgbClr val="FFFFFF"/>
+                    </a:solidFill>
+                  </a:tcPr>
+                </a:tc>
+              </a:tr>
+              <a:tr h="475488">
+                <a:tc>
+                  <a:txBody>
+                    <a:bodyPr wrap="square"/>
+                    <a:lstStyle/>
+                    <a:p>
+                      <a:r>
+                        <a:rPr sz="1100" b="0">
+                          <a:solidFill>
+                            <a:srgbClr val="1A1A1A"/>
+                          </a:solidFill>
+                          <a:latin typeface="Arial"/>
+                        </a:rPr>
+                        <a:t>2. Wettbewerbssituation (Wie positionieren Sie sich im Marktumfeld?)</a:t>
+                      </a:r>
+                    </a:p>
+                  </a:txBody>
+                  <a:tcPr>
+                    <a:solidFill>
+                      <a:srgbClr val="F4F6FA"/>
+                    </a:solidFill>
+                  </a:tcPr>
+                </a:tc>
+                <a:tc>
+                  <a:txBody>
+                    <a:bodyPr wrap="square"/>
+                    <a:lstStyle/>
+                    <a:p>
+                      <a:r>
+                        <a:rPr sz="1100" b="0">
+                          <a:solidFill>
+                            <a:srgbClr val="1A1A1A"/>
+                          </a:solidFill>
+                          <a:latin typeface="Arial"/>
+                        </a:rPr>
+                        <a:t/>
+                      </a:r>
+                    </a:p>
+                  </a:txBody>
+                  <a:tcPr>
+                    <a:solidFill>
+                      <a:srgbClr val="F4F6FA"/>
+                    </a:solidFill>
+                  </a:tcPr>
+                </a:tc>
+              </a:tr>
+              <a:tr h="475488">
+                <a:tc>
+                  <a:txBody>
+                    <a:bodyPr wrap="square"/>
+                    <a:lstStyle/>
+                    <a:p>
+                      <a:r>
+                        <a:rPr sz="1100" b="0">
+                          <a:solidFill>
+                            <a:srgbClr val="1A1A1A"/>
+                          </a:solidFill>
+                          <a:latin typeface="Arial"/>
+                        </a:rPr>
+                        <a:t>3. Chancen &amp; Investitionsabsichten (Welche Investitionen planen Sie in den nächsten 12–24 Monaten?)</a:t>
+                      </a:r>
+                    </a:p>
+                  </a:txBody>
+                  <a:tcPr>
+                    <a:solidFill>
+                      <a:srgbClr val="FFFFFF"/>
+                    </a:solidFill>
+                  </a:tcPr>
+                </a:tc>
+                <a:tc>
+                  <a:txBody>
+                    <a:bodyPr wrap="square"/>
+                    <a:lstStyle/>
+                    <a:p>
+                      <a:r>
+                        <a:rPr sz="1100" b="0">
+                          <a:solidFill>
+                            <a:srgbClr val="1A1A1A"/>
+                          </a:solidFill>
+                          <a:latin typeface="Arial"/>
+                        </a:rPr>
+                        <a:t/>
+                      </a:r>
+                    </a:p>
+                  </a:txBody>
+                  <a:tcPr>
+                    <a:solidFill>
+                      <a:srgbClr val="FFFFFF"/>
+                    </a:solidFill>
+                  </a:tcPr>
+                </a:tc>
+              </a:tr>
+              <a:tr h="475488">
+                <a:tc>
+                  <a:txBody>
+                    <a:bodyPr wrap="square"/>
+                    <a:lstStyle/>
+                    <a:p>
+                      <a:r>
+                        <a:rPr sz="1100" b="0">
+                          <a:solidFill>
+                            <a:srgbClr val="1A1A1A"/>
+                          </a:solidFill>
+                          <a:latin typeface="Arial"/>
+                        </a:rPr>
+                        <a:t>4. Risiken &amp; Belastungen (Was bereitet Ihnen aktuell die größten Sorgen?)</a:t>
+                      </a:r>
+                    </a:p>
+                  </a:txBody>
+                  <a:tcPr>
+                    <a:solidFill>
+                      <a:srgbClr val="F4F6FA"/>
+                    </a:solidFill>
+                  </a:tcPr>
+                </a:tc>
+                <a:tc>
+                  <a:txBody>
+                    <a:bodyPr wrap="square"/>
+                    <a:lstStyle/>
+                    <a:p>
+                      <a:r>
+                        <a:rPr sz="1100" b="0">
+                          <a:solidFill>
+                            <a:srgbClr val="1A1A1A"/>
+                          </a:solidFill>
+                          <a:latin typeface="Arial"/>
+                        </a:rPr>
+                        <a:t/>
+                      </a:r>
+                    </a:p>
+                  </a:txBody>
+                  <a:tcPr>
+                    <a:solidFill>
+                      <a:srgbClr val="F4F6FA"/>
+                    </a:solidFill>
+                  </a:tcPr>
+                </a:tc>
+              </a:tr>
+              <a:tr h="475488">
+                <a:tc>
+                  <a:txBody>
+                    <a:bodyPr wrap="square"/>
+                    <a:lstStyle/>
+                    <a:p>
+                      <a:r>
+                        <a:rPr sz="1100" b="0">
+                          <a:solidFill>
+                            <a:srgbClr val="1A1A1A"/>
+                          </a:solidFill>
+                          <a:latin typeface="Arial"/>
+                        </a:rPr>
+                        <a:t>5. Nächster Schritt / Folgethema (Was klären wir beim nächsten Termin?)</a:t>
+                      </a:r>
+                    </a:p>
+                  </a:txBody>
+                  <a:tcPr>
+                    <a:solidFill>
+                      <a:srgbClr val="FFFFFF"/>
+                    </a:solidFill>
+                  </a:tcPr>
+                </a:tc>
+                <a:tc>
+                  <a:txBody>
+                    <a:bodyPr wrap="square"/>
+                    <a:lstStyle/>
+                    <a:p>
+                      <a:r>
+                        <a:rPr sz="1100" b="0">
+                          <a:solidFill>
+                            <a:srgbClr val="1A1A1A"/>
+                          </a:solidFill>
+                          <a:latin typeface="Arial"/>
+                        </a:rPr>
+                        <a:t/>
+                      </a:r>
+                    </a:p>
+                  </a:txBody>
+                  <a:tcPr>
+                    <a:solidFill>
+                      <a:srgbClr val="FFFFFF"/>
+                    </a:solidFill>
+                  </a:tcPr>
+                </a:tc>
+              </a:tr>
+            </a:tbl>
+          </a:graphicData>
+        </a:graphic>
+      </p:graphicFrame>
+    </p:spTree>
+  </p:cSld>
+  <p:clrMapOvr>
+    <a:masterClrMapping/>
+  </p:clrMapOvr>
+</p:sld>
+</file>
+
+<file path=ppt/slides/slide21.xml><?xml version="1.0" encoding="utf-8"?>
+<p:sld xmlns:a="http://schemas.openxmlformats.org/drawingml/2006/main" xmlns:p="http://schemas.openxmlformats.org/presentationml/2006/main" xmlns:r="http://schemas.openxmlformats.org/officeDocument/2006/relationships">
+  <p:cSld>
+    <p:bg>
+      <p:bgPr>
+        <a:solidFill>
+          <a:srgbClr val="1A1A1A"/>
+        </a:solidFill>
+        <a:effectLst/>
+      </p:bgPr>
+    </p:bg>
+    <p:spTree>
+      <p:nvGrpSpPr>
+        <p:cNvPr id="1" name=""/>
+        <p:cNvGrpSpPr/>
+        <p:nvPr/>
+      </p:nvGrpSpPr>
+      <p:grpSpPr/>
+      <p:sp>
+        <p:nvSpPr>
+          <p:cNvPr id="2" name="Rectangle 1"/>
+          <p:cNvSpPr/>
+          <p:nvPr/>
+        </p:nvSpPr>
+        <p:spPr>
+          <a:xfrm>
+            <a:off x="0" y="0"/>
+            <a:ext cx="73152" cy="6858000"/>
+          </a:xfrm>
+          <a:prstGeom prst="rect">
+            <a:avLst/>
+          </a:prstGeom>
+          <a:solidFill>
+            <a:srgbClr val="E05B00"/>
+          </a:solidFill>
+          <a:ln>
+            <a:noFill/>
+          </a:ln>
+        </p:spPr>
+        <p:style>
+          <a:lnRef idx="1">
+            <a:schemeClr val="accent1"/>
+          </a:lnRef>
+          <a:fillRef idx="3">
+            <a:schemeClr val="accent1"/>
+          </a:fillRef>
+          <a:effectRef idx="2">
+            <a:schemeClr val="accent1"/>
+          </a:effectRef>
+          <a:fontRef idx="minor">
+            <a:schemeClr val="lt1"/>
+          </a:fontRef>
+        </p:style>
+        <p:txBody>
+          <a:bodyPr rtlCol="0" anchor="ctr"/>
+          <a:lstStyle/>
+          <a:p>
+            <a:pPr algn="ctr"/>
+          </a:p>
+        </p:txBody>
+      </p:sp>
+      <p:sp>
+        <p:nvSpPr>
+          <p:cNvPr id="3" name="TextBox 2"/>
+          <p:cNvSpPr txBox="1"/>
+          <p:nvPr/>
+        </p:nvSpPr>
+        <p:spPr>
+          <a:xfrm>
+            <a:off x="365760" y="2011680"/>
+            <a:ext cx="11430000" cy="2011680"/>
+          </a:xfrm>
+          <a:prstGeom prst="rect">
+            <a:avLst/>
+          </a:prstGeom>
+          <a:noFill/>
+        </p:spPr>
+        <p:txBody>
+          <a:bodyPr wrap="square">
+            <a:spAutoFit/>
+          </a:bodyPr>
+          <a:lstStyle/>
+          <a:p>
+            <a:pPr algn="l"/>
+            <a:r>
+              <a:rPr sz="3600" b="1" i="0">
+                <a:solidFill>
+                  <a:srgbClr val="FFFFFF"/>
+                </a:solidFill>
+                <a:latin typeface="Arial"/>
+              </a:rPr>
+              <a:t>Branchenportfolio – Mindestanforderungen</a:t>
+            </a:r>
+          </a:p>
+        </p:txBody>
+      </p:sp>
+    </p:spTree>
+  </p:cSld>
+  <p:clrMapOvr>
+    <a:masterClrMapping/>
+  </p:clrMapOvr>
+</p:sld>
+</file>
+
+<file path=ppt/slides/slide22.xml><?xml version="1.0" encoding="utf-8"?>
+<p:sld xmlns:a="http://schemas.openxmlformats.org/drawingml/2006/main" xmlns:p="http://schemas.openxmlformats.org/presentationml/2006/main" xmlns:r="http://schemas.openxmlformats.org/officeDocument/2006/relationships">
+  <p:cSld>
+    <p:bg>
+      <p:bgPr>
+        <a:solidFill>
+          <a:srgbClr val="FFFFFF"/>
+        </a:solidFill>
+        <a:effectLst/>
+      </p:bgPr>
+    </p:bg>
+    <p:spTree>
+      <p:nvGrpSpPr>
+        <p:cNvPr id="1" name=""/>
+        <p:cNvGrpSpPr/>
+        <p:nvPr/>
+      </p:nvGrpSpPr>
+      <p:grpSpPr/>
+      <p:sp>
+        <p:nvSpPr>
+          <p:cNvPr id="2" name="Rectangle 1"/>
+          <p:cNvSpPr/>
+          <p:nvPr/>
+        </p:nvSpPr>
+        <p:spPr>
+          <a:xfrm>
+            <a:off x="0" y="0"/>
+            <a:ext cx="73152" cy="6858000"/>
+          </a:xfrm>
+          <a:prstGeom prst="rect">
+            <a:avLst/>
+          </a:prstGeom>
+          <a:solidFill>
+            <a:srgbClr val="003DA5"/>
+          </a:solidFill>
+          <a:ln>
+            <a:noFill/>
+          </a:ln>
+        </p:spPr>
+        <p:style>
+          <a:lnRef idx="1">
+            <a:schemeClr val="accent1"/>
+          </a:lnRef>
+          <a:fillRef idx="3">
+            <a:schemeClr val="accent1"/>
+          </a:fillRef>
+          <a:effectRef idx="2">
+            <a:schemeClr val="accent1"/>
+          </a:effectRef>
+          <a:fontRef idx="minor">
+            <a:schemeClr val="lt1"/>
+          </a:fontRef>
+        </p:style>
+        <p:txBody>
+          <a:bodyPr rtlCol="0" anchor="ctr"/>
+          <a:lstStyle/>
+          <a:p>
+            <a:pPr algn="ctr"/>
+          </a:p>
+        </p:txBody>
+      </p:sp>
+      <p:sp>
+        <p:nvSpPr>
+          <p:cNvPr id="3" name="TextBox 2"/>
+          <p:cNvSpPr txBox="1"/>
+          <p:nvPr/>
+        </p:nvSpPr>
+        <p:spPr>
+          <a:xfrm>
+            <a:off x="228600" y="182880"/>
+            <a:ext cx="11430000" cy="320040"/>
+          </a:xfrm>
+          <a:prstGeom prst="rect">
+            <a:avLst/>
+          </a:prstGeom>
+          <a:noFill/>
+        </p:spPr>
+        <p:txBody>
+          <a:bodyPr wrap="square">
+            <a:spAutoFit/>
+          </a:bodyPr>
+          <a:lstStyle/>
+          <a:p>
+            <a:pPr algn="l"/>
+            <a:r>
+              <a:rPr sz="900" b="0" i="0">
+                <a:solidFill>
+                  <a:srgbClr val="556575"/>
+                </a:solidFill>
+                <a:latin typeface="Arial"/>
+              </a:rPr>
+              <a:t>M09 · 5.2 Meilensteine und Deliverables</a:t>
+            </a:r>
+          </a:p>
+        </p:txBody>
+      </p:sp>
+      <p:sp>
+        <p:nvSpPr>
+          <p:cNvPr id="4" name="TextBox 3"/>
+          <p:cNvSpPr txBox="1"/>
+          <p:nvPr/>
+        </p:nvSpPr>
+        <p:spPr>
+          <a:xfrm>
+            <a:off x="365760" y="274320"/>
+            <a:ext cx="11430000" cy="777240"/>
+          </a:xfrm>
+          <a:prstGeom prst="rect">
+            <a:avLst/>
+          </a:prstGeom>
+          <a:noFill/>
+        </p:spPr>
+        <p:txBody>
+          <a:bodyPr wrap="square">
+            <a:spAutoFit/>
+          </a:bodyPr>
+          <a:lstStyle/>
+          <a:p>
+            <a:pPr algn="l"/>
+            <a:r>
+              <a:rPr sz="2200" b="1" i="0">
+                <a:solidFill>
+                  <a:srgbClr val="003DA5"/>
+                </a:solidFill>
+                <a:latin typeface="Arial"/>
+              </a:rPr>
+              <a:t>Branchenportfolio – Mindestanforderungen</a:t>
+            </a:r>
+          </a:p>
+        </p:txBody>
+      </p:sp>
+      <p:sp>
+        <p:nvSpPr>
+          <p:cNvPr id="5" name="Rectangle 4"/>
+          <p:cNvSpPr/>
+          <p:nvPr/>
+        </p:nvSpPr>
+        <p:spPr>
+          <a:xfrm>
+            <a:off x="365760" y="1005840"/>
+            <a:ext cx="11430000" cy="27432"/>
+          </a:xfrm>
+          <a:prstGeom prst="rect">
+            <a:avLst/>
+          </a:prstGeom>
+          <a:solidFill>
+            <a:srgbClr val="D1D5DB"/>
+          </a:solidFill>
+          <a:ln>
+            <a:noFill/>
+          </a:ln>
+        </p:spPr>
+        <p:style>
+          <a:lnRef idx="1">
+            <a:schemeClr val="accent1"/>
+          </a:lnRef>
+          <a:fillRef idx="3">
+            <a:schemeClr val="accent1"/>
+          </a:fillRef>
+          <a:effectRef idx="2">
+            <a:schemeClr val="accent1"/>
+          </a:effectRef>
+          <a:fontRef idx="minor">
+            <a:schemeClr val="lt1"/>
+          </a:fontRef>
+        </p:style>
+        <p:txBody>
+          <a:bodyPr rtlCol="0" anchor="ctr"/>
+          <a:lstStyle/>
+          <a:p>
+            <a:pPr algn="ctr"/>
+          </a:p>
+        </p:txBody>
+      </p:sp>
+      <p:sp>
+        <p:nvSpPr>
+          <p:cNvPr id="6" name="TextBox 5"/>
+          <p:cNvSpPr txBox="1"/>
+          <p:nvPr/>
+        </p:nvSpPr>
+        <p:spPr>
+          <a:xfrm>
+            <a:off x="365760" y="1143000"/>
+            <a:ext cx="11430000" cy="5212080"/>
+          </a:xfrm>
+          <a:prstGeom prst="rect">
+            <a:avLst/>
+          </a:prstGeom>
+          <a:noFill/>
+        </p:spPr>
+        <p:txBody>
+          <a:bodyPr wrap="square">
+            <a:spAutoFit/>
+          </a:bodyPr>
+          <a:lstStyle/>
+          <a:p>
+            <a:pPr>
+              <a:spcBef>
+                <a:spcPts val="500"/>
+              </a:spcBef>
+            </a:pPr>
+            <a:r>
+              <a:rPr sz="1500">
+                <a:solidFill>
+                  <a:srgbClr val="003DA5"/>
+                </a:solidFill>
+                <a:latin typeface="Arial"/>
+              </a:rPr>
+              <a:t>▪  </a:t>
+            </a:r>
+            <a:r>
+              <a:rPr sz="1700" b="1">
+                <a:solidFill>
+                  <a:srgbClr val="003DA5"/>
+                </a:solidFill>
+                <a:latin typeface="Arial"/>
+              </a:rPr>
+              <a:t>Branchensteckbrief: </a:t>
+            </a:r>
+            <a:r>
+              <a:rPr sz="1700">
+                <a:solidFill>
+                  <a:srgbClr val="1A1A1A"/>
+                </a:solidFill>
+                <a:latin typeface="Arial"/>
+              </a:rPr>
+              <a:t>(1 Seite): Struktur, Größe, Top-Unternehmen, relevante Verbände 2.</a:t>
+            </a:r>
+          </a:p>
+          <a:p>
+            <a:pPr>
+              <a:spcBef>
+                <a:spcPts val="500"/>
+              </a:spcBef>
+            </a:pPr>
+            <a:r>
+              <a:rPr sz="1500">
+                <a:solidFill>
+                  <a:srgbClr val="003DA5"/>
+                </a:solidFill>
+                <a:latin typeface="Arial"/>
+              </a:rPr>
+              <a:t>▪  </a:t>
+            </a:r>
+            <a:r>
+              <a:rPr sz="1700" b="1">
+                <a:solidFill>
+                  <a:srgbClr val="003DA5"/>
+                </a:solidFill>
+                <a:latin typeface="Arial"/>
+              </a:rPr>
+              <a:t>Five-Forces-Analyse: </a:t>
+            </a:r>
+            <a:r>
+              <a:rPr sz="1700">
+                <a:solidFill>
+                  <a:srgbClr val="1A1A1A"/>
+                </a:solidFill>
+                <a:latin typeface="Arial"/>
+              </a:rPr>
+              <a:t>(1 Seite): Bewertung und Implikationen für Kreditrisiko und Beratungsansatz 3.</a:t>
+            </a:r>
+          </a:p>
+          <a:p>
+            <a:pPr>
+              <a:spcBef>
+                <a:spcPts val="500"/>
+              </a:spcBef>
+            </a:pPr>
+            <a:r>
+              <a:rPr sz="1500">
+                <a:solidFill>
+                  <a:srgbClr val="003DA5"/>
+                </a:solidFill>
+                <a:latin typeface="Arial"/>
+              </a:rPr>
+              <a:t>▪  </a:t>
+            </a:r>
+            <a:r>
+              <a:rPr sz="1700" b="1">
+                <a:solidFill>
+                  <a:srgbClr val="003DA5"/>
+                </a:solidFill>
+                <a:latin typeface="Arial"/>
+              </a:rPr>
+              <a:t>PESTEL-Kurzcheck: </a:t>
+            </a:r>
+            <a:r>
+              <a:rPr sz="1700">
+                <a:solidFill>
+                  <a:srgbClr val="1A1A1A"/>
+                </a:solidFill>
+                <a:latin typeface="Arial"/>
+              </a:rPr>
+              <a:t>(½ Seite): 2–3 relevante Trends je Dimension 4.</a:t>
+            </a:r>
+          </a:p>
+          <a:p>
+            <a:pPr>
+              <a:spcBef>
+                <a:spcPts val="500"/>
+              </a:spcBef>
+            </a:pPr>
+            <a:r>
+              <a:rPr sz="1500">
+                <a:solidFill>
+                  <a:srgbClr val="003DA5"/>
+                </a:solidFill>
+                <a:latin typeface="Arial"/>
+              </a:rPr>
+              <a:t>▪  </a:t>
+            </a:r>
+            <a:r>
+              <a:rPr sz="1700" b="1">
+                <a:solidFill>
+                  <a:srgbClr val="003DA5"/>
+                </a:solidFill>
+                <a:latin typeface="Arial"/>
+              </a:rPr>
+              <a:t>Informationsquellen: </a:t>
+            </a:r>
+            <a:r>
+              <a:rPr sz="1700">
+                <a:solidFill>
+                  <a:srgbClr val="1A1A1A"/>
+                </a:solidFill>
+                <a:latin typeface="Arial"/>
+              </a:rPr>
+              <a:t>(½ Seite): Persönliche Top-5-Quellen mit Bewertung 5.</a:t>
+            </a:r>
+          </a:p>
+          <a:p>
+            <a:pPr>
+              <a:spcBef>
+                <a:spcPts val="500"/>
+              </a:spcBef>
+            </a:pPr>
+            <a:r>
+              <a:rPr sz="1500">
+                <a:solidFill>
+                  <a:srgbClr val="003DA5"/>
+                </a:solidFill>
+                <a:latin typeface="Arial"/>
+              </a:rPr>
+              <a:t>▪  </a:t>
+            </a:r>
+            <a:r>
+              <a:rPr sz="1700" b="1">
+                <a:solidFill>
+                  <a:srgbClr val="003DA5"/>
+                </a:solidFill>
+                <a:latin typeface="Arial"/>
+              </a:rPr>
+              <a:t>Netzwerkkarte: </a:t>
+            </a:r>
+            <a:r>
+              <a:rPr sz="1700">
+                <a:solidFill>
+                  <a:srgbClr val="1A1A1A"/>
+                </a:solidFill>
+                <a:latin typeface="Arial"/>
+              </a:rPr>
+              <a:t>(½ Seite): Interne + externe Experten und Multiplikatoren 6.</a:t>
+            </a:r>
+          </a:p>
+          <a:p>
+            <a:pPr>
+              <a:spcBef>
+                <a:spcPts val="500"/>
+              </a:spcBef>
+            </a:pPr>
+            <a:r>
+              <a:rPr sz="1500">
+                <a:solidFill>
+                  <a:srgbClr val="003DA5"/>
+                </a:solidFill>
+                <a:latin typeface="Arial"/>
+              </a:rPr>
+              <a:t>▪  </a:t>
+            </a:r>
+            <a:r>
+              <a:rPr sz="1700" b="1">
+                <a:solidFill>
+                  <a:srgbClr val="003DA5"/>
+                </a:solidFill>
+                <a:latin typeface="Arial"/>
+              </a:rPr>
+              <a:t>Kundenlernpunkte: </a:t>
+            </a:r>
+            <a:r>
+              <a:rPr sz="1700">
+                <a:solidFill>
+                  <a:srgbClr val="1A1A1A"/>
+                </a:solidFill>
+                <a:latin typeface="Arial"/>
+              </a:rPr>
+              <a:t>(½ Seite): 3 konkrete Erkenntnisse aus Kundengesprächen in diesem Quartal</a:t>
+            </a:r>
+          </a:p>
+        </p:txBody>
+      </p:sp>
+    </p:spTree>
+  </p:cSld>
+  <p:clrMapOvr>
+    <a:masterClrMapping/>
+  </p:clrMapOvr>
+</p:sld>
+</file>
+
+<file path=ppt/slides/slide23.xml><?xml version="1.0" encoding="utf-8"?>
 <p:sld xmlns:a="http://schemas.openxmlformats.org/drawingml/2006/main" xmlns:p="http://schemas.openxmlformats.org/presentationml/2006/main" xmlns:r="http://schemas.openxmlformats.org/officeDocument/2006/relationships">
   <p:cSld>
     <p:bg>
@@ -4813,8 +7993,8 @@
         </p:nvSpPr>
         <p:spPr>
           <a:xfrm>
-            <a:off x="365760" y="365760"/>
-            <a:ext cx="5486400" cy="365760"/>
+            <a:off x="365760" y="347472"/>
+            <a:ext cx="7315200" cy="384048"/>
           </a:xfrm>
           <a:prstGeom prst="rect">
             <a:avLst/>
@@ -4829,62 +8009,27 @@
           <a:p>
             <a:pPr algn="l"/>
             <a:r>
-              <a:rPr sz="1000" b="1">
+              <a:rPr sz="900" b="1" i="0">
                 <a:solidFill>
                   <a:srgbClr val="CCD6F0"/>
                 </a:solidFill>
                 <a:latin typeface="Arial"/>
               </a:rPr>
-              <a:t>PRAXISTRANSFER</a:t>
-            </a:r>
-          </a:p>
-        </p:txBody>
-      </p:sp>
-      <p:sp>
-        <p:nvSpPr>
-          <p:cNvPr id="4" name="TextBox 3"/>
-          <p:cNvSpPr txBox="1"/>
+              <a:t>PRAXISTRANSFER &amp; NÄCHSTE SCHRITTE</a:t>
+            </a:r>
+          </a:p>
+        </p:txBody>
+      </p:sp>
+      <p:sp>
+        <p:nvSpPr>
+          <p:cNvPr id="4" name="Rectangle 3"/>
+          <p:cNvSpPr/>
           <p:nvPr/>
         </p:nvSpPr>
         <p:spPr>
           <a:xfrm>
-            <a:off x="365760" y="640080"/>
-            <a:ext cx="9144000" cy="914400"/>
-          </a:xfrm>
-          <a:prstGeom prst="rect">
-            <a:avLst/>
-          </a:prstGeom>
-          <a:noFill/>
-        </p:spPr>
-        <p:txBody>
-          <a:bodyPr wrap="square">
-            <a:spAutoFit/>
-          </a:bodyPr>
-          <a:lstStyle/>
-          <a:p>
-            <a:pPr algn="l"/>
-            <a:r>
-              <a:rPr sz="2800" b="1">
-                <a:solidFill>
-                  <a:srgbClr val="FFFFFF"/>
-                </a:solidFill>
-                <a:latin typeface="Arial"/>
-              </a:rPr>
-              <a:t>Was nehmen Sie mit?</a:t>
-            </a:r>
-          </a:p>
-        </p:txBody>
-      </p:sp>
-      <p:sp>
-        <p:nvSpPr>
-          <p:cNvPr id="5" name="Rectangle 4"/>
-          <p:cNvSpPr/>
-          <p:nvPr/>
-        </p:nvSpPr>
-        <p:spPr>
-          <a:xfrm>
-            <a:off x="365760" y="1463040"/>
-            <a:ext cx="7315200" cy="27432"/>
+            <a:off x="365760" y="804672"/>
+            <a:ext cx="8229600" cy="22860"/>
           </a:xfrm>
           <a:prstGeom prst="rect">
             <a:avLst/>
@@ -4920,13 +8065,48 @@
       </p:sp>
       <p:sp>
         <p:nvSpPr>
+          <p:cNvPr id="5" name="TextBox 4"/>
+          <p:cNvSpPr txBox="1"/>
+          <p:nvPr/>
+        </p:nvSpPr>
+        <p:spPr>
+          <a:xfrm>
+            <a:off x="365760" y="960120"/>
+            <a:ext cx="9144000" cy="914400"/>
+          </a:xfrm>
+          <a:prstGeom prst="rect">
+            <a:avLst/>
+          </a:prstGeom>
+          <a:noFill/>
+        </p:spPr>
+        <p:txBody>
+          <a:bodyPr wrap="square">
+            <a:spAutoFit/>
+          </a:bodyPr>
+          <a:lstStyle/>
+          <a:p>
+            <a:pPr algn="l"/>
+            <a:r>
+              <a:rPr sz="3000" b="1" i="0">
+                <a:solidFill>
+                  <a:srgbClr val="FFFFFF"/>
+                </a:solidFill>
+                <a:latin typeface="Arial"/>
+              </a:rPr>
+              <a:t>Was nehmen Sie mit?</a:t>
+            </a:r>
+          </a:p>
+        </p:txBody>
+      </p:sp>
+      <p:sp>
+        <p:nvSpPr>
           <p:cNvPr id="6" name="TextBox 5"/>
           <p:cNvSpPr txBox="1"/>
           <p:nvPr/>
         </p:nvSpPr>
         <p:spPr>
           <a:xfrm>
-            <a:off x="365760" y="1645920"/>
+            <a:off x="365760" y="2103120"/>
             <a:ext cx="11430000" cy="4114800"/>
           </a:xfrm>
           <a:prstGeom prst="rect">
@@ -4942,7 +8122,7 @@
           <a:p>
             <a:pPr>
               <a:spcBef>
-                <a:spcPts val="400"/>
+                <a:spcPts val="500"/>
               </a:spcBef>
             </a:pPr>
             <a:r>
@@ -4967,7 +8147,7 @@
           <a:p>
             <a:pPr>
               <a:spcBef>
-                <a:spcPts val="400"/>
+                <a:spcPts val="500"/>
               </a:spcBef>
             </a:pPr>
             <a:r>
@@ -4986,7 +8166,32 @@
                 </a:solidFill>
                 <a:latin typeface="Arial"/>
               </a:rPr>
-              <a:t>Selbstcheck nach 4 Wochen: Was hat sich verändert?</a:t>
+              <a:t>Selbstcheck nach 4 Wochen: Bewerten Sie Ihre Fortschritte ehrlich.</a:t>
+            </a:r>
+          </a:p>
+          <a:p>
+            <a:pPr>
+              <a:spcBef>
+                <a:spcPts val="500"/>
+              </a:spcBef>
+            </a:pPr>
+            <a:r>
+              <a:rPr sz="1600">
+                <a:solidFill>
+                  <a:srgbClr val="E05B00"/>
+                </a:solidFill>
+                <a:latin typeface="Arial"/>
+              </a:rPr>
+              <a:t>▪  </a:t>
+            </a:r>
+            <a:r>
+              <a:rPr sz="1800">
+                <a:solidFill>
+                  <a:srgbClr val="FFFFFF"/>
+                </a:solidFill>
+                <a:latin typeface="Arial"/>
+              </a:rPr>
+              <a:t>Nächste Module: M07, M08</a:t>
             </a:r>
           </a:p>
         </p:txBody>
@@ -5015,9 +8220,9 @@
           <a:p>
             <a:pPr algn="l"/>
             <a:r>
-              <a:rPr sz="900" b="0">
-                <a:solidFill>
-                  <a:srgbClr val="99AACC"/>
+              <a:rPr sz="900" b="0" i="0">
+                <a:solidFill>
+                  <a:srgbClr val="889ACC"/>
                 </a:solidFill>
                 <a:latin typeface="Arial"/>
               </a:rPr>
@@ -5103,8 +8308,8 @@
         </p:nvSpPr>
         <p:spPr>
           <a:xfrm>
-            <a:off x="365760" y="2286000"/>
-            <a:ext cx="11430000" cy="1828800"/>
+            <a:off x="365760" y="2011680"/>
+            <a:ext cx="11430000" cy="2011680"/>
           </a:xfrm>
           <a:prstGeom prst="rect">
             <a:avLst/>
@@ -5119,7 +8324,7 @@
           <a:p>
             <a:pPr algn="l"/>
             <a:r>
-              <a:rPr sz="3600" b="1">
+              <a:rPr sz="3600" b="1" i="0">
                 <a:solidFill>
                   <a:srgbClr val="FFFFFF"/>
                 </a:solidFill>
@@ -5144,7 +8349,7 @@
     <p:bg>
       <p:bgPr>
         <a:solidFill>
-          <a:srgbClr val="1A1A1A"/>
+          <a:srgbClr val="FFFFFF"/>
         </a:solidFill>
         <a:effectLst/>
       </p:bgPr>
@@ -5171,7 +8376,7 @@
             <a:avLst/>
           </a:prstGeom>
           <a:solidFill>
-            <a:srgbClr val="E05B00"/>
+            <a:srgbClr val="003DA5"/>
           </a:solidFill>
           <a:ln>
             <a:noFill/>
@@ -5207,8 +8412,8 @@
         </p:nvSpPr>
         <p:spPr>
           <a:xfrm>
-            <a:off x="365760" y="2286000"/>
-            <a:ext cx="11430000" cy="1828800"/>
+            <a:off x="228600" y="182880"/>
+            <a:ext cx="11430000" cy="320040"/>
           </a:xfrm>
           <a:prstGeom prst="rect">
             <a:avLst/>
@@ -5223,13 +8428,250 @@
           <a:p>
             <a:pPr algn="l"/>
             <a:r>
-              <a:rPr sz="3600" b="1">
-                <a:solidFill>
-                  <a:srgbClr val="FFFFFF"/>
+              <a:rPr sz="900" b="0" i="0">
+                <a:solidFill>
+                  <a:srgbClr val="556575"/>
                 </a:solidFill>
                 <a:latin typeface="Arial"/>
               </a:rPr>
-              <a:t>Porter's Five Forces</a:t>
+              <a:t>M09 · Modulinhalte</a:t>
+            </a:r>
+          </a:p>
+        </p:txBody>
+      </p:sp>
+      <p:sp>
+        <p:nvSpPr>
+          <p:cNvPr id="4" name="TextBox 3"/>
+          <p:cNvSpPr txBox="1"/>
+          <p:nvPr/>
+        </p:nvSpPr>
+        <p:spPr>
+          <a:xfrm>
+            <a:off x="365760" y="274320"/>
+            <a:ext cx="11430000" cy="777240"/>
+          </a:xfrm>
+          <a:prstGeom prst="rect">
+            <a:avLst/>
+          </a:prstGeom>
+          <a:noFill/>
+        </p:spPr>
+        <p:txBody>
+          <a:bodyPr wrap="square">
+            <a:spAutoFit/>
+          </a:bodyPr>
+          <a:lstStyle/>
+          <a:p>
+            <a:pPr algn="l"/>
+            <a:r>
+              <a:rPr sz="2200" b="1" i="0">
+                <a:solidFill>
+                  <a:srgbClr val="003DA5"/>
+                </a:solidFill>
+                <a:latin typeface="Arial"/>
+              </a:rPr>
+              <a:t>Was unterscheidet den Branchenexperten?</a:t>
+            </a:r>
+          </a:p>
+        </p:txBody>
+      </p:sp>
+      <p:sp>
+        <p:nvSpPr>
+          <p:cNvPr id="5" name="Rectangle 4"/>
+          <p:cNvSpPr/>
+          <p:nvPr/>
+        </p:nvSpPr>
+        <p:spPr>
+          <a:xfrm>
+            <a:off x="365760" y="1005840"/>
+            <a:ext cx="11430000" cy="27432"/>
+          </a:xfrm>
+          <a:prstGeom prst="rect">
+            <a:avLst/>
+          </a:prstGeom>
+          <a:solidFill>
+            <a:srgbClr val="D1D5DB"/>
+          </a:solidFill>
+          <a:ln>
+            <a:noFill/>
+          </a:ln>
+        </p:spPr>
+        <p:style>
+          <a:lnRef idx="1">
+            <a:schemeClr val="accent1"/>
+          </a:lnRef>
+          <a:fillRef idx="3">
+            <a:schemeClr val="accent1"/>
+          </a:fillRef>
+          <a:effectRef idx="2">
+            <a:schemeClr val="accent1"/>
+          </a:effectRef>
+          <a:fontRef idx="minor">
+            <a:schemeClr val="lt1"/>
+          </a:fontRef>
+        </p:style>
+        <p:txBody>
+          <a:bodyPr rtlCol="0" anchor="ctr"/>
+          <a:lstStyle/>
+          <a:p>
+            <a:pPr algn="ctr"/>
+          </a:p>
+        </p:txBody>
+      </p:sp>
+      <p:sp>
+        <p:nvSpPr>
+          <p:cNvPr id="6" name="TextBox 5"/>
+          <p:cNvSpPr txBox="1"/>
+          <p:nvPr/>
+        </p:nvSpPr>
+        <p:spPr>
+          <a:xfrm>
+            <a:off x="365760" y="1143000"/>
+            <a:ext cx="11430000" cy="5212080"/>
+          </a:xfrm>
+          <a:prstGeom prst="rect">
+            <a:avLst/>
+          </a:prstGeom>
+          <a:noFill/>
+        </p:spPr>
+        <p:txBody>
+          <a:bodyPr wrap="square">
+            <a:spAutoFit/>
+          </a:bodyPr>
+          <a:lstStyle/>
+          <a:p>
+            <a:pPr>
+              <a:spcBef>
+                <a:spcPts val="500"/>
+              </a:spcBef>
+            </a:pPr>
+            <a:r>
+              <a:rPr sz="1500">
+                <a:solidFill>
+                  <a:srgbClr val="003DA5"/>
+                </a:solidFill>
+                <a:latin typeface="Arial"/>
+              </a:rPr>
+              <a:t>▪  </a:t>
+            </a:r>
+            <a:r>
+              <a:rPr sz="1700" b="1">
+                <a:solidFill>
+                  <a:srgbClr val="003DA5"/>
+                </a:solidFill>
+                <a:latin typeface="Arial"/>
+              </a:rPr>
+              <a:t>Strukturwissen: </a:t>
+            </a:r>
+            <a:r>
+              <a:rPr sz="1700">
+                <a:solidFill>
+                  <a:srgbClr val="1A1A1A"/>
+                </a:solidFill>
+                <a:latin typeface="Arial"/>
+              </a:rPr>
+              <a:t>Wie ist die Branche aufgebaut? Welche Wertschöpfungsstufen gibt es? -</a:t>
+            </a:r>
+          </a:p>
+          <a:p>
+            <a:pPr>
+              <a:spcBef>
+                <a:spcPts val="500"/>
+              </a:spcBef>
+            </a:pPr>
+            <a:r>
+              <a:rPr sz="1500">
+                <a:solidFill>
+                  <a:srgbClr val="003DA5"/>
+                </a:solidFill>
+                <a:latin typeface="Arial"/>
+              </a:rPr>
+              <a:t>▪  </a:t>
+            </a:r>
+            <a:r>
+              <a:rPr sz="1700" b="1">
+                <a:solidFill>
+                  <a:srgbClr val="003DA5"/>
+                </a:solidFill>
+                <a:latin typeface="Arial"/>
+              </a:rPr>
+              <a:t>Dynamikwissen: </a:t>
+            </a:r>
+            <a:r>
+              <a:rPr sz="1700">
+                <a:solidFill>
+                  <a:srgbClr val="1A1A1A"/>
+                </a:solidFill>
+                <a:latin typeface="Arial"/>
+              </a:rPr>
+              <a:t>Welche Veränderungskräfte treiben die Branche? -</a:t>
+            </a:r>
+          </a:p>
+          <a:p>
+            <a:pPr>
+              <a:spcBef>
+                <a:spcPts val="500"/>
+              </a:spcBef>
+            </a:pPr>
+            <a:r>
+              <a:rPr sz="1500">
+                <a:solidFill>
+                  <a:srgbClr val="003DA5"/>
+                </a:solidFill>
+                <a:latin typeface="Arial"/>
+              </a:rPr>
+              <a:t>▪  </a:t>
+            </a:r>
+            <a:r>
+              <a:rPr sz="1700" b="1">
+                <a:solidFill>
+                  <a:srgbClr val="003DA5"/>
+                </a:solidFill>
+                <a:latin typeface="Arial"/>
+              </a:rPr>
+              <a:t>Netzwerkwissen: </a:t>
+            </a:r>
+            <a:r>
+              <a:rPr sz="1700">
+                <a:solidFill>
+                  <a:srgbClr val="1A1A1A"/>
+                </a:solidFill>
+                <a:latin typeface="Arial"/>
+              </a:rPr>
+              <a:t>Wer sind die relevanten Verbände, Meinungsführer, Schlüsselkunden? -</a:t>
+            </a:r>
+          </a:p>
+          <a:p>
+            <a:pPr>
+              <a:spcBef>
+                <a:spcPts val="500"/>
+              </a:spcBef>
+            </a:pPr>
+            <a:r>
+              <a:rPr sz="1500">
+                <a:solidFill>
+                  <a:srgbClr val="003DA5"/>
+                </a:solidFill>
+                <a:latin typeface="Arial"/>
+              </a:rPr>
+              <a:t>▪  </a:t>
+            </a:r>
+            <a:r>
+              <a:rPr sz="1700" b="1">
+                <a:solidFill>
+                  <a:srgbClr val="003DA5"/>
+                </a:solidFill>
+                <a:latin typeface="Arial"/>
+              </a:rPr>
+              <a:t>Erfahrungswissen: </a:t>
+            </a:r>
+            <a:r>
+              <a:rPr sz="1700">
+                <a:solidFill>
+                  <a:srgbClr val="1A1A1A"/>
+                </a:solidFill>
+                <a:latin typeface="Arial"/>
+              </a:rPr>
+              <a:t>Welche typischen Herausforderungen begegnen Unternehmern dieser Branche?</a:t>
             </a:r>
           </a:p>
         </p:txBody>
@@ -5311,8 +8753,8 @@
         </p:nvSpPr>
         <p:spPr>
           <a:xfrm>
-            <a:off x="365760" y="2286000"/>
-            <a:ext cx="11430000" cy="1828800"/>
+            <a:off x="365760" y="2011680"/>
+            <a:ext cx="11430000" cy="2011680"/>
           </a:xfrm>
           <a:prstGeom prst="rect">
             <a:avLst/>
@@ -5327,13 +8769,13 @@
           <a:p>
             <a:pPr algn="l"/>
             <a:r>
-              <a:rPr sz="3600" b="1">
+              <a:rPr sz="3600" b="1" i="0">
                 <a:solidFill>
                   <a:srgbClr val="FFFFFF"/>
                 </a:solidFill>
                 <a:latin typeface="Arial"/>
               </a:rPr>
-              <a:t>PESTEL-Analyse</a:t>
+              <a:t>Porter's Five Forces</a:t>
             </a:r>
           </a:p>
         </p:txBody>
@@ -5352,7 +8794,7 @@
     <p:bg>
       <p:bgPr>
         <a:solidFill>
-          <a:srgbClr val="1A1A1A"/>
+          <a:srgbClr val="FFFFFF"/>
         </a:solidFill>
         <a:effectLst/>
       </p:bgPr>
@@ -5379,7 +8821,7 @@
             <a:avLst/>
           </a:prstGeom>
           <a:solidFill>
-            <a:srgbClr val="E05B00"/>
+            <a:srgbClr val="003DA5"/>
           </a:solidFill>
           <a:ln>
             <a:noFill/>
@@ -5415,8 +8857,8 @@
         </p:nvSpPr>
         <p:spPr>
           <a:xfrm>
-            <a:off x="365760" y="2286000"/>
-            <a:ext cx="11430000" cy="1828800"/>
+            <a:off x="228600" y="182880"/>
+            <a:ext cx="11430000" cy="320040"/>
           </a:xfrm>
           <a:prstGeom prst="rect">
             <a:avLst/>
@@ -5431,17 +8873,397 @@
           <a:p>
             <a:pPr algn="l"/>
             <a:r>
-              <a:rPr sz="3600" b="1">
-                <a:solidFill>
-                  <a:srgbClr val="FFFFFF"/>
+              <a:rPr sz="900" b="0" i="0">
+                <a:solidFill>
+                  <a:srgbClr val="556575"/>
                 </a:solidFill>
                 <a:latin typeface="Arial"/>
               </a:rPr>
-              <a:t>Kombination im Kundengespräch</a:t>
-            </a:r>
-          </a:p>
-        </p:txBody>
-      </p:sp>
+              <a:t>M09 · 4.2 Branchenanalyse: Porter's Five Forces und PESTEL</a:t>
+            </a:r>
+          </a:p>
+        </p:txBody>
+      </p:sp>
+      <p:sp>
+        <p:nvSpPr>
+          <p:cNvPr id="4" name="TextBox 3"/>
+          <p:cNvSpPr txBox="1"/>
+          <p:nvPr/>
+        </p:nvSpPr>
+        <p:spPr>
+          <a:xfrm>
+            <a:off x="365760" y="274320"/>
+            <a:ext cx="11430000" cy="777240"/>
+          </a:xfrm>
+          <a:prstGeom prst="rect">
+            <a:avLst/>
+          </a:prstGeom>
+          <a:noFill/>
+        </p:spPr>
+        <p:txBody>
+          <a:bodyPr wrap="square">
+            <a:spAutoFit/>
+          </a:bodyPr>
+          <a:lstStyle/>
+          <a:p>
+            <a:pPr algn="l"/>
+            <a:r>
+              <a:rPr sz="2200" b="1" i="0">
+                <a:solidFill>
+                  <a:srgbClr val="003DA5"/>
+                </a:solidFill>
+                <a:latin typeface="Arial"/>
+              </a:rPr>
+              <a:t>Porter's Five Forces</a:t>
+            </a:r>
+          </a:p>
+        </p:txBody>
+      </p:sp>
+      <p:sp>
+        <p:nvSpPr>
+          <p:cNvPr id="5" name="Rectangle 4"/>
+          <p:cNvSpPr/>
+          <p:nvPr/>
+        </p:nvSpPr>
+        <p:spPr>
+          <a:xfrm>
+            <a:off x="365760" y="1005840"/>
+            <a:ext cx="11430000" cy="27432"/>
+          </a:xfrm>
+          <a:prstGeom prst="rect">
+            <a:avLst/>
+          </a:prstGeom>
+          <a:solidFill>
+            <a:srgbClr val="D1D5DB"/>
+          </a:solidFill>
+          <a:ln>
+            <a:noFill/>
+          </a:ln>
+        </p:spPr>
+        <p:style>
+          <a:lnRef idx="1">
+            <a:schemeClr val="accent1"/>
+          </a:lnRef>
+          <a:fillRef idx="3">
+            <a:schemeClr val="accent1"/>
+          </a:fillRef>
+          <a:effectRef idx="2">
+            <a:schemeClr val="accent1"/>
+          </a:effectRef>
+          <a:fontRef idx="minor">
+            <a:schemeClr val="lt1"/>
+          </a:fontRef>
+        </p:style>
+        <p:txBody>
+          <a:bodyPr rtlCol="0" anchor="ctr"/>
+          <a:lstStyle/>
+          <a:p>
+            <a:pPr algn="ctr"/>
+          </a:p>
+        </p:txBody>
+      </p:sp>
+      <p:graphicFrame>
+        <p:nvGraphicFramePr>
+          <p:cNvPr id="6" name="Table 5"/>
+          <p:cNvGraphicFramePr>
+            <a:graphicFrameLocks noGrp="1"/>
+          </p:cNvGraphicFramePr>
+          <p:nvPr/>
+        </p:nvGraphicFramePr>
+        <p:xfrm>
+          <a:off x="365760" y="1143000"/>
+          <a:ext cx="11430000" cy="2852928"/>
+        </p:xfrm>
+        <a:graphic>
+          <a:graphicData uri="http://schemas.openxmlformats.org/drawingml/2006/table">
+            <a:tbl>
+              <a:tblPr firstRow="1" bandRow="1">
+                <a:tableStyleId>{5C22544A-7EE6-4342-B048-85BDC9FD1C3A}</a:tableStyleId>
+              </a:tblPr>
+              <a:tblGrid>
+                <a:gridCol w="5715000"/>
+                <a:gridCol w="5715000"/>
+              </a:tblGrid>
+              <a:tr h="475488">
+                <a:tc>
+                  <a:txBody>
+                    <a:bodyPr wrap="square"/>
+                    <a:lstStyle/>
+                    <a:p>
+                      <a:r>
+                        <a:rPr sz="1100" b="1">
+                          <a:solidFill>
+                            <a:srgbClr val="FFFFFF"/>
+                          </a:solidFill>
+                          <a:latin typeface="Arial"/>
+                        </a:rPr>
+                        <a:t>Kraft</a:t>
+                      </a:r>
+                    </a:p>
+                  </a:txBody>
+                  <a:tcPr>
+                    <a:solidFill>
+                      <a:srgbClr val="003DA5"/>
+                    </a:solidFill>
+                  </a:tcPr>
+                </a:tc>
+                <a:tc>
+                  <a:txBody>
+                    <a:bodyPr wrap="square"/>
+                    <a:lstStyle/>
+                    <a:p>
+                      <a:r>
+                        <a:rPr sz="1100" b="1">
+                          <a:solidFill>
+                            <a:srgbClr val="FFFFFF"/>
+                          </a:solidFill>
+                          <a:latin typeface="Arial"/>
+                        </a:rPr>
+                        <a:t>Bankpraktische Relevanz</a:t>
+                      </a:r>
+                    </a:p>
+                  </a:txBody>
+                  <a:tcPr>
+                    <a:solidFill>
+                      <a:srgbClr val="003DA5"/>
+                    </a:solidFill>
+                  </a:tcPr>
+                </a:tc>
+              </a:tr>
+              <a:tr h="475488">
+                <a:tc>
+                  <a:txBody>
+                    <a:bodyPr wrap="square"/>
+                    <a:lstStyle/>
+                    <a:p>
+                      <a:r>
+                        <a:rPr sz="1100" b="0">
+                          <a:solidFill>
+                            <a:srgbClr val="1A1A1A"/>
+                          </a:solidFill>
+                          <a:latin typeface="Arial"/>
+                        </a:rPr>
+                        <a:t>Bedrohung durch neue Wettbewerber</a:t>
+                      </a:r>
+                    </a:p>
+                  </a:txBody>
+                  <a:tcPr>
+                    <a:solidFill>
+                      <a:srgbClr val="FFFFFF"/>
+                    </a:solidFill>
+                  </a:tcPr>
+                </a:tc>
+                <a:tc>
+                  <a:txBody>
+                    <a:bodyPr wrap="square"/>
+                    <a:lstStyle/>
+                    <a:p>
+                      <a:r>
+                        <a:rPr sz="1100" b="0">
+                          <a:solidFill>
+                            <a:srgbClr val="1A1A1A"/>
+                          </a:solidFill>
+                          <a:latin typeface="Arial"/>
+                        </a:rPr>
+                        <a:t>Wie hoch sind Markteintrittsbarrieren? Kapitalintensität? Regulierung? Skaleneffekte? → beeinflusst langfristige Ertragslage</a:t>
+                      </a:r>
+                    </a:p>
+                  </a:txBody>
+                  <a:tcPr>
+                    <a:solidFill>
+                      <a:srgbClr val="FFFFFF"/>
+                    </a:solidFill>
+                  </a:tcPr>
+                </a:tc>
+              </a:tr>
+              <a:tr h="475488">
+                <a:tc>
+                  <a:txBody>
+                    <a:bodyPr wrap="square"/>
+                    <a:lstStyle/>
+                    <a:p>
+                      <a:r>
+                        <a:rPr sz="1100" b="0">
+                          <a:solidFill>
+                            <a:srgbClr val="1A1A1A"/>
+                          </a:solidFill>
+                          <a:latin typeface="Arial"/>
+                        </a:rPr>
+                        <a:t>Verhandlungsmacht der Lieferanten</a:t>
+                      </a:r>
+                    </a:p>
+                  </a:txBody>
+                  <a:tcPr>
+                    <a:solidFill>
+                      <a:srgbClr val="F4F6FA"/>
+                    </a:solidFill>
+                  </a:tcPr>
+                </a:tc>
+                <a:tc>
+                  <a:txBody>
+                    <a:bodyPr wrap="square"/>
+                    <a:lstStyle/>
+                    <a:p>
+                      <a:r>
+                        <a:rPr sz="1100" b="0">
+                          <a:solidFill>
+                            <a:srgbClr val="1A1A1A"/>
+                          </a:solidFill>
+                          <a:latin typeface="Arial"/>
+                        </a:rPr>
+                        <a:t>Wie abhängig ist das Unternehmen von wenigen Lieferanten? → Konzentrationsrisiko in der Lieferkette</a:t>
+                      </a:r>
+                    </a:p>
+                  </a:txBody>
+                  <a:tcPr>
+                    <a:solidFill>
+                      <a:srgbClr val="F4F6FA"/>
+                    </a:solidFill>
+                  </a:tcPr>
+                </a:tc>
+              </a:tr>
+              <a:tr h="475488">
+                <a:tc>
+                  <a:txBody>
+                    <a:bodyPr wrap="square"/>
+                    <a:lstStyle/>
+                    <a:p>
+                      <a:r>
+                        <a:rPr sz="1100" b="0">
+                          <a:solidFill>
+                            <a:srgbClr val="1A1A1A"/>
+                          </a:solidFill>
+                          <a:latin typeface="Arial"/>
+                        </a:rPr>
+                        <a:t>Verhandlungsmacht der Abnehmer</a:t>
+                      </a:r>
+                    </a:p>
+                  </a:txBody>
+                  <a:tcPr>
+                    <a:solidFill>
+                      <a:srgbClr val="FFFFFF"/>
+                    </a:solidFill>
+                  </a:tcPr>
+                </a:tc>
+                <a:tc>
+                  <a:txBody>
+                    <a:bodyPr wrap="square"/>
+                    <a:lstStyle/>
+                    <a:p>
+                      <a:r>
+                        <a:rPr sz="1100" b="0">
+                          <a:solidFill>
+                            <a:srgbClr val="1A1A1A"/>
+                          </a:solidFill>
+                          <a:latin typeface="Arial"/>
+                        </a:rPr>
+                        <a:t>Wie viele Großkunden? OEM-Abhängigkeit? → Klumpenrisiko im Umsatz</a:t>
+                      </a:r>
+                    </a:p>
+                  </a:txBody>
+                  <a:tcPr>
+                    <a:solidFill>
+                      <a:srgbClr val="FFFFFF"/>
+                    </a:solidFill>
+                  </a:tcPr>
+                </a:tc>
+              </a:tr>
+              <a:tr h="475488">
+                <a:tc>
+                  <a:txBody>
+                    <a:bodyPr wrap="square"/>
+                    <a:lstStyle/>
+                    <a:p>
+                      <a:r>
+                        <a:rPr sz="1100" b="0">
+                          <a:solidFill>
+                            <a:srgbClr val="1A1A1A"/>
+                          </a:solidFill>
+                          <a:latin typeface="Arial"/>
+                        </a:rPr>
+                        <a:t>Bedrohung durch Substitute</a:t>
+                      </a:r>
+                    </a:p>
+                  </a:txBody>
+                  <a:tcPr>
+                    <a:solidFill>
+                      <a:srgbClr val="F4F6FA"/>
+                    </a:solidFill>
+                  </a:tcPr>
+                </a:tc>
+                <a:tc>
+                  <a:txBody>
+                    <a:bodyPr wrap="square"/>
+                    <a:lstStyle/>
+                    <a:p>
+                      <a:r>
+                        <a:rPr sz="1100" b="0">
+                          <a:solidFill>
+                            <a:srgbClr val="1A1A1A"/>
+                          </a:solidFill>
+                          <a:latin typeface="Arial"/>
+                        </a:rPr>
+                        <a:t>Können Produkte/Dienstleistungen ersetzt werden? → Disruptions- und Obsoleszenzrisiko</a:t>
+                      </a:r>
+                    </a:p>
+                  </a:txBody>
+                  <a:tcPr>
+                    <a:solidFill>
+                      <a:srgbClr val="F4F6FA"/>
+                    </a:solidFill>
+                  </a:tcPr>
+                </a:tc>
+              </a:tr>
+              <a:tr h="475488">
+                <a:tc>
+                  <a:txBody>
+                    <a:bodyPr wrap="square"/>
+                    <a:lstStyle/>
+                    <a:p>
+                      <a:r>
+                        <a:rPr sz="1100" b="0">
+                          <a:solidFill>
+                            <a:srgbClr val="1A1A1A"/>
+                          </a:solidFill>
+                          <a:latin typeface="Arial"/>
+                        </a:rPr>
+                        <a:t>Rivalität unter bestehenden Wettbewerbern</a:t>
+                      </a:r>
+                    </a:p>
+                  </a:txBody>
+                  <a:tcPr>
+                    <a:solidFill>
+                      <a:srgbClr val="FFFFFF"/>
+                    </a:solidFill>
+                  </a:tcPr>
+                </a:tc>
+                <a:tc>
+                  <a:txBody>
+                    <a:bodyPr wrap="square"/>
+                    <a:lstStyle/>
+                    <a:p>
+                      <a:r>
+                        <a:rPr sz="1100" b="0">
+                          <a:solidFill>
+                            <a:srgbClr val="1A1A1A"/>
+                          </a:solidFill>
+                          <a:latin typeface="Arial"/>
+                        </a:rPr>
+                        <a:t>Preiswettbewerb, Überkapazitäten, Marktkonzentration → Margendruck, Rentabilität</a:t>
+                      </a:r>
+                    </a:p>
+                  </a:txBody>
+                  <a:tcPr>
+                    <a:solidFill>
+                      <a:srgbClr val="FFFFFF"/>
+                    </a:solidFill>
+                  </a:tcPr>
+                </a:tc>
+              </a:tr>
+            </a:tbl>
+          </a:graphicData>
+        </a:graphic>
+      </p:graphicFrame>
     </p:spTree>
   </p:cSld>
   <p:clrMapOvr>
@@ -5519,8 +9341,8 @@
         </p:nvSpPr>
         <p:spPr>
           <a:xfrm>
-            <a:off x="365760" y="2286000"/>
-            <a:ext cx="11430000" cy="1828800"/>
+            <a:off x="365760" y="2011680"/>
+            <a:ext cx="11430000" cy="2011680"/>
           </a:xfrm>
           <a:prstGeom prst="rect">
             <a:avLst/>
@@ -5535,13 +9357,13 @@
           <a:p>
             <a:pPr algn="l"/>
             <a:r>
-              <a:rPr sz="3600" b="1">
+              <a:rPr sz="3600" b="1" i="0">
                 <a:solidFill>
                   <a:srgbClr val="FFFFFF"/>
                 </a:solidFill>
                 <a:latin typeface="Arial"/>
               </a:rPr>
-              <a:t>Einstiegsfragen für Branchenanfänger</a:t>
+              <a:t>PESTEL-Analyse</a:t>
             </a:r>
           </a:p>
         </p:txBody>
@@ -5560,7 +9382,7 @@
     <p:bg>
       <p:bgPr>
         <a:solidFill>
-          <a:srgbClr val="1A1A1A"/>
+          <a:srgbClr val="FFFFFF"/>
         </a:solidFill>
         <a:effectLst/>
       </p:bgPr>
@@ -5587,7 +9409,7 @@
             <a:avLst/>
           </a:prstGeom>
           <a:solidFill>
-            <a:srgbClr val="E05B00"/>
+            <a:srgbClr val="003DA5"/>
           </a:solidFill>
           <a:ln>
             <a:noFill/>
@@ -5623,8 +9445,8 @@
         </p:nvSpPr>
         <p:spPr>
           <a:xfrm>
-            <a:off x="365760" y="2286000"/>
-            <a:ext cx="11430000" cy="1828800"/>
+            <a:off x="228600" y="182880"/>
+            <a:ext cx="11430000" cy="320040"/>
           </a:xfrm>
           <a:prstGeom prst="rect">
             <a:avLst/>
@@ -5639,17 +9461,443 @@
           <a:p>
             <a:pPr algn="l"/>
             <a:r>
-              <a:rPr sz="3600" b="1">
-                <a:solidFill>
-                  <a:srgbClr val="FFFFFF"/>
+              <a:rPr sz="900" b="0" i="0">
+                <a:solidFill>
+                  <a:srgbClr val="556575"/>
                 </a:solidFill>
                 <a:latin typeface="Arial"/>
               </a:rPr>
-              <a:t>Wissensarbeit transparent machen – Gespräche in der Lernphase</a:t>
-            </a:r>
-          </a:p>
-        </p:txBody>
-      </p:sp>
+              <a:t>M09 · 4.2 Branchenanalyse: Porter's Five Forces und PESTEL</a:t>
+            </a:r>
+          </a:p>
+        </p:txBody>
+      </p:sp>
+      <p:sp>
+        <p:nvSpPr>
+          <p:cNvPr id="4" name="TextBox 3"/>
+          <p:cNvSpPr txBox="1"/>
+          <p:nvPr/>
+        </p:nvSpPr>
+        <p:spPr>
+          <a:xfrm>
+            <a:off x="365760" y="274320"/>
+            <a:ext cx="11430000" cy="777240"/>
+          </a:xfrm>
+          <a:prstGeom prst="rect">
+            <a:avLst/>
+          </a:prstGeom>
+          <a:noFill/>
+        </p:spPr>
+        <p:txBody>
+          <a:bodyPr wrap="square">
+            <a:spAutoFit/>
+          </a:bodyPr>
+          <a:lstStyle/>
+          <a:p>
+            <a:pPr algn="l"/>
+            <a:r>
+              <a:rPr sz="2200" b="1" i="0">
+                <a:solidFill>
+                  <a:srgbClr val="003DA5"/>
+                </a:solidFill>
+                <a:latin typeface="Arial"/>
+              </a:rPr>
+              <a:t>PESTEL-Analyse</a:t>
+            </a:r>
+          </a:p>
+        </p:txBody>
+      </p:sp>
+      <p:sp>
+        <p:nvSpPr>
+          <p:cNvPr id="5" name="Rectangle 4"/>
+          <p:cNvSpPr/>
+          <p:nvPr/>
+        </p:nvSpPr>
+        <p:spPr>
+          <a:xfrm>
+            <a:off x="365760" y="1005840"/>
+            <a:ext cx="11430000" cy="27432"/>
+          </a:xfrm>
+          <a:prstGeom prst="rect">
+            <a:avLst/>
+          </a:prstGeom>
+          <a:solidFill>
+            <a:srgbClr val="D1D5DB"/>
+          </a:solidFill>
+          <a:ln>
+            <a:noFill/>
+          </a:ln>
+        </p:spPr>
+        <p:style>
+          <a:lnRef idx="1">
+            <a:schemeClr val="accent1"/>
+          </a:lnRef>
+          <a:fillRef idx="3">
+            <a:schemeClr val="accent1"/>
+          </a:fillRef>
+          <a:effectRef idx="2">
+            <a:schemeClr val="accent1"/>
+          </a:effectRef>
+          <a:fontRef idx="minor">
+            <a:schemeClr val="lt1"/>
+          </a:fontRef>
+        </p:style>
+        <p:txBody>
+          <a:bodyPr rtlCol="0" anchor="ctr"/>
+          <a:lstStyle/>
+          <a:p>
+            <a:pPr algn="ctr"/>
+          </a:p>
+        </p:txBody>
+      </p:sp>
+      <p:graphicFrame>
+        <p:nvGraphicFramePr>
+          <p:cNvPr id="6" name="Table 5"/>
+          <p:cNvGraphicFramePr>
+            <a:graphicFrameLocks noGrp="1"/>
+          </p:cNvGraphicFramePr>
+          <p:nvPr/>
+        </p:nvGraphicFramePr>
+        <p:xfrm>
+          <a:off x="365760" y="1143000"/>
+          <a:ext cx="11430000" cy="3328416"/>
+        </p:xfrm>
+        <a:graphic>
+          <a:graphicData uri="http://schemas.openxmlformats.org/drawingml/2006/table">
+            <a:tbl>
+              <a:tblPr firstRow="1" bandRow="1">
+                <a:tableStyleId>{5C22544A-7EE6-4342-B048-85BDC9FD1C3A}</a:tableStyleId>
+              </a:tblPr>
+              <a:tblGrid>
+                <a:gridCol w="5715000"/>
+                <a:gridCol w="5715000"/>
+              </a:tblGrid>
+              <a:tr h="475488">
+                <a:tc>
+                  <a:txBody>
+                    <a:bodyPr wrap="square"/>
+                    <a:lstStyle/>
+                    <a:p>
+                      <a:r>
+                        <a:rPr sz="1100" b="1">
+                          <a:solidFill>
+                            <a:srgbClr val="FFFFFF"/>
+                          </a:solidFill>
+                          <a:latin typeface="Arial"/>
+                        </a:rPr>
+                        <a:t>Dimension</a:t>
+                      </a:r>
+                    </a:p>
+                  </a:txBody>
+                  <a:tcPr>
+                    <a:solidFill>
+                      <a:srgbClr val="003DA5"/>
+                    </a:solidFill>
+                  </a:tcPr>
+                </a:tc>
+                <a:tc>
+                  <a:txBody>
+                    <a:bodyPr wrap="square"/>
+                    <a:lstStyle/>
+                    <a:p>
+                      <a:r>
+                        <a:rPr sz="1100" b="1">
+                          <a:solidFill>
+                            <a:srgbClr val="FFFFFF"/>
+                          </a:solidFill>
+                          <a:latin typeface="Arial"/>
+                        </a:rPr>
+                        <a:t>Bankpraktische Fragestellung</a:t>
+                      </a:r>
+                    </a:p>
+                  </a:txBody>
+                  <a:tcPr>
+                    <a:solidFill>
+                      <a:srgbClr val="003DA5"/>
+                    </a:solidFill>
+                  </a:tcPr>
+                </a:tc>
+              </a:tr>
+              <a:tr h="475488">
+                <a:tc>
+                  <a:txBody>
+                    <a:bodyPr wrap="square"/>
+                    <a:lstStyle/>
+                    <a:p>
+                      <a:r>
+                        <a:rPr sz="1100" b="0">
+                          <a:solidFill>
+                            <a:srgbClr val="1A1A1A"/>
+                          </a:solidFill>
+                          <a:latin typeface="Arial"/>
+                        </a:rPr>
+                        <a:t>Politisch</a:t>
+                      </a:r>
+                    </a:p>
+                  </a:txBody>
+                  <a:tcPr>
+                    <a:solidFill>
+                      <a:srgbClr val="FFFFFF"/>
+                    </a:solidFill>
+                  </a:tcPr>
+                </a:tc>
+                <a:tc>
+                  <a:txBody>
+                    <a:bodyPr wrap="square"/>
+                    <a:lstStyle/>
+                    <a:p>
+                      <a:r>
+                        <a:rPr sz="1100" b="0">
+                          <a:solidFill>
+                            <a:srgbClr val="1A1A1A"/>
+                          </a:solidFill>
+                          <a:latin typeface="Arial"/>
+                        </a:rPr>
+                        <a:t>Subventionen, Regulierung, Handelspolitik</a:t>
+                      </a:r>
+                    </a:p>
+                  </a:txBody>
+                  <a:tcPr>
+                    <a:solidFill>
+                      <a:srgbClr val="FFFFFF"/>
+                    </a:solidFill>
+                  </a:tcPr>
+                </a:tc>
+              </a:tr>
+              <a:tr h="475488">
+                <a:tc>
+                  <a:txBody>
+                    <a:bodyPr wrap="square"/>
+                    <a:lstStyle/>
+                    <a:p>
+                      <a:r>
+                        <a:rPr sz="1100" b="0">
+                          <a:solidFill>
+                            <a:srgbClr val="1A1A1A"/>
+                          </a:solidFill>
+                          <a:latin typeface="Arial"/>
+                        </a:rPr>
+                        <a:t>Ökonomisch</a:t>
+                      </a:r>
+                    </a:p>
+                  </a:txBody>
+                  <a:tcPr>
+                    <a:solidFill>
+                      <a:srgbClr val="F4F6FA"/>
+                    </a:solidFill>
+                  </a:tcPr>
+                </a:tc>
+                <a:tc>
+                  <a:txBody>
+                    <a:bodyPr wrap="square"/>
+                    <a:lstStyle/>
+                    <a:p>
+                      <a:r>
+                        <a:rPr sz="1100" b="0">
+                          <a:solidFill>
+                            <a:srgbClr val="1A1A1A"/>
+                          </a:solidFill>
+                          <a:latin typeface="Arial"/>
+                        </a:rPr>
+                        <a:t>Konjunkturabhängigkeit, Zinsumfeld, Investitionszyklen</a:t>
+                      </a:r>
+                    </a:p>
+                  </a:txBody>
+                  <a:tcPr>
+                    <a:solidFill>
+                      <a:srgbClr val="F4F6FA"/>
+                    </a:solidFill>
+                  </a:tcPr>
+                </a:tc>
+              </a:tr>
+              <a:tr h="475488">
+                <a:tc>
+                  <a:txBody>
+                    <a:bodyPr wrap="square"/>
+                    <a:lstStyle/>
+                    <a:p>
+                      <a:r>
+                        <a:rPr sz="1100" b="0">
+                          <a:solidFill>
+                            <a:srgbClr val="1A1A1A"/>
+                          </a:solidFill>
+                          <a:latin typeface="Arial"/>
+                        </a:rPr>
+                        <a:t>Sozial</a:t>
+                      </a:r>
+                    </a:p>
+                  </a:txBody>
+                  <a:tcPr>
+                    <a:solidFill>
+                      <a:srgbClr val="FFFFFF"/>
+                    </a:solidFill>
+                  </a:tcPr>
+                </a:tc>
+                <a:tc>
+                  <a:txBody>
+                    <a:bodyPr wrap="square"/>
+                    <a:lstStyle/>
+                    <a:p>
+                      <a:r>
+                        <a:rPr sz="1100" b="0">
+                          <a:solidFill>
+                            <a:srgbClr val="1A1A1A"/>
+                          </a:solidFill>
+                          <a:latin typeface="Arial"/>
+                        </a:rPr>
+                        <a:t>Demografische Trends, Konsumverhalten, Fachkräftemangel</a:t>
+                      </a:r>
+                    </a:p>
+                  </a:txBody>
+                  <a:tcPr>
+                    <a:solidFill>
+                      <a:srgbClr val="FFFFFF"/>
+                    </a:solidFill>
+                  </a:tcPr>
+                </a:tc>
+              </a:tr>
+              <a:tr h="475488">
+                <a:tc>
+                  <a:txBody>
+                    <a:bodyPr wrap="square"/>
+                    <a:lstStyle/>
+                    <a:p>
+                      <a:r>
+                        <a:rPr sz="1100" b="0">
+                          <a:solidFill>
+                            <a:srgbClr val="1A1A1A"/>
+                          </a:solidFill>
+                          <a:latin typeface="Arial"/>
+                        </a:rPr>
+                        <a:t>Technologisch</a:t>
+                      </a:r>
+                    </a:p>
+                  </a:txBody>
+                  <a:tcPr>
+                    <a:solidFill>
+                      <a:srgbClr val="F4F6FA"/>
+                    </a:solidFill>
+                  </a:tcPr>
+                </a:tc>
+                <a:tc>
+                  <a:txBody>
+                    <a:bodyPr wrap="square"/>
+                    <a:lstStyle/>
+                    <a:p>
+                      <a:r>
+                        <a:rPr sz="1100" b="0">
+                          <a:solidFill>
+                            <a:srgbClr val="1A1A1A"/>
+                          </a:solidFill>
+                          <a:latin typeface="Arial"/>
+                        </a:rPr>
+                        <a:t>Digitalisierung, Automatisierung, F&amp;E-Intensität</a:t>
+                      </a:r>
+                    </a:p>
+                  </a:txBody>
+                  <a:tcPr>
+                    <a:solidFill>
+                      <a:srgbClr val="F4F6FA"/>
+                    </a:solidFill>
+                  </a:tcPr>
+                </a:tc>
+              </a:tr>
+              <a:tr h="475488">
+                <a:tc>
+                  <a:txBody>
+                    <a:bodyPr wrap="square"/>
+                    <a:lstStyle/>
+                    <a:p>
+                      <a:r>
+                        <a:rPr sz="1100" b="0">
+                          <a:solidFill>
+                            <a:srgbClr val="1A1A1A"/>
+                          </a:solidFill>
+                          <a:latin typeface="Arial"/>
+                        </a:rPr>
+                        <a:t>Ökologisch</a:t>
+                      </a:r>
+                    </a:p>
+                  </a:txBody>
+                  <a:tcPr>
+                    <a:solidFill>
+                      <a:srgbClr val="FFFFFF"/>
+                    </a:solidFill>
+                  </a:tcPr>
+                </a:tc>
+                <a:tc>
+                  <a:txBody>
+                    <a:bodyPr wrap="square"/>
+                    <a:lstStyle/>
+                    <a:p>
+                      <a:r>
+                        <a:rPr sz="1100" b="0">
+                          <a:solidFill>
+                            <a:srgbClr val="1A1A1A"/>
+                          </a:solidFill>
+                          <a:latin typeface="Arial"/>
+                        </a:rPr>
+                        <a:t>CO₂-Regulierung, Nachhaltigkeitspflichten, Transformationsrisiken</a:t>
+                      </a:r>
+                    </a:p>
+                  </a:txBody>
+                  <a:tcPr>
+                    <a:solidFill>
+                      <a:srgbClr val="FFFFFF"/>
+                    </a:solidFill>
+                  </a:tcPr>
+                </a:tc>
+              </a:tr>
+              <a:tr h="475488">
+                <a:tc>
+                  <a:txBody>
+                    <a:bodyPr wrap="square"/>
+                    <a:lstStyle/>
+                    <a:p>
+                      <a:r>
+                        <a:rPr sz="1100" b="0">
+                          <a:solidFill>
+                            <a:srgbClr val="1A1A1A"/>
+                          </a:solidFill>
+                          <a:latin typeface="Arial"/>
+                        </a:rPr>
+                        <a:t>Legal</a:t>
+                      </a:r>
+                    </a:p>
+                  </a:txBody>
+                  <a:tcPr>
+                    <a:solidFill>
+                      <a:srgbClr val="F4F6FA"/>
+                    </a:solidFill>
+                  </a:tcPr>
+                </a:tc>
+                <a:tc>
+                  <a:txBody>
+                    <a:bodyPr wrap="square"/>
+                    <a:lstStyle/>
+                    <a:p>
+                      <a:r>
+                        <a:rPr sz="1100" b="0">
+                          <a:solidFill>
+                            <a:srgbClr val="1A1A1A"/>
+                          </a:solidFill>
+                          <a:latin typeface="Arial"/>
+                        </a:rPr>
+                        <a:t>Branchenspezifische Rechtsnormen, Produkthaftung, Normen (DIN/ISO)</a:t>
+                      </a:r>
+                    </a:p>
+                  </a:txBody>
+                  <a:tcPr>
+                    <a:solidFill>
+                      <a:srgbClr val="F4F6FA"/>
+                    </a:solidFill>
+                  </a:tcPr>
+                </a:tc>
+              </a:tr>
+            </a:tbl>
+          </a:graphicData>
+        </a:graphic>
+      </p:graphicFrame>
     </p:spTree>
   </p:cSld>
   <p:clrMapOvr>
@@ -5727,8 +9975,8 @@
         </p:nvSpPr>
         <p:spPr>
           <a:xfrm>
-            <a:off x="365760" y="2286000"/>
-            <a:ext cx="11430000" cy="1828800"/>
+            <a:off x="365760" y="2011680"/>
+            <a:ext cx="11430000" cy="2011680"/>
           </a:xfrm>
           <a:prstGeom prst="rect">
             <a:avLst/>
@@ -5743,13 +9991,13 @@
           <a:p>
             <a:pPr algn="l"/>
             <a:r>
-              <a:rPr sz="3600" b="1">
+              <a:rPr sz="3600" b="1" i="0">
                 <a:solidFill>
                   <a:srgbClr val="FFFFFF"/>
                 </a:solidFill>
                 <a:latin typeface="Arial"/>
               </a:rPr>
-              <a:t>Arbeitsblatt A: Branchenanalyse – Five Forces Scoring</a:t>
+              <a:t>Kombination im Kundengespräch</a:t>
             </a:r>
           </a:p>
         </p:txBody>

--- a/public/downloads/praesentation/M09.pptx
+++ b/public/downloads/praesentation/M09.pptx
@@ -4057,7 +4057,7 @@
     <p:bg>
       <p:bgPr>
         <a:solidFill>
-          <a:srgbClr val="191D2E"/>
+          <a:srgbClr val="1F2B56"/>
         </a:solidFill>
         <a:effectLst/>
       </p:bgPr>
@@ -4258,7 +4258,7 @@
     <p:bg>
       <p:bgPr>
         <a:solidFill>
-          <a:srgbClr val="191D2E"/>
+          <a:srgbClr val="1F2B56"/>
         </a:solidFill>
         <a:effectLst/>
       </p:bgPr>
@@ -4459,7 +4459,7 @@
     <p:bg>
       <p:bgPr>
         <a:solidFill>
-          <a:srgbClr val="191D2E"/>
+          <a:srgbClr val="1F2B56"/>
         </a:solidFill>
         <a:effectLst/>
       </p:bgPr>
@@ -4660,7 +4660,7 @@
     <p:bg>
       <p:bgPr>
         <a:solidFill>
-          <a:srgbClr val="191D2E"/>
+          <a:srgbClr val="1F2B56"/>
         </a:solidFill>
         <a:effectLst/>
       </p:bgPr>
@@ -5169,7 +5169,7 @@
                   </a:txBody>
                   <a:tcPr>
                     <a:solidFill>
-                      <a:srgbClr val="191D2E"/>
+                      <a:srgbClr val="1F2B56"/>
                     </a:solidFill>
                   </a:tcPr>
                 </a:tc>
@@ -5191,7 +5191,7 @@
                   </a:txBody>
                   <a:tcPr>
                     <a:solidFill>
-                      <a:srgbClr val="191D2E"/>
+                      <a:srgbClr val="1F2B56"/>
                     </a:solidFill>
                   </a:tcPr>
                 </a:tc>
@@ -5213,7 +5213,7 @@
                   </a:txBody>
                   <a:tcPr>
                     <a:solidFill>
-                      <a:srgbClr val="191D2E"/>
+                      <a:srgbClr val="1F2B56"/>
                     </a:solidFill>
                   </a:tcPr>
                 </a:tc>
@@ -5235,7 +5235,7 @@
                   </a:txBody>
                   <a:tcPr>
                     <a:solidFill>
-                      <a:srgbClr val="191D2E"/>
+                      <a:srgbClr val="1F2B56"/>
                     </a:solidFill>
                   </a:tcPr>
                 </a:tc>
@@ -6071,7 +6071,7 @@
                   </a:txBody>
                   <a:tcPr>
                     <a:solidFill>
-                      <a:srgbClr val="191D2E"/>
+                      <a:srgbClr val="1F2B56"/>
                     </a:solidFill>
                   </a:tcPr>
                 </a:tc>
@@ -6093,7 +6093,7 @@
                   </a:txBody>
                   <a:tcPr>
                     <a:solidFill>
-                      <a:srgbClr val="191D2E"/>
+                      <a:srgbClr val="1F2B56"/>
                     </a:solidFill>
                   </a:tcPr>
                 </a:tc>
@@ -6115,7 +6115,7 @@
                   </a:txBody>
                   <a:tcPr>
                     <a:solidFill>
-                      <a:srgbClr val="191D2E"/>
+                      <a:srgbClr val="1F2B56"/>
                     </a:solidFill>
                   </a:tcPr>
                 </a:tc>
@@ -6137,7 +6137,7 @@
                   </a:txBody>
                   <a:tcPr>
                     <a:solidFill>
-                      <a:srgbClr val="191D2E"/>
+                      <a:srgbClr val="1F2B56"/>
                     </a:solidFill>
                   </a:tcPr>
                 </a:tc>
@@ -6701,7 +6701,7 @@
                   </a:txBody>
                   <a:tcPr>
                     <a:solidFill>
-                      <a:srgbClr val="191D2E"/>
+                      <a:srgbClr val="1F2B56"/>
                     </a:solidFill>
                   </a:tcPr>
                 </a:tc>
@@ -6723,7 +6723,7 @@
                   </a:txBody>
                   <a:tcPr>
                     <a:solidFill>
-                      <a:srgbClr val="191D2E"/>
+                      <a:srgbClr val="1F2B56"/>
                     </a:solidFill>
                   </a:tcPr>
                 </a:tc>
@@ -6976,7 +6976,7 @@
     <p:bg>
       <p:bgPr>
         <a:solidFill>
-          <a:srgbClr val="191D2E"/>
+          <a:srgbClr val="1F2B56"/>
         </a:solidFill>
         <a:effectLst/>
       </p:bgPr>
@@ -7484,7 +7484,7 @@
                   </a:txBody>
                   <a:tcPr>
                     <a:solidFill>
-                      <a:srgbClr val="191D2E"/>
+                      <a:srgbClr val="1F2B56"/>
                     </a:solidFill>
                   </a:tcPr>
                 </a:tc>
@@ -7506,7 +7506,7 @@
                   </a:txBody>
                   <a:tcPr>
                     <a:solidFill>
-                      <a:srgbClr val="191D2E"/>
+                      <a:srgbClr val="1F2B56"/>
                     </a:solidFill>
                   </a:tcPr>
                 </a:tc>
@@ -7528,7 +7528,7 @@
                   </a:txBody>
                   <a:tcPr>
                     <a:solidFill>
-                      <a:srgbClr val="191D2E"/>
+                      <a:srgbClr val="1F2B56"/>
                     </a:solidFill>
                   </a:tcPr>
                 </a:tc>
@@ -8273,29 +8273,29 @@
         </p:nvSpPr>
         <p:spPr>
           <a:xfrm>
-            <a:off x="4064000" y="927100"/>
-            <a:ext cx="508000" cy="647700"/>
-          </a:xfrm>
-          <a:prstGeom prst="rect">
-            <a:avLst/>
-          </a:prstGeom>
-          <a:noFill/>
-        </p:spPr>
-        <p:txBody>
-          <a:bodyPr wrap="square">
+            <a:off x="4064000" y="939799"/>
+            <a:ext cx="762000" cy="647700"/>
+          </a:xfrm>
+          <a:prstGeom prst="rect">
+            <a:avLst/>
+          </a:prstGeom>
+          <a:noFill/>
+        </p:spPr>
+        <p:txBody>
+          <a:bodyPr wrap="none">
             <a:normAutofit/>
           </a:bodyPr>
           <a:lstStyle/>
           <a:p>
             <a:pPr algn="l"/>
             <a:r>
-              <a:rPr sz="2600" b="0" i="1">
+              <a:rPr sz="2400" b="0" i="1">
                 <a:solidFill>
                   <a:srgbClr val="1F2B56"/>
                 </a:solidFill>
                 <a:latin typeface="Georgia"/>
               </a:rPr>
-              <a:t>I.</a:t>
+              <a:t>I</a:t>
             </a:r>
           </a:p>
         </p:txBody>
@@ -8308,8 +8308,8 @@
         </p:nvSpPr>
         <p:spPr>
           <a:xfrm>
-            <a:off x="4699000" y="952500"/>
-            <a:ext cx="6858000" cy="622300"/>
+            <a:off x="4953000" y="952500"/>
+            <a:ext cx="6629400" cy="635000"/>
           </a:xfrm>
           <a:prstGeom prst="rect">
             <a:avLst/>
@@ -8343,7 +8343,7 @@
         </p:nvSpPr>
         <p:spPr>
           <a:xfrm>
-            <a:off x="4064000" y="1574800"/>
+            <a:off x="4064000" y="1587500"/>
             <a:ext cx="7518399" cy="6350"/>
           </a:xfrm>
           <a:prstGeom prst="rect">
@@ -8386,29 +8386,29 @@
         </p:nvSpPr>
         <p:spPr>
           <a:xfrm>
-            <a:off x="4064000" y="1612900"/>
-            <a:ext cx="508000" cy="647700"/>
-          </a:xfrm>
-          <a:prstGeom prst="rect">
-            <a:avLst/>
-          </a:prstGeom>
-          <a:noFill/>
-        </p:spPr>
-        <p:txBody>
-          <a:bodyPr wrap="square">
+            <a:off x="4064000" y="1638300"/>
+            <a:ext cx="762000" cy="647700"/>
+          </a:xfrm>
+          <a:prstGeom prst="rect">
+            <a:avLst/>
+          </a:prstGeom>
+          <a:noFill/>
+        </p:spPr>
+        <p:txBody>
+          <a:bodyPr wrap="none">
             <a:normAutofit/>
           </a:bodyPr>
           <a:lstStyle/>
           <a:p>
             <a:pPr algn="l"/>
             <a:r>
-              <a:rPr sz="2600" b="0" i="1">
+              <a:rPr sz="2400" b="0" i="1">
                 <a:solidFill>
                   <a:srgbClr val="1F2B56"/>
                 </a:solidFill>
                 <a:latin typeface="Georgia"/>
               </a:rPr>
-              <a:t>II.</a:t>
+              <a:t>II</a:t>
             </a:r>
           </a:p>
         </p:txBody>
@@ -8421,8 +8421,8 @@
         </p:nvSpPr>
         <p:spPr>
           <a:xfrm>
-            <a:off x="4699000" y="1638300"/>
-            <a:ext cx="6858000" cy="622300"/>
+            <a:off x="4953000" y="1651000"/>
+            <a:ext cx="6629400" cy="635000"/>
           </a:xfrm>
           <a:prstGeom prst="rect">
             <a:avLst/>
@@ -8456,7 +8456,7 @@
         </p:nvSpPr>
         <p:spPr>
           <a:xfrm>
-            <a:off x="4064000" y="2260600"/>
+            <a:off x="4064000" y="2286000"/>
             <a:ext cx="7518399" cy="6350"/>
           </a:xfrm>
           <a:prstGeom prst="rect">
@@ -8499,29 +8499,29 @@
         </p:nvSpPr>
         <p:spPr>
           <a:xfrm>
-            <a:off x="4064000" y="2298700"/>
-            <a:ext cx="508000" cy="647700"/>
-          </a:xfrm>
-          <a:prstGeom prst="rect">
-            <a:avLst/>
-          </a:prstGeom>
-          <a:noFill/>
-        </p:spPr>
-        <p:txBody>
-          <a:bodyPr wrap="square">
+            <a:off x="4064000" y="2336800"/>
+            <a:ext cx="762000" cy="647700"/>
+          </a:xfrm>
+          <a:prstGeom prst="rect">
+            <a:avLst/>
+          </a:prstGeom>
+          <a:noFill/>
+        </p:spPr>
+        <p:txBody>
+          <a:bodyPr wrap="none">
             <a:normAutofit/>
           </a:bodyPr>
           <a:lstStyle/>
           <a:p>
             <a:pPr algn="l"/>
             <a:r>
-              <a:rPr sz="2600" b="0" i="1">
+              <a:rPr sz="2400" b="0" i="1">
                 <a:solidFill>
                   <a:srgbClr val="1F2B56"/>
                 </a:solidFill>
                 <a:latin typeface="Georgia"/>
               </a:rPr>
-              <a:t>III.</a:t>
+              <a:t>III</a:t>
             </a:r>
           </a:p>
         </p:txBody>
@@ -8534,8 +8534,8 @@
         </p:nvSpPr>
         <p:spPr>
           <a:xfrm>
-            <a:off x="4699000" y="2324100"/>
-            <a:ext cx="6858000" cy="622300"/>
+            <a:off x="4953000" y="2349500"/>
+            <a:ext cx="6629400" cy="635000"/>
           </a:xfrm>
           <a:prstGeom prst="rect">
             <a:avLst/>
@@ -8569,7 +8569,7 @@
         </p:nvSpPr>
         <p:spPr>
           <a:xfrm>
-            <a:off x="4064000" y="2946400"/>
+            <a:off x="4064000" y="2984500"/>
             <a:ext cx="7518399" cy="6350"/>
           </a:xfrm>
           <a:prstGeom prst="rect">
@@ -8612,29 +8612,29 @@
         </p:nvSpPr>
         <p:spPr>
           <a:xfrm>
-            <a:off x="4064000" y="2984500"/>
-            <a:ext cx="508000" cy="647700"/>
-          </a:xfrm>
-          <a:prstGeom prst="rect">
-            <a:avLst/>
-          </a:prstGeom>
-          <a:noFill/>
-        </p:spPr>
-        <p:txBody>
-          <a:bodyPr wrap="square">
+            <a:off x="4064000" y="3035300"/>
+            <a:ext cx="762000" cy="647700"/>
+          </a:xfrm>
+          <a:prstGeom prst="rect">
+            <a:avLst/>
+          </a:prstGeom>
+          <a:noFill/>
+        </p:spPr>
+        <p:txBody>
+          <a:bodyPr wrap="none">
             <a:normAutofit/>
           </a:bodyPr>
           <a:lstStyle/>
           <a:p>
             <a:pPr algn="l"/>
             <a:r>
-              <a:rPr sz="2600" b="0" i="1">
+              <a:rPr sz="2400" b="0" i="1">
                 <a:solidFill>
                   <a:srgbClr val="1F2B56"/>
                 </a:solidFill>
                 <a:latin typeface="Georgia"/>
               </a:rPr>
-              <a:t>IV.</a:t>
+              <a:t>IV</a:t>
             </a:r>
           </a:p>
         </p:txBody>
@@ -8647,8 +8647,8 @@
         </p:nvSpPr>
         <p:spPr>
           <a:xfrm>
-            <a:off x="4699000" y="3009900"/>
-            <a:ext cx="6858000" cy="622300"/>
+            <a:off x="4953000" y="3048000"/>
+            <a:ext cx="6629400" cy="635000"/>
           </a:xfrm>
           <a:prstGeom prst="rect">
             <a:avLst/>
@@ -8682,7 +8682,7 @@
         </p:nvSpPr>
         <p:spPr>
           <a:xfrm>
-            <a:off x="4064000" y="3632200"/>
+            <a:off x="4064000" y="3683000"/>
             <a:ext cx="7518399" cy="6350"/>
           </a:xfrm>
           <a:prstGeom prst="rect">
@@ -8725,29 +8725,29 @@
         </p:nvSpPr>
         <p:spPr>
           <a:xfrm>
-            <a:off x="4064000" y="3670300"/>
-            <a:ext cx="508000" cy="647700"/>
-          </a:xfrm>
-          <a:prstGeom prst="rect">
-            <a:avLst/>
-          </a:prstGeom>
-          <a:noFill/>
-        </p:spPr>
-        <p:txBody>
-          <a:bodyPr wrap="square">
+            <a:off x="4064000" y="3733799"/>
+            <a:ext cx="762000" cy="647700"/>
+          </a:xfrm>
+          <a:prstGeom prst="rect">
+            <a:avLst/>
+          </a:prstGeom>
+          <a:noFill/>
+        </p:spPr>
+        <p:txBody>
+          <a:bodyPr wrap="none">
             <a:normAutofit/>
           </a:bodyPr>
           <a:lstStyle/>
           <a:p>
             <a:pPr algn="l"/>
             <a:r>
-              <a:rPr sz="2600" b="0" i="1">
+              <a:rPr sz="2400" b="0" i="1">
                 <a:solidFill>
                   <a:srgbClr val="1F2B56"/>
                 </a:solidFill>
                 <a:latin typeface="Georgia"/>
               </a:rPr>
-              <a:t>V.</a:t>
+              <a:t>V</a:t>
             </a:r>
           </a:p>
         </p:txBody>
@@ -8760,8 +8760,8 @@
         </p:nvSpPr>
         <p:spPr>
           <a:xfrm>
-            <a:off x="4699000" y="3695700"/>
-            <a:ext cx="6858000" cy="622300"/>
+            <a:off x="4953000" y="3746500"/>
+            <a:ext cx="6629400" cy="635000"/>
           </a:xfrm>
           <a:prstGeom prst="rect">
             <a:avLst/>
@@ -8795,7 +8795,7 @@
         </p:nvSpPr>
         <p:spPr>
           <a:xfrm>
-            <a:off x="4064000" y="4318000"/>
+            <a:off x="4064000" y="4381500"/>
             <a:ext cx="7518399" cy="6350"/>
           </a:xfrm>
           <a:prstGeom prst="rect">
@@ -8838,29 +8838,29 @@
         </p:nvSpPr>
         <p:spPr>
           <a:xfrm>
-            <a:off x="4064000" y="4356100"/>
-            <a:ext cx="508000" cy="647700"/>
-          </a:xfrm>
-          <a:prstGeom prst="rect">
-            <a:avLst/>
-          </a:prstGeom>
-          <a:noFill/>
-        </p:spPr>
-        <p:txBody>
-          <a:bodyPr wrap="square">
+            <a:off x="4064000" y="4432300"/>
+            <a:ext cx="762000" cy="647700"/>
+          </a:xfrm>
+          <a:prstGeom prst="rect">
+            <a:avLst/>
+          </a:prstGeom>
+          <a:noFill/>
+        </p:spPr>
+        <p:txBody>
+          <a:bodyPr wrap="none">
             <a:normAutofit/>
           </a:bodyPr>
           <a:lstStyle/>
           <a:p>
             <a:pPr algn="l"/>
             <a:r>
-              <a:rPr sz="2600" b="0" i="1">
+              <a:rPr sz="2400" b="0" i="1">
                 <a:solidFill>
                   <a:srgbClr val="1F2B56"/>
                 </a:solidFill>
                 <a:latin typeface="Georgia"/>
               </a:rPr>
-              <a:t>VI.</a:t>
+              <a:t>VI</a:t>
             </a:r>
           </a:p>
         </p:txBody>
@@ -8873,8 +8873,8 @@
         </p:nvSpPr>
         <p:spPr>
           <a:xfrm>
-            <a:off x="4699000" y="4381500"/>
-            <a:ext cx="6858000" cy="622300"/>
+            <a:off x="4953000" y="4445000"/>
+            <a:ext cx="6629400" cy="635000"/>
           </a:xfrm>
           <a:prstGeom prst="rect">
             <a:avLst/>
@@ -10574,7 +10574,7 @@
     <p:bg>
       <p:bgPr>
         <a:solidFill>
-          <a:srgbClr val="191D2E"/>
+          <a:srgbClr val="1F2B56"/>
         </a:solidFill>
         <a:effectLst/>
       </p:bgPr>
@@ -11288,7 +11288,7 @@
     <p:bg>
       <p:bgPr>
         <a:solidFill>
-          <a:srgbClr val="191D2E"/>
+          <a:srgbClr val="1F2B56"/>
         </a:solidFill>
         <a:effectLst/>
       </p:bgPr>
@@ -11489,7 +11489,7 @@
     <p:bg>
       <p:bgPr>
         <a:solidFill>
-          <a:srgbClr val="191D2E"/>
+          <a:srgbClr val="1F2B56"/>
         </a:solidFill>
         <a:effectLst/>
       </p:bgPr>
@@ -13837,7 +13837,7 @@
     <p:bg>
       <p:bgPr>
         <a:solidFill>
-          <a:srgbClr val="191D2E"/>
+          <a:srgbClr val="1F2B56"/>
         </a:solidFill>
         <a:effectLst/>
       </p:bgPr>
@@ -14073,7 +14073,7 @@
     <p:bg>
       <p:bgPr>
         <a:solidFill>
-          <a:srgbClr val="191D2E"/>
+          <a:srgbClr val="1F2B56"/>
         </a:solidFill>
         <a:effectLst/>
       </p:bgPr>
@@ -14274,7 +14274,7 @@
     <p:bg>
       <p:bgPr>
         <a:solidFill>
-          <a:srgbClr val="191D2E"/>
+          <a:srgbClr val="1F2B56"/>
         </a:solidFill>
         <a:effectLst/>
       </p:bgPr>
@@ -14475,7 +14475,7 @@
     <p:bg>
       <p:bgPr>
         <a:solidFill>
-          <a:srgbClr val="191D2E"/>
+          <a:srgbClr val="1F2B56"/>
         </a:solidFill>
         <a:effectLst/>
       </p:bgPr>
@@ -14676,7 +14676,7 @@
     <p:bg>
       <p:bgPr>
         <a:solidFill>
-          <a:srgbClr val="191D2E"/>
+          <a:srgbClr val="1F2B56"/>
         </a:solidFill>
         <a:effectLst/>
       </p:bgPr>
@@ -15931,7 +15931,7 @@
     <p:bg>
       <p:bgPr>
         <a:solidFill>
-          <a:srgbClr val="191D2E"/>
+          <a:srgbClr val="1F2B56"/>
         </a:solidFill>
         <a:effectLst/>
       </p:bgPr>
@@ -16438,7 +16438,7 @@
                   </a:txBody>
                   <a:tcPr>
                     <a:solidFill>
-                      <a:srgbClr val="191D2E"/>
+                      <a:srgbClr val="1F2B56"/>
                     </a:solidFill>
                   </a:tcPr>
                 </a:tc>
@@ -16460,7 +16460,7 @@
                   </a:txBody>
                   <a:tcPr>
                     <a:solidFill>
-                      <a:srgbClr val="191D2E"/>
+                      <a:srgbClr val="1F2B56"/>
                     </a:solidFill>
                   </a:tcPr>
                 </a:tc>
@@ -16984,7 +16984,7 @@
                   </a:txBody>
                   <a:tcPr>
                     <a:solidFill>
-                      <a:srgbClr val="191D2E"/>
+                      <a:srgbClr val="1F2B56"/>
                     </a:solidFill>
                   </a:tcPr>
                 </a:tc>
@@ -17006,7 +17006,7 @@
                   </a:txBody>
                   <a:tcPr>
                     <a:solidFill>
-                      <a:srgbClr val="191D2E"/>
+                      <a:srgbClr val="1F2B56"/>
                     </a:solidFill>
                   </a:tcPr>
                 </a:tc>
@@ -17942,7 +17942,7 @@
                   </a:txBody>
                   <a:tcPr>
                     <a:solidFill>
-                      <a:srgbClr val="191D2E"/>
+                      <a:srgbClr val="1F2B56"/>
                     </a:solidFill>
                   </a:tcPr>
                 </a:tc>
@@ -17964,7 +17964,7 @@
                   </a:txBody>
                   <a:tcPr>
                     <a:solidFill>
-                      <a:srgbClr val="191D2E"/>
+                      <a:srgbClr val="1F2B56"/>
                     </a:solidFill>
                   </a:tcPr>
                 </a:tc>
@@ -17986,7 +17986,7 @@
                   </a:txBody>
                   <a:tcPr>
                     <a:solidFill>
-                      <a:srgbClr val="191D2E"/>
+                      <a:srgbClr val="1F2B56"/>
                     </a:solidFill>
                   </a:tcPr>
                 </a:tc>

--- a/public/downloads/praesentation/M09.pptx
+++ b/public/downloads/praesentation/M09.pptx
@@ -18,7 +18,7 @@
     <p:sldId id="266" r:id="rId17"/>
     <p:sldId id="267" r:id="rId18"/>
   </p:sldIdLst>
-  <p:sldSz cx="12191695" cy="6858000" type="screen4x3"/>
+  <p:sldSz cx="12188952" cy="6858000" type="screen4x3"/>
   <p:notesSz cx="6858000" cy="9144000"/>
   <p:defaultTextStyle>
     <a:defPPr>
@@ -3092,14 +3092,6 @@
 <file path=ppt/slides/slide1.xml><?xml version="1.0" encoding="utf-8"?>
 <p:sld xmlns:a="http://schemas.openxmlformats.org/drawingml/2006/main" xmlns:p="http://schemas.openxmlformats.org/presentationml/2006/main" xmlns:r="http://schemas.openxmlformats.org/officeDocument/2006/relationships">
   <p:cSld>
-    <p:bg>
-      <p:bgPr>
-        <a:solidFill>
-          <a:srgbClr val="F8F8FA"/>
-        </a:solidFill>
-        <a:effectLst/>
-      </p:bgPr>
-    </p:bg>
     <p:spTree>
       <p:nvGrpSpPr>
         <p:cNvPr id="1" name=""/>
@@ -3109,125 +3101,20 @@
       <p:grpSpPr/>
       <p:sp>
         <p:nvSpPr>
-          <p:cNvPr id="2" name="TextBox 1"/>
-          <p:cNvSpPr txBox="1"/>
-          <p:nvPr/>
-        </p:nvSpPr>
-        <p:spPr>
-          <a:xfrm>
-            <a:off x="609600" y="304800"/>
-            <a:ext cx="3175000" cy="279400"/>
-          </a:xfrm>
-          <a:prstGeom prst="rect">
-            <a:avLst/>
-          </a:prstGeom>
-          <a:noFill/>
-        </p:spPr>
-        <p:txBody>
-          <a:bodyPr wrap="square">
-            <a:normAutofit/>
-          </a:bodyPr>
-          <a:lstStyle/>
-          <a:p>
-            <a:pPr algn="l"/>
-            <a:r>
-              <a:rPr sz="1000" b="1" i="0">
-                <a:solidFill>
-                  <a:srgbClr val="191D2E"/>
-                </a:solidFill>
-                <a:latin typeface="Arial"/>
-              </a:rPr>
-              <a:t>FKB  Campus</a:t>
-            </a:r>
-          </a:p>
-        </p:txBody>
-      </p:sp>
-      <p:sp>
-        <p:nvSpPr>
-          <p:cNvPr id="3" name="TextBox 2"/>
-          <p:cNvSpPr txBox="1"/>
-          <p:nvPr/>
-        </p:nvSpPr>
-        <p:spPr>
-          <a:xfrm>
-            <a:off x="609600" y="304800"/>
-            <a:ext cx="10972800" cy="279400"/>
-          </a:xfrm>
-          <a:prstGeom prst="rect">
-            <a:avLst/>
-          </a:prstGeom>
-          <a:noFill/>
-        </p:spPr>
-        <p:txBody>
-          <a:bodyPr wrap="square">
-            <a:normAutofit/>
-          </a:bodyPr>
-          <a:lstStyle/>
-          <a:p>
-            <a:pPr algn="r"/>
-            <a:r>
-              <a:rPr sz="900" b="0" i="0">
-                <a:solidFill>
-                  <a:srgbClr val="7B7FA0"/>
-                </a:solidFill>
-                <a:latin typeface="Courier New"/>
-              </a:rPr>
-              <a:t>M09  ·  v0.4</a:t>
-            </a:r>
-          </a:p>
-        </p:txBody>
-      </p:sp>
-      <p:sp>
-        <p:nvSpPr>
-          <p:cNvPr id="4" name="TextBox 3"/>
-          <p:cNvSpPr txBox="1"/>
-          <p:nvPr/>
-        </p:nvSpPr>
-        <p:spPr>
-          <a:xfrm>
-            <a:off x="609600" y="2794000"/>
-            <a:ext cx="10972800" cy="2032000"/>
-          </a:xfrm>
-          <a:prstGeom prst="rect">
-            <a:avLst/>
-          </a:prstGeom>
-          <a:noFill/>
-        </p:spPr>
-        <p:txBody>
-          <a:bodyPr wrap="square">
-            <a:normAutofit/>
-          </a:bodyPr>
-          <a:lstStyle/>
-          <a:p>
-            <a:pPr algn="l"/>
-            <a:r>
-              <a:rPr sz="6000" b="0" i="0">
-                <a:solidFill>
-                  <a:srgbClr val="191D2E"/>
-                </a:solidFill>
-                <a:latin typeface="Georgia"/>
-              </a:rPr>
-              <a:t>Branchenexperte werden</a:t>
-            </a:r>
-          </a:p>
-        </p:txBody>
-      </p:sp>
-      <p:sp>
-        <p:nvSpPr>
-          <p:cNvPr id="5" name="Rectangle 4"/>
+          <p:cNvPr id="2" name="Rectangle 1"/>
           <p:cNvSpPr/>
           <p:nvPr/>
         </p:nvSpPr>
         <p:spPr>
           <a:xfrm>
-            <a:off x="609600" y="4889500"/>
-            <a:ext cx="10972800" cy="6350"/>
+            <a:off x="0" y="0"/>
+            <a:ext cx="12188952" cy="6858000"/>
           </a:xfrm>
           <a:prstGeom prst="rect">
             <a:avLst/>
           </a:prstGeom>
           <a:solidFill>
-            <a:srgbClr val="191D2E"/>
+            <a:srgbClr val="1F2C56"/>
           </a:solidFill>
           <a:ln>
             <a:noFill/>
@@ -3257,14 +3144,57 @@
       </p:sp>
       <p:sp>
         <p:nvSpPr>
-          <p:cNvPr id="6" name="TextBox 5"/>
+          <p:cNvPr id="3" name="Rectangle 2"/>
+          <p:cNvSpPr/>
+          <p:nvPr/>
+        </p:nvSpPr>
+        <p:spPr>
+          <a:xfrm>
+            <a:off x="0" y="0"/>
+            <a:ext cx="12188952" cy="54864"/>
+          </a:xfrm>
+          <a:prstGeom prst="rect">
+            <a:avLst/>
+          </a:prstGeom>
+          <a:solidFill>
+            <a:srgbClr val="D9C089"/>
+          </a:solidFill>
+          <a:ln>
+            <a:noFill/>
+          </a:ln>
+        </p:spPr>
+        <p:style>
+          <a:lnRef idx="1">
+            <a:schemeClr val="accent1"/>
+          </a:lnRef>
+          <a:fillRef idx="3">
+            <a:schemeClr val="accent1"/>
+          </a:fillRef>
+          <a:effectRef idx="2">
+            <a:schemeClr val="accent1"/>
+          </a:effectRef>
+          <a:fontRef idx="minor">
+            <a:schemeClr val="lt1"/>
+          </a:fontRef>
+        </p:style>
+        <p:txBody>
+          <a:bodyPr rtlCol="0" anchor="ctr"/>
+          <a:lstStyle/>
+          <a:p>
+            <a:pPr algn="ctr"/>
+          </a:p>
+        </p:txBody>
+      </p:sp>
+      <p:sp>
+        <p:nvSpPr>
+          <p:cNvPr id="4" name="TextBox 3"/>
           <p:cNvSpPr txBox="1"/>
           <p:nvPr/>
         </p:nvSpPr>
         <p:spPr>
           <a:xfrm>
-            <a:off x="609600" y="5016500"/>
-            <a:ext cx="5207000" cy="1143000"/>
+            <a:off x="685800" y="201168"/>
+            <a:ext cx="10817352" cy="256032"/>
           </a:xfrm>
           <a:prstGeom prst="rect">
             <a:avLst/>
@@ -3272,21 +3202,99 @@
           <a:noFill/>
         </p:spPr>
         <p:txBody>
+          <a:bodyPr wrap="none">
+            <a:spAutoFit/>
+          </a:bodyPr>
+          <a:lstStyle/>
+          <a:p>
+            <a:pPr algn="l"/>
+            <a:r>
+              <a:rPr sz="800">
+                <a:solidFill>
+                  <a:srgbClr val="C8D2E6"/>
+                </a:solidFill>
+                <a:latin typeface="JetBrains Mono"/>
+              </a:rPr>
+              <a:t>FKB CAMPUS  ·  FIRMENKUNDENAKADEMIE  ·  M09</a:t>
+            </a:r>
+          </a:p>
+        </p:txBody>
+      </p:sp>
+      <p:sp>
+        <p:nvSpPr>
+          <p:cNvPr id="5" name="TextBox 4"/>
+          <p:cNvSpPr txBox="1"/>
+          <p:nvPr/>
+        </p:nvSpPr>
+        <p:spPr>
+          <a:xfrm>
+            <a:off x="685800" y="1828800"/>
+            <a:ext cx="10817352" cy="2011680"/>
+          </a:xfrm>
+          <a:prstGeom prst="rect">
+            <a:avLst/>
+          </a:prstGeom>
+          <a:noFill/>
+        </p:spPr>
+        <p:txBody>
           <a:bodyPr wrap="square">
-            <a:normAutofit/>
+            <a:spAutoFit/>
           </a:bodyPr>
           <a:lstStyle/>
           <a:p>
             <a:pPr algn="l"/>
             <a:r>
-              <a:rPr sz="1400" b="0" i="1">
-                <a:solidFill>
-                  <a:srgbClr val="4D5270"/>
-                </a:solidFill>
-                <a:latin typeface="Georgia"/>
-              </a:rPr>
-              <a:t>Systematischer Aufbau von Branchenexpertise im 3-Monats-Programm</a:t>
-            </a:r>
+              <a:rPr sz="4600" b="1" i="0">
+                <a:solidFill>
+                  <a:srgbClr val="FFFFFF"/>
+                </a:solidFill>
+                <a:latin typeface="Source Serif 4"/>
+              </a:rPr>
+              <a:t>Branchenexperte werden</a:t>
+            </a:r>
+          </a:p>
+        </p:txBody>
+      </p:sp>
+      <p:sp>
+        <p:nvSpPr>
+          <p:cNvPr id="6" name="Rectangle 5"/>
+          <p:cNvSpPr/>
+          <p:nvPr/>
+        </p:nvSpPr>
+        <p:spPr>
+          <a:xfrm>
+            <a:off x="685800" y="5029200"/>
+            <a:ext cx="10817352" cy="12700"/>
+          </a:xfrm>
+          <a:prstGeom prst="rect">
+            <a:avLst/>
+          </a:prstGeom>
+          <a:solidFill>
+            <a:srgbClr val="FFFFFF"/>
+          </a:solidFill>
+          <a:ln>
+            <a:noFill/>
+          </a:ln>
+        </p:spPr>
+        <p:style>
+          <a:lnRef idx="1">
+            <a:schemeClr val="accent1"/>
+          </a:lnRef>
+          <a:fillRef idx="3">
+            <a:schemeClr val="accent1"/>
+          </a:fillRef>
+          <a:effectRef idx="2">
+            <a:schemeClr val="accent1"/>
+          </a:effectRef>
+          <a:fontRef idx="minor">
+            <a:schemeClr val="lt1"/>
+          </a:fontRef>
+        </p:style>
+        <p:txBody>
+          <a:bodyPr rtlCol="0" anchor="ctr"/>
+          <a:lstStyle/>
+          <a:p>
+            <a:pPr algn="ctr"/>
           </a:p>
         </p:txBody>
       </p:sp>
@@ -3298,8 +3306,8 @@
         </p:nvSpPr>
         <p:spPr>
           <a:xfrm>
-            <a:off x="6032500" y="5016500"/>
-            <a:ext cx="2540000" cy="177800"/>
+            <a:off x="685800" y="5193792"/>
+            <a:ext cx="5408676" cy="201168"/>
           </a:xfrm>
           <a:prstGeom prst="rect">
             <a:avLst/>
@@ -3307,20 +3315,20 @@
           <a:noFill/>
         </p:spPr>
         <p:txBody>
-          <a:bodyPr wrap="square">
-            <a:normAutofit/>
+          <a:bodyPr wrap="none">
+            <a:spAutoFit/>
           </a:bodyPr>
           <a:lstStyle/>
           <a:p>
             <a:pPr algn="l"/>
             <a:r>
-              <a:rPr sz="900" b="0" i="0">
-                <a:solidFill>
-                  <a:srgbClr val="7B7FA0"/>
-                </a:solidFill>
-                <a:latin typeface="Courier New"/>
-              </a:rPr>
-              <a:t>ZIELSTUFE</a:t>
+              <a:rPr sz="700">
+                <a:solidFill>
+                  <a:srgbClr val="A0B4D2"/>
+                </a:solidFill>
+                <a:latin typeface="JetBrains Mono"/>
+              </a:rPr>
+              <a:t>KOMPETENZSTUFE</a:t>
             </a:r>
           </a:p>
         </p:txBody>
@@ -3333,8 +3341,8 @@
         </p:nvSpPr>
         <p:spPr>
           <a:xfrm>
-            <a:off x="6032500" y="5207000"/>
-            <a:ext cx="2540000" cy="508000"/>
+            <a:off x="685800" y="5394960"/>
+            <a:ext cx="5408676" cy="320040"/>
           </a:xfrm>
           <a:prstGeom prst="rect">
             <a:avLst/>
@@ -3343,17 +3351,17 @@
         </p:spPr>
         <p:txBody>
           <a:bodyPr wrap="square">
-            <a:normAutofit/>
+            <a:spAutoFit/>
           </a:bodyPr>
           <a:lstStyle/>
           <a:p>
             <a:pPr algn="l"/>
             <a:r>
-              <a:rPr sz="1400" b="0" i="0">
-                <a:solidFill>
-                  <a:srgbClr val="191D2E"/>
-                </a:solidFill>
-                <a:latin typeface="Georgia"/>
+              <a:rPr sz="1100" b="0" i="0">
+                <a:solidFill>
+                  <a:srgbClr val="FFFFFF"/>
+                </a:solidFill>
+                <a:latin typeface="Arial"/>
               </a:rPr>
               <a:t>Stratege</a:t>
             </a:r>
@@ -3368,8 +3376,8 @@
         </p:nvSpPr>
         <p:spPr>
           <a:xfrm>
-            <a:off x="8890000" y="5016500"/>
-            <a:ext cx="2667000" cy="177800"/>
+            <a:off x="6094476" y="5193792"/>
+            <a:ext cx="5408676" cy="201168"/>
           </a:xfrm>
           <a:prstGeom prst="rect">
             <a:avLst/>
@@ -3377,20 +3385,20 @@
           <a:noFill/>
         </p:spPr>
         <p:txBody>
-          <a:bodyPr wrap="square">
-            <a:normAutofit/>
+          <a:bodyPr wrap="none">
+            <a:spAutoFit/>
           </a:bodyPr>
           <a:lstStyle/>
           <a:p>
             <a:pPr algn="l"/>
             <a:r>
-              <a:rPr sz="900" b="0" i="0">
-                <a:solidFill>
-                  <a:srgbClr val="7B7FA0"/>
-                </a:solidFill>
-                <a:latin typeface="Courier New"/>
-              </a:rPr>
-              <a:t>DAUER</a:t>
+              <a:rPr sz="700">
+                <a:solidFill>
+                  <a:srgbClr val="A0B4D2"/>
+                </a:solidFill>
+                <a:latin typeface="JetBrains Mono"/>
+              </a:rPr>
+              <a:t>VERSION</a:t>
             </a:r>
           </a:p>
         </p:txBody>
@@ -3403,8 +3411,8 @@
         </p:nvSpPr>
         <p:spPr>
           <a:xfrm>
-            <a:off x="8890000" y="5207000"/>
-            <a:ext cx="2667000" cy="508000"/>
+            <a:off x="6094476" y="5394960"/>
+            <a:ext cx="5408676" cy="320040"/>
           </a:xfrm>
           <a:prstGeom prst="rect">
             <a:avLst/>
@@ -3413,19 +3421,132 @@
         </p:spPr>
         <p:txBody>
           <a:bodyPr wrap="square">
-            <a:normAutofit/>
+            <a:spAutoFit/>
           </a:bodyPr>
           <a:lstStyle/>
           <a:p>
             <a:pPr algn="l"/>
             <a:r>
-              <a:rPr sz="1400" b="0" i="0">
-                <a:solidFill>
-                  <a:srgbClr val="191D2E"/>
-                </a:solidFill>
-                <a:latin typeface="Georgia"/>
-              </a:rPr>
-              <a:t>1 Tag + 3 Monatsrunden</a:t>
+              <a:rPr sz="1100" b="0" i="0">
+                <a:solidFill>
+                  <a:srgbClr val="FFFFFF"/>
+                </a:solidFill>
+                <a:latin typeface="Arial"/>
+              </a:rPr>
+              <a:t>v0.4</a:t>
+            </a:r>
+          </a:p>
+        </p:txBody>
+      </p:sp>
+      <p:sp>
+        <p:nvSpPr>
+          <p:cNvPr id="11" name="Rectangle 10"/>
+          <p:cNvSpPr/>
+          <p:nvPr/>
+        </p:nvSpPr>
+        <p:spPr>
+          <a:xfrm>
+            <a:off x="0" y="6510528"/>
+            <a:ext cx="12188952" cy="347472"/>
+          </a:xfrm>
+          <a:prstGeom prst="rect">
+            <a:avLst/>
+          </a:prstGeom>
+          <a:solidFill>
+            <a:srgbClr val="0A1937"/>
+          </a:solidFill>
+          <a:ln>
+            <a:noFill/>
+          </a:ln>
+        </p:spPr>
+        <p:style>
+          <a:lnRef idx="1">
+            <a:schemeClr val="accent1"/>
+          </a:lnRef>
+          <a:fillRef idx="3">
+            <a:schemeClr val="accent1"/>
+          </a:fillRef>
+          <a:effectRef idx="2">
+            <a:schemeClr val="accent1"/>
+          </a:effectRef>
+          <a:fontRef idx="minor">
+            <a:schemeClr val="lt1"/>
+          </a:fontRef>
+        </p:style>
+        <p:txBody>
+          <a:bodyPr rtlCol="0" anchor="ctr"/>
+          <a:lstStyle/>
+          <a:p>
+            <a:pPr algn="ctr"/>
+          </a:p>
+        </p:txBody>
+      </p:sp>
+      <p:sp>
+        <p:nvSpPr>
+          <p:cNvPr id="12" name="TextBox 11"/>
+          <p:cNvSpPr txBox="1"/>
+          <p:nvPr/>
+        </p:nvSpPr>
+        <p:spPr>
+          <a:xfrm>
+            <a:off x="685800" y="6583680"/>
+            <a:ext cx="5408676" cy="256032"/>
+          </a:xfrm>
+          <a:prstGeom prst="rect">
+            <a:avLst/>
+          </a:prstGeom>
+          <a:noFill/>
+        </p:spPr>
+        <p:txBody>
+          <a:bodyPr wrap="none">
+            <a:spAutoFit/>
+          </a:bodyPr>
+          <a:lstStyle/>
+          <a:p>
+            <a:pPr algn="l"/>
+            <a:r>
+              <a:rPr sz="700">
+                <a:solidFill>
+                  <a:srgbClr val="96A5BE"/>
+                </a:solidFill>
+                <a:latin typeface="JetBrains Mono"/>
+              </a:rPr>
+              <a:t>Benedikt Zoller Coaching  ·  FKB Campus  ·  2026</a:t>
+            </a:r>
+          </a:p>
+        </p:txBody>
+      </p:sp>
+      <p:sp>
+        <p:nvSpPr>
+          <p:cNvPr id="13" name="TextBox 12"/>
+          <p:cNvSpPr txBox="1"/>
+          <p:nvPr/>
+        </p:nvSpPr>
+        <p:spPr>
+          <a:xfrm>
+            <a:off x="6094476" y="6583680"/>
+            <a:ext cx="5408676" cy="256032"/>
+          </a:xfrm>
+          <a:prstGeom prst="rect">
+            <a:avLst/>
+          </a:prstGeom>
+          <a:noFill/>
+        </p:spPr>
+        <p:txBody>
+          <a:bodyPr wrap="none">
+            <a:spAutoFit/>
+          </a:bodyPr>
+          <a:lstStyle/>
+          <a:p>
+            <a:pPr algn="r"/>
+            <a:r>
+              <a:rPr sz="700">
+                <a:solidFill>
+                  <a:srgbClr val="96A5BE"/>
+                </a:solidFill>
+                <a:latin typeface="JetBrains Mono"/>
+              </a:rPr>
+              <a:t>Trainer-Präsentation</a:t>
             </a:r>
           </a:p>
         </p:txBody>
@@ -3441,14 +3562,6 @@
 <file path=ppt/slides/slide10.xml><?xml version="1.0" encoding="utf-8"?>
 <p:sld xmlns:a="http://schemas.openxmlformats.org/drawingml/2006/main" xmlns:p="http://schemas.openxmlformats.org/presentationml/2006/main" xmlns:r="http://schemas.openxmlformats.org/officeDocument/2006/relationships">
   <p:cSld>
-    <p:bg>
-      <p:bgPr>
-        <a:solidFill>
-          <a:srgbClr val="F8F8FA"/>
-        </a:solidFill>
-        <a:effectLst/>
-      </p:bgPr>
-    </p:bg>
     <p:spTree>
       <p:nvGrpSpPr>
         <p:cNvPr id="1" name=""/>
@@ -3458,125 +3571,20 @@
       <p:grpSpPr/>
       <p:sp>
         <p:nvSpPr>
-          <p:cNvPr id="2" name="TextBox 1"/>
-          <p:cNvSpPr txBox="1"/>
-          <p:nvPr/>
-        </p:nvSpPr>
-        <p:spPr>
-          <a:xfrm>
-            <a:off x="609600" y="279400"/>
-            <a:ext cx="2540000" cy="279400"/>
-          </a:xfrm>
-          <a:prstGeom prst="rect">
-            <a:avLst/>
-          </a:prstGeom>
-          <a:noFill/>
-        </p:spPr>
-        <p:txBody>
-          <a:bodyPr wrap="square">
-            <a:normAutofit/>
-          </a:bodyPr>
-          <a:lstStyle/>
-          <a:p>
-            <a:pPr algn="l"/>
-            <a:r>
-              <a:rPr sz="1000" b="1" i="0">
-                <a:solidFill>
-                  <a:srgbClr val="191D2E"/>
-                </a:solidFill>
-                <a:latin typeface="Arial"/>
-              </a:rPr>
-              <a:t>FKB  Campus</a:t>
-            </a:r>
-          </a:p>
-        </p:txBody>
-      </p:sp>
-      <p:sp>
-        <p:nvSpPr>
-          <p:cNvPr id="3" name="TextBox 2"/>
-          <p:cNvSpPr txBox="1"/>
-          <p:nvPr/>
-        </p:nvSpPr>
-        <p:spPr>
-          <a:xfrm>
-            <a:off x="609600" y="279400"/>
-            <a:ext cx="10972800" cy="279400"/>
-          </a:xfrm>
-          <a:prstGeom prst="rect">
-            <a:avLst/>
-          </a:prstGeom>
-          <a:noFill/>
-        </p:spPr>
-        <p:txBody>
-          <a:bodyPr wrap="square">
-            <a:normAutofit/>
-          </a:bodyPr>
-          <a:lstStyle/>
-          <a:p>
-            <a:pPr algn="r"/>
-            <a:r>
-              <a:rPr sz="900" b="0" i="0">
-                <a:solidFill>
-                  <a:srgbClr val="7B7FA0"/>
-                </a:solidFill>
-                <a:latin typeface="Courier New"/>
-              </a:rPr>
-              <a:t>III · IHR 3-MONATS-PLAN</a:t>
-            </a:r>
-          </a:p>
-        </p:txBody>
-      </p:sp>
-      <p:sp>
-        <p:nvSpPr>
-          <p:cNvPr id="4" name="TextBox 3"/>
-          <p:cNvSpPr txBox="1"/>
-          <p:nvPr/>
-        </p:nvSpPr>
-        <p:spPr>
-          <a:xfrm>
-            <a:off x="609600" y="6426200"/>
-            <a:ext cx="10972800" cy="228600"/>
-          </a:xfrm>
-          <a:prstGeom prst="rect">
-            <a:avLst/>
-          </a:prstGeom>
-          <a:noFill/>
-        </p:spPr>
-        <p:txBody>
-          <a:bodyPr wrap="square">
-            <a:normAutofit/>
-          </a:bodyPr>
-          <a:lstStyle/>
-          <a:p>
-            <a:pPr algn="r"/>
-            <a:r>
-              <a:rPr sz="900" b="0" i="0">
-                <a:solidFill>
-                  <a:srgbClr val="7B7FA0"/>
-                </a:solidFill>
-                <a:latin typeface="Courier New"/>
-              </a:rPr>
-              <a:t>10</a:t>
-            </a:r>
-          </a:p>
-        </p:txBody>
-      </p:sp>
-      <p:sp>
-        <p:nvSpPr>
-          <p:cNvPr id="5" name="Rectangle 4"/>
+          <p:cNvPr id="2" name="Rectangle 1"/>
           <p:cNvSpPr/>
           <p:nvPr/>
         </p:nvSpPr>
         <p:spPr>
           <a:xfrm>
-            <a:off x="609600" y="825500"/>
-            <a:ext cx="10972800" cy="6350"/>
+            <a:off x="0" y="0"/>
+            <a:ext cx="12188952" cy="6858000"/>
           </a:xfrm>
           <a:prstGeom prst="rect">
             <a:avLst/>
           </a:prstGeom>
           <a:solidFill>
-            <a:srgbClr val="191D2E"/>
+            <a:srgbClr val="EDEDF3"/>
           </a:solidFill>
           <a:ln>
             <a:noFill/>
@@ -3606,55 +3614,20 @@
       </p:sp>
       <p:sp>
         <p:nvSpPr>
-          <p:cNvPr id="6" name="TextBox 5"/>
-          <p:cNvSpPr txBox="1"/>
-          <p:nvPr/>
-        </p:nvSpPr>
-        <p:spPr>
-          <a:xfrm>
-            <a:off x="609600" y="920750"/>
-            <a:ext cx="10972800" cy="1778000"/>
-          </a:xfrm>
-          <a:prstGeom prst="rect">
-            <a:avLst/>
-          </a:prstGeom>
-          <a:noFill/>
-        </p:spPr>
-        <p:txBody>
-          <a:bodyPr wrap="square">
-            <a:normAutofit/>
-          </a:bodyPr>
-          <a:lstStyle/>
-          <a:p>
-            <a:pPr algn="l"/>
-            <a:r>
-              <a:rPr sz="3800" b="0" i="0">
-                <a:solidFill>
-                  <a:srgbClr val="191D2E"/>
-                </a:solidFill>
-                <a:latin typeface="Georgia"/>
-              </a:rPr>
-              <a:t>Monat 2–3: Netzwerk und Sichtbarkeit</a:t>
-            </a:r>
-          </a:p>
-        </p:txBody>
-      </p:sp>
-      <p:sp>
-        <p:nvSpPr>
-          <p:cNvPr id="7" name="Rectangle 6"/>
+          <p:cNvPr id="3" name="Rectangle 2"/>
           <p:cNvSpPr/>
           <p:nvPr/>
         </p:nvSpPr>
         <p:spPr>
           <a:xfrm>
-            <a:off x="609600" y="2762250"/>
-            <a:ext cx="10972800" cy="6350"/>
+            <a:off x="0" y="0"/>
+            <a:ext cx="12188952" cy="50292"/>
           </a:xfrm>
           <a:prstGeom prst="rect">
             <a:avLst/>
           </a:prstGeom>
           <a:solidFill>
-            <a:srgbClr val="E0E0E8"/>
+            <a:srgbClr val="1F2C56"/>
           </a:solidFill>
           <a:ln>
             <a:noFill/>
@@ -3684,14 +3657,170 @@
       </p:sp>
       <p:sp>
         <p:nvSpPr>
+          <p:cNvPr id="4" name="TextBox 3"/>
+          <p:cNvSpPr txBox="1"/>
+          <p:nvPr/>
+        </p:nvSpPr>
+        <p:spPr>
+          <a:xfrm>
+            <a:off x="685800" y="109728"/>
+            <a:ext cx="10817352" cy="228600"/>
+          </a:xfrm>
+          <a:prstGeom prst="rect">
+            <a:avLst/>
+          </a:prstGeom>
+          <a:noFill/>
+        </p:spPr>
+        <p:txBody>
+          <a:bodyPr wrap="none">
+            <a:spAutoFit/>
+          </a:bodyPr>
+          <a:lstStyle/>
+          <a:p>
+            <a:pPr algn="l"/>
+            <a:r>
+              <a:rPr sz="750">
+                <a:solidFill>
+                  <a:srgbClr val="78808C"/>
+                </a:solidFill>
+                <a:latin typeface="JetBrains Mono"/>
+              </a:rPr>
+              <a:t>M09  ·  INHALT</a:t>
+            </a:r>
+          </a:p>
+        </p:txBody>
+      </p:sp>
+      <p:sp>
+        <p:nvSpPr>
+          <p:cNvPr id="5" name="Rectangle 4"/>
+          <p:cNvSpPr/>
+          <p:nvPr/>
+        </p:nvSpPr>
+        <p:spPr>
+          <a:xfrm>
+            <a:off x="0" y="1234440"/>
+            <a:ext cx="12188952" cy="12700"/>
+          </a:xfrm>
+          <a:prstGeom prst="rect">
+            <a:avLst/>
+          </a:prstGeom>
+          <a:solidFill>
+            <a:srgbClr val="D8DFE4"/>
+          </a:solidFill>
+          <a:ln>
+            <a:noFill/>
+          </a:ln>
+        </p:spPr>
+        <p:style>
+          <a:lnRef idx="1">
+            <a:schemeClr val="accent1"/>
+          </a:lnRef>
+          <a:fillRef idx="3">
+            <a:schemeClr val="accent1"/>
+          </a:fillRef>
+          <a:effectRef idx="2">
+            <a:schemeClr val="accent1"/>
+          </a:effectRef>
+          <a:fontRef idx="minor">
+            <a:schemeClr val="lt1"/>
+          </a:fontRef>
+        </p:style>
+        <p:txBody>
+          <a:bodyPr rtlCol="0" anchor="ctr"/>
+          <a:lstStyle/>
+          <a:p>
+            <a:pPr algn="ctr"/>
+          </a:p>
+        </p:txBody>
+      </p:sp>
+      <p:sp>
+        <p:nvSpPr>
+          <p:cNvPr id="6" name="Rectangle 5"/>
+          <p:cNvSpPr/>
+          <p:nvPr/>
+        </p:nvSpPr>
+        <p:spPr>
+          <a:xfrm>
+            <a:off x="685800" y="502920"/>
+            <a:ext cx="36576" cy="658368"/>
+          </a:xfrm>
+          <a:prstGeom prst="rect">
+            <a:avLst/>
+          </a:prstGeom>
+          <a:solidFill>
+            <a:srgbClr val="D9C089"/>
+          </a:solidFill>
+          <a:ln>
+            <a:noFill/>
+          </a:ln>
+        </p:spPr>
+        <p:style>
+          <a:lnRef idx="1">
+            <a:schemeClr val="accent1"/>
+          </a:lnRef>
+          <a:fillRef idx="3">
+            <a:schemeClr val="accent1"/>
+          </a:fillRef>
+          <a:effectRef idx="2">
+            <a:schemeClr val="accent1"/>
+          </a:effectRef>
+          <a:fontRef idx="minor">
+            <a:schemeClr val="lt1"/>
+          </a:fontRef>
+        </p:style>
+        <p:txBody>
+          <a:bodyPr rtlCol="0" anchor="ctr"/>
+          <a:lstStyle/>
+          <a:p>
+            <a:pPr algn="ctr"/>
+          </a:p>
+        </p:txBody>
+      </p:sp>
+      <p:sp>
+        <p:nvSpPr>
+          <p:cNvPr id="7" name="TextBox 6"/>
+          <p:cNvSpPr txBox="1"/>
+          <p:nvPr/>
+        </p:nvSpPr>
+        <p:spPr>
+          <a:xfrm>
+            <a:off x="813816" y="502920"/>
+            <a:ext cx="10634472" cy="685800"/>
+          </a:xfrm>
+          <a:prstGeom prst="rect">
+            <a:avLst/>
+          </a:prstGeom>
+          <a:noFill/>
+        </p:spPr>
+        <p:txBody>
+          <a:bodyPr wrap="square">
+            <a:spAutoFit/>
+          </a:bodyPr>
+          <a:lstStyle/>
+          <a:p>
+            <a:pPr algn="l"/>
+            <a:r>
+              <a:rPr sz="2400" b="1" i="0">
+                <a:solidFill>
+                  <a:srgbClr val="1F2C56"/>
+                </a:solidFill>
+                <a:latin typeface="Source Serif 4"/>
+              </a:rPr>
+              <a:t>Arbeitsblatt A: Branchenanalyse – Five Forces Scoring</a:t>
+            </a:r>
+          </a:p>
+        </p:txBody>
+      </p:sp>
+      <p:sp>
+        <p:nvSpPr>
           <p:cNvPr id="8" name="TextBox 7"/>
           <p:cNvSpPr txBox="1"/>
           <p:nvPr/>
         </p:nvSpPr>
         <p:spPr>
           <a:xfrm>
-            <a:off x="609600" y="2851150"/>
-            <a:ext cx="10972800" cy="3448050"/>
+            <a:off x="685800" y="1417320"/>
+            <a:ext cx="10817352" cy="5029200"/>
           </a:xfrm>
           <a:prstGeom prst="rect">
             <a:avLst/>
@@ -3700,102 +3829,161 @@
         </p:spPr>
         <p:txBody>
           <a:bodyPr wrap="square">
-            <a:normAutofit/>
+            <a:spAutoFit/>
           </a:bodyPr>
           <a:lstStyle/>
           <a:p>
             <a:pPr>
               <a:spcBef>
-                <a:spcPts val="600"/>
+                <a:spcPts val="400"/>
               </a:spcBef>
               <a:spcAft>
-                <a:spcPts val="600"/>
+                <a:spcPts val="200"/>
               </a:spcAft>
             </a:pPr>
             <a:r>
-              <a:rPr sz="1400">
-                <a:solidFill>
-                  <a:srgbClr val="191D2E"/>
-                </a:solidFill>
-                <a:latin typeface="Georgia"/>
-              </a:rPr>
-              <a:t>–  Branchenverbands-Veranstaltung besuchen</a:t>
+              <a:rPr sz="1200">
+                <a:solidFill>
+                  <a:srgbClr val="3D5466"/>
+                </a:solidFill>
+                <a:latin typeface="Arial"/>
+              </a:rPr>
+              <a:t>Meine Zielbranche: ___________________________</a:t>
             </a:r>
           </a:p>
           <a:p>
             <a:pPr>
               <a:spcBef>
-                <a:spcPts val="600"/>
+                <a:spcPts val="400"/>
               </a:spcBef>
               <a:spcAft>
-                <a:spcPts val="600"/>
+                <a:spcPts val="200"/>
               </a:spcAft>
             </a:pPr>
             <a:r>
-              <a:rPr sz="1400">
-                <a:solidFill>
-                  <a:srgbClr val="191D2E"/>
-                </a:solidFill>
-                <a:latin typeface="Georgia"/>
-              </a:rPr>
-              <a:t>–  Einen Steuerberater der Branche als Kooperationspartner ansprechen</a:t>
+              <a:rPr sz="1200">
+                <a:solidFill>
+                  <a:srgbClr val="3D5466"/>
+                </a:solidFill>
+                <a:latin typeface="Arial"/>
+              </a:rPr>
+              <a:t>Bewertungslogik: 1 = schwach / kaum relevant · 5 = stark / hochrelevant</a:t>
             </a:r>
           </a:p>
           <a:p>
             <a:pPr>
               <a:spcBef>
-                <a:spcPts val="600"/>
+                <a:spcPts val="400"/>
               </a:spcBef>
               <a:spcAft>
-                <a:spcPts val="600"/>
+                <a:spcPts val="200"/>
               </a:spcAft>
             </a:pPr>
             <a:r>
-              <a:rPr sz="1400">
-                <a:solidFill>
-                  <a:srgbClr val="191D2E"/>
-                </a:solidFill>
-                <a:latin typeface="Georgia"/>
-              </a:rPr>
-              <a:t>–  Fachpresse verfolgen: Google Alerts einrichten</a:t>
+              <a:rPr sz="1200">
+                <a:solidFill>
+                  <a:srgbClr val="3D5466"/>
+                </a:solidFill>
+                <a:latin typeface="Arial"/>
+              </a:rPr>
+              <a:t>Wichtigste Erkenntnis aus dieser Analyse:</a:t>
             </a:r>
           </a:p>
           <a:p>
             <a:pPr>
               <a:spcBef>
-                <a:spcPts val="600"/>
+                <a:spcPts val="400"/>
               </a:spcBef>
               <a:spcAft>
-                <a:spcPts val="600"/>
+                <a:spcPts val="200"/>
               </a:spcAft>
             </a:pPr>
             <a:r>
-              <a:rPr sz="1400">
-                <a:solidFill>
-                  <a:srgbClr val="191D2E"/>
-                </a:solidFill>
-                <a:latin typeface="Georgia"/>
-              </a:rPr>
-              <a:t>–  Intern: Wissenstransfer — Erkenntnisse im Teammeeting teilen</a:t>
-            </a:r>
-          </a:p>
-          <a:p>
-            <a:pPr>
-              <a:spcBef>
-                <a:spcPts val="600"/>
-              </a:spcBef>
-              <a:spcAft>
-                <a:spcPts val="600"/>
-              </a:spcAft>
-            </a:pPr>
-            <a:r>
-              <a:rPr sz="1400">
-                <a:solidFill>
-                  <a:srgbClr val="191D2E"/>
-                </a:solidFill>
-                <a:latin typeface="Georgia"/>
-              </a:rPr>
-              <a:t>–  Extern: Kurzes Fachgespräch bei Kunden platzieren</a:t>
+              <a:rPr sz="1200">
+                <a:solidFill>
+                  <a:srgbClr val="3D5466"/>
+                </a:solidFill>
+                <a:latin typeface="Arial"/>
+              </a:rPr>
+              <a:t>___________________________________________________________________________</a:t>
+            </a:r>
+          </a:p>
+        </p:txBody>
+      </p:sp>
+      <p:sp>
+        <p:nvSpPr>
+          <p:cNvPr id="9" name="Rectangle 8"/>
+          <p:cNvSpPr/>
+          <p:nvPr/>
+        </p:nvSpPr>
+        <p:spPr>
+          <a:xfrm>
+            <a:off x="0" y="6510528"/>
+            <a:ext cx="12188952" cy="347472"/>
+          </a:xfrm>
+          <a:prstGeom prst="rect">
+            <a:avLst/>
+          </a:prstGeom>
+          <a:solidFill>
+            <a:srgbClr val="0A1937"/>
+          </a:solidFill>
+          <a:ln>
+            <a:noFill/>
+          </a:ln>
+        </p:spPr>
+        <p:style>
+          <a:lnRef idx="1">
+            <a:schemeClr val="accent1"/>
+          </a:lnRef>
+          <a:fillRef idx="3">
+            <a:schemeClr val="accent1"/>
+          </a:fillRef>
+          <a:effectRef idx="2">
+            <a:schemeClr val="accent1"/>
+          </a:effectRef>
+          <a:fontRef idx="minor">
+            <a:schemeClr val="lt1"/>
+          </a:fontRef>
+        </p:style>
+        <p:txBody>
+          <a:bodyPr rtlCol="0" anchor="ctr"/>
+          <a:lstStyle/>
+          <a:p>
+            <a:pPr algn="ctr"/>
+          </a:p>
+        </p:txBody>
+      </p:sp>
+      <p:sp>
+        <p:nvSpPr>
+          <p:cNvPr id="10" name="TextBox 9"/>
+          <p:cNvSpPr txBox="1"/>
+          <p:nvPr/>
+        </p:nvSpPr>
+        <p:spPr>
+          <a:xfrm>
+            <a:off x="685800" y="6583680"/>
+            <a:ext cx="6490411" cy="256032"/>
+          </a:xfrm>
+          <a:prstGeom prst="rect">
+            <a:avLst/>
+          </a:prstGeom>
+          <a:noFill/>
+        </p:spPr>
+        <p:txBody>
+          <a:bodyPr wrap="none">
+            <a:spAutoFit/>
+          </a:bodyPr>
+          <a:lstStyle/>
+          <a:p>
+            <a:pPr algn="l"/>
+            <a:r>
+              <a:rPr sz="700">
+                <a:solidFill>
+                  <a:srgbClr val="A0B4D2"/>
+                </a:solidFill>
+                <a:latin typeface="JetBrains Mono"/>
+              </a:rPr>
+              <a:t>Benedikt Zoller Coaching  ·  FKB Campus  ·  M09</a:t>
             </a:r>
           </a:p>
         </p:txBody>
@@ -3811,14 +3999,6 @@
 <file path=ppt/slides/slide11.xml><?xml version="1.0" encoding="utf-8"?>
 <p:sld xmlns:a="http://schemas.openxmlformats.org/drawingml/2006/main" xmlns:p="http://schemas.openxmlformats.org/presentationml/2006/main" xmlns:r="http://schemas.openxmlformats.org/officeDocument/2006/relationships">
   <p:cSld>
-    <p:bg>
-      <p:bgPr>
-        <a:solidFill>
-          <a:srgbClr val="F8F8FA"/>
-        </a:solidFill>
-        <a:effectLst/>
-      </p:bgPr>
-    </p:bg>
     <p:spTree>
       <p:nvGrpSpPr>
         <p:cNvPr id="1" name=""/>
@@ -3828,125 +4008,20 @@
       <p:grpSpPr/>
       <p:sp>
         <p:nvSpPr>
-          <p:cNvPr id="2" name="TextBox 1"/>
-          <p:cNvSpPr txBox="1"/>
-          <p:nvPr/>
-        </p:nvSpPr>
-        <p:spPr>
-          <a:xfrm>
-            <a:off x="609600" y="279400"/>
-            <a:ext cx="2540000" cy="279400"/>
-          </a:xfrm>
-          <a:prstGeom prst="rect">
-            <a:avLst/>
-          </a:prstGeom>
-          <a:noFill/>
-        </p:spPr>
-        <p:txBody>
-          <a:bodyPr wrap="square">
-            <a:normAutofit/>
-          </a:bodyPr>
-          <a:lstStyle/>
-          <a:p>
-            <a:pPr algn="l"/>
-            <a:r>
-              <a:rPr sz="1000" b="1" i="0">
-                <a:solidFill>
-                  <a:srgbClr val="191D2E"/>
-                </a:solidFill>
-                <a:latin typeface="Arial"/>
-              </a:rPr>
-              <a:t>FKB  Campus</a:t>
-            </a:r>
-          </a:p>
-        </p:txBody>
-      </p:sp>
-      <p:sp>
-        <p:nvSpPr>
-          <p:cNvPr id="3" name="TextBox 2"/>
-          <p:cNvSpPr txBox="1"/>
-          <p:nvPr/>
-        </p:nvSpPr>
-        <p:spPr>
-          <a:xfrm>
-            <a:off x="609600" y="279400"/>
-            <a:ext cx="10972800" cy="279400"/>
-          </a:xfrm>
-          <a:prstGeom prst="rect">
-            <a:avLst/>
-          </a:prstGeom>
-          <a:noFill/>
-        </p:spPr>
-        <p:txBody>
-          <a:bodyPr wrap="square">
-            <a:normAutofit/>
-          </a:bodyPr>
-          <a:lstStyle/>
-          <a:p>
-            <a:pPr algn="r"/>
-            <a:r>
-              <a:rPr sz="900" b="0" i="0">
-                <a:solidFill>
-                  <a:srgbClr val="7B7FA0"/>
-                </a:solidFill>
-                <a:latin typeface="Courier New"/>
-              </a:rPr>
-              <a:t>III · IHR 3-MONATS-PLAN</a:t>
-            </a:r>
-          </a:p>
-        </p:txBody>
-      </p:sp>
-      <p:sp>
-        <p:nvSpPr>
-          <p:cNvPr id="4" name="TextBox 3"/>
-          <p:cNvSpPr txBox="1"/>
-          <p:nvPr/>
-        </p:nvSpPr>
-        <p:spPr>
-          <a:xfrm>
-            <a:off x="609600" y="6426200"/>
-            <a:ext cx="10972800" cy="228600"/>
-          </a:xfrm>
-          <a:prstGeom prst="rect">
-            <a:avLst/>
-          </a:prstGeom>
-          <a:noFill/>
-        </p:spPr>
-        <p:txBody>
-          <a:bodyPr wrap="square">
-            <a:normAutofit/>
-          </a:bodyPr>
-          <a:lstStyle/>
-          <a:p>
-            <a:pPr algn="r"/>
-            <a:r>
-              <a:rPr sz="900" b="0" i="0">
-                <a:solidFill>
-                  <a:srgbClr val="7B7FA0"/>
-                </a:solidFill>
-                <a:latin typeface="Courier New"/>
-              </a:rPr>
-              <a:t>11</a:t>
-            </a:r>
-          </a:p>
-        </p:txBody>
-      </p:sp>
-      <p:sp>
-        <p:nvSpPr>
-          <p:cNvPr id="5" name="Rectangle 4"/>
+          <p:cNvPr id="2" name="Rectangle 1"/>
           <p:cNvSpPr/>
           <p:nvPr/>
         </p:nvSpPr>
         <p:spPr>
           <a:xfrm>
-            <a:off x="609600" y="825500"/>
-            <a:ext cx="10972800" cy="6350"/>
+            <a:off x="0" y="0"/>
+            <a:ext cx="12188952" cy="6858000"/>
           </a:xfrm>
           <a:prstGeom prst="rect">
             <a:avLst/>
           </a:prstGeom>
           <a:solidFill>
-            <a:srgbClr val="191D2E"/>
+            <a:srgbClr val="EDEDF3"/>
           </a:solidFill>
           <a:ln>
             <a:noFill/>
@@ -3976,55 +4051,20 @@
       </p:sp>
       <p:sp>
         <p:nvSpPr>
-          <p:cNvPr id="6" name="TextBox 5"/>
-          <p:cNvSpPr txBox="1"/>
-          <p:nvPr/>
-        </p:nvSpPr>
-        <p:spPr>
-          <a:xfrm>
-            <a:off x="609600" y="920750"/>
-            <a:ext cx="10972800" cy="1778000"/>
-          </a:xfrm>
-          <a:prstGeom prst="rect">
-            <a:avLst/>
-          </a:prstGeom>
-          <a:noFill/>
-        </p:spPr>
-        <p:txBody>
-          <a:bodyPr wrap="square">
-            <a:normAutofit/>
-          </a:bodyPr>
-          <a:lstStyle/>
-          <a:p>
-            <a:pPr algn="l"/>
-            <a:r>
-              <a:rPr sz="3800" b="0" i="0">
-                <a:solidFill>
-                  <a:srgbClr val="191D2E"/>
-                </a:solidFill>
-                <a:latin typeface="Georgia"/>
-              </a:rPr>
-              <a:t>Ihr Auftrag: Jetzt starten</a:t>
-            </a:r>
-          </a:p>
-        </p:txBody>
-      </p:sp>
-      <p:sp>
-        <p:nvSpPr>
-          <p:cNvPr id="7" name="Rectangle 6"/>
+          <p:cNvPr id="3" name="Rectangle 2"/>
           <p:cNvSpPr/>
           <p:nvPr/>
         </p:nvSpPr>
         <p:spPr>
           <a:xfrm>
-            <a:off x="609600" y="2762250"/>
-            <a:ext cx="10972800" cy="6350"/>
+            <a:off x="0" y="0"/>
+            <a:ext cx="12188952" cy="50292"/>
           </a:xfrm>
           <a:prstGeom prst="rect">
             <a:avLst/>
           </a:prstGeom>
           <a:solidFill>
-            <a:srgbClr val="E0E0E8"/>
+            <a:srgbClr val="1F2C56"/>
           </a:solidFill>
           <a:ln>
             <a:noFill/>
@@ -4054,14 +4094,170 @@
       </p:sp>
       <p:sp>
         <p:nvSpPr>
+          <p:cNvPr id="4" name="TextBox 3"/>
+          <p:cNvSpPr txBox="1"/>
+          <p:nvPr/>
+        </p:nvSpPr>
+        <p:spPr>
+          <a:xfrm>
+            <a:off x="685800" y="109728"/>
+            <a:ext cx="10817352" cy="228600"/>
+          </a:xfrm>
+          <a:prstGeom prst="rect">
+            <a:avLst/>
+          </a:prstGeom>
+          <a:noFill/>
+        </p:spPr>
+        <p:txBody>
+          <a:bodyPr wrap="none">
+            <a:spAutoFit/>
+          </a:bodyPr>
+          <a:lstStyle/>
+          <a:p>
+            <a:pPr algn="l"/>
+            <a:r>
+              <a:rPr sz="750">
+                <a:solidFill>
+                  <a:srgbClr val="78808C"/>
+                </a:solidFill>
+                <a:latin typeface="JetBrains Mono"/>
+              </a:rPr>
+              <a:t>M09  ·  INHALT</a:t>
+            </a:r>
+          </a:p>
+        </p:txBody>
+      </p:sp>
+      <p:sp>
+        <p:nvSpPr>
+          <p:cNvPr id="5" name="Rectangle 4"/>
+          <p:cNvSpPr/>
+          <p:nvPr/>
+        </p:nvSpPr>
+        <p:spPr>
+          <a:xfrm>
+            <a:off x="0" y="1234440"/>
+            <a:ext cx="12188952" cy="12700"/>
+          </a:xfrm>
+          <a:prstGeom prst="rect">
+            <a:avLst/>
+          </a:prstGeom>
+          <a:solidFill>
+            <a:srgbClr val="D8DFE4"/>
+          </a:solidFill>
+          <a:ln>
+            <a:noFill/>
+          </a:ln>
+        </p:spPr>
+        <p:style>
+          <a:lnRef idx="1">
+            <a:schemeClr val="accent1"/>
+          </a:lnRef>
+          <a:fillRef idx="3">
+            <a:schemeClr val="accent1"/>
+          </a:fillRef>
+          <a:effectRef idx="2">
+            <a:schemeClr val="accent1"/>
+          </a:effectRef>
+          <a:fontRef idx="minor">
+            <a:schemeClr val="lt1"/>
+          </a:fontRef>
+        </p:style>
+        <p:txBody>
+          <a:bodyPr rtlCol="0" anchor="ctr"/>
+          <a:lstStyle/>
+          <a:p>
+            <a:pPr algn="ctr"/>
+          </a:p>
+        </p:txBody>
+      </p:sp>
+      <p:sp>
+        <p:nvSpPr>
+          <p:cNvPr id="6" name="Rectangle 5"/>
+          <p:cNvSpPr/>
+          <p:nvPr/>
+        </p:nvSpPr>
+        <p:spPr>
+          <a:xfrm>
+            <a:off x="685800" y="502920"/>
+            <a:ext cx="36576" cy="658368"/>
+          </a:xfrm>
+          <a:prstGeom prst="rect">
+            <a:avLst/>
+          </a:prstGeom>
+          <a:solidFill>
+            <a:srgbClr val="D9C089"/>
+          </a:solidFill>
+          <a:ln>
+            <a:noFill/>
+          </a:ln>
+        </p:spPr>
+        <p:style>
+          <a:lnRef idx="1">
+            <a:schemeClr val="accent1"/>
+          </a:lnRef>
+          <a:fillRef idx="3">
+            <a:schemeClr val="accent1"/>
+          </a:fillRef>
+          <a:effectRef idx="2">
+            <a:schemeClr val="accent1"/>
+          </a:effectRef>
+          <a:fontRef idx="minor">
+            <a:schemeClr val="lt1"/>
+          </a:fontRef>
+        </p:style>
+        <p:txBody>
+          <a:bodyPr rtlCol="0" anchor="ctr"/>
+          <a:lstStyle/>
+          <a:p>
+            <a:pPr algn="ctr"/>
+          </a:p>
+        </p:txBody>
+      </p:sp>
+      <p:sp>
+        <p:nvSpPr>
+          <p:cNvPr id="7" name="TextBox 6"/>
+          <p:cNvSpPr txBox="1"/>
+          <p:nvPr/>
+        </p:nvSpPr>
+        <p:spPr>
+          <a:xfrm>
+            <a:off x="813816" y="502920"/>
+            <a:ext cx="10634472" cy="685800"/>
+          </a:xfrm>
+          <a:prstGeom prst="rect">
+            <a:avLst/>
+          </a:prstGeom>
+          <a:noFill/>
+        </p:spPr>
+        <p:txBody>
+          <a:bodyPr wrap="square">
+            <a:spAutoFit/>
+          </a:bodyPr>
+          <a:lstStyle/>
+          <a:p>
+            <a:pPr algn="l"/>
+            <a:r>
+              <a:rPr sz="2400" b="1" i="0">
+                <a:solidFill>
+                  <a:srgbClr val="1F2C56"/>
+                </a:solidFill>
+                <a:latin typeface="Source Serif 4"/>
+              </a:rPr>
+              <a:t>Arbeitsblatt B: Mein 3-Monats-Expertiseplan</a:t>
+            </a:r>
+          </a:p>
+        </p:txBody>
+      </p:sp>
+      <p:sp>
+        <p:nvSpPr>
           <p:cNvPr id="8" name="TextBox 7"/>
           <p:cNvSpPr txBox="1"/>
           <p:nvPr/>
         </p:nvSpPr>
         <p:spPr>
           <a:xfrm>
-            <a:off x="609600" y="2851150"/>
-            <a:ext cx="10972800" cy="3448050"/>
+            <a:off x="685800" y="1417320"/>
+            <a:ext cx="10817352" cy="5029200"/>
           </a:xfrm>
           <a:prstGeom prst="rect">
             <a:avLst/>
@@ -4070,83 +4266,142 @@
         </p:spPr>
         <p:txBody>
           <a:bodyPr wrap="square">
-            <a:normAutofit/>
+            <a:spAutoFit/>
           </a:bodyPr>
           <a:lstStyle/>
           <a:p>
             <a:pPr>
               <a:spcBef>
-                <a:spcPts val="600"/>
+                <a:spcPts val="400"/>
               </a:spcBef>
               <a:spcAft>
-                <a:spcPts val="600"/>
+                <a:spcPts val="200"/>
               </a:spcAft>
             </a:pPr>
             <a:r>
-              <a:rPr sz="1400">
-                <a:solidFill>
-                  <a:srgbClr val="191D2E"/>
-                </a:solidFill>
-                <a:latin typeface="Georgia"/>
-              </a:rPr>
-              <a:t>–  Zielbranche festlegen — heute, nicht 'irgendwann'</a:t>
+              <a:rPr sz="1200">
+                <a:solidFill>
+                  <a:srgbClr val="3D5466"/>
+                </a:solidFill>
+                <a:latin typeface="Arial"/>
+              </a:rPr>
+              <a:t>Mein Zielsegment: ___________________________</a:t>
             </a:r>
           </a:p>
           <a:p>
             <a:pPr>
               <a:spcBef>
-                <a:spcPts val="600"/>
+                <a:spcPts val="400"/>
               </a:spcBef>
               <a:spcAft>
-                <a:spcPts val="600"/>
+                <a:spcPts val="200"/>
               </a:spcAft>
             </a:pPr>
             <a:r>
-              <a:rPr sz="1400">
-                <a:solidFill>
-                  <a:srgbClr val="191D2E"/>
-                </a:solidFill>
-                <a:latin typeface="Georgia"/>
-              </a:rPr>
-              <a:t>–  Ersten Analysebericht beschaffen (Bibliothek, IHK, kostenlos)</a:t>
+              <a:rPr sz="1200">
+                <a:solidFill>
+                  <a:srgbClr val="3D5466"/>
+                </a:solidFill>
+                <a:latin typeface="Arial"/>
+              </a:rPr>
+              <a:t>Meine Kernmotivation (Warum diese Branche?):</a:t>
             </a:r>
           </a:p>
           <a:p>
             <a:pPr>
               <a:spcBef>
-                <a:spcPts val="600"/>
+                <a:spcPts val="400"/>
               </a:spcBef>
               <a:spcAft>
-                <a:spcPts val="600"/>
+                <a:spcPts val="200"/>
               </a:spcAft>
             </a:pPr>
             <a:r>
-              <a:rPr sz="1400">
-                <a:solidFill>
-                  <a:srgbClr val="191D2E"/>
-                </a:solidFill>
-                <a:latin typeface="Georgia"/>
-              </a:rPr>
-              <a:t>–  Zwei Kundengespräche für diese Woche einplanen</a:t>
-            </a:r>
-          </a:p>
-          <a:p>
-            <a:pPr>
-              <a:spcBef>
-                <a:spcPts val="600"/>
-              </a:spcBef>
-              <a:spcAft>
-                <a:spcPts val="600"/>
-              </a:spcAft>
-            </a:pPr>
-            <a:r>
-              <a:rPr sz="1400">
-                <a:solidFill>
-                  <a:srgbClr val="191D2E"/>
-                </a:solidFill>
-                <a:latin typeface="Georgia"/>
-              </a:rPr>
-              <a:t>–  3-Monats-Plan schriftlich fixieren und mit Teamleiter besprechen</a:t>
+              <a:rPr sz="1200">
+                <a:solidFill>
+                  <a:srgbClr val="3D5466"/>
+                </a:solidFill>
+                <a:latin typeface="Arial"/>
+              </a:rPr>
+              <a:t>___________________________________________________________________________</a:t>
+            </a:r>
+          </a:p>
+        </p:txBody>
+      </p:sp>
+      <p:sp>
+        <p:nvSpPr>
+          <p:cNvPr id="9" name="Rectangle 8"/>
+          <p:cNvSpPr/>
+          <p:nvPr/>
+        </p:nvSpPr>
+        <p:spPr>
+          <a:xfrm>
+            <a:off x="0" y="6510528"/>
+            <a:ext cx="12188952" cy="347472"/>
+          </a:xfrm>
+          <a:prstGeom prst="rect">
+            <a:avLst/>
+          </a:prstGeom>
+          <a:solidFill>
+            <a:srgbClr val="0A1937"/>
+          </a:solidFill>
+          <a:ln>
+            <a:noFill/>
+          </a:ln>
+        </p:spPr>
+        <p:style>
+          <a:lnRef idx="1">
+            <a:schemeClr val="accent1"/>
+          </a:lnRef>
+          <a:fillRef idx="3">
+            <a:schemeClr val="accent1"/>
+          </a:fillRef>
+          <a:effectRef idx="2">
+            <a:schemeClr val="accent1"/>
+          </a:effectRef>
+          <a:fontRef idx="minor">
+            <a:schemeClr val="lt1"/>
+          </a:fontRef>
+        </p:style>
+        <p:txBody>
+          <a:bodyPr rtlCol="0" anchor="ctr"/>
+          <a:lstStyle/>
+          <a:p>
+            <a:pPr algn="ctr"/>
+          </a:p>
+        </p:txBody>
+      </p:sp>
+      <p:sp>
+        <p:nvSpPr>
+          <p:cNvPr id="10" name="TextBox 9"/>
+          <p:cNvSpPr txBox="1"/>
+          <p:nvPr/>
+        </p:nvSpPr>
+        <p:spPr>
+          <a:xfrm>
+            <a:off x="685800" y="6583680"/>
+            <a:ext cx="6490411" cy="256032"/>
+          </a:xfrm>
+          <a:prstGeom prst="rect">
+            <a:avLst/>
+          </a:prstGeom>
+          <a:noFill/>
+        </p:spPr>
+        <p:txBody>
+          <a:bodyPr wrap="none">
+            <a:spAutoFit/>
+          </a:bodyPr>
+          <a:lstStyle/>
+          <a:p>
+            <a:pPr algn="l"/>
+            <a:r>
+              <a:rPr sz="700">
+                <a:solidFill>
+                  <a:srgbClr val="A0B4D2"/>
+                </a:solidFill>
+                <a:latin typeface="JetBrains Mono"/>
+              </a:rPr>
+              <a:t>Benedikt Zoller Coaching  ·  FKB Campus  ·  M09</a:t>
             </a:r>
           </a:p>
         </p:txBody>
@@ -4162,14 +4417,6 @@
 <file path=ppt/slides/slide12.xml><?xml version="1.0" encoding="utf-8"?>
 <p:sld xmlns:a="http://schemas.openxmlformats.org/drawingml/2006/main" xmlns:p="http://schemas.openxmlformats.org/presentationml/2006/main" xmlns:r="http://schemas.openxmlformats.org/officeDocument/2006/relationships">
   <p:cSld>
-    <p:bg>
-      <p:bgPr>
-        <a:solidFill>
-          <a:srgbClr val="F8F8FA"/>
-        </a:solidFill>
-        <a:effectLst/>
-      </p:bgPr>
-    </p:bg>
     <p:spTree>
       <p:nvGrpSpPr>
         <p:cNvPr id="1" name=""/>
@@ -4179,126 +4426,20 @@
       <p:grpSpPr/>
       <p:sp>
         <p:nvSpPr>
-          <p:cNvPr id="2" name="TextBox 1"/>
-          <p:cNvSpPr txBox="1"/>
-          <p:nvPr/>
-        </p:nvSpPr>
-        <p:spPr>
-          <a:xfrm>
-            <a:off x="609600" y="457200"/>
-            <a:ext cx="3175000" cy="279400"/>
-          </a:xfrm>
-          <a:prstGeom prst="rect">
-            <a:avLst/>
-          </a:prstGeom>
-          <a:noFill/>
-        </p:spPr>
-        <p:txBody>
-          <a:bodyPr wrap="square">
-            <a:normAutofit/>
-          </a:bodyPr>
-          <a:lstStyle/>
-          <a:p>
-            <a:pPr algn="l"/>
-            <a:r>
-              <a:rPr sz="1000" b="1" i="0">
-                <a:solidFill>
-                  <a:srgbClr val="191D2E"/>
-                </a:solidFill>
-                <a:latin typeface="Arial"/>
-              </a:rPr>
-              <a:t>FKB  Campus</a:t>
-            </a:r>
-          </a:p>
-        </p:txBody>
-      </p:sp>
-      <p:sp>
-        <p:nvSpPr>
-          <p:cNvPr id="3" name="TextBox 2"/>
-          <p:cNvSpPr txBox="1"/>
-          <p:nvPr/>
-        </p:nvSpPr>
-        <p:spPr>
-          <a:xfrm>
-            <a:off x="609600" y="457200"/>
-            <a:ext cx="10972800" cy="279400"/>
-          </a:xfrm>
-          <a:prstGeom prst="rect">
-            <a:avLst/>
-          </a:prstGeom>
-          <a:noFill/>
-        </p:spPr>
-        <p:txBody>
-          <a:bodyPr wrap="square">
-            <a:normAutofit/>
-          </a:bodyPr>
-          <a:lstStyle/>
-          <a:p>
-            <a:pPr algn="r"/>
-            <a:r>
-              <a:rPr sz="900" b="0" i="0">
-                <a:solidFill>
-                  <a:srgbClr val="7B7FA0"/>
-                </a:solidFill>
-                <a:latin typeface="Courier New"/>
-              </a:rPr>
-              <a:t>Ende · v0.4</a:t>
-            </a:r>
-          </a:p>
-        </p:txBody>
-      </p:sp>
-      <p:sp>
-        <p:nvSpPr>
-          <p:cNvPr id="4" name="TextBox 3"/>
-          <p:cNvSpPr txBox="1"/>
-          <p:nvPr/>
-        </p:nvSpPr>
-        <p:spPr>
-          <a:xfrm>
-            <a:off x="609600" y="1143000"/>
-            <a:ext cx="10972800" cy="3556000"/>
-          </a:xfrm>
-          <a:prstGeom prst="rect">
-            <a:avLst/>
-          </a:prstGeom>
-          <a:noFill/>
-        </p:spPr>
-        <p:txBody>
-          <a:bodyPr wrap="square">
-            <a:normAutofit/>
-          </a:bodyPr>
-          <a:lstStyle/>
-          <a:p>
-            <a:pPr algn="l"/>
-            <a:r>
-              <a:rPr sz="9600" b="0" i="0">
-                <a:solidFill>
-                  <a:srgbClr val="191D2E"/>
-                </a:solidFill>
-                <a:latin typeface="Georgia"/>
-              </a:rPr>
-              <a:t>Danke.
-Fragen?</a:t>
-            </a:r>
-          </a:p>
-        </p:txBody>
-      </p:sp>
-      <p:sp>
-        <p:nvSpPr>
-          <p:cNvPr id="5" name="Rectangle 4"/>
+          <p:cNvPr id="2" name="Rectangle 1"/>
           <p:cNvSpPr/>
           <p:nvPr/>
         </p:nvSpPr>
         <p:spPr>
           <a:xfrm>
-            <a:off x="609600" y="4826000"/>
-            <a:ext cx="10972800" cy="6350"/>
+            <a:off x="0" y="0"/>
+            <a:ext cx="12188952" cy="6858000"/>
           </a:xfrm>
           <a:prstGeom prst="rect">
             <a:avLst/>
           </a:prstGeom>
           <a:solidFill>
-            <a:srgbClr val="191D2E"/>
+            <a:srgbClr val="EDEDF3"/>
           </a:solidFill>
           <a:ln>
             <a:noFill/>
@@ -4328,14 +4469,57 @@
       </p:sp>
       <p:sp>
         <p:nvSpPr>
-          <p:cNvPr id="6" name="TextBox 5"/>
+          <p:cNvPr id="3" name="Rectangle 2"/>
+          <p:cNvSpPr/>
+          <p:nvPr/>
+        </p:nvSpPr>
+        <p:spPr>
+          <a:xfrm>
+            <a:off x="0" y="0"/>
+            <a:ext cx="12188952" cy="50292"/>
+          </a:xfrm>
+          <a:prstGeom prst="rect">
+            <a:avLst/>
+          </a:prstGeom>
+          <a:solidFill>
+            <a:srgbClr val="1F2C56"/>
+          </a:solidFill>
+          <a:ln>
+            <a:noFill/>
+          </a:ln>
+        </p:spPr>
+        <p:style>
+          <a:lnRef idx="1">
+            <a:schemeClr val="accent1"/>
+          </a:lnRef>
+          <a:fillRef idx="3">
+            <a:schemeClr val="accent1"/>
+          </a:fillRef>
+          <a:effectRef idx="2">
+            <a:schemeClr val="accent1"/>
+          </a:effectRef>
+          <a:fontRef idx="minor">
+            <a:schemeClr val="lt1"/>
+          </a:fontRef>
+        </p:style>
+        <p:txBody>
+          <a:bodyPr rtlCol="0" anchor="ctr"/>
+          <a:lstStyle/>
+          <a:p>
+            <a:pPr algn="ctr"/>
+          </a:p>
+        </p:txBody>
+      </p:sp>
+      <p:sp>
+        <p:nvSpPr>
+          <p:cNvPr id="4" name="TextBox 3"/>
           <p:cNvSpPr txBox="1"/>
           <p:nvPr/>
         </p:nvSpPr>
         <p:spPr>
           <a:xfrm>
-            <a:off x="609600" y="4953000"/>
-            <a:ext cx="5715000" cy="1143000"/>
+            <a:off x="685800" y="109728"/>
+            <a:ext cx="10817352" cy="228600"/>
           </a:xfrm>
           <a:prstGeom prst="rect">
             <a:avLst/>
@@ -4343,21 +4527,107 @@
           <a:noFill/>
         </p:spPr>
         <p:txBody>
-          <a:bodyPr wrap="square">
-            <a:normAutofit/>
+          <a:bodyPr wrap="none">
+            <a:spAutoFit/>
           </a:bodyPr>
           <a:lstStyle/>
           <a:p>
             <a:pPr algn="l"/>
             <a:r>
-              <a:rPr sz="1400" b="0" i="1">
-                <a:solidFill>
-                  <a:srgbClr val="191D2E"/>
-                </a:solidFill>
-                <a:latin typeface="Georgia"/>
-              </a:rPr>
-              <a:t>Modul «Branchenexperte werden» auf FKB Campus — 6 Lernziele, Praxisfall und Quellenapparat.</a:t>
-            </a:r>
+              <a:rPr sz="750">
+                <a:solidFill>
+                  <a:srgbClr val="78808C"/>
+                </a:solidFill>
+                <a:latin typeface="JetBrains Mono"/>
+              </a:rPr>
+              <a:t>M09  ·  INHALT</a:t>
+            </a:r>
+          </a:p>
+        </p:txBody>
+      </p:sp>
+      <p:sp>
+        <p:nvSpPr>
+          <p:cNvPr id="5" name="Rectangle 4"/>
+          <p:cNvSpPr/>
+          <p:nvPr/>
+        </p:nvSpPr>
+        <p:spPr>
+          <a:xfrm>
+            <a:off x="0" y="1234440"/>
+            <a:ext cx="12188952" cy="12700"/>
+          </a:xfrm>
+          <a:prstGeom prst="rect">
+            <a:avLst/>
+          </a:prstGeom>
+          <a:solidFill>
+            <a:srgbClr val="D8DFE4"/>
+          </a:solidFill>
+          <a:ln>
+            <a:noFill/>
+          </a:ln>
+        </p:spPr>
+        <p:style>
+          <a:lnRef idx="1">
+            <a:schemeClr val="accent1"/>
+          </a:lnRef>
+          <a:fillRef idx="3">
+            <a:schemeClr val="accent1"/>
+          </a:fillRef>
+          <a:effectRef idx="2">
+            <a:schemeClr val="accent1"/>
+          </a:effectRef>
+          <a:fontRef idx="minor">
+            <a:schemeClr val="lt1"/>
+          </a:fontRef>
+        </p:style>
+        <p:txBody>
+          <a:bodyPr rtlCol="0" anchor="ctr"/>
+          <a:lstStyle/>
+          <a:p>
+            <a:pPr algn="ctr"/>
+          </a:p>
+        </p:txBody>
+      </p:sp>
+      <p:sp>
+        <p:nvSpPr>
+          <p:cNvPr id="6" name="Rectangle 5"/>
+          <p:cNvSpPr/>
+          <p:nvPr/>
+        </p:nvSpPr>
+        <p:spPr>
+          <a:xfrm>
+            <a:off x="685800" y="502920"/>
+            <a:ext cx="36576" cy="658368"/>
+          </a:xfrm>
+          <a:prstGeom prst="rect">
+            <a:avLst/>
+          </a:prstGeom>
+          <a:solidFill>
+            <a:srgbClr val="D9C089"/>
+          </a:solidFill>
+          <a:ln>
+            <a:noFill/>
+          </a:ln>
+        </p:spPr>
+        <p:style>
+          <a:lnRef idx="1">
+            <a:schemeClr val="accent1"/>
+          </a:lnRef>
+          <a:fillRef idx="3">
+            <a:schemeClr val="accent1"/>
+          </a:fillRef>
+          <a:effectRef idx="2">
+            <a:schemeClr val="accent1"/>
+          </a:effectRef>
+          <a:fontRef idx="minor">
+            <a:schemeClr val="lt1"/>
+          </a:fontRef>
+        </p:style>
+        <p:txBody>
+          <a:bodyPr rtlCol="0" anchor="ctr"/>
+          <a:lstStyle/>
+          <a:p>
+            <a:pPr algn="ctr"/>
           </a:p>
         </p:txBody>
       </p:sp>
@@ -4369,8 +4639,8 @@
         </p:nvSpPr>
         <p:spPr>
           <a:xfrm>
-            <a:off x="6731000" y="4953000"/>
-            <a:ext cx="2413000" cy="177800"/>
+            <a:off x="813816" y="502920"/>
+            <a:ext cx="10634472" cy="685800"/>
           </a:xfrm>
           <a:prstGeom prst="rect">
             <a:avLst/>
@@ -4379,19 +4649,19 @@
         </p:spPr>
         <p:txBody>
           <a:bodyPr wrap="square">
-            <a:normAutofit/>
+            <a:spAutoFit/>
           </a:bodyPr>
           <a:lstStyle/>
           <a:p>
             <a:pPr algn="l"/>
             <a:r>
-              <a:rPr sz="900" b="0" i="0">
-                <a:solidFill>
-                  <a:srgbClr val="7B7FA0"/>
-                </a:solidFill>
-                <a:latin typeface="Courier New"/>
-              </a:rPr>
-              <a:t>Trainer</a:t>
+              <a:rPr sz="2400" b="1" i="0">
+                <a:solidFill>
+                  <a:srgbClr val="1F2C56"/>
+                </a:solidFill>
+                <a:latin typeface="Source Serif 4"/>
+              </a:rPr>
+              <a:t>Arbeitsblatt C: Strukturiertes Branchengespräch – Protokollvorlage</a:t>
             </a:r>
           </a:p>
         </p:txBody>
@@ -4404,8 +4674,8 @@
         </p:nvSpPr>
         <p:spPr>
           <a:xfrm>
-            <a:off x="6731000" y="5156200"/>
-            <a:ext cx="2413000" cy="381000"/>
+            <a:off x="685800" y="1417320"/>
+            <a:ext cx="10817352" cy="5029200"/>
           </a:xfrm>
           <a:prstGeom prst="rect">
             <a:avLst/>
@@ -4414,55 +4684,279 @@
         </p:spPr>
         <p:txBody>
           <a:bodyPr wrap="square">
-            <a:normAutofit/>
+            <a:spAutoFit/>
           </a:bodyPr>
           <a:lstStyle/>
           <a:p>
-            <a:pPr algn="l"/>
-            <a:r>
-              <a:rPr sz="1400" b="0" i="0">
-                <a:solidFill>
-                  <a:srgbClr val="4D5270"/>
-                </a:solidFill>
-                <a:latin typeface="Georgia"/>
-              </a:rPr>
-              <a:t>[Name · Kontakt]</a:t>
-            </a:r>
-          </a:p>
-        </p:txBody>
-      </p:sp>
-      <p:sp>
-        <p:nvSpPr>
-          <p:cNvPr id="9" name="TextBox 8"/>
-          <p:cNvSpPr txBox="1"/>
-          <p:nvPr/>
-        </p:nvSpPr>
-        <p:spPr>
-          <a:xfrm>
-            <a:off x="9398000" y="4953000"/>
-            <a:ext cx="2184400" cy="177800"/>
-          </a:xfrm>
-          <a:prstGeom prst="rect">
-            <a:avLst/>
-          </a:prstGeom>
-          <a:noFill/>
-        </p:spPr>
-        <p:txBody>
-          <a:bodyPr wrap="square">
-            <a:normAutofit/>
-          </a:bodyPr>
-          <a:lstStyle/>
-          <a:p>
-            <a:pPr algn="l"/>
-            <a:r>
-              <a:rPr sz="900" b="0" i="0">
-                <a:solidFill>
-                  <a:srgbClr val="7B7FA0"/>
-                </a:solidFill>
-                <a:latin typeface="Courier New"/>
-              </a:rPr>
-              <a:t>Modul</a:t>
-            </a:r>
+            <a:pPr>
+              <a:spcBef>
+                <a:spcPts val="400"/>
+              </a:spcBef>
+              <a:spcAft>
+                <a:spcPts val="200"/>
+              </a:spcAft>
+            </a:pPr>
+            <a:r>
+              <a:rPr sz="1200">
+                <a:solidFill>
+                  <a:srgbClr val="3D5466"/>
+                </a:solidFill>
+                <a:latin typeface="Arial"/>
+              </a:rPr>
+              <a:t>Datum: _______________  Kunde/Unternehmen: ___________________________</a:t>
+            </a:r>
+          </a:p>
+          <a:p>
+            <a:pPr>
+              <a:spcBef>
+                <a:spcPts val="400"/>
+              </a:spcBef>
+              <a:spcAft>
+                <a:spcPts val="200"/>
+              </a:spcAft>
+            </a:pPr>
+            <a:r>
+              <a:rPr sz="1200">
+                <a:solidFill>
+                  <a:srgbClr val="3D5466"/>
+                </a:solidFill>
+                <a:latin typeface="Arial"/>
+              </a:rPr>
+              <a:t>Branche: _______________  Berater: ___________________________</a:t>
+            </a:r>
+          </a:p>
+          <a:p>
+            <a:pPr>
+              <a:spcBef>
+                <a:spcPts val="400"/>
+              </a:spcBef>
+              <a:spcAft>
+                <a:spcPts val="200"/>
+              </a:spcAft>
+            </a:pPr>
+            <a:r>
+              <a:rPr sz="1200">
+                <a:solidFill>
+                  <a:srgbClr val="3D5466"/>
+                </a:solidFill>
+                <a:latin typeface="Arial"/>
+              </a:rPr>
+              <a:t>Mein wichtigstes Branchenlernen aus diesem Gespräch:</a:t>
+            </a:r>
+          </a:p>
+          <a:p>
+            <a:pPr>
+              <a:spcBef>
+                <a:spcPts val="400"/>
+              </a:spcBef>
+              <a:spcAft>
+                <a:spcPts val="200"/>
+              </a:spcAft>
+            </a:pPr>
+            <a:r>
+              <a:rPr sz="1200">
+                <a:solidFill>
+                  <a:srgbClr val="3D5466"/>
+                </a:solidFill>
+                <a:latin typeface="Arial"/>
+              </a:rPr>
+              <a:t>___________________________________________________________________________</a:t>
+            </a:r>
+          </a:p>
+          <a:p>
+            <a:pPr>
+              <a:spcBef>
+                <a:spcPts val="600"/>
+              </a:spcBef>
+              <a:spcAft>
+                <a:spcPts val="200"/>
+              </a:spcAft>
+            </a:pPr>
+            <a:r>
+              <a:rPr sz="1200" i="1">
+                <a:solidFill>
+                  <a:srgbClr val="3D5466"/>
+                </a:solidFill>
+                <a:latin typeface="Arial"/>
+              </a:rPr>
+              <a:t>→  Tipp: Dieses Protokoll in agree (Gesprächsnotiz) hinterlegen. Orientieren Sie sich an dieser Mini-Vorlage (5 Stichpunkte reichen):</a:t>
+            </a:r>
+          </a:p>
+          <a:p>
+            <a:pPr>
+              <a:spcBef>
+                <a:spcPts val="600"/>
+              </a:spcBef>
+              <a:spcAft>
+                <a:spcPts val="200"/>
+              </a:spcAft>
+            </a:pPr>
+            <a:r>
+              <a:rPr sz="1200" i="1">
+                <a:solidFill>
+                  <a:srgbClr val="3D5466"/>
+                </a:solidFill>
+                <a:latin typeface="Arial"/>
+              </a:rPr>
+              <a:t>→  1. Branchenentwicklung laut Kunde: _____________</a:t>
+            </a:r>
+          </a:p>
+          <a:p>
+            <a:pPr>
+              <a:spcBef>
+                <a:spcPts val="600"/>
+              </a:spcBef>
+              <a:spcAft>
+                <a:spcPts val="200"/>
+              </a:spcAft>
+            </a:pPr>
+            <a:r>
+              <a:rPr sz="1200" i="1">
+                <a:solidFill>
+                  <a:srgbClr val="3D5466"/>
+                </a:solidFill>
+                <a:latin typeface="Arial"/>
+              </a:rPr>
+              <a:t>→  2. Genannte Risiken/Belastungen: _____________</a:t>
+            </a:r>
+          </a:p>
+          <a:p>
+            <a:pPr>
+              <a:spcBef>
+                <a:spcPts val="600"/>
+              </a:spcBef>
+              <a:spcAft>
+                <a:spcPts val="200"/>
+              </a:spcAft>
+            </a:pPr>
+            <a:r>
+              <a:rPr sz="1200" i="1">
+                <a:solidFill>
+                  <a:srgbClr val="3D5466"/>
+                </a:solidFill>
+                <a:latin typeface="Arial"/>
+              </a:rPr>
+              <a:t>→  3. Chancen oder Investitionsabsichten: _____________</a:t>
+            </a:r>
+          </a:p>
+          <a:p>
+            <a:pPr>
+              <a:spcBef>
+                <a:spcPts val="600"/>
+              </a:spcBef>
+              <a:spcAft>
+                <a:spcPts val="200"/>
+              </a:spcAft>
+            </a:pPr>
+            <a:r>
+              <a:rPr sz="1200" i="1">
+                <a:solidFill>
+                  <a:srgbClr val="3D5466"/>
+                </a:solidFill>
+                <a:latin typeface="Arial"/>
+              </a:rPr>
+              <a:t>→  4. Eigene Einschätzung (Kreditrisiko, Beratungsansatz): _____________</a:t>
+            </a:r>
+          </a:p>
+          <a:p>
+            <a:pPr>
+              <a:spcBef>
+                <a:spcPts val="600"/>
+              </a:spcBef>
+              <a:spcAft>
+                <a:spcPts val="200"/>
+              </a:spcAft>
+            </a:pPr>
+            <a:r>
+              <a:rPr sz="1200" i="1">
+                <a:solidFill>
+                  <a:srgbClr val="3D5466"/>
+                </a:solidFill>
+                <a:latin typeface="Arial"/>
+              </a:rPr>
+              <a:t>→  5. Nächste Aktion / Folgethema: _____________</a:t>
+            </a:r>
+          </a:p>
+          <a:p>
+            <a:pPr>
+              <a:spcBef>
+                <a:spcPts val="600"/>
+              </a:spcBef>
+              <a:spcAft>
+                <a:spcPts val="200"/>
+              </a:spcAft>
+            </a:pPr>
+            <a:r>
+              <a:rPr sz="1200" i="1">
+                <a:solidFill>
+                  <a:srgbClr val="3D5466"/>
+                </a:solidFill>
+                <a:latin typeface="Arial"/>
+              </a:rPr>
+              <a:t>→  Drei solcher Notizen aus der gleichen Branche zeigen Ihnen verlässlich die Muster – und sind im nächsten Jahresgespräch Gold wert.</a:t>
+            </a:r>
+          </a:p>
+          <a:p>
+            <a:pPr>
+              <a:spcBef>
+                <a:spcPts val="400"/>
+              </a:spcBef>
+              <a:spcAft>
+                <a:spcPts val="200"/>
+              </a:spcAft>
+            </a:pPr>
+            <a:r>
+              <a:rPr sz="1200">
+                <a:solidFill>
+                  <a:srgbClr val="3D5466"/>
+                </a:solidFill>
+                <a:latin typeface="Arial"/>
+              </a:rPr>
+              <a:t># 5. PRAXISTRANSFER</a:t>
+            </a:r>
+          </a:p>
+        </p:txBody>
+      </p:sp>
+      <p:sp>
+        <p:nvSpPr>
+          <p:cNvPr id="9" name="Rectangle 8"/>
+          <p:cNvSpPr/>
+          <p:nvPr/>
+        </p:nvSpPr>
+        <p:spPr>
+          <a:xfrm>
+            <a:off x="0" y="6510528"/>
+            <a:ext cx="12188952" cy="347472"/>
+          </a:xfrm>
+          <a:prstGeom prst="rect">
+            <a:avLst/>
+          </a:prstGeom>
+          <a:solidFill>
+            <a:srgbClr val="0A1937"/>
+          </a:solidFill>
+          <a:ln>
+            <a:noFill/>
+          </a:ln>
+        </p:spPr>
+        <p:style>
+          <a:lnRef idx="1">
+            <a:schemeClr val="accent1"/>
+          </a:lnRef>
+          <a:fillRef idx="3">
+            <a:schemeClr val="accent1"/>
+          </a:fillRef>
+          <a:effectRef idx="2">
+            <a:schemeClr val="accent1"/>
+          </a:effectRef>
+          <a:fontRef idx="minor">
+            <a:schemeClr val="lt1"/>
+          </a:fontRef>
+        </p:style>
+        <p:txBody>
+          <a:bodyPr rtlCol="0" anchor="ctr"/>
+          <a:lstStyle/>
+          <a:p>
+            <a:pPr algn="ctr"/>
           </a:p>
         </p:txBody>
       </p:sp>
@@ -4474,8 +4968,8 @@
         </p:nvSpPr>
         <p:spPr>
           <a:xfrm>
-            <a:off x="9398000" y="5156200"/>
-            <a:ext cx="2184400" cy="381000"/>
+            <a:off x="685800" y="6583680"/>
+            <a:ext cx="6490411" cy="256032"/>
           </a:xfrm>
           <a:prstGeom prst="rect">
             <a:avLst/>
@@ -4483,20 +4977,20 @@
           <a:noFill/>
         </p:spPr>
         <p:txBody>
-          <a:bodyPr wrap="square">
-            <a:normAutofit/>
+          <a:bodyPr wrap="none">
+            <a:spAutoFit/>
           </a:bodyPr>
           <a:lstStyle/>
           <a:p>
             <a:pPr algn="l"/>
             <a:r>
-              <a:rPr sz="1400" b="0" i="0">
-                <a:solidFill>
-                  <a:srgbClr val="191D2E"/>
-                </a:solidFill>
-                <a:latin typeface="Georgia"/>
-              </a:rPr>
-              <a:t>M09 · Stratege</a:t>
+              <a:rPr sz="700">
+                <a:solidFill>
+                  <a:srgbClr val="A0B4D2"/>
+                </a:solidFill>
+                <a:latin typeface="JetBrains Mono"/>
+              </a:rPr>
+              <a:t>Benedikt Zoller Coaching  ·  FKB Campus  ·  M09</a:t>
             </a:r>
           </a:p>
         </p:txBody>
@@ -4512,14 +5006,6 @@
 <file path=ppt/slides/slide2.xml><?xml version="1.0" encoding="utf-8"?>
 <p:sld xmlns:a="http://schemas.openxmlformats.org/drawingml/2006/main" xmlns:p="http://schemas.openxmlformats.org/presentationml/2006/main" xmlns:r="http://schemas.openxmlformats.org/officeDocument/2006/relationships">
   <p:cSld>
-    <p:bg>
-      <p:bgPr>
-        <a:solidFill>
-          <a:srgbClr val="F8F8FA"/>
-        </a:solidFill>
-        <a:effectLst/>
-      </p:bgPr>
-    </p:bg>
     <p:spTree>
       <p:nvGrpSpPr>
         <p:cNvPr id="1" name=""/>
@@ -4529,125 +5015,20 @@
       <p:grpSpPr/>
       <p:sp>
         <p:nvSpPr>
-          <p:cNvPr id="2" name="TextBox 1"/>
-          <p:cNvSpPr txBox="1"/>
-          <p:nvPr/>
-        </p:nvSpPr>
-        <p:spPr>
-          <a:xfrm>
-            <a:off x="609600" y="279400"/>
-            <a:ext cx="2540000" cy="279400"/>
-          </a:xfrm>
-          <a:prstGeom prst="rect">
-            <a:avLst/>
-          </a:prstGeom>
-          <a:noFill/>
-        </p:spPr>
-        <p:txBody>
-          <a:bodyPr wrap="square">
-            <a:normAutofit/>
-          </a:bodyPr>
-          <a:lstStyle/>
-          <a:p>
-            <a:pPr algn="l"/>
-            <a:r>
-              <a:rPr sz="1000" b="1" i="0">
-                <a:solidFill>
-                  <a:srgbClr val="191D2E"/>
-                </a:solidFill>
-                <a:latin typeface="Arial"/>
-              </a:rPr>
-              <a:t>FKB  Campus</a:t>
-            </a:r>
-          </a:p>
-        </p:txBody>
-      </p:sp>
-      <p:sp>
-        <p:nvSpPr>
-          <p:cNvPr id="3" name="TextBox 2"/>
-          <p:cNvSpPr txBox="1"/>
-          <p:nvPr/>
-        </p:nvSpPr>
-        <p:spPr>
-          <a:xfrm>
-            <a:off x="609600" y="279400"/>
-            <a:ext cx="10972800" cy="279400"/>
-          </a:xfrm>
-          <a:prstGeom prst="rect">
-            <a:avLst/>
-          </a:prstGeom>
-          <a:noFill/>
-        </p:spPr>
-        <p:txBody>
-          <a:bodyPr wrap="square">
-            <a:normAutofit/>
-          </a:bodyPr>
-          <a:lstStyle/>
-          <a:p>
-            <a:pPr algn="r"/>
-            <a:r>
-              <a:rPr sz="900" b="0" i="0">
-                <a:solidFill>
-                  <a:srgbClr val="7B7FA0"/>
-                </a:solidFill>
-                <a:latin typeface="Courier New"/>
-              </a:rPr>
-              <a:t>§ 00 — LERNZIELE</a:t>
-            </a:r>
-          </a:p>
-        </p:txBody>
-      </p:sp>
-      <p:sp>
-        <p:nvSpPr>
-          <p:cNvPr id="4" name="TextBox 3"/>
-          <p:cNvSpPr txBox="1"/>
-          <p:nvPr/>
-        </p:nvSpPr>
-        <p:spPr>
-          <a:xfrm>
-            <a:off x="609600" y="6426200"/>
-            <a:ext cx="10972800" cy="228600"/>
-          </a:xfrm>
-          <a:prstGeom prst="rect">
-            <a:avLst/>
-          </a:prstGeom>
-          <a:noFill/>
-        </p:spPr>
-        <p:txBody>
-          <a:bodyPr wrap="square">
-            <a:normAutofit/>
-          </a:bodyPr>
-          <a:lstStyle/>
-          <a:p>
-            <a:pPr algn="r"/>
-            <a:r>
-              <a:rPr sz="900" b="0" i="0">
-                <a:solidFill>
-                  <a:srgbClr val="7B7FA0"/>
-                </a:solidFill>
-                <a:latin typeface="Courier New"/>
-              </a:rPr>
-              <a:t>02</a:t>
-            </a:r>
-          </a:p>
-        </p:txBody>
-      </p:sp>
-      <p:sp>
-        <p:nvSpPr>
-          <p:cNvPr id="5" name="Rectangle 4"/>
+          <p:cNvPr id="2" name="Rectangle 1"/>
           <p:cNvSpPr/>
           <p:nvPr/>
         </p:nvSpPr>
         <p:spPr>
           <a:xfrm>
-            <a:off x="609600" y="825500"/>
-            <a:ext cx="10972800" cy="6350"/>
+            <a:off x="0" y="0"/>
+            <a:ext cx="12188952" cy="6858000"/>
           </a:xfrm>
           <a:prstGeom prst="rect">
             <a:avLst/>
           </a:prstGeom>
           <a:solidFill>
-            <a:srgbClr val="191D2E"/>
+            <a:srgbClr val="EDEDF3"/>
           </a:solidFill>
           <a:ln>
             <a:noFill/>
@@ -4677,55 +5058,20 @@
       </p:sp>
       <p:sp>
         <p:nvSpPr>
-          <p:cNvPr id="6" name="TextBox 5"/>
-          <p:cNvSpPr txBox="1"/>
-          <p:nvPr/>
-        </p:nvSpPr>
-        <p:spPr>
-          <a:xfrm>
-            <a:off x="609600" y="920750"/>
-            <a:ext cx="3175000" cy="1651000"/>
-          </a:xfrm>
-          <a:prstGeom prst="rect">
-            <a:avLst/>
-          </a:prstGeom>
-          <a:noFill/>
-        </p:spPr>
-        <p:txBody>
-          <a:bodyPr wrap="square">
-            <a:normAutofit/>
-          </a:bodyPr>
-          <a:lstStyle/>
-          <a:p>
-            <a:pPr algn="l"/>
-            <a:r>
-              <a:rPr sz="4800" b="0" i="1">
-                <a:solidFill>
-                  <a:srgbClr val="1F2B56"/>
-                </a:solidFill>
-                <a:latin typeface="Georgia"/>
-              </a:rPr>
-              <a:t>Inhalt.</a:t>
-            </a:r>
-          </a:p>
-        </p:txBody>
-      </p:sp>
-      <p:sp>
-        <p:nvSpPr>
-          <p:cNvPr id="7" name="Rectangle 6"/>
+          <p:cNvPr id="3" name="Rectangle 2"/>
           <p:cNvSpPr/>
           <p:nvPr/>
         </p:nvSpPr>
         <p:spPr>
           <a:xfrm>
-            <a:off x="4064000" y="889000"/>
-            <a:ext cx="7518399" cy="6350"/>
+            <a:off x="0" y="0"/>
+            <a:ext cx="12188952" cy="50292"/>
           </a:xfrm>
           <a:prstGeom prst="rect">
             <a:avLst/>
           </a:prstGeom>
           <a:solidFill>
-            <a:srgbClr val="E0E0E8"/>
+            <a:srgbClr val="1F2C56"/>
           </a:solidFill>
           <a:ln>
             <a:noFill/>
@@ -4755,14 +5101,14 @@
       </p:sp>
       <p:sp>
         <p:nvSpPr>
-          <p:cNvPr id="8" name="TextBox 7"/>
+          <p:cNvPr id="4" name="TextBox 3"/>
           <p:cNvSpPr txBox="1"/>
           <p:nvPr/>
         </p:nvSpPr>
         <p:spPr>
           <a:xfrm>
-            <a:off x="4064000" y="939799"/>
-            <a:ext cx="762000" cy="647700"/>
+            <a:off x="685800" y="109728"/>
+            <a:ext cx="10817352" cy="228600"/>
           </a:xfrm>
           <a:prstGeom prst="rect">
             <a:avLst/>
@@ -4771,74 +5117,39 @@
         </p:spPr>
         <p:txBody>
           <a:bodyPr wrap="none">
-            <a:normAutofit/>
+            <a:spAutoFit/>
           </a:bodyPr>
           <a:lstStyle/>
           <a:p>
             <a:pPr algn="l"/>
             <a:r>
-              <a:rPr sz="2400" b="0" i="1">
-                <a:solidFill>
-                  <a:srgbClr val="1F2B56"/>
-                </a:solidFill>
-                <a:latin typeface="Georgia"/>
-              </a:rPr>
-              <a:t>I</a:t>
-            </a:r>
-          </a:p>
-        </p:txBody>
-      </p:sp>
-      <p:sp>
-        <p:nvSpPr>
-          <p:cNvPr id="9" name="TextBox 8"/>
-          <p:cNvSpPr txBox="1"/>
-          <p:nvPr/>
-        </p:nvSpPr>
-        <p:spPr>
-          <a:xfrm>
-            <a:off x="4953000" y="952500"/>
-            <a:ext cx="6629400" cy="635000"/>
-          </a:xfrm>
-          <a:prstGeom prst="rect">
-            <a:avLst/>
-          </a:prstGeom>
-          <a:noFill/>
-        </p:spPr>
-        <p:txBody>
-          <a:bodyPr wrap="square">
-            <a:normAutofit/>
-          </a:bodyPr>
-          <a:lstStyle/>
-          <a:p>
-            <a:pPr algn="l"/>
-            <a:r>
-              <a:rPr sz="1400" b="0" i="0">
-                <a:solidFill>
-                  <a:srgbClr val="191D2E"/>
-                </a:solidFill>
-                <a:latin typeface="Georgia"/>
-              </a:rPr>
-              <a:t>Eine zugewiesene Branche anhand von Porter's Five Forces und PESTEL systematisch analysieren und Werttreiber sowie Risikofaktoren identifizieren</a:t>
-            </a:r>
-          </a:p>
-        </p:txBody>
-      </p:sp>
-      <p:sp>
-        <p:nvSpPr>
-          <p:cNvPr id="10" name="Rectangle 9"/>
+              <a:rPr sz="750">
+                <a:solidFill>
+                  <a:srgbClr val="78808C"/>
+                </a:solidFill>
+                <a:latin typeface="JetBrains Mono"/>
+              </a:rPr>
+              <a:t>LERNZIELE  ·  M09</a:t>
+            </a:r>
+          </a:p>
+        </p:txBody>
+      </p:sp>
+      <p:sp>
+        <p:nvSpPr>
+          <p:cNvPr id="5" name="Rectangle 4"/>
           <p:cNvSpPr/>
           <p:nvPr/>
         </p:nvSpPr>
         <p:spPr>
           <a:xfrm>
-            <a:off x="4064000" y="1587500"/>
-            <a:ext cx="7518399" cy="6350"/>
+            <a:off x="0" y="1234440"/>
+            <a:ext cx="12188952" cy="12700"/>
           </a:xfrm>
           <a:prstGeom prst="rect">
             <a:avLst/>
           </a:prstGeom>
           <a:solidFill>
-            <a:srgbClr val="E0E0E8"/>
+            <a:srgbClr val="D8DFE4"/>
           </a:solidFill>
           <a:ln>
             <a:noFill/>
@@ -4868,14 +5179,14 @@
       </p:sp>
       <p:sp>
         <p:nvSpPr>
-          <p:cNvPr id="11" name="TextBox 10"/>
+          <p:cNvPr id="6" name="TextBox 5"/>
           <p:cNvSpPr txBox="1"/>
           <p:nvPr/>
         </p:nvSpPr>
         <p:spPr>
           <a:xfrm>
-            <a:off x="4064000" y="1638300"/>
-            <a:ext cx="762000" cy="647700"/>
+            <a:off x="685800" y="502920"/>
+            <a:ext cx="10817352" cy="658368"/>
           </a:xfrm>
           <a:prstGeom prst="rect">
             <a:avLst/>
@@ -4883,34 +5194,34 @@
           <a:noFill/>
         </p:spPr>
         <p:txBody>
-          <a:bodyPr wrap="none">
-            <a:normAutofit/>
+          <a:bodyPr wrap="square">
+            <a:spAutoFit/>
           </a:bodyPr>
           <a:lstStyle/>
           <a:p>
             <a:pPr algn="l"/>
             <a:r>
-              <a:rPr sz="2400" b="0" i="1">
-                <a:solidFill>
-                  <a:srgbClr val="1F2B56"/>
-                </a:solidFill>
-                <a:latin typeface="Georgia"/>
-              </a:rPr>
-              <a:t>II</a:t>
-            </a:r>
-          </a:p>
-        </p:txBody>
-      </p:sp>
-      <p:sp>
-        <p:nvSpPr>
-          <p:cNvPr id="12" name="TextBox 11"/>
+              <a:rPr sz="2600" b="1" i="0">
+                <a:solidFill>
+                  <a:srgbClr val="1F2C56"/>
+                </a:solidFill>
+                <a:latin typeface="Source Serif 4"/>
+              </a:rPr>
+              <a:t>Was Sie heute mitnehmen</a:t>
+            </a:r>
+          </a:p>
+        </p:txBody>
+      </p:sp>
+      <p:sp>
+        <p:nvSpPr>
+          <p:cNvPr id="7" name="TextBox 6"/>
           <p:cNvSpPr txBox="1"/>
           <p:nvPr/>
         </p:nvSpPr>
         <p:spPr>
           <a:xfrm>
-            <a:off x="4953000" y="1651000"/>
-            <a:ext cx="6629400" cy="635000"/>
+            <a:off x="685800" y="1371600"/>
+            <a:ext cx="10817352" cy="5120640"/>
           </a:xfrm>
           <a:prstGeom prst="rect">
             <a:avLst/>
@@ -4919,39 +5230,141 @@
         </p:spPr>
         <p:txBody>
           <a:bodyPr wrap="square">
-            <a:normAutofit/>
+            <a:spAutoFit/>
           </a:bodyPr>
           <a:lstStyle/>
           <a:p>
-            <a:pPr algn="l"/>
-            <a:r>
-              <a:rPr sz="1400" b="0" i="0">
-                <a:solidFill>
-                  <a:srgbClr val="191D2E"/>
-                </a:solidFill>
-                <a:latin typeface="Georgia"/>
-              </a:rPr>
-              <a:t>Wettbewerbsposition und strategische Optionen eines Firmenkundenunternehmens auf Basis der Branchenanalyse bewerten</a:t>
-            </a:r>
-          </a:p>
-        </p:txBody>
-      </p:sp>
-      <p:sp>
-        <p:nvSpPr>
-          <p:cNvPr id="13" name="Rectangle 12"/>
+            <a:pPr>
+              <a:spcBef>
+                <a:spcPts val="800"/>
+              </a:spcBef>
+              <a:spcAft>
+                <a:spcPts val="200"/>
+              </a:spcAft>
+            </a:pPr>
+            <a:r>
+              <a:rPr sz="1400">
+                <a:solidFill>
+                  <a:srgbClr val="3D5466"/>
+                </a:solidFill>
+                <a:latin typeface="Arial"/>
+              </a:rPr>
+              <a:t>▸  Eine zugewiesene Branche anhand von Porter's Five Forces und PESTEL systematisch analysieren und Werttreiber sowie Risikofaktoren identifizieren</a:t>
+            </a:r>
+          </a:p>
+          <a:p>
+            <a:pPr>
+              <a:spcBef>
+                <a:spcPts val="800"/>
+              </a:spcBef>
+              <a:spcAft>
+                <a:spcPts val="200"/>
+              </a:spcAft>
+            </a:pPr>
+            <a:r>
+              <a:rPr sz="1400">
+                <a:solidFill>
+                  <a:srgbClr val="3D5466"/>
+                </a:solidFill>
+                <a:latin typeface="Arial"/>
+              </a:rPr>
+              <a:t>▸  Wettbewerbsposition und strategische Optionen eines Firmenkundenunternehmens auf Basis der Branchenanalyse bewerten</a:t>
+            </a:r>
+          </a:p>
+          <a:p>
+            <a:pPr>
+              <a:spcBef>
+                <a:spcPts val="800"/>
+              </a:spcBef>
+              <a:spcAft>
+                <a:spcPts val="200"/>
+              </a:spcAft>
+            </a:pPr>
+            <a:r>
+              <a:rPr sz="1400">
+                <a:solidFill>
+                  <a:srgbClr val="3D5466"/>
+                </a:solidFill>
+                <a:latin typeface="Arial"/>
+              </a:rPr>
+              <a:t>▸  Einen persönlichen 3-Monats-Plan zum Aufbau von Branchenexpertise für ein definiertes Zielsegment entwickeln</a:t>
+            </a:r>
+          </a:p>
+          <a:p>
+            <a:pPr>
+              <a:spcBef>
+                <a:spcPts val="800"/>
+              </a:spcBef>
+              <a:spcAft>
+                <a:spcPts val="200"/>
+              </a:spcAft>
+            </a:pPr>
+            <a:r>
+              <a:rPr sz="1400">
+                <a:solidFill>
+                  <a:srgbClr val="3D5466"/>
+                </a:solidFill>
+                <a:latin typeface="Arial"/>
+              </a:rPr>
+              <a:t>▸  Relevante Informationsquellen für das Zielsegment analysieren und geeignete Quellen auswählen</a:t>
+            </a:r>
+          </a:p>
+          <a:p>
+            <a:pPr>
+              <a:spcBef>
+                <a:spcPts val="800"/>
+              </a:spcBef>
+              <a:spcAft>
+                <a:spcPts val="200"/>
+              </a:spcAft>
+            </a:pPr>
+            <a:r>
+              <a:rPr sz="1400">
+                <a:solidFill>
+                  <a:srgbClr val="3D5466"/>
+                </a:solidFill>
+                <a:latin typeface="Arial"/>
+              </a:rPr>
+              <a:t>▸  Möglichkeiten zum Aufbau eines branchenspezifischen Expertennetzwerks bewerten und konkrete Vernetzungsschritte ableiten</a:t>
+            </a:r>
+          </a:p>
+          <a:p>
+            <a:pPr>
+              <a:spcBef>
+                <a:spcPts val="800"/>
+              </a:spcBef>
+              <a:spcAft>
+                <a:spcPts val="200"/>
+              </a:spcAft>
+            </a:pPr>
+            <a:r>
+              <a:rPr sz="1400">
+                <a:solidFill>
+                  <a:srgbClr val="3D5466"/>
+                </a:solidFill>
+                <a:latin typeface="Arial"/>
+              </a:rPr>
+              <a:t>▸  Ein strukturiertes Branchenportfolio als Dokumentationsinstrument für die Expertiseentwicklung entwickeln</a:t>
+            </a:r>
+          </a:p>
+        </p:txBody>
+      </p:sp>
+      <p:sp>
+        <p:nvSpPr>
+          <p:cNvPr id="8" name="Rectangle 7"/>
           <p:cNvSpPr/>
           <p:nvPr/>
         </p:nvSpPr>
         <p:spPr>
           <a:xfrm>
-            <a:off x="4064000" y="2286000"/>
-            <a:ext cx="7518399" cy="6350"/>
+            <a:off x="0" y="6510528"/>
+            <a:ext cx="12188952" cy="347472"/>
           </a:xfrm>
           <a:prstGeom prst="rect">
             <a:avLst/>
           </a:prstGeom>
           <a:solidFill>
-            <a:srgbClr val="E0E0E8"/>
+            <a:srgbClr val="0A1937"/>
           </a:solidFill>
           <a:ln>
             <a:noFill/>
@@ -4981,14 +5394,14 @@
       </p:sp>
       <p:sp>
         <p:nvSpPr>
-          <p:cNvPr id="14" name="TextBox 13"/>
+          <p:cNvPr id="9" name="TextBox 8"/>
           <p:cNvSpPr txBox="1"/>
           <p:nvPr/>
         </p:nvSpPr>
         <p:spPr>
           <a:xfrm>
-            <a:off x="4064000" y="2336800"/>
-            <a:ext cx="762000" cy="647700"/>
+            <a:off x="685800" y="6583680"/>
+            <a:ext cx="6490411" cy="256032"/>
           </a:xfrm>
           <a:prstGeom prst="rect">
             <a:avLst/>
@@ -4997,393 +5410,19 @@
         </p:spPr>
         <p:txBody>
           <a:bodyPr wrap="none">
-            <a:normAutofit/>
+            <a:spAutoFit/>
           </a:bodyPr>
           <a:lstStyle/>
           <a:p>
             <a:pPr algn="l"/>
             <a:r>
-              <a:rPr sz="2400" b="0" i="1">
-                <a:solidFill>
-                  <a:srgbClr val="1F2B56"/>
-                </a:solidFill>
-                <a:latin typeface="Georgia"/>
-              </a:rPr>
-              <a:t>III</a:t>
-            </a:r>
-          </a:p>
-        </p:txBody>
-      </p:sp>
-      <p:sp>
-        <p:nvSpPr>
-          <p:cNvPr id="15" name="TextBox 14"/>
-          <p:cNvSpPr txBox="1"/>
-          <p:nvPr/>
-        </p:nvSpPr>
-        <p:spPr>
-          <a:xfrm>
-            <a:off x="4953000" y="2349500"/>
-            <a:ext cx="6629400" cy="635000"/>
-          </a:xfrm>
-          <a:prstGeom prst="rect">
-            <a:avLst/>
-          </a:prstGeom>
-          <a:noFill/>
-        </p:spPr>
-        <p:txBody>
-          <a:bodyPr wrap="square">
-            <a:normAutofit/>
-          </a:bodyPr>
-          <a:lstStyle/>
-          <a:p>
-            <a:pPr algn="l"/>
-            <a:r>
-              <a:rPr sz="1400" b="0" i="0">
-                <a:solidFill>
-                  <a:srgbClr val="191D2E"/>
-                </a:solidFill>
-                <a:latin typeface="Georgia"/>
-              </a:rPr>
-              <a:t>Einen persönlichen 3-Monats-Plan zum Aufbau von Branchenexpertise für ein definiertes Zielsegment entwickeln</a:t>
-            </a:r>
-          </a:p>
-        </p:txBody>
-      </p:sp>
-      <p:sp>
-        <p:nvSpPr>
-          <p:cNvPr id="16" name="Rectangle 15"/>
-          <p:cNvSpPr/>
-          <p:nvPr/>
-        </p:nvSpPr>
-        <p:spPr>
-          <a:xfrm>
-            <a:off x="4064000" y="2984500"/>
-            <a:ext cx="7518399" cy="6350"/>
-          </a:xfrm>
-          <a:prstGeom prst="rect">
-            <a:avLst/>
-          </a:prstGeom>
-          <a:solidFill>
-            <a:srgbClr val="E0E0E8"/>
-          </a:solidFill>
-          <a:ln>
-            <a:noFill/>
-          </a:ln>
-        </p:spPr>
-        <p:style>
-          <a:lnRef idx="1">
-            <a:schemeClr val="accent1"/>
-          </a:lnRef>
-          <a:fillRef idx="3">
-            <a:schemeClr val="accent1"/>
-          </a:fillRef>
-          <a:effectRef idx="2">
-            <a:schemeClr val="accent1"/>
-          </a:effectRef>
-          <a:fontRef idx="minor">
-            <a:schemeClr val="lt1"/>
-          </a:fontRef>
-        </p:style>
-        <p:txBody>
-          <a:bodyPr rtlCol="0" anchor="ctr"/>
-          <a:lstStyle/>
-          <a:p>
-            <a:pPr algn="ctr"/>
-          </a:p>
-        </p:txBody>
-      </p:sp>
-      <p:sp>
-        <p:nvSpPr>
-          <p:cNvPr id="17" name="TextBox 16"/>
-          <p:cNvSpPr txBox="1"/>
-          <p:nvPr/>
-        </p:nvSpPr>
-        <p:spPr>
-          <a:xfrm>
-            <a:off x="4064000" y="3035300"/>
-            <a:ext cx="762000" cy="647700"/>
-          </a:xfrm>
-          <a:prstGeom prst="rect">
-            <a:avLst/>
-          </a:prstGeom>
-          <a:noFill/>
-        </p:spPr>
-        <p:txBody>
-          <a:bodyPr wrap="none">
-            <a:normAutofit/>
-          </a:bodyPr>
-          <a:lstStyle/>
-          <a:p>
-            <a:pPr algn="l"/>
-            <a:r>
-              <a:rPr sz="2400" b="0" i="1">
-                <a:solidFill>
-                  <a:srgbClr val="1F2B56"/>
-                </a:solidFill>
-                <a:latin typeface="Georgia"/>
-              </a:rPr>
-              <a:t>IV</a:t>
-            </a:r>
-          </a:p>
-        </p:txBody>
-      </p:sp>
-      <p:sp>
-        <p:nvSpPr>
-          <p:cNvPr id="18" name="TextBox 17"/>
-          <p:cNvSpPr txBox="1"/>
-          <p:nvPr/>
-        </p:nvSpPr>
-        <p:spPr>
-          <a:xfrm>
-            <a:off x="4953000" y="3048000"/>
-            <a:ext cx="6629400" cy="635000"/>
-          </a:xfrm>
-          <a:prstGeom prst="rect">
-            <a:avLst/>
-          </a:prstGeom>
-          <a:noFill/>
-        </p:spPr>
-        <p:txBody>
-          <a:bodyPr wrap="square">
-            <a:normAutofit/>
-          </a:bodyPr>
-          <a:lstStyle/>
-          <a:p>
-            <a:pPr algn="l"/>
-            <a:r>
-              <a:rPr sz="1400" b="0" i="0">
-                <a:solidFill>
-                  <a:srgbClr val="191D2E"/>
-                </a:solidFill>
-                <a:latin typeface="Georgia"/>
-              </a:rPr>
-              <a:t>Relevante Informationsquellen für das Zielsegment analysieren und geeignete Quellen auswählen</a:t>
-            </a:r>
-          </a:p>
-        </p:txBody>
-      </p:sp>
-      <p:sp>
-        <p:nvSpPr>
-          <p:cNvPr id="19" name="Rectangle 18"/>
-          <p:cNvSpPr/>
-          <p:nvPr/>
-        </p:nvSpPr>
-        <p:spPr>
-          <a:xfrm>
-            <a:off x="4064000" y="3683000"/>
-            <a:ext cx="7518399" cy="6350"/>
-          </a:xfrm>
-          <a:prstGeom prst="rect">
-            <a:avLst/>
-          </a:prstGeom>
-          <a:solidFill>
-            <a:srgbClr val="E0E0E8"/>
-          </a:solidFill>
-          <a:ln>
-            <a:noFill/>
-          </a:ln>
-        </p:spPr>
-        <p:style>
-          <a:lnRef idx="1">
-            <a:schemeClr val="accent1"/>
-          </a:lnRef>
-          <a:fillRef idx="3">
-            <a:schemeClr val="accent1"/>
-          </a:fillRef>
-          <a:effectRef idx="2">
-            <a:schemeClr val="accent1"/>
-          </a:effectRef>
-          <a:fontRef idx="minor">
-            <a:schemeClr val="lt1"/>
-          </a:fontRef>
-        </p:style>
-        <p:txBody>
-          <a:bodyPr rtlCol="0" anchor="ctr"/>
-          <a:lstStyle/>
-          <a:p>
-            <a:pPr algn="ctr"/>
-          </a:p>
-        </p:txBody>
-      </p:sp>
-      <p:sp>
-        <p:nvSpPr>
-          <p:cNvPr id="20" name="TextBox 19"/>
-          <p:cNvSpPr txBox="1"/>
-          <p:nvPr/>
-        </p:nvSpPr>
-        <p:spPr>
-          <a:xfrm>
-            <a:off x="4064000" y="3733799"/>
-            <a:ext cx="762000" cy="647700"/>
-          </a:xfrm>
-          <a:prstGeom prst="rect">
-            <a:avLst/>
-          </a:prstGeom>
-          <a:noFill/>
-        </p:spPr>
-        <p:txBody>
-          <a:bodyPr wrap="none">
-            <a:normAutofit/>
-          </a:bodyPr>
-          <a:lstStyle/>
-          <a:p>
-            <a:pPr algn="l"/>
-            <a:r>
-              <a:rPr sz="2400" b="0" i="1">
-                <a:solidFill>
-                  <a:srgbClr val="1F2B56"/>
-                </a:solidFill>
-                <a:latin typeface="Georgia"/>
-              </a:rPr>
-              <a:t>V</a:t>
-            </a:r>
-          </a:p>
-        </p:txBody>
-      </p:sp>
-      <p:sp>
-        <p:nvSpPr>
-          <p:cNvPr id="21" name="TextBox 20"/>
-          <p:cNvSpPr txBox="1"/>
-          <p:nvPr/>
-        </p:nvSpPr>
-        <p:spPr>
-          <a:xfrm>
-            <a:off x="4953000" y="3746500"/>
-            <a:ext cx="6629400" cy="635000"/>
-          </a:xfrm>
-          <a:prstGeom prst="rect">
-            <a:avLst/>
-          </a:prstGeom>
-          <a:noFill/>
-        </p:spPr>
-        <p:txBody>
-          <a:bodyPr wrap="square">
-            <a:normAutofit/>
-          </a:bodyPr>
-          <a:lstStyle/>
-          <a:p>
-            <a:pPr algn="l"/>
-            <a:r>
-              <a:rPr sz="1400" b="0" i="0">
-                <a:solidFill>
-                  <a:srgbClr val="191D2E"/>
-                </a:solidFill>
-                <a:latin typeface="Georgia"/>
-              </a:rPr>
-              <a:t>Möglichkeiten zum Aufbau eines branchenspezifischen Expertennetzwerks bewerten und konkrete Vernetzungsschritte ableiten</a:t>
-            </a:r>
-          </a:p>
-        </p:txBody>
-      </p:sp>
-      <p:sp>
-        <p:nvSpPr>
-          <p:cNvPr id="22" name="Rectangle 21"/>
-          <p:cNvSpPr/>
-          <p:nvPr/>
-        </p:nvSpPr>
-        <p:spPr>
-          <a:xfrm>
-            <a:off x="4064000" y="4381500"/>
-            <a:ext cx="7518399" cy="6350"/>
-          </a:xfrm>
-          <a:prstGeom prst="rect">
-            <a:avLst/>
-          </a:prstGeom>
-          <a:solidFill>
-            <a:srgbClr val="E0E0E8"/>
-          </a:solidFill>
-          <a:ln>
-            <a:noFill/>
-          </a:ln>
-        </p:spPr>
-        <p:style>
-          <a:lnRef idx="1">
-            <a:schemeClr val="accent1"/>
-          </a:lnRef>
-          <a:fillRef idx="3">
-            <a:schemeClr val="accent1"/>
-          </a:fillRef>
-          <a:effectRef idx="2">
-            <a:schemeClr val="accent1"/>
-          </a:effectRef>
-          <a:fontRef idx="minor">
-            <a:schemeClr val="lt1"/>
-          </a:fontRef>
-        </p:style>
-        <p:txBody>
-          <a:bodyPr rtlCol="0" anchor="ctr"/>
-          <a:lstStyle/>
-          <a:p>
-            <a:pPr algn="ctr"/>
-          </a:p>
-        </p:txBody>
-      </p:sp>
-      <p:sp>
-        <p:nvSpPr>
-          <p:cNvPr id="23" name="TextBox 22"/>
-          <p:cNvSpPr txBox="1"/>
-          <p:nvPr/>
-        </p:nvSpPr>
-        <p:spPr>
-          <a:xfrm>
-            <a:off x="4064000" y="4432300"/>
-            <a:ext cx="762000" cy="647700"/>
-          </a:xfrm>
-          <a:prstGeom prst="rect">
-            <a:avLst/>
-          </a:prstGeom>
-          <a:noFill/>
-        </p:spPr>
-        <p:txBody>
-          <a:bodyPr wrap="none">
-            <a:normAutofit/>
-          </a:bodyPr>
-          <a:lstStyle/>
-          <a:p>
-            <a:pPr algn="l"/>
-            <a:r>
-              <a:rPr sz="2400" b="0" i="1">
-                <a:solidFill>
-                  <a:srgbClr val="1F2B56"/>
-                </a:solidFill>
-                <a:latin typeface="Georgia"/>
-              </a:rPr>
-              <a:t>VI</a:t>
-            </a:r>
-          </a:p>
-        </p:txBody>
-      </p:sp>
-      <p:sp>
-        <p:nvSpPr>
-          <p:cNvPr id="24" name="TextBox 23"/>
-          <p:cNvSpPr txBox="1"/>
-          <p:nvPr/>
-        </p:nvSpPr>
-        <p:spPr>
-          <a:xfrm>
-            <a:off x="4953000" y="4445000"/>
-            <a:ext cx="6629400" cy="635000"/>
-          </a:xfrm>
-          <a:prstGeom prst="rect">
-            <a:avLst/>
-          </a:prstGeom>
-          <a:noFill/>
-        </p:spPr>
-        <p:txBody>
-          <a:bodyPr wrap="square">
-            <a:normAutofit/>
-          </a:bodyPr>
-          <a:lstStyle/>
-          <a:p>
-            <a:pPr algn="l"/>
-            <a:r>
-              <a:rPr sz="1400" b="0" i="0">
-                <a:solidFill>
-                  <a:srgbClr val="191D2E"/>
-                </a:solidFill>
-                <a:latin typeface="Georgia"/>
-              </a:rPr>
-              <a:t>Ein strukturiertes Branchenportfolio als Dokumentationsinstrument für die Expertiseentwicklung entwickeln</a:t>
+              <a:rPr sz="700">
+                <a:solidFill>
+                  <a:srgbClr val="A0B4D2"/>
+                </a:solidFill>
+                <a:latin typeface="JetBrains Mono"/>
+              </a:rPr>
+              <a:t>Benedikt Zoller Coaching  ·  FKB Campus  ·  M09</a:t>
             </a:r>
           </a:p>
         </p:txBody>
@@ -5399,14 +5438,6 @@
 <file path=ppt/slides/slide3.xml><?xml version="1.0" encoding="utf-8"?>
 <p:sld xmlns:a="http://schemas.openxmlformats.org/drawingml/2006/main" xmlns:p="http://schemas.openxmlformats.org/presentationml/2006/main" xmlns:r="http://schemas.openxmlformats.org/officeDocument/2006/relationships">
   <p:cSld>
-    <p:bg>
-      <p:bgPr>
-        <a:solidFill>
-          <a:srgbClr val="1F2B56"/>
-        </a:solidFill>
-        <a:effectLst/>
-      </p:bgPr>
-    </p:bg>
     <p:spTree>
       <p:nvGrpSpPr>
         <p:cNvPr id="1" name=""/>
@@ -5416,71 +5447,87 @@
       <p:grpSpPr/>
       <p:sp>
         <p:nvSpPr>
-          <p:cNvPr id="2" name="TextBox 1"/>
-          <p:cNvSpPr txBox="1"/>
-          <p:nvPr/>
-        </p:nvSpPr>
-        <p:spPr>
-          <a:xfrm>
-            <a:off x="609600" y="279400"/>
-            <a:ext cx="2540000" cy="279400"/>
-          </a:xfrm>
-          <a:prstGeom prst="rect">
-            <a:avLst/>
-          </a:prstGeom>
-          <a:noFill/>
-        </p:spPr>
-        <p:txBody>
-          <a:bodyPr wrap="square">
-            <a:normAutofit/>
-          </a:bodyPr>
-          <a:lstStyle/>
-          <a:p>
-            <a:pPr algn="l"/>
-            <a:r>
-              <a:rPr sz="1000" b="1" i="0">
-                <a:solidFill>
-                  <a:srgbClr val="F8F8FA"/>
-                </a:solidFill>
-                <a:latin typeface="Arial"/>
-              </a:rPr>
-              <a:t>FKB  Campus</a:t>
-            </a:r>
-          </a:p>
-        </p:txBody>
-      </p:sp>
-      <p:sp>
-        <p:nvSpPr>
-          <p:cNvPr id="3" name="TextBox 2"/>
-          <p:cNvSpPr txBox="1"/>
-          <p:nvPr/>
-        </p:nvSpPr>
-        <p:spPr>
-          <a:xfrm>
-            <a:off x="609600" y="279400"/>
-            <a:ext cx="10972800" cy="279400"/>
-          </a:xfrm>
-          <a:prstGeom prst="rect">
-            <a:avLst/>
-          </a:prstGeom>
-          <a:noFill/>
-        </p:spPr>
-        <p:txBody>
-          <a:bodyPr wrap="square">
-            <a:normAutofit/>
-          </a:bodyPr>
-          <a:lstStyle/>
-          <a:p>
-            <a:pPr algn="r"/>
-            <a:r>
-              <a:rPr sz="900" b="0" i="0">
-                <a:solidFill>
-                  <a:srgbClr val="7B7FA0"/>
-                </a:solidFill>
-                <a:latin typeface="Courier New"/>
-              </a:rPr>
-              <a:t>WAS EINEN BRANCHENEXPERTEN AUSMACHT</a:t>
-            </a:r>
+          <p:cNvPr id="2" name="Rectangle 1"/>
+          <p:cNvSpPr/>
+          <p:nvPr/>
+        </p:nvSpPr>
+        <p:spPr>
+          <a:xfrm>
+            <a:off x="0" y="0"/>
+            <a:ext cx="12188952" cy="6858000"/>
+          </a:xfrm>
+          <a:prstGeom prst="rect">
+            <a:avLst/>
+          </a:prstGeom>
+          <a:solidFill>
+            <a:srgbClr val="EDEDF3"/>
+          </a:solidFill>
+          <a:ln>
+            <a:noFill/>
+          </a:ln>
+        </p:spPr>
+        <p:style>
+          <a:lnRef idx="1">
+            <a:schemeClr val="accent1"/>
+          </a:lnRef>
+          <a:fillRef idx="3">
+            <a:schemeClr val="accent1"/>
+          </a:fillRef>
+          <a:effectRef idx="2">
+            <a:schemeClr val="accent1"/>
+          </a:effectRef>
+          <a:fontRef idx="minor">
+            <a:schemeClr val="lt1"/>
+          </a:fontRef>
+        </p:style>
+        <p:txBody>
+          <a:bodyPr rtlCol="0" anchor="ctr"/>
+          <a:lstStyle/>
+          <a:p>
+            <a:pPr algn="ctr"/>
+          </a:p>
+        </p:txBody>
+      </p:sp>
+      <p:sp>
+        <p:nvSpPr>
+          <p:cNvPr id="3" name="Rectangle 2"/>
+          <p:cNvSpPr/>
+          <p:nvPr/>
+        </p:nvSpPr>
+        <p:spPr>
+          <a:xfrm>
+            <a:off x="0" y="0"/>
+            <a:ext cx="12188952" cy="50292"/>
+          </a:xfrm>
+          <a:prstGeom prst="rect">
+            <a:avLst/>
+          </a:prstGeom>
+          <a:solidFill>
+            <a:srgbClr val="1F2C56"/>
+          </a:solidFill>
+          <a:ln>
+            <a:noFill/>
+          </a:ln>
+        </p:spPr>
+        <p:style>
+          <a:lnRef idx="1">
+            <a:schemeClr val="accent1"/>
+          </a:lnRef>
+          <a:fillRef idx="3">
+            <a:schemeClr val="accent1"/>
+          </a:fillRef>
+          <a:effectRef idx="2">
+            <a:schemeClr val="accent1"/>
+          </a:effectRef>
+          <a:fontRef idx="minor">
+            <a:schemeClr val="lt1"/>
+          </a:fontRef>
+        </p:style>
+        <p:txBody>
+          <a:bodyPr rtlCol="0" anchor="ctr"/>
+          <a:lstStyle/>
+          <a:p>
+            <a:pPr algn="ctr"/>
           </a:p>
         </p:txBody>
       </p:sp>
@@ -5492,8 +5539,8 @@
         </p:nvSpPr>
         <p:spPr>
           <a:xfrm>
-            <a:off x="609600" y="6426200"/>
-            <a:ext cx="10972800" cy="228600"/>
+            <a:off x="685800" y="109728"/>
+            <a:ext cx="10817352" cy="228600"/>
           </a:xfrm>
           <a:prstGeom prst="rect">
             <a:avLst/>
@@ -5501,91 +5548,107 @@
           <a:noFill/>
         </p:spPr>
         <p:txBody>
-          <a:bodyPr wrap="square">
-            <a:normAutofit/>
+          <a:bodyPr wrap="none">
+            <a:spAutoFit/>
           </a:bodyPr>
           <a:lstStyle/>
           <a:p>
-            <a:pPr algn="r"/>
-            <a:r>
-              <a:rPr sz="900" b="0" i="0">
-                <a:solidFill>
-                  <a:srgbClr val="7B7FA0"/>
-                </a:solidFill>
-                <a:latin typeface="Courier New"/>
-              </a:rPr>
-              <a:t>03</a:t>
-            </a:r>
-          </a:p>
-        </p:txBody>
-      </p:sp>
-      <p:sp>
-        <p:nvSpPr>
-          <p:cNvPr id="5" name="TextBox 4"/>
-          <p:cNvSpPr txBox="1"/>
-          <p:nvPr/>
-        </p:nvSpPr>
-        <p:spPr>
-          <a:xfrm>
-            <a:off x="609600" y="635000"/>
-            <a:ext cx="5461000" cy="5461000"/>
-          </a:xfrm>
-          <a:prstGeom prst="rect">
-            <a:avLst/>
-          </a:prstGeom>
-          <a:noFill/>
-        </p:spPr>
-        <p:txBody>
-          <a:bodyPr wrap="square">
-            <a:normAutofit/>
-          </a:bodyPr>
-          <a:lstStyle/>
-          <a:p>
             <a:pPr algn="l"/>
             <a:r>
-              <a:rPr sz="28000" b="0" i="1">
-                <a:solidFill>
-                  <a:srgbClr val="D9BF7A"/>
-                </a:solidFill>
-                <a:latin typeface="Georgia"/>
-              </a:rPr>
-              <a:t>I</a:t>
-            </a:r>
-          </a:p>
-        </p:txBody>
-      </p:sp>
-      <p:sp>
-        <p:nvSpPr>
-          <p:cNvPr id="6" name="TextBox 5"/>
-          <p:cNvSpPr txBox="1"/>
-          <p:nvPr/>
-        </p:nvSpPr>
-        <p:spPr>
-          <a:xfrm>
-            <a:off x="6731000" y="4064000"/>
-            <a:ext cx="4851400" cy="1778000"/>
-          </a:xfrm>
-          <a:prstGeom prst="rect">
-            <a:avLst/>
-          </a:prstGeom>
-          <a:noFill/>
-        </p:spPr>
-        <p:txBody>
-          <a:bodyPr wrap="square">
-            <a:normAutofit/>
-          </a:bodyPr>
-          <a:lstStyle/>
-          <a:p>
-            <a:pPr algn="r"/>
-            <a:r>
-              <a:rPr sz="3800" b="0" i="0">
-                <a:solidFill>
-                  <a:srgbClr val="F8F8FA"/>
-                </a:solidFill>
-                <a:latin typeface="Georgia"/>
-              </a:rPr>
-              <a:t>Was einen Branchenexperten ausmacht</a:t>
-            </a:r>
+              <a:rPr sz="750">
+                <a:solidFill>
+                  <a:srgbClr val="78808C"/>
+                </a:solidFill>
+                <a:latin typeface="JetBrains Mono"/>
+              </a:rPr>
+              <a:t>M09  ·  INHALT</a:t>
+            </a:r>
+          </a:p>
+        </p:txBody>
+      </p:sp>
+      <p:sp>
+        <p:nvSpPr>
+          <p:cNvPr id="5" name="Rectangle 4"/>
+          <p:cNvSpPr/>
+          <p:nvPr/>
+        </p:nvSpPr>
+        <p:spPr>
+          <a:xfrm>
+            <a:off x="0" y="1234440"/>
+            <a:ext cx="12188952" cy="12700"/>
+          </a:xfrm>
+          <a:prstGeom prst="rect">
+            <a:avLst/>
+          </a:prstGeom>
+          <a:solidFill>
+            <a:srgbClr val="D8DFE4"/>
+          </a:solidFill>
+          <a:ln>
+            <a:noFill/>
+          </a:ln>
+        </p:spPr>
+        <p:style>
+          <a:lnRef idx="1">
+            <a:schemeClr val="accent1"/>
+          </a:lnRef>
+          <a:fillRef idx="3">
+            <a:schemeClr val="accent1"/>
+          </a:fillRef>
+          <a:effectRef idx="2">
+            <a:schemeClr val="accent1"/>
+          </a:effectRef>
+          <a:fontRef idx="minor">
+            <a:schemeClr val="lt1"/>
+          </a:fontRef>
+        </p:style>
+        <p:txBody>
+          <a:bodyPr rtlCol="0" anchor="ctr"/>
+          <a:lstStyle/>
+          <a:p>
+            <a:pPr algn="ctr"/>
+          </a:p>
+        </p:txBody>
+      </p:sp>
+      <p:sp>
+        <p:nvSpPr>
+          <p:cNvPr id="6" name="Rectangle 5"/>
+          <p:cNvSpPr/>
+          <p:nvPr/>
+        </p:nvSpPr>
+        <p:spPr>
+          <a:xfrm>
+            <a:off x="685800" y="502920"/>
+            <a:ext cx="36576" cy="658368"/>
+          </a:xfrm>
+          <a:prstGeom prst="rect">
+            <a:avLst/>
+          </a:prstGeom>
+          <a:solidFill>
+            <a:srgbClr val="D9C089"/>
+          </a:solidFill>
+          <a:ln>
+            <a:noFill/>
+          </a:ln>
+        </p:spPr>
+        <p:style>
+          <a:lnRef idx="1">
+            <a:schemeClr val="accent1"/>
+          </a:lnRef>
+          <a:fillRef idx="3">
+            <a:schemeClr val="accent1"/>
+          </a:fillRef>
+          <a:effectRef idx="2">
+            <a:schemeClr val="accent1"/>
+          </a:effectRef>
+          <a:fontRef idx="minor">
+            <a:schemeClr val="lt1"/>
+          </a:fontRef>
+        </p:style>
+        <p:txBody>
+          <a:bodyPr rtlCol="0" anchor="ctr"/>
+          <a:lstStyle/>
+          <a:p>
+            <a:pPr algn="ctr"/>
           </a:p>
         </p:txBody>
       </p:sp>
@@ -5597,8 +5660,8 @@
         </p:nvSpPr>
         <p:spPr>
           <a:xfrm>
-            <a:off x="6731000" y="5842000"/>
-            <a:ext cx="4851400" cy="635000"/>
+            <a:off x="813816" y="502920"/>
+            <a:ext cx="10634472" cy="685800"/>
           </a:xfrm>
           <a:prstGeom prst="rect">
             <a:avLst/>
@@ -5607,19 +5670,253 @@
         </p:spPr>
         <p:txBody>
           <a:bodyPr wrap="square">
-            <a:normAutofit/>
+            <a:spAutoFit/>
           </a:bodyPr>
           <a:lstStyle/>
           <a:p>
-            <a:pPr algn="r"/>
-            <a:r>
-              <a:rPr sz="1400" b="0" i="1">
-                <a:solidFill>
-                  <a:srgbClr val="7B7FA0"/>
-                </a:solidFill>
-                <a:latin typeface="Georgia"/>
-              </a:rPr>
-              <a:t>Mehr als Zahlen — ein anderes Gespräch</a:t>
+            <a:pPr algn="l"/>
+            <a:r>
+              <a:rPr sz="2400" b="1" i="0">
+                <a:solidFill>
+                  <a:srgbClr val="1F2C56"/>
+                </a:solidFill>
+                <a:latin typeface="Source Serif 4"/>
+              </a:rPr>
+              <a:t>Was unterscheidet den Branchenexperten?</a:t>
+            </a:r>
+          </a:p>
+        </p:txBody>
+      </p:sp>
+      <p:sp>
+        <p:nvSpPr>
+          <p:cNvPr id="8" name="TextBox 7"/>
+          <p:cNvSpPr txBox="1"/>
+          <p:nvPr/>
+        </p:nvSpPr>
+        <p:spPr>
+          <a:xfrm>
+            <a:off x="685800" y="1417320"/>
+            <a:ext cx="10817352" cy="5029200"/>
+          </a:xfrm>
+          <a:prstGeom prst="rect">
+            <a:avLst/>
+          </a:prstGeom>
+          <a:noFill/>
+        </p:spPr>
+        <p:txBody>
+          <a:bodyPr wrap="square">
+            <a:spAutoFit/>
+          </a:bodyPr>
+          <a:lstStyle/>
+          <a:p>
+            <a:pPr>
+              <a:spcBef>
+                <a:spcPts val="400"/>
+              </a:spcBef>
+              <a:spcAft>
+                <a:spcPts val="200"/>
+              </a:spcAft>
+            </a:pPr>
+            <a:r>
+              <a:rPr sz="1200">
+                <a:solidFill>
+                  <a:srgbClr val="3D5466"/>
+                </a:solidFill>
+                <a:latin typeface="Arial"/>
+              </a:rPr>
+              <a:t>Branchenexpertise bedeutet mehr als das Kennen von Kennziffern. Sie umfasst:</a:t>
+            </a:r>
+          </a:p>
+          <a:p>
+            <a:pPr>
+              <a:spcBef>
+                <a:spcPts val="400"/>
+              </a:spcBef>
+              <a:spcAft>
+                <a:spcPts val="200"/>
+              </a:spcAft>
+            </a:pPr>
+            <a:r>
+              <a:rPr sz="1300">
+                <a:solidFill>
+                  <a:srgbClr val="3D5466"/>
+                </a:solidFill>
+                <a:latin typeface="Arial"/>
+              </a:rPr>
+              <a:t>▸  Strukturwissen: Wie ist die Branche aufgebaut? Welche Wertschöpfungsstufen gibt es?</a:t>
+            </a:r>
+          </a:p>
+          <a:p>
+            <a:pPr>
+              <a:spcBef>
+                <a:spcPts val="400"/>
+              </a:spcBef>
+              <a:spcAft>
+                <a:spcPts val="200"/>
+              </a:spcAft>
+            </a:pPr>
+            <a:r>
+              <a:rPr sz="1300">
+                <a:solidFill>
+                  <a:srgbClr val="3D5466"/>
+                </a:solidFill>
+                <a:latin typeface="Arial"/>
+              </a:rPr>
+              <a:t>▸  Dynamikwissen: Welche Veränderungskräfte treiben die Branche?</a:t>
+            </a:r>
+          </a:p>
+          <a:p>
+            <a:pPr>
+              <a:spcBef>
+                <a:spcPts val="400"/>
+              </a:spcBef>
+              <a:spcAft>
+                <a:spcPts val="200"/>
+              </a:spcAft>
+            </a:pPr>
+            <a:r>
+              <a:rPr sz="1300">
+                <a:solidFill>
+                  <a:srgbClr val="3D5466"/>
+                </a:solidFill>
+                <a:latin typeface="Arial"/>
+              </a:rPr>
+              <a:t>▸  Netzwerkwissen: Wer sind die relevanten Verbände, Meinungsführer, Schlüsselkunden?</a:t>
+            </a:r>
+          </a:p>
+          <a:p>
+            <a:pPr>
+              <a:spcBef>
+                <a:spcPts val="400"/>
+              </a:spcBef>
+              <a:spcAft>
+                <a:spcPts val="200"/>
+              </a:spcAft>
+            </a:pPr>
+            <a:r>
+              <a:rPr sz="1300">
+                <a:solidFill>
+                  <a:srgbClr val="3D5466"/>
+                </a:solidFill>
+                <a:latin typeface="Arial"/>
+              </a:rPr>
+              <a:t>▸  Erfahrungswissen: Welche typischen Herausforderungen begegnen Unternehmern dieser Branche?</a:t>
+            </a:r>
+          </a:p>
+          <a:p>
+            <a:pPr>
+              <a:spcBef>
+                <a:spcPts val="600"/>
+              </a:spcBef>
+              <a:spcAft>
+                <a:spcPts val="200"/>
+              </a:spcAft>
+            </a:pPr>
+            <a:r>
+              <a:rPr sz="1200" i="1">
+                <a:solidFill>
+                  <a:srgbClr val="3D5466"/>
+                </a:solidFill>
+                <a:latin typeface="Arial"/>
+              </a:rPr>
+              <a:t>→  „Der Experte weiß nicht mehr Fakten als der Novize – er sieht die Situation anders." (Dreyfus &amp; Dreyfus, 1986, S. 28)</a:t>
+            </a:r>
+          </a:p>
+          <a:p>
+            <a:pPr>
+              <a:spcBef>
+                <a:spcPts val="400"/>
+              </a:spcBef>
+              <a:spcAft>
+                <a:spcPts val="200"/>
+              </a:spcAft>
+            </a:pPr>
+            <a:r>
+              <a:rPr sz="1200">
+                <a:solidFill>
+                  <a:srgbClr val="3D5466"/>
+                </a:solidFill>
+                <a:latin typeface="Arial"/>
+              </a:rPr>
+              <a:t>## 4.2 Branchenanalyse: Porter's Five Forces und PESTEL</a:t>
+            </a:r>
+          </a:p>
+        </p:txBody>
+      </p:sp>
+      <p:sp>
+        <p:nvSpPr>
+          <p:cNvPr id="9" name="Rectangle 8"/>
+          <p:cNvSpPr/>
+          <p:nvPr/>
+        </p:nvSpPr>
+        <p:spPr>
+          <a:xfrm>
+            <a:off x="0" y="6510528"/>
+            <a:ext cx="12188952" cy="347472"/>
+          </a:xfrm>
+          <a:prstGeom prst="rect">
+            <a:avLst/>
+          </a:prstGeom>
+          <a:solidFill>
+            <a:srgbClr val="0A1937"/>
+          </a:solidFill>
+          <a:ln>
+            <a:noFill/>
+          </a:ln>
+        </p:spPr>
+        <p:style>
+          <a:lnRef idx="1">
+            <a:schemeClr val="accent1"/>
+          </a:lnRef>
+          <a:fillRef idx="3">
+            <a:schemeClr val="accent1"/>
+          </a:fillRef>
+          <a:effectRef idx="2">
+            <a:schemeClr val="accent1"/>
+          </a:effectRef>
+          <a:fontRef idx="minor">
+            <a:schemeClr val="lt1"/>
+          </a:fontRef>
+        </p:style>
+        <p:txBody>
+          <a:bodyPr rtlCol="0" anchor="ctr"/>
+          <a:lstStyle/>
+          <a:p>
+            <a:pPr algn="ctr"/>
+          </a:p>
+        </p:txBody>
+      </p:sp>
+      <p:sp>
+        <p:nvSpPr>
+          <p:cNvPr id="10" name="TextBox 9"/>
+          <p:cNvSpPr txBox="1"/>
+          <p:nvPr/>
+        </p:nvSpPr>
+        <p:spPr>
+          <a:xfrm>
+            <a:off x="685800" y="6583680"/>
+            <a:ext cx="6490411" cy="256032"/>
+          </a:xfrm>
+          <a:prstGeom prst="rect">
+            <a:avLst/>
+          </a:prstGeom>
+          <a:noFill/>
+        </p:spPr>
+        <p:txBody>
+          <a:bodyPr wrap="none">
+            <a:spAutoFit/>
+          </a:bodyPr>
+          <a:lstStyle/>
+          <a:p>
+            <a:pPr algn="l"/>
+            <a:r>
+              <a:rPr sz="700">
+                <a:solidFill>
+                  <a:srgbClr val="A0B4D2"/>
+                </a:solidFill>
+                <a:latin typeface="JetBrains Mono"/>
+              </a:rPr>
+              <a:t>Benedikt Zoller Coaching  ·  FKB Campus  ·  M09</a:t>
             </a:r>
           </a:p>
         </p:txBody>
@@ -5635,14 +5932,6 @@
 <file path=ppt/slides/slide4.xml><?xml version="1.0" encoding="utf-8"?>
 <p:sld xmlns:a="http://schemas.openxmlformats.org/drawingml/2006/main" xmlns:p="http://schemas.openxmlformats.org/presentationml/2006/main" xmlns:r="http://schemas.openxmlformats.org/officeDocument/2006/relationships">
   <p:cSld>
-    <p:bg>
-      <p:bgPr>
-        <a:solidFill>
-          <a:srgbClr val="F8F8FA"/>
-        </a:solidFill>
-        <a:effectLst/>
-      </p:bgPr>
-    </p:bg>
     <p:spTree>
       <p:nvGrpSpPr>
         <p:cNvPr id="1" name=""/>
@@ -5652,125 +5941,20 @@
       <p:grpSpPr/>
       <p:sp>
         <p:nvSpPr>
-          <p:cNvPr id="2" name="TextBox 1"/>
-          <p:cNvSpPr txBox="1"/>
-          <p:nvPr/>
-        </p:nvSpPr>
-        <p:spPr>
-          <a:xfrm>
-            <a:off x="609600" y="279400"/>
-            <a:ext cx="2540000" cy="279400"/>
-          </a:xfrm>
-          <a:prstGeom prst="rect">
-            <a:avLst/>
-          </a:prstGeom>
-          <a:noFill/>
-        </p:spPr>
-        <p:txBody>
-          <a:bodyPr wrap="square">
-            <a:normAutofit/>
-          </a:bodyPr>
-          <a:lstStyle/>
-          <a:p>
-            <a:pPr algn="l"/>
-            <a:r>
-              <a:rPr sz="1000" b="1" i="0">
-                <a:solidFill>
-                  <a:srgbClr val="191D2E"/>
-                </a:solidFill>
-                <a:latin typeface="Arial"/>
-              </a:rPr>
-              <a:t>FKB  Campus</a:t>
-            </a:r>
-          </a:p>
-        </p:txBody>
-      </p:sp>
-      <p:sp>
-        <p:nvSpPr>
-          <p:cNvPr id="3" name="TextBox 2"/>
-          <p:cNvSpPr txBox="1"/>
-          <p:nvPr/>
-        </p:nvSpPr>
-        <p:spPr>
-          <a:xfrm>
-            <a:off x="609600" y="279400"/>
-            <a:ext cx="10972800" cy="279400"/>
-          </a:xfrm>
-          <a:prstGeom prst="rect">
-            <a:avLst/>
-          </a:prstGeom>
-          <a:noFill/>
-        </p:spPr>
-        <p:txBody>
-          <a:bodyPr wrap="square">
-            <a:normAutofit/>
-          </a:bodyPr>
-          <a:lstStyle/>
-          <a:p>
-            <a:pPr algn="r"/>
-            <a:r>
-              <a:rPr sz="900" b="0" i="0">
-                <a:solidFill>
-                  <a:srgbClr val="7B7FA0"/>
-                </a:solidFill>
-                <a:latin typeface="Courier New"/>
-              </a:rPr>
-              <a:t>I · WAS EINEN BRANCHENEXPERTEN AUSMACHT</a:t>
-            </a:r>
-          </a:p>
-        </p:txBody>
-      </p:sp>
-      <p:sp>
-        <p:nvSpPr>
-          <p:cNvPr id="4" name="TextBox 3"/>
-          <p:cNvSpPr txBox="1"/>
-          <p:nvPr/>
-        </p:nvSpPr>
-        <p:spPr>
-          <a:xfrm>
-            <a:off x="609600" y="6426200"/>
-            <a:ext cx="10972800" cy="228600"/>
-          </a:xfrm>
-          <a:prstGeom prst="rect">
-            <a:avLst/>
-          </a:prstGeom>
-          <a:noFill/>
-        </p:spPr>
-        <p:txBody>
-          <a:bodyPr wrap="square">
-            <a:normAutofit/>
-          </a:bodyPr>
-          <a:lstStyle/>
-          <a:p>
-            <a:pPr algn="r"/>
-            <a:r>
-              <a:rPr sz="900" b="0" i="0">
-                <a:solidFill>
-                  <a:srgbClr val="7B7FA0"/>
-                </a:solidFill>
-                <a:latin typeface="Courier New"/>
-              </a:rPr>
-              <a:t>04</a:t>
-            </a:r>
-          </a:p>
-        </p:txBody>
-      </p:sp>
-      <p:sp>
-        <p:nvSpPr>
-          <p:cNvPr id="5" name="Rectangle 4"/>
+          <p:cNvPr id="2" name="Rectangle 1"/>
           <p:cNvSpPr/>
           <p:nvPr/>
         </p:nvSpPr>
         <p:spPr>
           <a:xfrm>
-            <a:off x="609600" y="825500"/>
-            <a:ext cx="10972800" cy="6350"/>
+            <a:off x="0" y="0"/>
+            <a:ext cx="12188952" cy="6858000"/>
           </a:xfrm>
           <a:prstGeom prst="rect">
             <a:avLst/>
           </a:prstGeom>
           <a:solidFill>
-            <a:srgbClr val="191D2E"/>
+            <a:srgbClr val="EDEDF3"/>
           </a:solidFill>
           <a:ln>
             <a:noFill/>
@@ -5800,90 +5984,20 @@
       </p:sp>
       <p:sp>
         <p:nvSpPr>
-          <p:cNvPr id="6" name="TextBox 5"/>
-          <p:cNvSpPr txBox="1"/>
-          <p:nvPr/>
-        </p:nvSpPr>
-        <p:spPr>
-          <a:xfrm>
-            <a:off x="609600" y="889000"/>
-            <a:ext cx="3810000" cy="177800"/>
-          </a:xfrm>
-          <a:prstGeom prst="rect">
-            <a:avLst/>
-          </a:prstGeom>
-          <a:noFill/>
-        </p:spPr>
-        <p:txBody>
-          <a:bodyPr wrap="square">
-            <a:normAutofit/>
-          </a:bodyPr>
-          <a:lstStyle/>
-          <a:p>
-            <a:pPr algn="l"/>
-            <a:r>
-              <a:rPr sz="900" b="0" i="0">
-                <a:solidFill>
-                  <a:srgbClr val="7B7FA0"/>
-                </a:solidFill>
-                <a:latin typeface="Courier New"/>
-              </a:rPr>
-              <a:t>Kernaussage</a:t>
-            </a:r>
-          </a:p>
-        </p:txBody>
-      </p:sp>
-      <p:sp>
-        <p:nvSpPr>
-          <p:cNvPr id="7" name="TextBox 6"/>
-          <p:cNvSpPr txBox="1"/>
-          <p:nvPr/>
-        </p:nvSpPr>
-        <p:spPr>
-          <a:xfrm>
-            <a:off x="609600" y="920750"/>
-            <a:ext cx="10972800" cy="1778000"/>
-          </a:xfrm>
-          <a:prstGeom prst="rect">
-            <a:avLst/>
-          </a:prstGeom>
-          <a:noFill/>
-        </p:spPr>
-        <p:txBody>
-          <a:bodyPr wrap="square">
-            <a:normAutofit/>
-          </a:bodyPr>
-          <a:lstStyle/>
-          <a:p>
-            <a:pPr algn="l"/>
-            <a:r>
-              <a:rPr sz="3800" b="0" i="0">
-                <a:solidFill>
-                  <a:srgbClr val="191D2E"/>
-                </a:solidFill>
-                <a:latin typeface="Georgia"/>
-              </a:rPr>
-              <a:t>Der Unterschied: Zahlen kennen vs. Branche verstehen</a:t>
-            </a:r>
-          </a:p>
-        </p:txBody>
-      </p:sp>
-      <p:sp>
-        <p:nvSpPr>
-          <p:cNvPr id="8" name="Rectangle 7"/>
+          <p:cNvPr id="3" name="Rectangle 2"/>
           <p:cNvSpPr/>
           <p:nvPr/>
         </p:nvSpPr>
         <p:spPr>
           <a:xfrm>
-            <a:off x="609600" y="2762250"/>
-            <a:ext cx="10972800" cy="6350"/>
+            <a:off x="0" y="0"/>
+            <a:ext cx="12188952" cy="50292"/>
           </a:xfrm>
           <a:prstGeom prst="rect">
             <a:avLst/>
           </a:prstGeom>
           <a:solidFill>
-            <a:srgbClr val="191D2E"/>
+            <a:srgbClr val="1F2C56"/>
           </a:solidFill>
           <a:ln>
             <a:noFill/>
@@ -5913,14 +6027,213 @@
       </p:sp>
       <p:sp>
         <p:nvSpPr>
+          <p:cNvPr id="4" name="TextBox 3"/>
+          <p:cNvSpPr txBox="1"/>
+          <p:nvPr/>
+        </p:nvSpPr>
+        <p:spPr>
+          <a:xfrm>
+            <a:off x="685800" y="109728"/>
+            <a:ext cx="10817352" cy="228600"/>
+          </a:xfrm>
+          <a:prstGeom prst="rect">
+            <a:avLst/>
+          </a:prstGeom>
+          <a:noFill/>
+        </p:spPr>
+        <p:txBody>
+          <a:bodyPr wrap="none">
+            <a:spAutoFit/>
+          </a:bodyPr>
+          <a:lstStyle/>
+          <a:p>
+            <a:pPr algn="l"/>
+            <a:r>
+              <a:rPr sz="750">
+                <a:solidFill>
+                  <a:srgbClr val="78808C"/>
+                </a:solidFill>
+                <a:latin typeface="JetBrains Mono"/>
+              </a:rPr>
+              <a:t>M09  ·  INHALT</a:t>
+            </a:r>
+          </a:p>
+        </p:txBody>
+      </p:sp>
+      <p:sp>
+        <p:nvSpPr>
+          <p:cNvPr id="5" name="Rectangle 4"/>
+          <p:cNvSpPr/>
+          <p:nvPr/>
+        </p:nvSpPr>
+        <p:spPr>
+          <a:xfrm>
+            <a:off x="0" y="1234440"/>
+            <a:ext cx="12188952" cy="12700"/>
+          </a:xfrm>
+          <a:prstGeom prst="rect">
+            <a:avLst/>
+          </a:prstGeom>
+          <a:solidFill>
+            <a:srgbClr val="D8DFE4"/>
+          </a:solidFill>
+          <a:ln>
+            <a:noFill/>
+          </a:ln>
+        </p:spPr>
+        <p:style>
+          <a:lnRef idx="1">
+            <a:schemeClr val="accent1"/>
+          </a:lnRef>
+          <a:fillRef idx="3">
+            <a:schemeClr val="accent1"/>
+          </a:fillRef>
+          <a:effectRef idx="2">
+            <a:schemeClr val="accent1"/>
+          </a:effectRef>
+          <a:fontRef idx="minor">
+            <a:schemeClr val="lt1"/>
+          </a:fontRef>
+        </p:style>
+        <p:txBody>
+          <a:bodyPr rtlCol="0" anchor="ctr"/>
+          <a:lstStyle/>
+          <a:p>
+            <a:pPr algn="ctr"/>
+          </a:p>
+        </p:txBody>
+      </p:sp>
+      <p:sp>
+        <p:nvSpPr>
+          <p:cNvPr id="6" name="Rectangle 5"/>
+          <p:cNvSpPr/>
+          <p:nvPr/>
+        </p:nvSpPr>
+        <p:spPr>
+          <a:xfrm>
+            <a:off x="685800" y="502920"/>
+            <a:ext cx="36576" cy="658368"/>
+          </a:xfrm>
+          <a:prstGeom prst="rect">
+            <a:avLst/>
+          </a:prstGeom>
+          <a:solidFill>
+            <a:srgbClr val="D9C089"/>
+          </a:solidFill>
+          <a:ln>
+            <a:noFill/>
+          </a:ln>
+        </p:spPr>
+        <p:style>
+          <a:lnRef idx="1">
+            <a:schemeClr val="accent1"/>
+          </a:lnRef>
+          <a:fillRef idx="3">
+            <a:schemeClr val="accent1"/>
+          </a:fillRef>
+          <a:effectRef idx="2">
+            <a:schemeClr val="accent1"/>
+          </a:effectRef>
+          <a:fontRef idx="minor">
+            <a:schemeClr val="lt1"/>
+          </a:fontRef>
+        </p:style>
+        <p:txBody>
+          <a:bodyPr rtlCol="0" anchor="ctr"/>
+          <a:lstStyle/>
+          <a:p>
+            <a:pPr algn="ctr"/>
+          </a:p>
+        </p:txBody>
+      </p:sp>
+      <p:sp>
+        <p:nvSpPr>
+          <p:cNvPr id="7" name="TextBox 6"/>
+          <p:cNvSpPr txBox="1"/>
+          <p:nvPr/>
+        </p:nvSpPr>
+        <p:spPr>
+          <a:xfrm>
+            <a:off x="813816" y="502920"/>
+            <a:ext cx="10634472" cy="685800"/>
+          </a:xfrm>
+          <a:prstGeom prst="rect">
+            <a:avLst/>
+          </a:prstGeom>
+          <a:noFill/>
+        </p:spPr>
+        <p:txBody>
+          <a:bodyPr wrap="square">
+            <a:spAutoFit/>
+          </a:bodyPr>
+          <a:lstStyle/>
+          <a:p>
+            <a:pPr algn="l"/>
+            <a:r>
+              <a:rPr sz="2400" b="1" i="0">
+                <a:solidFill>
+                  <a:srgbClr val="1F2C56"/>
+                </a:solidFill>
+                <a:latin typeface="Source Serif 4"/>
+              </a:rPr>
+              <a:t>Porter's Five Forces</a:t>
+            </a:r>
+          </a:p>
+        </p:txBody>
+      </p:sp>
+      <p:sp>
+        <p:nvSpPr>
+          <p:cNvPr id="8" name="Rectangle 7"/>
+          <p:cNvSpPr/>
+          <p:nvPr/>
+        </p:nvSpPr>
+        <p:spPr>
+          <a:xfrm>
+            <a:off x="0" y="6510528"/>
+            <a:ext cx="12188952" cy="347472"/>
+          </a:xfrm>
+          <a:prstGeom prst="rect">
+            <a:avLst/>
+          </a:prstGeom>
+          <a:solidFill>
+            <a:srgbClr val="0A1937"/>
+          </a:solidFill>
+          <a:ln>
+            <a:noFill/>
+          </a:ln>
+        </p:spPr>
+        <p:style>
+          <a:lnRef idx="1">
+            <a:schemeClr val="accent1"/>
+          </a:lnRef>
+          <a:fillRef idx="3">
+            <a:schemeClr val="accent1"/>
+          </a:fillRef>
+          <a:effectRef idx="2">
+            <a:schemeClr val="accent1"/>
+          </a:effectRef>
+          <a:fontRef idx="minor">
+            <a:schemeClr val="lt1"/>
+          </a:fontRef>
+        </p:style>
+        <p:txBody>
+          <a:bodyPr rtlCol="0" anchor="ctr"/>
+          <a:lstStyle/>
+          <a:p>
+            <a:pPr algn="ctr"/>
+          </a:p>
+        </p:txBody>
+      </p:sp>
+      <p:sp>
+        <p:nvSpPr>
           <p:cNvPr id="9" name="TextBox 8"/>
           <p:cNvSpPr txBox="1"/>
           <p:nvPr/>
         </p:nvSpPr>
         <p:spPr>
           <a:xfrm>
-            <a:off x="609600" y="2825750"/>
-            <a:ext cx="5207000" cy="2857500"/>
+            <a:off x="685800" y="6583680"/>
+            <a:ext cx="6490411" cy="256032"/>
           </a:xfrm>
           <a:prstGeom prst="rect">
             <a:avLst/>
@@ -5928,90 +6241,20 @@
           <a:noFill/>
         </p:spPr>
         <p:txBody>
-          <a:bodyPr wrap="square">
-            <a:normAutofit/>
+          <a:bodyPr wrap="none">
+            <a:spAutoFit/>
           </a:bodyPr>
           <a:lstStyle/>
           <a:p>
             <a:pPr algn="l"/>
             <a:r>
-              <a:rPr sz="1400" b="0" i="0">
-                <a:solidFill>
-                  <a:srgbClr val="191D2E"/>
-                </a:solidFill>
-                <a:latin typeface="Georgia"/>
-              </a:rPr>
-              <a:t>Ein guter Analyst liest Zahlen. Ein Branchenexperte weiß, warum sie so aussehen — und was als nächstes kommt. Er spricht die Sprache des Unternehmers, nicht die des Kreditprüfers.</a:t>
-            </a:r>
-          </a:p>
-        </p:txBody>
-      </p:sp>
-      <p:sp>
-        <p:nvSpPr>
-          <p:cNvPr id="10" name="TextBox 9"/>
-          <p:cNvSpPr txBox="1"/>
-          <p:nvPr/>
-        </p:nvSpPr>
-        <p:spPr>
-          <a:xfrm>
-            <a:off x="6096000" y="2825750"/>
-            <a:ext cx="4851400" cy="177800"/>
-          </a:xfrm>
-          <a:prstGeom prst="rect">
-            <a:avLst/>
-          </a:prstGeom>
-          <a:noFill/>
-        </p:spPr>
-        <p:txBody>
-          <a:bodyPr wrap="square">
-            <a:normAutofit/>
-          </a:bodyPr>
-          <a:lstStyle/>
-          <a:p>
-            <a:pPr algn="l"/>
-            <a:r>
-              <a:rPr sz="900" b="0" i="0">
-                <a:solidFill>
-                  <a:srgbClr val="1F2B56"/>
-                </a:solidFill>
-                <a:latin typeface="Courier New"/>
-              </a:rPr>
-              <a:t>Mitnahme</a:t>
-            </a:r>
-          </a:p>
-        </p:txBody>
-      </p:sp>
-      <p:sp>
-        <p:nvSpPr>
-          <p:cNvPr id="11" name="TextBox 10"/>
-          <p:cNvSpPr txBox="1"/>
-          <p:nvPr/>
-        </p:nvSpPr>
-        <p:spPr>
-          <a:xfrm>
-            <a:off x="6096000" y="3041650"/>
-            <a:ext cx="4851400" cy="2667000"/>
-          </a:xfrm>
-          <a:prstGeom prst="rect">
-            <a:avLst/>
-          </a:prstGeom>
-          <a:noFill/>
-        </p:spPr>
-        <p:txBody>
-          <a:bodyPr wrap="square">
-            <a:normAutofit/>
-          </a:bodyPr>
-          <a:lstStyle/>
-          <a:p>
-            <a:pPr algn="l"/>
-            <a:r>
-              <a:rPr sz="1400" b="0" i="1">
-                <a:solidFill>
-                  <a:srgbClr val="191D2E"/>
-                </a:solidFill>
-                <a:latin typeface="Georgia"/>
-              </a:rPr>
-              <a:t>Folge: Kunden suchen das Gespräch. Cross-Selling entsteht von allein. Das Rating verbessert sich, weil der Berater Risiken früher erkennt.</a:t>
+              <a:rPr sz="700">
+                <a:solidFill>
+                  <a:srgbClr val="A0B4D2"/>
+                </a:solidFill>
+                <a:latin typeface="JetBrains Mono"/>
+              </a:rPr>
+              <a:t>Benedikt Zoller Coaching  ·  FKB Campus  ·  M09</a:t>
             </a:r>
           </a:p>
         </p:txBody>
@@ -6027,14 +6270,6 @@
 <file path=ppt/slides/slide5.xml><?xml version="1.0" encoding="utf-8"?>
 <p:sld xmlns:a="http://schemas.openxmlformats.org/drawingml/2006/main" xmlns:p="http://schemas.openxmlformats.org/presentationml/2006/main" xmlns:r="http://schemas.openxmlformats.org/officeDocument/2006/relationships">
   <p:cSld>
-    <p:bg>
-      <p:bgPr>
-        <a:solidFill>
-          <a:srgbClr val="1F2B56"/>
-        </a:solidFill>
-        <a:effectLst/>
-      </p:bgPr>
-    </p:bg>
     <p:spTree>
       <p:nvGrpSpPr>
         <p:cNvPr id="1" name=""/>
@@ -6044,71 +6279,87 @@
       <p:grpSpPr/>
       <p:sp>
         <p:nvSpPr>
-          <p:cNvPr id="2" name="TextBox 1"/>
-          <p:cNvSpPr txBox="1"/>
-          <p:nvPr/>
-        </p:nvSpPr>
-        <p:spPr>
-          <a:xfrm>
-            <a:off x="609600" y="279400"/>
-            <a:ext cx="2540000" cy="279400"/>
-          </a:xfrm>
-          <a:prstGeom prst="rect">
-            <a:avLst/>
-          </a:prstGeom>
-          <a:noFill/>
-        </p:spPr>
-        <p:txBody>
-          <a:bodyPr wrap="square">
-            <a:normAutofit/>
-          </a:bodyPr>
-          <a:lstStyle/>
-          <a:p>
-            <a:pPr algn="l"/>
-            <a:r>
-              <a:rPr sz="1000" b="1" i="0">
-                <a:solidFill>
-                  <a:srgbClr val="F8F8FA"/>
-                </a:solidFill>
-                <a:latin typeface="Arial"/>
-              </a:rPr>
-              <a:t>FKB  Campus</a:t>
-            </a:r>
-          </a:p>
-        </p:txBody>
-      </p:sp>
-      <p:sp>
-        <p:nvSpPr>
-          <p:cNvPr id="3" name="TextBox 2"/>
-          <p:cNvSpPr txBox="1"/>
-          <p:nvPr/>
-        </p:nvSpPr>
-        <p:spPr>
-          <a:xfrm>
-            <a:off x="609600" y="279400"/>
-            <a:ext cx="10972800" cy="279400"/>
-          </a:xfrm>
-          <a:prstGeom prst="rect">
-            <a:avLst/>
-          </a:prstGeom>
-          <a:noFill/>
-        </p:spPr>
-        <p:txBody>
-          <a:bodyPr wrap="square">
-            <a:normAutofit/>
-          </a:bodyPr>
-          <a:lstStyle/>
-          <a:p>
-            <a:pPr algn="r"/>
-            <a:r>
-              <a:rPr sz="900" b="0" i="0">
-                <a:solidFill>
-                  <a:srgbClr val="7B7FA0"/>
-                </a:solidFill>
-                <a:latin typeface="Courier New"/>
-              </a:rPr>
-              <a:t>BRANCHE ANALYSIEREN — IN 90 MINUTEN</a:t>
-            </a:r>
+          <p:cNvPr id="2" name="Rectangle 1"/>
+          <p:cNvSpPr/>
+          <p:nvPr/>
+        </p:nvSpPr>
+        <p:spPr>
+          <a:xfrm>
+            <a:off x="0" y="0"/>
+            <a:ext cx="12188952" cy="6858000"/>
+          </a:xfrm>
+          <a:prstGeom prst="rect">
+            <a:avLst/>
+          </a:prstGeom>
+          <a:solidFill>
+            <a:srgbClr val="EDEDF3"/>
+          </a:solidFill>
+          <a:ln>
+            <a:noFill/>
+          </a:ln>
+        </p:spPr>
+        <p:style>
+          <a:lnRef idx="1">
+            <a:schemeClr val="accent1"/>
+          </a:lnRef>
+          <a:fillRef idx="3">
+            <a:schemeClr val="accent1"/>
+          </a:fillRef>
+          <a:effectRef idx="2">
+            <a:schemeClr val="accent1"/>
+          </a:effectRef>
+          <a:fontRef idx="minor">
+            <a:schemeClr val="lt1"/>
+          </a:fontRef>
+        </p:style>
+        <p:txBody>
+          <a:bodyPr rtlCol="0" anchor="ctr"/>
+          <a:lstStyle/>
+          <a:p>
+            <a:pPr algn="ctr"/>
+          </a:p>
+        </p:txBody>
+      </p:sp>
+      <p:sp>
+        <p:nvSpPr>
+          <p:cNvPr id="3" name="Rectangle 2"/>
+          <p:cNvSpPr/>
+          <p:nvPr/>
+        </p:nvSpPr>
+        <p:spPr>
+          <a:xfrm>
+            <a:off x="0" y="0"/>
+            <a:ext cx="12188952" cy="50292"/>
+          </a:xfrm>
+          <a:prstGeom prst="rect">
+            <a:avLst/>
+          </a:prstGeom>
+          <a:solidFill>
+            <a:srgbClr val="1F2C56"/>
+          </a:solidFill>
+          <a:ln>
+            <a:noFill/>
+          </a:ln>
+        </p:spPr>
+        <p:style>
+          <a:lnRef idx="1">
+            <a:schemeClr val="accent1"/>
+          </a:lnRef>
+          <a:fillRef idx="3">
+            <a:schemeClr val="accent1"/>
+          </a:fillRef>
+          <a:effectRef idx="2">
+            <a:schemeClr val="accent1"/>
+          </a:effectRef>
+          <a:fontRef idx="minor">
+            <a:schemeClr val="lt1"/>
+          </a:fontRef>
+        </p:style>
+        <p:txBody>
+          <a:bodyPr rtlCol="0" anchor="ctr"/>
+          <a:lstStyle/>
+          <a:p>
+            <a:pPr algn="ctr"/>
           </a:p>
         </p:txBody>
       </p:sp>
@@ -6120,8 +6371,8 @@
         </p:nvSpPr>
         <p:spPr>
           <a:xfrm>
-            <a:off x="609600" y="6426200"/>
-            <a:ext cx="10972800" cy="228600"/>
+            <a:off x="685800" y="109728"/>
+            <a:ext cx="10817352" cy="228600"/>
           </a:xfrm>
           <a:prstGeom prst="rect">
             <a:avLst/>
@@ -6129,91 +6380,107 @@
           <a:noFill/>
         </p:spPr>
         <p:txBody>
-          <a:bodyPr wrap="square">
-            <a:normAutofit/>
+          <a:bodyPr wrap="none">
+            <a:spAutoFit/>
           </a:bodyPr>
           <a:lstStyle/>
           <a:p>
-            <a:pPr algn="r"/>
-            <a:r>
-              <a:rPr sz="900" b="0" i="0">
-                <a:solidFill>
-                  <a:srgbClr val="7B7FA0"/>
-                </a:solidFill>
-                <a:latin typeface="Courier New"/>
-              </a:rPr>
-              <a:t>05</a:t>
-            </a:r>
-          </a:p>
-        </p:txBody>
-      </p:sp>
-      <p:sp>
-        <p:nvSpPr>
-          <p:cNvPr id="5" name="TextBox 4"/>
-          <p:cNvSpPr txBox="1"/>
-          <p:nvPr/>
-        </p:nvSpPr>
-        <p:spPr>
-          <a:xfrm>
-            <a:off x="609600" y="635000"/>
-            <a:ext cx="5461000" cy="5461000"/>
-          </a:xfrm>
-          <a:prstGeom prst="rect">
-            <a:avLst/>
-          </a:prstGeom>
-          <a:noFill/>
-        </p:spPr>
-        <p:txBody>
-          <a:bodyPr wrap="square">
-            <a:normAutofit/>
-          </a:bodyPr>
-          <a:lstStyle/>
-          <a:p>
             <a:pPr algn="l"/>
             <a:r>
-              <a:rPr sz="28000" b="0" i="1">
-                <a:solidFill>
-                  <a:srgbClr val="D9BF7A"/>
-                </a:solidFill>
-                <a:latin typeface="Georgia"/>
-              </a:rPr>
-              <a:t>II</a:t>
-            </a:r>
-          </a:p>
-        </p:txBody>
-      </p:sp>
-      <p:sp>
-        <p:nvSpPr>
-          <p:cNvPr id="6" name="TextBox 5"/>
-          <p:cNvSpPr txBox="1"/>
-          <p:nvPr/>
-        </p:nvSpPr>
-        <p:spPr>
-          <a:xfrm>
-            <a:off x="6731000" y="4064000"/>
-            <a:ext cx="4851400" cy="1778000"/>
-          </a:xfrm>
-          <a:prstGeom prst="rect">
-            <a:avLst/>
-          </a:prstGeom>
-          <a:noFill/>
-        </p:spPr>
-        <p:txBody>
-          <a:bodyPr wrap="square">
-            <a:normAutofit/>
-          </a:bodyPr>
-          <a:lstStyle/>
-          <a:p>
-            <a:pPr algn="r"/>
-            <a:r>
-              <a:rPr sz="3800" b="0" i="0">
-                <a:solidFill>
-                  <a:srgbClr val="F8F8FA"/>
-                </a:solidFill>
-                <a:latin typeface="Georgia"/>
-              </a:rPr>
-              <a:t>Branche analysieren — in 90 Minuten</a:t>
-            </a:r>
+              <a:rPr sz="750">
+                <a:solidFill>
+                  <a:srgbClr val="78808C"/>
+                </a:solidFill>
+                <a:latin typeface="JetBrains Mono"/>
+              </a:rPr>
+              <a:t>M09  ·  INHALT</a:t>
+            </a:r>
+          </a:p>
+        </p:txBody>
+      </p:sp>
+      <p:sp>
+        <p:nvSpPr>
+          <p:cNvPr id="5" name="Rectangle 4"/>
+          <p:cNvSpPr/>
+          <p:nvPr/>
+        </p:nvSpPr>
+        <p:spPr>
+          <a:xfrm>
+            <a:off x="0" y="1234440"/>
+            <a:ext cx="12188952" cy="12700"/>
+          </a:xfrm>
+          <a:prstGeom prst="rect">
+            <a:avLst/>
+          </a:prstGeom>
+          <a:solidFill>
+            <a:srgbClr val="D8DFE4"/>
+          </a:solidFill>
+          <a:ln>
+            <a:noFill/>
+          </a:ln>
+        </p:spPr>
+        <p:style>
+          <a:lnRef idx="1">
+            <a:schemeClr val="accent1"/>
+          </a:lnRef>
+          <a:fillRef idx="3">
+            <a:schemeClr val="accent1"/>
+          </a:fillRef>
+          <a:effectRef idx="2">
+            <a:schemeClr val="accent1"/>
+          </a:effectRef>
+          <a:fontRef idx="minor">
+            <a:schemeClr val="lt1"/>
+          </a:fontRef>
+        </p:style>
+        <p:txBody>
+          <a:bodyPr rtlCol="0" anchor="ctr"/>
+          <a:lstStyle/>
+          <a:p>
+            <a:pPr algn="ctr"/>
+          </a:p>
+        </p:txBody>
+      </p:sp>
+      <p:sp>
+        <p:nvSpPr>
+          <p:cNvPr id="6" name="Rectangle 5"/>
+          <p:cNvSpPr/>
+          <p:nvPr/>
+        </p:nvSpPr>
+        <p:spPr>
+          <a:xfrm>
+            <a:off x="685800" y="502920"/>
+            <a:ext cx="36576" cy="658368"/>
+          </a:xfrm>
+          <a:prstGeom prst="rect">
+            <a:avLst/>
+          </a:prstGeom>
+          <a:solidFill>
+            <a:srgbClr val="D9C089"/>
+          </a:solidFill>
+          <a:ln>
+            <a:noFill/>
+          </a:ln>
+        </p:spPr>
+        <p:style>
+          <a:lnRef idx="1">
+            <a:schemeClr val="accent1"/>
+          </a:lnRef>
+          <a:fillRef idx="3">
+            <a:schemeClr val="accent1"/>
+          </a:fillRef>
+          <a:effectRef idx="2">
+            <a:schemeClr val="accent1"/>
+          </a:effectRef>
+          <a:fontRef idx="minor">
+            <a:schemeClr val="lt1"/>
+          </a:fontRef>
+        </p:style>
+        <p:txBody>
+          <a:bodyPr rtlCol="0" anchor="ctr"/>
+          <a:lstStyle/>
+          <a:p>
+            <a:pPr algn="ctr"/>
           </a:p>
         </p:txBody>
       </p:sp>
@@ -6225,8 +6492,8 @@
         </p:nvSpPr>
         <p:spPr>
           <a:xfrm>
-            <a:off x="6731000" y="5842000"/>
-            <a:ext cx="4851400" cy="635000"/>
+            <a:off x="813816" y="502920"/>
+            <a:ext cx="10634472" cy="685800"/>
           </a:xfrm>
           <a:prstGeom prst="rect">
             <a:avLst/>
@@ -6235,19 +6502,139 @@
         </p:spPr>
         <p:txBody>
           <a:bodyPr wrap="square">
-            <a:normAutofit/>
+            <a:spAutoFit/>
           </a:bodyPr>
           <a:lstStyle/>
           <a:p>
-            <a:pPr algn="r"/>
-            <a:r>
-              <a:rPr sz="1400" b="0" i="1">
-                <a:solidFill>
-                  <a:srgbClr val="7B7FA0"/>
-                </a:solidFill>
-                <a:latin typeface="Georgia"/>
-              </a:rPr>
-              <a:t>Porter's Five Forces + PESTEL</a:t>
+            <a:pPr algn="l"/>
+            <a:r>
+              <a:rPr sz="2400" b="1" i="0">
+                <a:solidFill>
+                  <a:srgbClr val="1F2C56"/>
+                </a:solidFill>
+                <a:latin typeface="Source Serif 4"/>
+              </a:rPr>
+              <a:t>PESTEL-Analyse</a:t>
+            </a:r>
+          </a:p>
+        </p:txBody>
+      </p:sp>
+      <p:sp>
+        <p:nvSpPr>
+          <p:cNvPr id="8" name="TextBox 7"/>
+          <p:cNvSpPr txBox="1"/>
+          <p:nvPr/>
+        </p:nvSpPr>
+        <p:spPr>
+          <a:xfrm>
+            <a:off x="685800" y="1417320"/>
+            <a:ext cx="10817352" cy="5029200"/>
+          </a:xfrm>
+          <a:prstGeom prst="rect">
+            <a:avLst/>
+          </a:prstGeom>
+          <a:noFill/>
+        </p:spPr>
+        <p:txBody>
+          <a:bodyPr wrap="square">
+            <a:spAutoFit/>
+          </a:bodyPr>
+          <a:lstStyle/>
+          <a:p>
+            <a:pPr>
+              <a:spcBef>
+                <a:spcPts val="400"/>
+              </a:spcBef>
+              <a:spcAft>
+                <a:spcPts val="200"/>
+              </a:spcAft>
+            </a:pPr>
+            <a:r>
+              <a:rPr sz="1200">
+                <a:solidFill>
+                  <a:srgbClr val="3D5466"/>
+                </a:solidFill>
+                <a:latin typeface="Arial"/>
+              </a:rPr>
+              <a:t>Die PESTEL-Analyse ergänzt das Five-Forces-Modell um das makroökonomische Umfeld:</a:t>
+            </a:r>
+          </a:p>
+        </p:txBody>
+      </p:sp>
+      <p:sp>
+        <p:nvSpPr>
+          <p:cNvPr id="9" name="Rectangle 8"/>
+          <p:cNvSpPr/>
+          <p:nvPr/>
+        </p:nvSpPr>
+        <p:spPr>
+          <a:xfrm>
+            <a:off x="0" y="6510528"/>
+            <a:ext cx="12188952" cy="347472"/>
+          </a:xfrm>
+          <a:prstGeom prst="rect">
+            <a:avLst/>
+          </a:prstGeom>
+          <a:solidFill>
+            <a:srgbClr val="0A1937"/>
+          </a:solidFill>
+          <a:ln>
+            <a:noFill/>
+          </a:ln>
+        </p:spPr>
+        <p:style>
+          <a:lnRef idx="1">
+            <a:schemeClr val="accent1"/>
+          </a:lnRef>
+          <a:fillRef idx="3">
+            <a:schemeClr val="accent1"/>
+          </a:fillRef>
+          <a:effectRef idx="2">
+            <a:schemeClr val="accent1"/>
+          </a:effectRef>
+          <a:fontRef idx="minor">
+            <a:schemeClr val="lt1"/>
+          </a:fontRef>
+        </p:style>
+        <p:txBody>
+          <a:bodyPr rtlCol="0" anchor="ctr"/>
+          <a:lstStyle/>
+          <a:p>
+            <a:pPr algn="ctr"/>
+          </a:p>
+        </p:txBody>
+      </p:sp>
+      <p:sp>
+        <p:nvSpPr>
+          <p:cNvPr id="10" name="TextBox 9"/>
+          <p:cNvSpPr txBox="1"/>
+          <p:nvPr/>
+        </p:nvSpPr>
+        <p:spPr>
+          <a:xfrm>
+            <a:off x="685800" y="6583680"/>
+            <a:ext cx="6490411" cy="256032"/>
+          </a:xfrm>
+          <a:prstGeom prst="rect">
+            <a:avLst/>
+          </a:prstGeom>
+          <a:noFill/>
+        </p:spPr>
+        <p:txBody>
+          <a:bodyPr wrap="none">
+            <a:spAutoFit/>
+          </a:bodyPr>
+          <a:lstStyle/>
+          <a:p>
+            <a:pPr algn="l"/>
+            <a:r>
+              <a:rPr sz="700">
+                <a:solidFill>
+                  <a:srgbClr val="A0B4D2"/>
+                </a:solidFill>
+                <a:latin typeface="JetBrains Mono"/>
+              </a:rPr>
+              <a:t>Benedikt Zoller Coaching  ·  FKB Campus  ·  M09</a:t>
             </a:r>
           </a:p>
         </p:txBody>
@@ -6263,14 +6650,6 @@
 <file path=ppt/slides/slide6.xml><?xml version="1.0" encoding="utf-8"?>
 <p:sld xmlns:a="http://schemas.openxmlformats.org/drawingml/2006/main" xmlns:p="http://schemas.openxmlformats.org/presentationml/2006/main" xmlns:r="http://schemas.openxmlformats.org/officeDocument/2006/relationships">
   <p:cSld>
-    <p:bg>
-      <p:bgPr>
-        <a:solidFill>
-          <a:srgbClr val="F8F8FA"/>
-        </a:solidFill>
-        <a:effectLst/>
-      </p:bgPr>
-    </p:bg>
     <p:spTree>
       <p:nvGrpSpPr>
         <p:cNvPr id="1" name=""/>
@@ -6280,125 +6659,20 @@
       <p:grpSpPr/>
       <p:sp>
         <p:nvSpPr>
-          <p:cNvPr id="2" name="TextBox 1"/>
-          <p:cNvSpPr txBox="1"/>
-          <p:nvPr/>
-        </p:nvSpPr>
-        <p:spPr>
-          <a:xfrm>
-            <a:off x="609600" y="279400"/>
-            <a:ext cx="2540000" cy="279400"/>
-          </a:xfrm>
-          <a:prstGeom prst="rect">
-            <a:avLst/>
-          </a:prstGeom>
-          <a:noFill/>
-        </p:spPr>
-        <p:txBody>
-          <a:bodyPr wrap="square">
-            <a:normAutofit/>
-          </a:bodyPr>
-          <a:lstStyle/>
-          <a:p>
-            <a:pPr algn="l"/>
-            <a:r>
-              <a:rPr sz="1000" b="1" i="0">
-                <a:solidFill>
-                  <a:srgbClr val="191D2E"/>
-                </a:solidFill>
-                <a:latin typeface="Arial"/>
-              </a:rPr>
-              <a:t>FKB  Campus</a:t>
-            </a:r>
-          </a:p>
-        </p:txBody>
-      </p:sp>
-      <p:sp>
-        <p:nvSpPr>
-          <p:cNvPr id="3" name="TextBox 2"/>
-          <p:cNvSpPr txBox="1"/>
-          <p:nvPr/>
-        </p:nvSpPr>
-        <p:spPr>
-          <a:xfrm>
-            <a:off x="609600" y="279400"/>
-            <a:ext cx="10972800" cy="279400"/>
-          </a:xfrm>
-          <a:prstGeom prst="rect">
-            <a:avLst/>
-          </a:prstGeom>
-          <a:noFill/>
-        </p:spPr>
-        <p:txBody>
-          <a:bodyPr wrap="square">
-            <a:normAutofit/>
-          </a:bodyPr>
-          <a:lstStyle/>
-          <a:p>
-            <a:pPr algn="r"/>
-            <a:r>
-              <a:rPr sz="900" b="0" i="0">
-                <a:solidFill>
-                  <a:srgbClr val="7B7FA0"/>
-                </a:solidFill>
-                <a:latin typeface="Courier New"/>
-              </a:rPr>
-              <a:t>II · BRANCHE ANALYSIEREN — IN 90 MINUTEN</a:t>
-            </a:r>
-          </a:p>
-        </p:txBody>
-      </p:sp>
-      <p:sp>
-        <p:nvSpPr>
-          <p:cNvPr id="4" name="TextBox 3"/>
-          <p:cNvSpPr txBox="1"/>
-          <p:nvPr/>
-        </p:nvSpPr>
-        <p:spPr>
-          <a:xfrm>
-            <a:off x="609600" y="6426200"/>
-            <a:ext cx="10972800" cy="228600"/>
-          </a:xfrm>
-          <a:prstGeom prst="rect">
-            <a:avLst/>
-          </a:prstGeom>
-          <a:noFill/>
-        </p:spPr>
-        <p:txBody>
-          <a:bodyPr wrap="square">
-            <a:normAutofit/>
-          </a:bodyPr>
-          <a:lstStyle/>
-          <a:p>
-            <a:pPr algn="r"/>
-            <a:r>
-              <a:rPr sz="900" b="0" i="0">
-                <a:solidFill>
-                  <a:srgbClr val="7B7FA0"/>
-                </a:solidFill>
-                <a:latin typeface="Courier New"/>
-              </a:rPr>
-              <a:t>06</a:t>
-            </a:r>
-          </a:p>
-        </p:txBody>
-      </p:sp>
-      <p:sp>
-        <p:nvSpPr>
-          <p:cNvPr id="5" name="Rectangle 4"/>
+          <p:cNvPr id="2" name="Rectangle 1"/>
           <p:cNvSpPr/>
           <p:nvPr/>
         </p:nvSpPr>
         <p:spPr>
           <a:xfrm>
-            <a:off x="609600" y="825500"/>
-            <a:ext cx="10972800" cy="6350"/>
+            <a:off x="0" y="0"/>
+            <a:ext cx="12188952" cy="6858000"/>
           </a:xfrm>
           <a:prstGeom prst="rect">
             <a:avLst/>
           </a:prstGeom>
           <a:solidFill>
-            <a:srgbClr val="191D2E"/>
+            <a:srgbClr val="FFFFFF"/>
           </a:solidFill>
           <a:ln>
             <a:noFill/>
@@ -6428,55 +6702,20 @@
       </p:sp>
       <p:sp>
         <p:nvSpPr>
-          <p:cNvPr id="6" name="TextBox 5"/>
-          <p:cNvSpPr txBox="1"/>
-          <p:nvPr/>
-        </p:nvSpPr>
-        <p:spPr>
-          <a:xfrm>
-            <a:off x="609600" y="920750"/>
-            <a:ext cx="10972800" cy="1778000"/>
-          </a:xfrm>
-          <a:prstGeom prst="rect">
-            <a:avLst/>
-          </a:prstGeom>
-          <a:noFill/>
-        </p:spPr>
-        <p:txBody>
-          <a:bodyPr wrap="square">
-            <a:normAutofit/>
-          </a:bodyPr>
-          <a:lstStyle/>
-          <a:p>
-            <a:pPr algn="l"/>
-            <a:r>
-              <a:rPr sz="3800" b="0" i="0">
-                <a:solidFill>
-                  <a:srgbClr val="191D2E"/>
-                </a:solidFill>
-                <a:latin typeface="Georgia"/>
-              </a:rPr>
-              <a:t>Porter's Five Forces: Fünf Fragen, ein Branchenbild</a:t>
-            </a:r>
-          </a:p>
-        </p:txBody>
-      </p:sp>
-      <p:sp>
-        <p:nvSpPr>
-          <p:cNvPr id="7" name="Rectangle 6"/>
+          <p:cNvPr id="3" name="Rectangle 2"/>
           <p:cNvSpPr/>
           <p:nvPr/>
         </p:nvSpPr>
         <p:spPr>
           <a:xfrm>
-            <a:off x="609600" y="2762250"/>
-            <a:ext cx="10972800" cy="6350"/>
+            <a:off x="0" y="0"/>
+            <a:ext cx="12188952" cy="50292"/>
           </a:xfrm>
           <a:prstGeom prst="rect">
             <a:avLst/>
           </a:prstGeom>
           <a:solidFill>
-            <a:srgbClr val="E0E0E8"/>
+            <a:srgbClr val="1F2C56"/>
           </a:solidFill>
           <a:ln>
             <a:noFill/>
@@ -6506,14 +6745,14 @@
       </p:sp>
       <p:sp>
         <p:nvSpPr>
-          <p:cNvPr id="8" name="TextBox 7"/>
+          <p:cNvPr id="4" name="TextBox 3"/>
           <p:cNvSpPr txBox="1"/>
           <p:nvPr/>
         </p:nvSpPr>
         <p:spPr>
           <a:xfrm>
-            <a:off x="609600" y="2851150"/>
-            <a:ext cx="10972800" cy="3448050"/>
+            <a:off x="685800" y="109728"/>
+            <a:ext cx="10817352" cy="228600"/>
           </a:xfrm>
           <a:prstGeom prst="rect">
             <a:avLst/>
@@ -6521,103 +6760,235 @@
           <a:noFill/>
         </p:spPr>
         <p:txBody>
+          <a:bodyPr wrap="none">
+            <a:spAutoFit/>
+          </a:bodyPr>
+          <a:lstStyle/>
+          <a:p>
+            <a:pPr algn="l"/>
+            <a:r>
+              <a:rPr sz="750">
+                <a:solidFill>
+                  <a:srgbClr val="78808C"/>
+                </a:solidFill>
+                <a:latin typeface="JetBrains Mono"/>
+              </a:rPr>
+              <a:t>M09  ·  SCHAUBILD</a:t>
+            </a:r>
+          </a:p>
+        </p:txBody>
+      </p:sp>
+      <p:sp>
+        <p:nvSpPr>
+          <p:cNvPr id="5" name="TextBox 4"/>
+          <p:cNvSpPr txBox="1"/>
+          <p:nvPr/>
+        </p:nvSpPr>
+        <p:spPr>
+          <a:xfrm>
+            <a:off x="685800" y="502920"/>
+            <a:ext cx="10817352" cy="594360"/>
+          </a:xfrm>
+          <a:prstGeom prst="rect">
+            <a:avLst/>
+          </a:prstGeom>
+          <a:noFill/>
+        </p:spPr>
+        <p:txBody>
           <a:bodyPr wrap="square">
-            <a:normAutofit/>
+            <a:spAutoFit/>
           </a:bodyPr>
           <a:lstStyle/>
           <a:p>
-            <a:pPr>
-              <a:spcBef>
-                <a:spcPts val="600"/>
-              </a:spcBef>
-              <a:spcAft>
-                <a:spcPts val="600"/>
-              </a:spcAft>
-            </a:pPr>
-            <a:r>
-              <a:rPr sz="1400">
-                <a:solidFill>
-                  <a:srgbClr val="191D2E"/>
-                </a:solidFill>
-                <a:latin typeface="Georgia"/>
-              </a:rPr>
-              <a:t>–  Branchenrivalität: Wer kämpft um denselben Kunden?</a:t>
-            </a:r>
-          </a:p>
-          <a:p>
-            <a:pPr>
-              <a:spcBef>
-                <a:spcPts val="600"/>
-              </a:spcBef>
-              <a:spcAft>
-                <a:spcPts val="600"/>
-              </a:spcAft>
-            </a:pPr>
-            <a:r>
-              <a:rPr sz="1400">
-                <a:solidFill>
-                  <a:srgbClr val="191D2E"/>
-                </a:solidFill>
-                <a:latin typeface="Georgia"/>
-              </a:rPr>
-              <a:t>–  Substitution: Welche Technologie oder Lösung ersetzt das Produkt?</a:t>
-            </a:r>
-          </a:p>
-          <a:p>
-            <a:pPr>
-              <a:spcBef>
-                <a:spcPts val="600"/>
-              </a:spcBef>
-              <a:spcAft>
-                <a:spcPts val="600"/>
-              </a:spcAft>
-            </a:pPr>
-            <a:r>
-              <a:rPr sz="1400">
-                <a:solidFill>
-                  <a:srgbClr val="191D2E"/>
-                </a:solidFill>
-                <a:latin typeface="Georgia"/>
-              </a:rPr>
-              <a:t>–  Neue Wettbewerber: Wie schwer ist der Markteintritt?</a:t>
-            </a:r>
-          </a:p>
-          <a:p>
-            <a:pPr>
-              <a:spcBef>
-                <a:spcPts val="600"/>
-              </a:spcBef>
-              <a:spcAft>
-                <a:spcPts val="600"/>
-              </a:spcAft>
-            </a:pPr>
-            <a:r>
-              <a:rPr sz="1400">
-                <a:solidFill>
-                  <a:srgbClr val="191D2E"/>
-                </a:solidFill>
-                <a:latin typeface="Georgia"/>
-              </a:rPr>
-              <a:t>–  Lieferantenmacht: Können Preise diktiiert werden?</a:t>
-            </a:r>
-          </a:p>
-          <a:p>
-            <a:pPr>
-              <a:spcBef>
-                <a:spcPts val="600"/>
-              </a:spcBef>
-              <a:spcAft>
-                <a:spcPts val="600"/>
-              </a:spcAft>
-            </a:pPr>
-            <a:r>
-              <a:rPr sz="1400">
-                <a:solidFill>
-                  <a:srgbClr val="191D2E"/>
-                </a:solidFill>
-                <a:latin typeface="Georgia"/>
-              </a:rPr>
-              <a:t>–  Kundenmacht: Wer hat die Verhandlungshoheit?</a:t>
+            <a:pPr algn="l"/>
+            <a:r>
+              <a:rPr sz="2000" b="1" i="0">
+                <a:solidFill>
+                  <a:srgbClr val="1F2C56"/>
+                </a:solidFill>
+                <a:latin typeface="Source Serif 4"/>
+              </a:rPr>
+              <a:t>PESTEL-Analyse für die Bankpraxis</a:t>
+            </a:r>
+          </a:p>
+        </p:txBody>
+      </p:sp>
+      <p:sp>
+        <p:nvSpPr>
+          <p:cNvPr id="6" name="Rectangle 5"/>
+          <p:cNvSpPr/>
+          <p:nvPr/>
+        </p:nvSpPr>
+        <p:spPr>
+          <a:xfrm>
+            <a:off x="685800" y="1143000"/>
+            <a:ext cx="10817352" cy="25400"/>
+          </a:xfrm>
+          <a:prstGeom prst="rect">
+            <a:avLst/>
+          </a:prstGeom>
+          <a:solidFill>
+            <a:srgbClr val="D9C089"/>
+          </a:solidFill>
+          <a:ln>
+            <a:noFill/>
+          </a:ln>
+        </p:spPr>
+        <p:style>
+          <a:lnRef idx="1">
+            <a:schemeClr val="accent1"/>
+          </a:lnRef>
+          <a:fillRef idx="3">
+            <a:schemeClr val="accent1"/>
+          </a:fillRef>
+          <a:effectRef idx="2">
+            <a:schemeClr val="accent1"/>
+          </a:effectRef>
+          <a:fontRef idx="minor">
+            <a:schemeClr val="lt1"/>
+          </a:fontRef>
+        </p:style>
+        <p:txBody>
+          <a:bodyPr rtlCol="0" anchor="ctr"/>
+          <a:lstStyle/>
+          <a:p>
+            <a:pPr algn="ctr"/>
+          </a:p>
+        </p:txBody>
+      </p:sp>
+      <p:pic>
+        <p:nvPicPr>
+          <p:cNvPr id="7" name="Picture 6" descr="image.png"/>
+          <p:cNvPicPr>
+            <a:picLocks noChangeAspect="1"/>
+          </p:cNvPicPr>
+          <p:nvPr/>
+        </p:nvPicPr>
+        <p:blipFill>
+          <a:blip r:embed="rId2"/>
+          <a:stretch>
+            <a:fillRect/>
+          </a:stretch>
+        </p:blipFill>
+        <p:spPr>
+          <a:xfrm>
+            <a:off x="2303489" y="1325880"/>
+            <a:ext cx="7581973" cy="4937760"/>
+          </a:xfrm>
+          <a:prstGeom prst="rect">
+            <a:avLst/>
+          </a:prstGeom>
+        </p:spPr>
+      </p:pic>
+      <p:sp>
+        <p:nvSpPr>
+          <p:cNvPr id="8" name="Rectangle 7"/>
+          <p:cNvSpPr/>
+          <p:nvPr/>
+        </p:nvSpPr>
+        <p:spPr>
+          <a:xfrm>
+            <a:off x="0" y="6510528"/>
+            <a:ext cx="12188952" cy="347472"/>
+          </a:xfrm>
+          <a:prstGeom prst="rect">
+            <a:avLst/>
+          </a:prstGeom>
+          <a:solidFill>
+            <a:srgbClr val="0A1937"/>
+          </a:solidFill>
+          <a:ln>
+            <a:noFill/>
+          </a:ln>
+        </p:spPr>
+        <p:style>
+          <a:lnRef idx="1">
+            <a:schemeClr val="accent1"/>
+          </a:lnRef>
+          <a:fillRef idx="3">
+            <a:schemeClr val="accent1"/>
+          </a:fillRef>
+          <a:effectRef idx="2">
+            <a:schemeClr val="accent1"/>
+          </a:effectRef>
+          <a:fontRef idx="minor">
+            <a:schemeClr val="lt1"/>
+          </a:fontRef>
+        </p:style>
+        <p:txBody>
+          <a:bodyPr rtlCol="0" anchor="ctr"/>
+          <a:lstStyle/>
+          <a:p>
+            <a:pPr algn="ctr"/>
+          </a:p>
+        </p:txBody>
+      </p:sp>
+      <p:sp>
+        <p:nvSpPr>
+          <p:cNvPr id="9" name="TextBox 8"/>
+          <p:cNvSpPr txBox="1"/>
+          <p:nvPr/>
+        </p:nvSpPr>
+        <p:spPr>
+          <a:xfrm>
+            <a:off x="685800" y="6583680"/>
+            <a:ext cx="6490411" cy="256032"/>
+          </a:xfrm>
+          <a:prstGeom prst="rect">
+            <a:avLst/>
+          </a:prstGeom>
+          <a:noFill/>
+        </p:spPr>
+        <p:txBody>
+          <a:bodyPr wrap="none">
+            <a:spAutoFit/>
+          </a:bodyPr>
+          <a:lstStyle/>
+          <a:p>
+            <a:pPr algn="l"/>
+            <a:r>
+              <a:rPr sz="700">
+                <a:solidFill>
+                  <a:srgbClr val="A0B4D2"/>
+                </a:solidFill>
+                <a:latin typeface="JetBrains Mono"/>
+              </a:rPr>
+              <a:t>Benedikt Zoller Coaching  ·  FKB Campus  ·  M09</a:t>
+            </a:r>
+          </a:p>
+        </p:txBody>
+      </p:sp>
+      <p:sp>
+        <p:nvSpPr>
+          <p:cNvPr id="10" name="TextBox 9"/>
+          <p:cNvSpPr txBox="1"/>
+          <p:nvPr/>
+        </p:nvSpPr>
+        <p:spPr>
+          <a:xfrm>
+            <a:off x="7176211" y="6583680"/>
+            <a:ext cx="4326940" cy="256032"/>
+          </a:xfrm>
+          <a:prstGeom prst="rect">
+            <a:avLst/>
+          </a:prstGeom>
+          <a:noFill/>
+        </p:spPr>
+        <p:txBody>
+          <a:bodyPr wrap="none">
+            <a:spAutoFit/>
+          </a:bodyPr>
+          <a:lstStyle/>
+          <a:p>
+            <a:pPr algn="r"/>
+            <a:r>
+              <a:rPr sz="700">
+                <a:solidFill>
+                  <a:srgbClr val="A0B4D2"/>
+                </a:solidFill>
+                <a:latin typeface="JetBrains Mono"/>
+              </a:rPr>
+              <a:t>Schaubild</a:t>
             </a:r>
           </a:p>
         </p:txBody>
@@ -6633,14 +7004,6 @@
 <file path=ppt/slides/slide7.xml><?xml version="1.0" encoding="utf-8"?>
 <p:sld xmlns:a="http://schemas.openxmlformats.org/drawingml/2006/main" xmlns:p="http://schemas.openxmlformats.org/presentationml/2006/main" xmlns:r="http://schemas.openxmlformats.org/officeDocument/2006/relationships">
   <p:cSld>
-    <p:bg>
-      <p:bgPr>
-        <a:solidFill>
-          <a:srgbClr val="F8F8FA"/>
-        </a:solidFill>
-        <a:effectLst/>
-      </p:bgPr>
-    </p:bg>
     <p:spTree>
       <p:nvGrpSpPr>
         <p:cNvPr id="1" name=""/>
@@ -6650,125 +7013,20 @@
       <p:grpSpPr/>
       <p:sp>
         <p:nvSpPr>
-          <p:cNvPr id="2" name="TextBox 1"/>
-          <p:cNvSpPr txBox="1"/>
-          <p:nvPr/>
-        </p:nvSpPr>
-        <p:spPr>
-          <a:xfrm>
-            <a:off x="609600" y="279400"/>
-            <a:ext cx="2540000" cy="279400"/>
-          </a:xfrm>
-          <a:prstGeom prst="rect">
-            <a:avLst/>
-          </a:prstGeom>
-          <a:noFill/>
-        </p:spPr>
-        <p:txBody>
-          <a:bodyPr wrap="square">
-            <a:normAutofit/>
-          </a:bodyPr>
-          <a:lstStyle/>
-          <a:p>
-            <a:pPr algn="l"/>
-            <a:r>
-              <a:rPr sz="1000" b="1" i="0">
-                <a:solidFill>
-                  <a:srgbClr val="191D2E"/>
-                </a:solidFill>
-                <a:latin typeface="Arial"/>
-              </a:rPr>
-              <a:t>FKB  Campus</a:t>
-            </a:r>
-          </a:p>
-        </p:txBody>
-      </p:sp>
-      <p:sp>
-        <p:nvSpPr>
-          <p:cNvPr id="3" name="TextBox 2"/>
-          <p:cNvSpPr txBox="1"/>
-          <p:nvPr/>
-        </p:nvSpPr>
-        <p:spPr>
-          <a:xfrm>
-            <a:off x="609600" y="279400"/>
-            <a:ext cx="10972800" cy="279400"/>
-          </a:xfrm>
-          <a:prstGeom prst="rect">
-            <a:avLst/>
-          </a:prstGeom>
-          <a:noFill/>
-        </p:spPr>
-        <p:txBody>
-          <a:bodyPr wrap="square">
-            <a:normAutofit/>
-          </a:bodyPr>
-          <a:lstStyle/>
-          <a:p>
-            <a:pPr algn="r"/>
-            <a:r>
-              <a:rPr sz="900" b="0" i="0">
-                <a:solidFill>
-                  <a:srgbClr val="7B7FA0"/>
-                </a:solidFill>
-                <a:latin typeface="Courier New"/>
-              </a:rPr>
-              <a:t>II · BRANCHE ANALYSIEREN — IN 90 MINUTEN</a:t>
-            </a:r>
-          </a:p>
-        </p:txBody>
-      </p:sp>
-      <p:sp>
-        <p:nvSpPr>
-          <p:cNvPr id="4" name="TextBox 3"/>
-          <p:cNvSpPr txBox="1"/>
-          <p:nvPr/>
-        </p:nvSpPr>
-        <p:spPr>
-          <a:xfrm>
-            <a:off x="609600" y="6426200"/>
-            <a:ext cx="10972800" cy="228600"/>
-          </a:xfrm>
-          <a:prstGeom prst="rect">
-            <a:avLst/>
-          </a:prstGeom>
-          <a:noFill/>
-        </p:spPr>
-        <p:txBody>
-          <a:bodyPr wrap="square">
-            <a:normAutofit/>
-          </a:bodyPr>
-          <a:lstStyle/>
-          <a:p>
-            <a:pPr algn="r"/>
-            <a:r>
-              <a:rPr sz="900" b="0" i="0">
-                <a:solidFill>
-                  <a:srgbClr val="7B7FA0"/>
-                </a:solidFill>
-                <a:latin typeface="Courier New"/>
-              </a:rPr>
-              <a:t>07</a:t>
-            </a:r>
-          </a:p>
-        </p:txBody>
-      </p:sp>
-      <p:sp>
-        <p:nvSpPr>
-          <p:cNvPr id="5" name="Rectangle 4"/>
+          <p:cNvPr id="2" name="Rectangle 1"/>
           <p:cNvSpPr/>
           <p:nvPr/>
         </p:nvSpPr>
         <p:spPr>
           <a:xfrm>
-            <a:off x="609600" y="825500"/>
-            <a:ext cx="10972800" cy="6350"/>
+            <a:off x="0" y="0"/>
+            <a:ext cx="12188952" cy="6858000"/>
           </a:xfrm>
           <a:prstGeom prst="rect">
             <a:avLst/>
           </a:prstGeom>
           <a:solidFill>
-            <a:srgbClr val="191D2E"/>
+            <a:srgbClr val="EDEDF3"/>
           </a:solidFill>
           <a:ln>
             <a:noFill/>
@@ -6798,55 +7056,20 @@
       </p:sp>
       <p:sp>
         <p:nvSpPr>
-          <p:cNvPr id="6" name="TextBox 5"/>
-          <p:cNvSpPr txBox="1"/>
-          <p:nvPr/>
-        </p:nvSpPr>
-        <p:spPr>
-          <a:xfrm>
-            <a:off x="609600" y="920750"/>
-            <a:ext cx="10972800" cy="1778000"/>
-          </a:xfrm>
-          <a:prstGeom prst="rect">
-            <a:avLst/>
-          </a:prstGeom>
-          <a:noFill/>
-        </p:spPr>
-        <p:txBody>
-          <a:bodyPr wrap="square">
-            <a:normAutofit/>
-          </a:bodyPr>
-          <a:lstStyle/>
-          <a:p>
-            <a:pPr algn="l"/>
-            <a:r>
-              <a:rPr sz="3800" b="0" i="0">
-                <a:solidFill>
-                  <a:srgbClr val="191D2E"/>
-                </a:solidFill>
-                <a:latin typeface="Georgia"/>
-              </a:rPr>
-              <a:t>PESTEL: Die äußeren Kräfte</a:t>
-            </a:r>
-          </a:p>
-        </p:txBody>
-      </p:sp>
-      <p:sp>
-        <p:nvSpPr>
-          <p:cNvPr id="7" name="Rectangle 6"/>
+          <p:cNvPr id="3" name="Rectangle 2"/>
           <p:cNvSpPr/>
           <p:nvPr/>
         </p:nvSpPr>
         <p:spPr>
           <a:xfrm>
-            <a:off x="609600" y="2762250"/>
-            <a:ext cx="10972800" cy="6350"/>
+            <a:off x="0" y="0"/>
+            <a:ext cx="12188952" cy="50292"/>
           </a:xfrm>
           <a:prstGeom prst="rect">
             <a:avLst/>
           </a:prstGeom>
           <a:solidFill>
-            <a:srgbClr val="E0E0E8"/>
+            <a:srgbClr val="1F2C56"/>
           </a:solidFill>
           <a:ln>
             <a:noFill/>
@@ -6876,14 +7099,14 @@
       </p:sp>
       <p:sp>
         <p:nvSpPr>
-          <p:cNvPr id="8" name="TextBox 7"/>
+          <p:cNvPr id="4" name="TextBox 3"/>
           <p:cNvSpPr txBox="1"/>
           <p:nvPr/>
         </p:nvSpPr>
         <p:spPr>
           <a:xfrm>
-            <a:off x="609600" y="2851150"/>
-            <a:ext cx="10972800" cy="3448050"/>
+            <a:off x="685800" y="109728"/>
+            <a:ext cx="10817352" cy="228600"/>
           </a:xfrm>
           <a:prstGeom prst="rect">
             <a:avLst/>
@@ -6891,103 +7114,219 @@
           <a:noFill/>
         </p:spPr>
         <p:txBody>
+          <a:bodyPr wrap="none">
+            <a:spAutoFit/>
+          </a:bodyPr>
+          <a:lstStyle/>
+          <a:p>
+            <a:pPr algn="l"/>
+            <a:r>
+              <a:rPr sz="750">
+                <a:solidFill>
+                  <a:srgbClr val="78808C"/>
+                </a:solidFill>
+                <a:latin typeface="JetBrains Mono"/>
+              </a:rPr>
+              <a:t>M09  ·  INHALT</a:t>
+            </a:r>
+          </a:p>
+        </p:txBody>
+      </p:sp>
+      <p:sp>
+        <p:nvSpPr>
+          <p:cNvPr id="5" name="Rectangle 4"/>
+          <p:cNvSpPr/>
+          <p:nvPr/>
+        </p:nvSpPr>
+        <p:spPr>
+          <a:xfrm>
+            <a:off x="0" y="1234440"/>
+            <a:ext cx="12188952" cy="12700"/>
+          </a:xfrm>
+          <a:prstGeom prst="rect">
+            <a:avLst/>
+          </a:prstGeom>
+          <a:solidFill>
+            <a:srgbClr val="D8DFE4"/>
+          </a:solidFill>
+          <a:ln>
+            <a:noFill/>
+          </a:ln>
+        </p:spPr>
+        <p:style>
+          <a:lnRef idx="1">
+            <a:schemeClr val="accent1"/>
+          </a:lnRef>
+          <a:fillRef idx="3">
+            <a:schemeClr val="accent1"/>
+          </a:fillRef>
+          <a:effectRef idx="2">
+            <a:schemeClr val="accent1"/>
+          </a:effectRef>
+          <a:fontRef idx="minor">
+            <a:schemeClr val="lt1"/>
+          </a:fontRef>
+        </p:style>
+        <p:txBody>
+          <a:bodyPr rtlCol="0" anchor="ctr"/>
+          <a:lstStyle/>
+          <a:p>
+            <a:pPr algn="ctr"/>
+          </a:p>
+        </p:txBody>
+      </p:sp>
+      <p:sp>
+        <p:nvSpPr>
+          <p:cNvPr id="6" name="Rectangle 5"/>
+          <p:cNvSpPr/>
+          <p:nvPr/>
+        </p:nvSpPr>
+        <p:spPr>
+          <a:xfrm>
+            <a:off x="685800" y="502920"/>
+            <a:ext cx="36576" cy="658368"/>
+          </a:xfrm>
+          <a:prstGeom prst="rect">
+            <a:avLst/>
+          </a:prstGeom>
+          <a:solidFill>
+            <a:srgbClr val="D9C089"/>
+          </a:solidFill>
+          <a:ln>
+            <a:noFill/>
+          </a:ln>
+        </p:spPr>
+        <p:style>
+          <a:lnRef idx="1">
+            <a:schemeClr val="accent1"/>
+          </a:lnRef>
+          <a:fillRef idx="3">
+            <a:schemeClr val="accent1"/>
+          </a:fillRef>
+          <a:effectRef idx="2">
+            <a:schemeClr val="accent1"/>
+          </a:effectRef>
+          <a:fontRef idx="minor">
+            <a:schemeClr val="lt1"/>
+          </a:fontRef>
+        </p:style>
+        <p:txBody>
+          <a:bodyPr rtlCol="0" anchor="ctr"/>
+          <a:lstStyle/>
+          <a:p>
+            <a:pPr algn="ctr"/>
+          </a:p>
+        </p:txBody>
+      </p:sp>
+      <p:sp>
+        <p:nvSpPr>
+          <p:cNvPr id="7" name="TextBox 6"/>
+          <p:cNvSpPr txBox="1"/>
+          <p:nvPr/>
+        </p:nvSpPr>
+        <p:spPr>
+          <a:xfrm>
+            <a:off x="813816" y="502920"/>
+            <a:ext cx="10634472" cy="685800"/>
+          </a:xfrm>
+          <a:prstGeom prst="rect">
+            <a:avLst/>
+          </a:prstGeom>
+          <a:noFill/>
+        </p:spPr>
+        <p:txBody>
           <a:bodyPr wrap="square">
-            <a:normAutofit/>
+            <a:spAutoFit/>
           </a:bodyPr>
           <a:lstStyle/>
           <a:p>
-            <a:pPr>
-              <a:spcBef>
-                <a:spcPts val="600"/>
-              </a:spcBef>
-              <a:spcAft>
-                <a:spcPts val="600"/>
-              </a:spcAft>
-            </a:pPr>
-            <a:r>
-              <a:rPr sz="1400">
-                <a:solidFill>
-                  <a:srgbClr val="191D2E"/>
-                </a:solidFill>
-                <a:latin typeface="Georgia"/>
-              </a:rPr>
-              <a:t>–  Politisch: Regulierung, Förderprogramme, Subventionen</a:t>
-            </a:r>
-          </a:p>
-          <a:p>
-            <a:pPr>
-              <a:spcBef>
-                <a:spcPts val="600"/>
-              </a:spcBef>
-              <a:spcAft>
-                <a:spcPts val="600"/>
-              </a:spcAft>
-            </a:pPr>
-            <a:r>
-              <a:rPr sz="1400">
-                <a:solidFill>
-                  <a:srgbClr val="191D2E"/>
-                </a:solidFill>
-                <a:latin typeface="Georgia"/>
-              </a:rPr>
-              <a:t>–  Ökonomisch: Zinsen, Konjunktur, Rohstoffpreise</a:t>
-            </a:r>
-          </a:p>
-          <a:p>
-            <a:pPr>
-              <a:spcBef>
-                <a:spcPts val="600"/>
-              </a:spcBef>
-              <a:spcAft>
-                <a:spcPts val="600"/>
-              </a:spcAft>
-            </a:pPr>
-            <a:r>
-              <a:rPr sz="1400">
-                <a:solidFill>
-                  <a:srgbClr val="191D2E"/>
-                </a:solidFill>
-                <a:latin typeface="Georgia"/>
-              </a:rPr>
-              <a:t>–  Sozial: Fachkräftemangel, Demografie, Kaufverhalten</a:t>
-            </a:r>
-          </a:p>
-          <a:p>
-            <a:pPr>
-              <a:spcBef>
-                <a:spcPts val="600"/>
-              </a:spcBef>
-              <a:spcAft>
-                <a:spcPts val="600"/>
-              </a:spcAft>
-            </a:pPr>
-            <a:r>
-              <a:rPr sz="1400">
-                <a:solidFill>
-                  <a:srgbClr val="191D2E"/>
-                </a:solidFill>
-                <a:latin typeface="Georgia"/>
-              </a:rPr>
-              <a:t>–  Technologisch: Digitalisierung, KI, Automatisierung</a:t>
-            </a:r>
-          </a:p>
-          <a:p>
-            <a:pPr>
-              <a:spcBef>
-                <a:spcPts val="600"/>
-              </a:spcBef>
-              <a:spcAft>
-                <a:spcPts val="600"/>
-              </a:spcAft>
-            </a:pPr>
-            <a:r>
-              <a:rPr sz="1400">
-                <a:solidFill>
-                  <a:srgbClr val="191D2E"/>
-                </a:solidFill>
-                <a:latin typeface="Georgia"/>
-              </a:rPr>
-              <a:t>–  Ökologisch: CO₂-Auflagen, ESG-Anforderungen</a:t>
+            <a:pPr algn="l"/>
+            <a:r>
+              <a:rPr sz="2400" b="1" i="0">
+                <a:solidFill>
+                  <a:srgbClr val="1F2C56"/>
+                </a:solidFill>
+                <a:latin typeface="Source Serif 4"/>
+              </a:rPr>
+              <a:t>Kombination im Kundengespräch</a:t>
+            </a:r>
+          </a:p>
+        </p:txBody>
+      </p:sp>
+      <p:sp>
+        <p:nvSpPr>
+          <p:cNvPr id="8" name="Rectangle 7"/>
+          <p:cNvSpPr/>
+          <p:nvPr/>
+        </p:nvSpPr>
+        <p:spPr>
+          <a:xfrm>
+            <a:off x="0" y="6510528"/>
+            <a:ext cx="12188952" cy="347472"/>
+          </a:xfrm>
+          <a:prstGeom prst="rect">
+            <a:avLst/>
+          </a:prstGeom>
+          <a:solidFill>
+            <a:srgbClr val="0A1937"/>
+          </a:solidFill>
+          <a:ln>
+            <a:noFill/>
+          </a:ln>
+        </p:spPr>
+        <p:style>
+          <a:lnRef idx="1">
+            <a:schemeClr val="accent1"/>
+          </a:lnRef>
+          <a:fillRef idx="3">
+            <a:schemeClr val="accent1"/>
+          </a:fillRef>
+          <a:effectRef idx="2">
+            <a:schemeClr val="accent1"/>
+          </a:effectRef>
+          <a:fontRef idx="minor">
+            <a:schemeClr val="lt1"/>
+          </a:fontRef>
+        </p:style>
+        <p:txBody>
+          <a:bodyPr rtlCol="0" anchor="ctr"/>
+          <a:lstStyle/>
+          <a:p>
+            <a:pPr algn="ctr"/>
+          </a:p>
+        </p:txBody>
+      </p:sp>
+      <p:sp>
+        <p:nvSpPr>
+          <p:cNvPr id="9" name="TextBox 8"/>
+          <p:cNvSpPr txBox="1"/>
+          <p:nvPr/>
+        </p:nvSpPr>
+        <p:spPr>
+          <a:xfrm>
+            <a:off x="685800" y="6583680"/>
+            <a:ext cx="6490411" cy="256032"/>
+          </a:xfrm>
+          <a:prstGeom prst="rect">
+            <a:avLst/>
+          </a:prstGeom>
+          <a:noFill/>
+        </p:spPr>
+        <p:txBody>
+          <a:bodyPr wrap="none">
+            <a:spAutoFit/>
+          </a:bodyPr>
+          <a:lstStyle/>
+          <a:p>
+            <a:pPr algn="l"/>
+            <a:r>
+              <a:rPr sz="700">
+                <a:solidFill>
+                  <a:srgbClr val="A0B4D2"/>
+                </a:solidFill>
+                <a:latin typeface="JetBrains Mono"/>
+              </a:rPr>
+              <a:t>Benedikt Zoller Coaching  ·  FKB Campus  ·  M09</a:t>
             </a:r>
           </a:p>
         </p:txBody>
@@ -7003,14 +7342,6 @@
 <file path=ppt/slides/slide8.xml><?xml version="1.0" encoding="utf-8"?>
 <p:sld xmlns:a="http://schemas.openxmlformats.org/drawingml/2006/main" xmlns:p="http://schemas.openxmlformats.org/presentationml/2006/main" xmlns:r="http://schemas.openxmlformats.org/officeDocument/2006/relationships">
   <p:cSld>
-    <p:bg>
-      <p:bgPr>
-        <a:solidFill>
-          <a:srgbClr val="1F2B56"/>
-        </a:solidFill>
-        <a:effectLst/>
-      </p:bgPr>
-    </p:bg>
     <p:spTree>
       <p:nvGrpSpPr>
         <p:cNvPr id="1" name=""/>
@@ -7020,71 +7351,87 @@
       <p:grpSpPr/>
       <p:sp>
         <p:nvSpPr>
-          <p:cNvPr id="2" name="TextBox 1"/>
-          <p:cNvSpPr txBox="1"/>
-          <p:nvPr/>
-        </p:nvSpPr>
-        <p:spPr>
-          <a:xfrm>
-            <a:off x="609600" y="279400"/>
-            <a:ext cx="2540000" cy="279400"/>
-          </a:xfrm>
-          <a:prstGeom prst="rect">
-            <a:avLst/>
-          </a:prstGeom>
-          <a:noFill/>
-        </p:spPr>
-        <p:txBody>
-          <a:bodyPr wrap="square">
-            <a:normAutofit/>
-          </a:bodyPr>
-          <a:lstStyle/>
-          <a:p>
-            <a:pPr algn="l"/>
-            <a:r>
-              <a:rPr sz="1000" b="1" i="0">
-                <a:solidFill>
-                  <a:srgbClr val="F8F8FA"/>
-                </a:solidFill>
-                <a:latin typeface="Arial"/>
-              </a:rPr>
-              <a:t>FKB  Campus</a:t>
-            </a:r>
-          </a:p>
-        </p:txBody>
-      </p:sp>
-      <p:sp>
-        <p:nvSpPr>
-          <p:cNvPr id="3" name="TextBox 2"/>
-          <p:cNvSpPr txBox="1"/>
-          <p:nvPr/>
-        </p:nvSpPr>
-        <p:spPr>
-          <a:xfrm>
-            <a:off x="609600" y="279400"/>
-            <a:ext cx="10972800" cy="279400"/>
-          </a:xfrm>
-          <a:prstGeom prst="rect">
-            <a:avLst/>
-          </a:prstGeom>
-          <a:noFill/>
-        </p:spPr>
-        <p:txBody>
-          <a:bodyPr wrap="square">
-            <a:normAutofit/>
-          </a:bodyPr>
-          <a:lstStyle/>
-          <a:p>
-            <a:pPr algn="r"/>
-            <a:r>
-              <a:rPr sz="900" b="0" i="0">
-                <a:solidFill>
-                  <a:srgbClr val="7B7FA0"/>
-                </a:solidFill>
-                <a:latin typeface="Courier New"/>
-              </a:rPr>
-              <a:t>IHR 3-MONATS-PLAN ZUM BRANCHENEXPERTEN</a:t>
-            </a:r>
+          <p:cNvPr id="2" name="Rectangle 1"/>
+          <p:cNvSpPr/>
+          <p:nvPr/>
+        </p:nvSpPr>
+        <p:spPr>
+          <a:xfrm>
+            <a:off x="0" y="0"/>
+            <a:ext cx="12188952" cy="6858000"/>
+          </a:xfrm>
+          <a:prstGeom prst="rect">
+            <a:avLst/>
+          </a:prstGeom>
+          <a:solidFill>
+            <a:srgbClr val="EDEDF3"/>
+          </a:solidFill>
+          <a:ln>
+            <a:noFill/>
+          </a:ln>
+        </p:spPr>
+        <p:style>
+          <a:lnRef idx="1">
+            <a:schemeClr val="accent1"/>
+          </a:lnRef>
+          <a:fillRef idx="3">
+            <a:schemeClr val="accent1"/>
+          </a:fillRef>
+          <a:effectRef idx="2">
+            <a:schemeClr val="accent1"/>
+          </a:effectRef>
+          <a:fontRef idx="minor">
+            <a:schemeClr val="lt1"/>
+          </a:fontRef>
+        </p:style>
+        <p:txBody>
+          <a:bodyPr rtlCol="0" anchor="ctr"/>
+          <a:lstStyle/>
+          <a:p>
+            <a:pPr algn="ctr"/>
+          </a:p>
+        </p:txBody>
+      </p:sp>
+      <p:sp>
+        <p:nvSpPr>
+          <p:cNvPr id="3" name="Rectangle 2"/>
+          <p:cNvSpPr/>
+          <p:nvPr/>
+        </p:nvSpPr>
+        <p:spPr>
+          <a:xfrm>
+            <a:off x="0" y="0"/>
+            <a:ext cx="12188952" cy="50292"/>
+          </a:xfrm>
+          <a:prstGeom prst="rect">
+            <a:avLst/>
+          </a:prstGeom>
+          <a:solidFill>
+            <a:srgbClr val="1F2C56"/>
+          </a:solidFill>
+          <a:ln>
+            <a:noFill/>
+          </a:ln>
+        </p:spPr>
+        <p:style>
+          <a:lnRef idx="1">
+            <a:schemeClr val="accent1"/>
+          </a:lnRef>
+          <a:fillRef idx="3">
+            <a:schemeClr val="accent1"/>
+          </a:fillRef>
+          <a:effectRef idx="2">
+            <a:schemeClr val="accent1"/>
+          </a:effectRef>
+          <a:fontRef idx="minor">
+            <a:schemeClr val="lt1"/>
+          </a:fontRef>
+        </p:style>
+        <p:txBody>
+          <a:bodyPr rtlCol="0" anchor="ctr"/>
+          <a:lstStyle/>
+          <a:p>
+            <a:pPr algn="ctr"/>
           </a:p>
         </p:txBody>
       </p:sp>
@@ -7096,8 +7443,8 @@
         </p:nvSpPr>
         <p:spPr>
           <a:xfrm>
-            <a:off x="609600" y="6426200"/>
-            <a:ext cx="10972800" cy="228600"/>
+            <a:off x="685800" y="109728"/>
+            <a:ext cx="10817352" cy="228600"/>
           </a:xfrm>
           <a:prstGeom prst="rect">
             <a:avLst/>
@@ -7105,91 +7452,107 @@
           <a:noFill/>
         </p:spPr>
         <p:txBody>
-          <a:bodyPr wrap="square">
-            <a:normAutofit/>
+          <a:bodyPr wrap="none">
+            <a:spAutoFit/>
           </a:bodyPr>
           <a:lstStyle/>
           <a:p>
-            <a:pPr algn="r"/>
-            <a:r>
-              <a:rPr sz="900" b="0" i="0">
-                <a:solidFill>
-                  <a:srgbClr val="7B7FA0"/>
-                </a:solidFill>
-                <a:latin typeface="Courier New"/>
-              </a:rPr>
-              <a:t>08</a:t>
-            </a:r>
-          </a:p>
-        </p:txBody>
-      </p:sp>
-      <p:sp>
-        <p:nvSpPr>
-          <p:cNvPr id="5" name="TextBox 4"/>
-          <p:cNvSpPr txBox="1"/>
-          <p:nvPr/>
-        </p:nvSpPr>
-        <p:spPr>
-          <a:xfrm>
-            <a:off x="609600" y="635000"/>
-            <a:ext cx="5461000" cy="5461000"/>
-          </a:xfrm>
-          <a:prstGeom prst="rect">
-            <a:avLst/>
-          </a:prstGeom>
-          <a:noFill/>
-        </p:spPr>
-        <p:txBody>
-          <a:bodyPr wrap="square">
-            <a:normAutofit/>
-          </a:bodyPr>
-          <a:lstStyle/>
-          <a:p>
             <a:pPr algn="l"/>
             <a:r>
-              <a:rPr sz="28000" b="0" i="1">
-                <a:solidFill>
-                  <a:srgbClr val="D9BF7A"/>
-                </a:solidFill>
-                <a:latin typeface="Georgia"/>
-              </a:rPr>
-              <a:t>III</a:t>
-            </a:r>
-          </a:p>
-        </p:txBody>
-      </p:sp>
-      <p:sp>
-        <p:nvSpPr>
-          <p:cNvPr id="6" name="TextBox 5"/>
-          <p:cNvSpPr txBox="1"/>
-          <p:nvPr/>
-        </p:nvSpPr>
-        <p:spPr>
-          <a:xfrm>
-            <a:off x="6731000" y="4064000"/>
-            <a:ext cx="4851400" cy="1778000"/>
-          </a:xfrm>
-          <a:prstGeom prst="rect">
-            <a:avLst/>
-          </a:prstGeom>
-          <a:noFill/>
-        </p:spPr>
-        <p:txBody>
-          <a:bodyPr wrap="square">
-            <a:normAutofit/>
-          </a:bodyPr>
-          <a:lstStyle/>
-          <a:p>
-            <a:pPr algn="r"/>
-            <a:r>
-              <a:rPr sz="3800" b="0" i="0">
-                <a:solidFill>
-                  <a:srgbClr val="F8F8FA"/>
-                </a:solidFill>
-                <a:latin typeface="Georgia"/>
-              </a:rPr>
-              <a:t>Ihr 3-Monats-Plan zum Branchenexperten</a:t>
-            </a:r>
+              <a:rPr sz="750">
+                <a:solidFill>
+                  <a:srgbClr val="78808C"/>
+                </a:solidFill>
+                <a:latin typeface="JetBrains Mono"/>
+              </a:rPr>
+              <a:t>M09  ·  INHALT</a:t>
+            </a:r>
+          </a:p>
+        </p:txBody>
+      </p:sp>
+      <p:sp>
+        <p:nvSpPr>
+          <p:cNvPr id="5" name="Rectangle 4"/>
+          <p:cNvSpPr/>
+          <p:nvPr/>
+        </p:nvSpPr>
+        <p:spPr>
+          <a:xfrm>
+            <a:off x="0" y="1234440"/>
+            <a:ext cx="12188952" cy="12700"/>
+          </a:xfrm>
+          <a:prstGeom prst="rect">
+            <a:avLst/>
+          </a:prstGeom>
+          <a:solidFill>
+            <a:srgbClr val="D8DFE4"/>
+          </a:solidFill>
+          <a:ln>
+            <a:noFill/>
+          </a:ln>
+        </p:spPr>
+        <p:style>
+          <a:lnRef idx="1">
+            <a:schemeClr val="accent1"/>
+          </a:lnRef>
+          <a:fillRef idx="3">
+            <a:schemeClr val="accent1"/>
+          </a:fillRef>
+          <a:effectRef idx="2">
+            <a:schemeClr val="accent1"/>
+          </a:effectRef>
+          <a:fontRef idx="minor">
+            <a:schemeClr val="lt1"/>
+          </a:fontRef>
+        </p:style>
+        <p:txBody>
+          <a:bodyPr rtlCol="0" anchor="ctr"/>
+          <a:lstStyle/>
+          <a:p>
+            <a:pPr algn="ctr"/>
+          </a:p>
+        </p:txBody>
+      </p:sp>
+      <p:sp>
+        <p:nvSpPr>
+          <p:cNvPr id="6" name="Rectangle 5"/>
+          <p:cNvSpPr/>
+          <p:nvPr/>
+        </p:nvSpPr>
+        <p:spPr>
+          <a:xfrm>
+            <a:off x="685800" y="502920"/>
+            <a:ext cx="36576" cy="658368"/>
+          </a:xfrm>
+          <a:prstGeom prst="rect">
+            <a:avLst/>
+          </a:prstGeom>
+          <a:solidFill>
+            <a:srgbClr val="D9C089"/>
+          </a:solidFill>
+          <a:ln>
+            <a:noFill/>
+          </a:ln>
+        </p:spPr>
+        <p:style>
+          <a:lnRef idx="1">
+            <a:schemeClr val="accent1"/>
+          </a:lnRef>
+          <a:fillRef idx="3">
+            <a:schemeClr val="accent1"/>
+          </a:fillRef>
+          <a:effectRef idx="2">
+            <a:schemeClr val="accent1"/>
+          </a:effectRef>
+          <a:fontRef idx="minor">
+            <a:schemeClr val="lt1"/>
+          </a:fontRef>
+        </p:style>
+        <p:txBody>
+          <a:bodyPr rtlCol="0" anchor="ctr"/>
+          <a:lstStyle/>
+          <a:p>
+            <a:pPr algn="ctr"/>
           </a:p>
         </p:txBody>
       </p:sp>
@@ -7201,8 +7564,8 @@
         </p:nvSpPr>
         <p:spPr>
           <a:xfrm>
-            <a:off x="6731000" y="5842000"/>
-            <a:ext cx="4851400" cy="635000"/>
+            <a:off x="813816" y="502920"/>
+            <a:ext cx="10634472" cy="685800"/>
           </a:xfrm>
           <a:prstGeom prst="rect">
             <a:avLst/>
@@ -7211,19 +7574,97 @@
         </p:spPr>
         <p:txBody>
           <a:bodyPr wrap="square">
-            <a:normAutofit/>
+            <a:spAutoFit/>
           </a:bodyPr>
           <a:lstStyle/>
           <a:p>
-            <a:pPr algn="r"/>
-            <a:r>
-              <a:rPr sz="1400" b="0" i="1">
-                <a:solidFill>
-                  <a:srgbClr val="7B7FA0"/>
-                </a:solidFill>
-                <a:latin typeface="Georgia"/>
-              </a:rPr>
-              <a:t>Strukturiert. Realistisch. Messbar.</a:t>
+            <a:pPr algn="l"/>
+            <a:r>
+              <a:rPr sz="2400" b="1" i="0">
+                <a:solidFill>
+                  <a:srgbClr val="1F2C56"/>
+                </a:solidFill>
+                <a:latin typeface="Source Serif 4"/>
+              </a:rPr>
+              <a:t>Einstiegsfragen für Branchenanfänger</a:t>
+            </a:r>
+          </a:p>
+        </p:txBody>
+      </p:sp>
+      <p:sp>
+        <p:nvSpPr>
+          <p:cNvPr id="8" name="Rectangle 7"/>
+          <p:cNvSpPr/>
+          <p:nvPr/>
+        </p:nvSpPr>
+        <p:spPr>
+          <a:xfrm>
+            <a:off x="0" y="6510528"/>
+            <a:ext cx="12188952" cy="347472"/>
+          </a:xfrm>
+          <a:prstGeom prst="rect">
+            <a:avLst/>
+          </a:prstGeom>
+          <a:solidFill>
+            <a:srgbClr val="0A1937"/>
+          </a:solidFill>
+          <a:ln>
+            <a:noFill/>
+          </a:ln>
+        </p:spPr>
+        <p:style>
+          <a:lnRef idx="1">
+            <a:schemeClr val="accent1"/>
+          </a:lnRef>
+          <a:fillRef idx="3">
+            <a:schemeClr val="accent1"/>
+          </a:fillRef>
+          <a:effectRef idx="2">
+            <a:schemeClr val="accent1"/>
+          </a:effectRef>
+          <a:fontRef idx="minor">
+            <a:schemeClr val="lt1"/>
+          </a:fontRef>
+        </p:style>
+        <p:txBody>
+          <a:bodyPr rtlCol="0" anchor="ctr"/>
+          <a:lstStyle/>
+          <a:p>
+            <a:pPr algn="ctr"/>
+          </a:p>
+        </p:txBody>
+      </p:sp>
+      <p:sp>
+        <p:nvSpPr>
+          <p:cNvPr id="9" name="TextBox 8"/>
+          <p:cNvSpPr txBox="1"/>
+          <p:nvPr/>
+        </p:nvSpPr>
+        <p:spPr>
+          <a:xfrm>
+            <a:off x="685800" y="6583680"/>
+            <a:ext cx="6490411" cy="256032"/>
+          </a:xfrm>
+          <a:prstGeom prst="rect">
+            <a:avLst/>
+          </a:prstGeom>
+          <a:noFill/>
+        </p:spPr>
+        <p:txBody>
+          <a:bodyPr wrap="none">
+            <a:spAutoFit/>
+          </a:bodyPr>
+          <a:lstStyle/>
+          <a:p>
+            <a:pPr algn="l"/>
+            <a:r>
+              <a:rPr sz="700">
+                <a:solidFill>
+                  <a:srgbClr val="A0B4D2"/>
+                </a:solidFill>
+                <a:latin typeface="JetBrains Mono"/>
+              </a:rPr>
+              <a:t>Benedikt Zoller Coaching  ·  FKB Campus  ·  M09</a:t>
             </a:r>
           </a:p>
         </p:txBody>
@@ -7239,14 +7680,6 @@
 <file path=ppt/slides/slide9.xml><?xml version="1.0" encoding="utf-8"?>
 <p:sld xmlns:a="http://schemas.openxmlformats.org/drawingml/2006/main" xmlns:p="http://schemas.openxmlformats.org/presentationml/2006/main" xmlns:r="http://schemas.openxmlformats.org/officeDocument/2006/relationships">
   <p:cSld>
-    <p:bg>
-      <p:bgPr>
-        <a:solidFill>
-          <a:srgbClr val="F8F8FA"/>
-        </a:solidFill>
-        <a:effectLst/>
-      </p:bgPr>
-    </p:bg>
     <p:spTree>
       <p:nvGrpSpPr>
         <p:cNvPr id="1" name=""/>
@@ -7256,125 +7689,20 @@
       <p:grpSpPr/>
       <p:sp>
         <p:nvSpPr>
-          <p:cNvPr id="2" name="TextBox 1"/>
-          <p:cNvSpPr txBox="1"/>
-          <p:nvPr/>
-        </p:nvSpPr>
-        <p:spPr>
-          <a:xfrm>
-            <a:off x="609600" y="279400"/>
-            <a:ext cx="2540000" cy="279400"/>
-          </a:xfrm>
-          <a:prstGeom prst="rect">
-            <a:avLst/>
-          </a:prstGeom>
-          <a:noFill/>
-        </p:spPr>
-        <p:txBody>
-          <a:bodyPr wrap="square">
-            <a:normAutofit/>
-          </a:bodyPr>
-          <a:lstStyle/>
-          <a:p>
-            <a:pPr algn="l"/>
-            <a:r>
-              <a:rPr sz="1000" b="1" i="0">
-                <a:solidFill>
-                  <a:srgbClr val="191D2E"/>
-                </a:solidFill>
-                <a:latin typeface="Arial"/>
-              </a:rPr>
-              <a:t>FKB  Campus</a:t>
-            </a:r>
-          </a:p>
-        </p:txBody>
-      </p:sp>
-      <p:sp>
-        <p:nvSpPr>
-          <p:cNvPr id="3" name="TextBox 2"/>
-          <p:cNvSpPr txBox="1"/>
-          <p:nvPr/>
-        </p:nvSpPr>
-        <p:spPr>
-          <a:xfrm>
-            <a:off x="609600" y="279400"/>
-            <a:ext cx="10972800" cy="279400"/>
-          </a:xfrm>
-          <a:prstGeom prst="rect">
-            <a:avLst/>
-          </a:prstGeom>
-          <a:noFill/>
-        </p:spPr>
-        <p:txBody>
-          <a:bodyPr wrap="square">
-            <a:normAutofit/>
-          </a:bodyPr>
-          <a:lstStyle/>
-          <a:p>
-            <a:pPr algn="r"/>
-            <a:r>
-              <a:rPr sz="900" b="0" i="0">
-                <a:solidFill>
-                  <a:srgbClr val="7B7FA0"/>
-                </a:solidFill>
-                <a:latin typeface="Courier New"/>
-              </a:rPr>
-              <a:t>III · IHR 3-MONATS-PLAN</a:t>
-            </a:r>
-          </a:p>
-        </p:txBody>
-      </p:sp>
-      <p:sp>
-        <p:nvSpPr>
-          <p:cNvPr id="4" name="TextBox 3"/>
-          <p:cNvSpPr txBox="1"/>
-          <p:nvPr/>
-        </p:nvSpPr>
-        <p:spPr>
-          <a:xfrm>
-            <a:off x="609600" y="6426200"/>
-            <a:ext cx="10972800" cy="228600"/>
-          </a:xfrm>
-          <a:prstGeom prst="rect">
-            <a:avLst/>
-          </a:prstGeom>
-          <a:noFill/>
-        </p:spPr>
-        <p:txBody>
-          <a:bodyPr wrap="square">
-            <a:normAutofit/>
-          </a:bodyPr>
-          <a:lstStyle/>
-          <a:p>
-            <a:pPr algn="r"/>
-            <a:r>
-              <a:rPr sz="900" b="0" i="0">
-                <a:solidFill>
-                  <a:srgbClr val="7B7FA0"/>
-                </a:solidFill>
-                <a:latin typeface="Courier New"/>
-              </a:rPr>
-              <a:t>09</a:t>
-            </a:r>
-          </a:p>
-        </p:txBody>
-      </p:sp>
-      <p:sp>
-        <p:nvSpPr>
-          <p:cNvPr id="5" name="Rectangle 4"/>
+          <p:cNvPr id="2" name="Rectangle 1"/>
           <p:cNvSpPr/>
           <p:nvPr/>
         </p:nvSpPr>
         <p:spPr>
           <a:xfrm>
-            <a:off x="609600" y="825500"/>
-            <a:ext cx="10972800" cy="6350"/>
+            <a:off x="0" y="0"/>
+            <a:ext cx="12188952" cy="6858000"/>
           </a:xfrm>
           <a:prstGeom prst="rect">
             <a:avLst/>
           </a:prstGeom>
           <a:solidFill>
-            <a:srgbClr val="191D2E"/>
+            <a:srgbClr val="EDEDF3"/>
           </a:solidFill>
           <a:ln>
             <a:noFill/>
@@ -7404,55 +7732,20 @@
       </p:sp>
       <p:sp>
         <p:nvSpPr>
-          <p:cNvPr id="6" name="TextBox 5"/>
-          <p:cNvSpPr txBox="1"/>
-          <p:nvPr/>
-        </p:nvSpPr>
-        <p:spPr>
-          <a:xfrm>
-            <a:off x="609600" y="920750"/>
-            <a:ext cx="10972800" cy="1778000"/>
-          </a:xfrm>
-          <a:prstGeom prst="rect">
-            <a:avLst/>
-          </a:prstGeom>
-          <a:noFill/>
-        </p:spPr>
-        <p:txBody>
-          <a:bodyPr wrap="square">
-            <a:normAutofit/>
-          </a:bodyPr>
-          <a:lstStyle/>
-          <a:p>
-            <a:pPr algn="l"/>
-            <a:r>
-              <a:rPr sz="3800" b="0" i="0">
-                <a:solidFill>
-                  <a:srgbClr val="191D2E"/>
-                </a:solidFill>
-                <a:latin typeface="Georgia"/>
-              </a:rPr>
-              <a:t>Monat 1: Wissen aufbauen</a:t>
-            </a:r>
-          </a:p>
-        </p:txBody>
-      </p:sp>
-      <p:sp>
-        <p:nvSpPr>
-          <p:cNvPr id="7" name="Rectangle 6"/>
+          <p:cNvPr id="3" name="Rectangle 2"/>
           <p:cNvSpPr/>
           <p:nvPr/>
         </p:nvSpPr>
         <p:spPr>
           <a:xfrm>
-            <a:off x="609600" y="2762250"/>
-            <a:ext cx="10972800" cy="6350"/>
+            <a:off x="0" y="0"/>
+            <a:ext cx="12188952" cy="50292"/>
           </a:xfrm>
           <a:prstGeom prst="rect">
             <a:avLst/>
           </a:prstGeom>
           <a:solidFill>
-            <a:srgbClr val="E0E0E8"/>
+            <a:srgbClr val="1F2C56"/>
           </a:solidFill>
           <a:ln>
             <a:noFill/>
@@ -7482,14 +7775,170 @@
       </p:sp>
       <p:sp>
         <p:nvSpPr>
+          <p:cNvPr id="4" name="TextBox 3"/>
+          <p:cNvSpPr txBox="1"/>
+          <p:nvPr/>
+        </p:nvSpPr>
+        <p:spPr>
+          <a:xfrm>
+            <a:off x="685800" y="109728"/>
+            <a:ext cx="10817352" cy="228600"/>
+          </a:xfrm>
+          <a:prstGeom prst="rect">
+            <a:avLst/>
+          </a:prstGeom>
+          <a:noFill/>
+        </p:spPr>
+        <p:txBody>
+          <a:bodyPr wrap="none">
+            <a:spAutoFit/>
+          </a:bodyPr>
+          <a:lstStyle/>
+          <a:p>
+            <a:pPr algn="l"/>
+            <a:r>
+              <a:rPr sz="750">
+                <a:solidFill>
+                  <a:srgbClr val="78808C"/>
+                </a:solidFill>
+                <a:latin typeface="JetBrains Mono"/>
+              </a:rPr>
+              <a:t>M09  ·  INHALT</a:t>
+            </a:r>
+          </a:p>
+        </p:txBody>
+      </p:sp>
+      <p:sp>
+        <p:nvSpPr>
+          <p:cNvPr id="5" name="Rectangle 4"/>
+          <p:cNvSpPr/>
+          <p:nvPr/>
+        </p:nvSpPr>
+        <p:spPr>
+          <a:xfrm>
+            <a:off x="0" y="1234440"/>
+            <a:ext cx="12188952" cy="12700"/>
+          </a:xfrm>
+          <a:prstGeom prst="rect">
+            <a:avLst/>
+          </a:prstGeom>
+          <a:solidFill>
+            <a:srgbClr val="D8DFE4"/>
+          </a:solidFill>
+          <a:ln>
+            <a:noFill/>
+          </a:ln>
+        </p:spPr>
+        <p:style>
+          <a:lnRef idx="1">
+            <a:schemeClr val="accent1"/>
+          </a:lnRef>
+          <a:fillRef idx="3">
+            <a:schemeClr val="accent1"/>
+          </a:fillRef>
+          <a:effectRef idx="2">
+            <a:schemeClr val="accent1"/>
+          </a:effectRef>
+          <a:fontRef idx="minor">
+            <a:schemeClr val="lt1"/>
+          </a:fontRef>
+        </p:style>
+        <p:txBody>
+          <a:bodyPr rtlCol="0" anchor="ctr"/>
+          <a:lstStyle/>
+          <a:p>
+            <a:pPr algn="ctr"/>
+          </a:p>
+        </p:txBody>
+      </p:sp>
+      <p:sp>
+        <p:nvSpPr>
+          <p:cNvPr id="6" name="Rectangle 5"/>
+          <p:cNvSpPr/>
+          <p:nvPr/>
+        </p:nvSpPr>
+        <p:spPr>
+          <a:xfrm>
+            <a:off x="685800" y="502920"/>
+            <a:ext cx="36576" cy="658368"/>
+          </a:xfrm>
+          <a:prstGeom prst="rect">
+            <a:avLst/>
+          </a:prstGeom>
+          <a:solidFill>
+            <a:srgbClr val="D9C089"/>
+          </a:solidFill>
+          <a:ln>
+            <a:noFill/>
+          </a:ln>
+        </p:spPr>
+        <p:style>
+          <a:lnRef idx="1">
+            <a:schemeClr val="accent1"/>
+          </a:lnRef>
+          <a:fillRef idx="3">
+            <a:schemeClr val="accent1"/>
+          </a:fillRef>
+          <a:effectRef idx="2">
+            <a:schemeClr val="accent1"/>
+          </a:effectRef>
+          <a:fontRef idx="minor">
+            <a:schemeClr val="lt1"/>
+          </a:fontRef>
+        </p:style>
+        <p:txBody>
+          <a:bodyPr rtlCol="0" anchor="ctr"/>
+          <a:lstStyle/>
+          <a:p>
+            <a:pPr algn="ctr"/>
+          </a:p>
+        </p:txBody>
+      </p:sp>
+      <p:sp>
+        <p:nvSpPr>
+          <p:cNvPr id="7" name="TextBox 6"/>
+          <p:cNvSpPr txBox="1"/>
+          <p:nvPr/>
+        </p:nvSpPr>
+        <p:spPr>
+          <a:xfrm>
+            <a:off x="813816" y="502920"/>
+            <a:ext cx="10634472" cy="685800"/>
+          </a:xfrm>
+          <a:prstGeom prst="rect">
+            <a:avLst/>
+          </a:prstGeom>
+          <a:noFill/>
+        </p:spPr>
+        <p:txBody>
+          <a:bodyPr wrap="square">
+            <a:spAutoFit/>
+          </a:bodyPr>
+          <a:lstStyle/>
+          <a:p>
+            <a:pPr algn="l"/>
+            <a:r>
+              <a:rPr sz="2400" b="1" i="0">
+                <a:solidFill>
+                  <a:srgbClr val="1F2C56"/>
+                </a:solidFill>
+                <a:latin typeface="Source Serif 4"/>
+              </a:rPr>
+              <a:t>Wissensarbeit transparent machen – Gespräche in der Lernphase</a:t>
+            </a:r>
+          </a:p>
+        </p:txBody>
+      </p:sp>
+      <p:sp>
+        <p:nvSpPr>
           <p:cNvPr id="8" name="TextBox 7"/>
           <p:cNvSpPr txBox="1"/>
           <p:nvPr/>
         </p:nvSpPr>
         <p:spPr>
           <a:xfrm>
-            <a:off x="609600" y="2851150"/>
-            <a:ext cx="10972800" cy="3448050"/>
+            <a:off x="685800" y="1417320"/>
+            <a:ext cx="10817352" cy="5029200"/>
           </a:xfrm>
           <a:prstGeom prst="rect">
             <a:avLst/>
@@ -7498,26 +7947,45 @@
         </p:spPr>
         <p:txBody>
           <a:bodyPr wrap="square">
-            <a:normAutofit/>
+            <a:spAutoFit/>
           </a:bodyPr>
           <a:lstStyle/>
+          <a:p>
+            <a:pPr>
+              <a:spcBef>
+                <a:spcPts val="400"/>
+              </a:spcBef>
+              <a:spcAft>
+                <a:spcPts val="200"/>
+              </a:spcAft>
+            </a:pPr>
+            <a:r>
+              <a:rPr sz="1200">
+                <a:solidFill>
+                  <a:srgbClr val="3D5466"/>
+                </a:solidFill>
+                <a:latin typeface="Arial"/>
+              </a:rPr>
+              <a:t>Formulierungen, die funktionieren:</a:t>
+            </a:r>
+          </a:p>
           <a:p>
             <a:pPr>
               <a:spcBef>
                 <a:spcPts val="600"/>
               </a:spcBef>
               <a:spcAft>
-                <a:spcPts val="600"/>
+                <a:spcPts val="200"/>
               </a:spcAft>
             </a:pPr>
             <a:r>
-              <a:rPr sz="1400">
-                <a:solidFill>
-                  <a:srgbClr val="191D2E"/>
-                </a:solidFill>
-                <a:latin typeface="Georgia"/>
-              </a:rPr>
-              <a:t>–  Eine Zielbranche wählen (wo sind Ihre größten Kunden?)</a:t>
+              <a:rPr sz="1200" i="1">
+                <a:solidFill>
+                  <a:srgbClr val="3D5466"/>
+                </a:solidFill>
+                <a:latin typeface="Arial"/>
+              </a:rPr>
+              <a:t>→  „Ich bin gerade dabei, mein Wissen über Ihre Branche systematisch auszubauen – ich lerne am meisten von meinen Kunden. Was sollte jeder Bankmitarbeiter über Ihr Geschäft wissen?"</a:t>
             </a:r>
           </a:p>
           <a:p>
@@ -7526,55 +7994,266 @@
                 <a:spcPts val="600"/>
               </a:spcBef>
               <a:spcAft>
-                <a:spcPts val="600"/>
+                <a:spcPts val="200"/>
               </a:spcAft>
             </a:pPr>
             <a:r>
-              <a:rPr sz="1400">
-                <a:solidFill>
-                  <a:srgbClr val="191D2E"/>
-                </a:solidFill>
-                <a:latin typeface="Georgia"/>
-              </a:rPr>
-              <a:t>–  Branchenberichte lesen: KfW, Creditreform, IHK, Fachverband</a:t>
+              <a:rPr sz="1200" i="1">
+                <a:solidFill>
+                  <a:srgbClr val="3D5466"/>
+                </a:solidFill>
+                <a:latin typeface="Arial"/>
+              </a:rPr>
+              <a:t>→  „Ich habe mit dem DZ BANK Agrar-Spezialisten gesprochen – der hat mir [Thema] erklärt. Das war neu für mich. Stimmt das mit Ihrer Erfahrung überein?"</a:t>
             </a:r>
           </a:p>
           <a:p>
             <a:pPr>
               <a:spcBef>
-                <a:spcPts val="600"/>
+                <a:spcPts val="400"/>
               </a:spcBef>
               <a:spcAft>
-                <a:spcPts val="600"/>
+                <a:spcPts val="200"/>
               </a:spcAft>
             </a:pPr>
             <a:r>
-              <a:rPr sz="1400">
-                <a:solidFill>
-                  <a:srgbClr val="191D2E"/>
-                </a:solidFill>
-                <a:latin typeface="Georgia"/>
-              </a:rPr>
-              <a:t>–  Fünf Gespräche mit Kunden dieser Branche führen — zuhören</a:t>
+              <a:rPr sz="1200">
+                <a:solidFill>
+                  <a:srgbClr val="3D5466"/>
+                </a:solidFill>
+                <a:latin typeface="Arial"/>
+              </a:rPr>
+              <a:t>Was vermeiden:</a:t>
             </a:r>
           </a:p>
           <a:p>
             <a:pPr>
               <a:spcBef>
-                <a:spcPts val="600"/>
+                <a:spcPts val="400"/>
               </a:spcBef>
               <a:spcAft>
-                <a:spcPts val="600"/>
+                <a:spcPts val="200"/>
               </a:spcAft>
             </a:pPr>
             <a:r>
-              <a:rPr sz="1400">
-                <a:solidFill>
-                  <a:srgbClr val="191D2E"/>
-                </a:solidFill>
-                <a:latin typeface="Georgia"/>
-              </a:rPr>
-              <a:t>–  Fünf Forces für die gewählte Branche ausfüllen</a:t>
+              <a:rPr sz="1300">
+                <a:solidFill>
+                  <a:srgbClr val="3D5466"/>
+                </a:solidFill>
+                <a:latin typeface="Arial"/>
+              </a:rPr>
+              <a:t>▸  Nicht sagen: „Ich kenne mich in Ihrer Branche noch nicht so gut aus." (schafft Unsicherheit)</a:t>
+            </a:r>
+          </a:p>
+          <a:p>
+            <a:pPr>
+              <a:spcBef>
+                <a:spcPts val="400"/>
+              </a:spcBef>
+              <a:spcAft>
+                <a:spcPts val="200"/>
+              </a:spcAft>
+            </a:pPr>
+            <a:r>
+              <a:rPr sz="1300">
+                <a:solidFill>
+                  <a:srgbClr val="3D5466"/>
+                </a:solidFill>
+                <a:latin typeface="Arial"/>
+              </a:rPr>
+              <a:t>▸  Nicht sagen: „Ich bin kein Branchenexperte, aber..." (unnötige Selbstabwertung)</a:t>
+            </a:r>
+          </a:p>
+          <a:p>
+            <a:pPr>
+              <a:spcBef>
+                <a:spcPts val="400"/>
+              </a:spcBef>
+              <a:spcAft>
+                <a:spcPts val="200"/>
+              </a:spcAft>
+            </a:pPr>
+            <a:r>
+              <a:rPr sz="1300">
+                <a:solidFill>
+                  <a:srgbClr val="3D5466"/>
+                </a:solidFill>
+                <a:latin typeface="Arial"/>
+              </a:rPr>
+              <a:t>▸  Nicht so tun, als ob man alles weiß (Kunden merken es sofort)</a:t>
+            </a:r>
+          </a:p>
+          <a:p>
+            <a:pPr>
+              <a:spcBef>
+                <a:spcPts val="400"/>
+              </a:spcBef>
+              <a:spcAft>
+                <a:spcPts val="200"/>
+              </a:spcAft>
+            </a:pPr>
+            <a:r>
+              <a:rPr sz="1200">
+                <a:solidFill>
+                  <a:srgbClr val="3D5466"/>
+                </a:solidFill>
+                <a:latin typeface="Arial"/>
+              </a:rPr>
+              <a:t>Die Grundregel: Interesse + konkrete Vorbereitung + echtes Zuhören ersetzen fehlende Expertise – zumindest in den ersten Gesprächen. Expertise entsteht dann im Dialog.</a:t>
+            </a:r>
+          </a:p>
+          <a:p>
+            <a:pPr>
+              <a:spcBef>
+                <a:spcPts val="400"/>
+              </a:spcBef>
+              <a:spcAft>
+                <a:spcPts val="200"/>
+              </a:spcAft>
+            </a:pPr>
+            <a:r>
+              <a:rPr sz="1200">
+                <a:solidFill>
+                  <a:srgbClr val="3D5466"/>
+                </a:solidFill>
+                <a:latin typeface="Arial"/>
+              </a:rPr>
+              <a:t>## 4.3 Informationsquellen für Branchenexpertise</a:t>
+            </a:r>
+          </a:p>
+          <a:p>
+            <a:pPr>
+              <a:spcBef>
+                <a:spcPts val="400"/>
+              </a:spcBef>
+              <a:spcAft>
+                <a:spcPts val="200"/>
+              </a:spcAft>
+            </a:pPr>
+            <a:r>
+              <a:rPr sz="1200">
+                <a:solidFill>
+                  <a:srgbClr val="3D5466"/>
+                </a:solidFill>
+                <a:latin typeface="Arial"/>
+              </a:rPr>
+              <a:t>Systematische Branchenexpertise entsteht aus dem Zusammenspiel verschiedener Quellen. Die folgende Matrix hilft bei der Auswahl:</a:t>
+            </a:r>
+          </a:p>
+          <a:p>
+            <a:pPr>
+              <a:spcBef>
+                <a:spcPts val="400"/>
+              </a:spcBef>
+              <a:spcAft>
+                <a:spcPts val="200"/>
+              </a:spcAft>
+            </a:pPr>
+            <a:r>
+              <a:rPr sz="1200">
+                <a:solidFill>
+                  <a:srgbClr val="3D5466"/>
+                </a:solidFill>
+                <a:latin typeface="Arial"/>
+              </a:rPr>
+              <a:t>Empfohlene Priorisierung für den Start: Branchenverband (Jahresbericht), DZ BANK Research (sofern verfügbar), IHK-Konjunkturbericht, 3–5 Kundengespräche mit Fokus auf Branchentrends.</a:t>
+            </a:r>
+          </a:p>
+          <a:p>
+            <a:pPr>
+              <a:spcBef>
+                <a:spcPts val="400"/>
+              </a:spcBef>
+              <a:spcAft>
+                <a:spcPts val="200"/>
+              </a:spcAft>
+            </a:pPr>
+            <a:r>
+              <a:rPr sz="1200">
+                <a:solidFill>
+                  <a:srgbClr val="3D5466"/>
+                </a:solidFill>
+                <a:latin typeface="Arial"/>
+              </a:rPr>
+              <a:t>## 4.4 Expertennetzwerk aufbauen</a:t>
+            </a:r>
+          </a:p>
+        </p:txBody>
+      </p:sp>
+      <p:sp>
+        <p:nvSpPr>
+          <p:cNvPr id="9" name="Rectangle 8"/>
+          <p:cNvSpPr/>
+          <p:nvPr/>
+        </p:nvSpPr>
+        <p:spPr>
+          <a:xfrm>
+            <a:off x="0" y="6510528"/>
+            <a:ext cx="12188952" cy="347472"/>
+          </a:xfrm>
+          <a:prstGeom prst="rect">
+            <a:avLst/>
+          </a:prstGeom>
+          <a:solidFill>
+            <a:srgbClr val="0A1937"/>
+          </a:solidFill>
+          <a:ln>
+            <a:noFill/>
+          </a:ln>
+        </p:spPr>
+        <p:style>
+          <a:lnRef idx="1">
+            <a:schemeClr val="accent1"/>
+          </a:lnRef>
+          <a:fillRef idx="3">
+            <a:schemeClr val="accent1"/>
+          </a:fillRef>
+          <a:effectRef idx="2">
+            <a:schemeClr val="accent1"/>
+          </a:effectRef>
+          <a:fontRef idx="minor">
+            <a:schemeClr val="lt1"/>
+          </a:fontRef>
+        </p:style>
+        <p:txBody>
+          <a:bodyPr rtlCol="0" anchor="ctr"/>
+          <a:lstStyle/>
+          <a:p>
+            <a:pPr algn="ctr"/>
+          </a:p>
+        </p:txBody>
+      </p:sp>
+      <p:sp>
+        <p:nvSpPr>
+          <p:cNvPr id="10" name="TextBox 9"/>
+          <p:cNvSpPr txBox="1"/>
+          <p:nvPr/>
+        </p:nvSpPr>
+        <p:spPr>
+          <a:xfrm>
+            <a:off x="685800" y="6583680"/>
+            <a:ext cx="6490411" cy="256032"/>
+          </a:xfrm>
+          <a:prstGeom prst="rect">
+            <a:avLst/>
+          </a:prstGeom>
+          <a:noFill/>
+        </p:spPr>
+        <p:txBody>
+          <a:bodyPr wrap="none">
+            <a:spAutoFit/>
+          </a:bodyPr>
+          <a:lstStyle/>
+          <a:p>
+            <a:pPr algn="l"/>
+            <a:r>
+              <a:rPr sz="700">
+                <a:solidFill>
+                  <a:srgbClr val="A0B4D2"/>
+                </a:solidFill>
+                <a:latin typeface="JetBrains Mono"/>
+              </a:rPr>
+              <a:t>Benedikt Zoller Coaching  ·  FKB Campus  ·  M09</a:t>
             </a:r>
           </a:p>
         </p:txBody>

--- a/public/downloads/praesentation/M09.pptx
+++ b/public/downloads/praesentation/M09.pptx
@@ -3257,7 +3257,42 @@
       </p:sp>
       <p:sp>
         <p:nvSpPr>
-          <p:cNvPr id="6" name="Rectangle 5"/>
+          <p:cNvPr id="6" name="TextBox 5"/>
+          <p:cNvSpPr txBox="1"/>
+          <p:nvPr/>
+        </p:nvSpPr>
+        <p:spPr>
+          <a:xfrm>
+            <a:off x="685800" y="3977639"/>
+            <a:ext cx="10817352" cy="731520"/>
+          </a:xfrm>
+          <a:prstGeom prst="rect">
+            <a:avLst/>
+          </a:prstGeom>
+          <a:noFill/>
+        </p:spPr>
+        <p:txBody>
+          <a:bodyPr wrap="square">
+            <a:spAutoFit/>
+          </a:bodyPr>
+          <a:lstStyle/>
+          <a:p>
+            <a:pPr algn="l"/>
+            <a:r>
+              <a:rPr sz="1900" b="0" i="1">
+                <a:solidFill>
+                  <a:srgbClr val="BECDE6"/>
+                </a:solidFill>
+                <a:latin typeface="Source Serif 4"/>
+              </a:rPr>
+              <a:t>Systematischer Aufbau von Branchenexpertise im 3-Monats-Programm</a:t>
+            </a:r>
+          </a:p>
+        </p:txBody>
+      </p:sp>
+      <p:sp>
+        <p:nvSpPr>
+          <p:cNvPr id="7" name="Rectangle 6"/>
           <p:cNvSpPr/>
           <p:nvPr/>
         </p:nvSpPr>
@@ -3300,14 +3335,14 @@
       </p:sp>
       <p:sp>
         <p:nvSpPr>
-          <p:cNvPr id="7" name="TextBox 6"/>
+          <p:cNvPr id="8" name="TextBox 7"/>
           <p:cNvSpPr txBox="1"/>
           <p:nvPr/>
         </p:nvSpPr>
         <p:spPr>
           <a:xfrm>
             <a:off x="685800" y="5193792"/>
-            <a:ext cx="5408676" cy="201168"/>
+            <a:ext cx="3605784" cy="201168"/>
           </a:xfrm>
           <a:prstGeom prst="rect">
             <a:avLst/>
@@ -3328,21 +3363,21 @@
                 </a:solidFill>
                 <a:latin typeface="JetBrains Mono"/>
               </a:rPr>
-              <a:t>KOMPETENZSTUFE</a:t>
-            </a:r>
-          </a:p>
-        </p:txBody>
-      </p:sp>
-      <p:sp>
-        <p:nvSpPr>
-          <p:cNvPr id="8" name="TextBox 7"/>
+              <a:t>KOMPETENZFELD</a:t>
+            </a:r>
+          </a:p>
+        </p:txBody>
+      </p:sp>
+      <p:sp>
+        <p:nvSpPr>
+          <p:cNvPr id="9" name="TextBox 8"/>
           <p:cNvSpPr txBox="1"/>
           <p:nvPr/>
         </p:nvSpPr>
         <p:spPr>
           <a:xfrm>
             <a:off x="685800" y="5394960"/>
-            <a:ext cx="5408676" cy="320040"/>
+            <a:ext cx="3605784" cy="320040"/>
           </a:xfrm>
           <a:prstGeom prst="rect">
             <a:avLst/>
@@ -3363,21 +3398,21 @@
                 </a:solidFill>
                 <a:latin typeface="Arial"/>
               </a:rPr>
-              <a:t>Stratege</a:t>
-            </a:r>
-          </a:p>
-        </p:txBody>
-      </p:sp>
-      <p:sp>
-        <p:nvSpPr>
-          <p:cNvPr id="9" name="TextBox 8"/>
+              <a:t>K-02 Branchenwissen</a:t>
+            </a:r>
+          </a:p>
+        </p:txBody>
+      </p:sp>
+      <p:sp>
+        <p:nvSpPr>
+          <p:cNvPr id="10" name="TextBox 9"/>
           <p:cNvSpPr txBox="1"/>
           <p:nvPr/>
         </p:nvSpPr>
         <p:spPr>
           <a:xfrm>
-            <a:off x="6094476" y="5193792"/>
-            <a:ext cx="5408676" cy="201168"/>
+            <a:off x="4291584" y="5193792"/>
+            <a:ext cx="3605784" cy="201168"/>
           </a:xfrm>
           <a:prstGeom prst="rect">
             <a:avLst/>
@@ -3398,21 +3433,21 @@
                 </a:solidFill>
                 <a:latin typeface="JetBrains Mono"/>
               </a:rPr>
-              <a:t>VERSION</a:t>
-            </a:r>
-          </a:p>
-        </p:txBody>
-      </p:sp>
-      <p:sp>
-        <p:nvSpPr>
-          <p:cNvPr id="10" name="TextBox 9"/>
+              <a:t>KOMPETENZSTUFE</a:t>
+            </a:r>
+          </a:p>
+        </p:txBody>
+      </p:sp>
+      <p:sp>
+        <p:nvSpPr>
+          <p:cNvPr id="11" name="TextBox 10"/>
           <p:cNvSpPr txBox="1"/>
           <p:nvPr/>
         </p:nvSpPr>
         <p:spPr>
           <a:xfrm>
-            <a:off x="6094476" y="5394960"/>
-            <a:ext cx="5408676" cy="320040"/>
+            <a:off x="4291584" y="5394960"/>
+            <a:ext cx="3605784" cy="320040"/>
           </a:xfrm>
           <a:prstGeom prst="rect">
             <a:avLst/>
@@ -3433,6 +3468,76 @@
                 </a:solidFill>
                 <a:latin typeface="Arial"/>
               </a:rPr>
+              <a:t>Stratege</a:t>
+            </a:r>
+          </a:p>
+        </p:txBody>
+      </p:sp>
+      <p:sp>
+        <p:nvSpPr>
+          <p:cNvPr id="12" name="TextBox 11"/>
+          <p:cNvSpPr txBox="1"/>
+          <p:nvPr/>
+        </p:nvSpPr>
+        <p:spPr>
+          <a:xfrm>
+            <a:off x="7897368" y="5193792"/>
+            <a:ext cx="3605784" cy="201168"/>
+          </a:xfrm>
+          <a:prstGeom prst="rect">
+            <a:avLst/>
+          </a:prstGeom>
+          <a:noFill/>
+        </p:spPr>
+        <p:txBody>
+          <a:bodyPr wrap="none">
+            <a:spAutoFit/>
+          </a:bodyPr>
+          <a:lstStyle/>
+          <a:p>
+            <a:pPr algn="l"/>
+            <a:r>
+              <a:rPr sz="700">
+                <a:solidFill>
+                  <a:srgbClr val="A0B4D2"/>
+                </a:solidFill>
+                <a:latin typeface="JetBrains Mono"/>
+              </a:rPr>
+              <a:t>VERSION</a:t>
+            </a:r>
+          </a:p>
+        </p:txBody>
+      </p:sp>
+      <p:sp>
+        <p:nvSpPr>
+          <p:cNvPr id="13" name="TextBox 12"/>
+          <p:cNvSpPr txBox="1"/>
+          <p:nvPr/>
+        </p:nvSpPr>
+        <p:spPr>
+          <a:xfrm>
+            <a:off x="7897368" y="5394960"/>
+            <a:ext cx="3605784" cy="320040"/>
+          </a:xfrm>
+          <a:prstGeom prst="rect">
+            <a:avLst/>
+          </a:prstGeom>
+          <a:noFill/>
+        </p:spPr>
+        <p:txBody>
+          <a:bodyPr wrap="square">
+            <a:spAutoFit/>
+          </a:bodyPr>
+          <a:lstStyle/>
+          <a:p>
+            <a:pPr algn="l"/>
+            <a:r>
+              <a:rPr sz="1100" b="0" i="0">
+                <a:solidFill>
+                  <a:srgbClr val="FFFFFF"/>
+                </a:solidFill>
+                <a:latin typeface="Arial"/>
+              </a:rPr>
               <a:t>v0.4</a:t>
             </a:r>
           </a:p>
@@ -3440,7 +3545,7 @@
       </p:sp>
       <p:sp>
         <p:nvSpPr>
-          <p:cNvPr id="11" name="Rectangle 10"/>
+          <p:cNvPr id="14" name="Rectangle 13"/>
           <p:cNvSpPr/>
           <p:nvPr/>
         </p:nvSpPr>
@@ -3483,7 +3588,7 @@
       </p:sp>
       <p:sp>
         <p:nvSpPr>
-          <p:cNvPr id="12" name="TextBox 11"/>
+          <p:cNvPr id="15" name="TextBox 14"/>
           <p:cNvSpPr txBox="1"/>
           <p:nvPr/>
         </p:nvSpPr>
@@ -3518,7 +3623,7 @@
       </p:sp>
       <p:sp>
         <p:nvSpPr>
-          <p:cNvPr id="13" name="TextBox 12"/>
+          <p:cNvPr id="16" name="TextBox 15"/>
           <p:cNvSpPr txBox="1"/>
           <p:nvPr/>
         </p:nvSpPr>
